--- a/outputs/manual-20260516-music-bonus/presentations/music-big-data-assignment/output/music-listening-analytics-recommendation-system.pptx
+++ b/outputs/manual-20260516-music-bonus/presentations/music-big-data-assignment/output/music-listening-analytics-recommendation-system.pptx
@@ -2,22 +2,22 @@
 <file path=ppt/presentation.xml><?xml version="1.0" encoding="utf-8"?>
 <p:presentation xmlns:p="http://schemas.openxmlformats.org/presentationml/2006/main">
   <p:sldMasterIdLst>
-    <p:sldMasterId xmlns:r="http://schemas.openxmlformats.org/officeDocument/2006/relationships" id="2147483648" r:id="R47520d1753804389"/>
+    <p:sldMasterId xmlns:r="http://schemas.openxmlformats.org/officeDocument/2006/relationships" id="2147483648" r:id="R1625663072d144a1"/>
   </p:sldMasterIdLst>
   <p:notesMasterIdLst>
-    <p:notesMasterId xmlns:r="http://schemas.openxmlformats.org/officeDocument/2006/relationships" r:id="R5877526d0adc4727"/>
+    <p:notesMasterId xmlns:r="http://schemas.openxmlformats.org/officeDocument/2006/relationships" r:id="R246ebb2e4bd14775"/>
   </p:notesMasterIdLst>
   <p:sldIdLst>
-    <p:sldId xmlns:r="http://schemas.openxmlformats.org/officeDocument/2006/relationships" id="256" r:id="Rfa0a767e56084f4b"/>
-    <p:sldId xmlns:r="http://schemas.openxmlformats.org/officeDocument/2006/relationships" id="257" r:id="R28668971bd304725"/>
-    <p:sldId xmlns:r="http://schemas.openxmlformats.org/officeDocument/2006/relationships" id="258" r:id="R971455b8a93542b9"/>
-    <p:sldId xmlns:r="http://schemas.openxmlformats.org/officeDocument/2006/relationships" id="259" r:id="R3742b738c33c4c25"/>
-    <p:sldId xmlns:r="http://schemas.openxmlformats.org/officeDocument/2006/relationships" id="260" r:id="R371f279a313d492e"/>
-    <p:sldId xmlns:r="http://schemas.openxmlformats.org/officeDocument/2006/relationships" id="261" r:id="R7a7331d102414d15"/>
-    <p:sldId xmlns:r="http://schemas.openxmlformats.org/officeDocument/2006/relationships" id="262" r:id="R3ad3251fe9ec4979"/>
-    <p:sldId xmlns:r="http://schemas.openxmlformats.org/officeDocument/2006/relationships" id="263" r:id="Rced200f17b504794"/>
-    <p:sldId xmlns:r="http://schemas.openxmlformats.org/officeDocument/2006/relationships" id="264" r:id="R1a62bab3511f4080"/>
-    <p:sldId xmlns:r="http://schemas.openxmlformats.org/officeDocument/2006/relationships" id="265" r:id="R07d03b5b405e465b"/>
+    <p:sldId xmlns:r="http://schemas.openxmlformats.org/officeDocument/2006/relationships" id="256" r:id="R573b0f4060f74d01"/>
+    <p:sldId xmlns:r="http://schemas.openxmlformats.org/officeDocument/2006/relationships" id="257" r:id="Re9c3b9cc5087454f"/>
+    <p:sldId xmlns:r="http://schemas.openxmlformats.org/officeDocument/2006/relationships" id="258" r:id="R02a8ee1998184194"/>
+    <p:sldId xmlns:r="http://schemas.openxmlformats.org/officeDocument/2006/relationships" id="259" r:id="R902fb67d7b174678"/>
+    <p:sldId xmlns:r="http://schemas.openxmlformats.org/officeDocument/2006/relationships" id="260" r:id="R5aa2c836eac94ffa"/>
+    <p:sldId xmlns:r="http://schemas.openxmlformats.org/officeDocument/2006/relationships" id="261" r:id="Rb270cfb8d6014d42"/>
+    <p:sldId xmlns:r="http://schemas.openxmlformats.org/officeDocument/2006/relationships" id="262" r:id="R785a33cf1ff64c67"/>
+    <p:sldId xmlns:r="http://schemas.openxmlformats.org/officeDocument/2006/relationships" id="263" r:id="R629524a14767483e"/>
+    <p:sldId xmlns:r="http://schemas.openxmlformats.org/officeDocument/2006/relationships" id="264" r:id="R3a5319dca68b414a"/>
+    <p:sldId xmlns:r="http://schemas.openxmlformats.org/officeDocument/2006/relationships" id="265" r:id="R5b5d52512c0d43a8"/>
   </p:sldIdLst>
   <p:sldSz cx="12192000" cy="6858000"/>
   <p:notesSz cx="6858000" cy="9144000"/>
@@ -1158,7 +1158,7 @@
   </p:cSld>
   <p:clrMap bg1="lt1" tx1="dk1" bg2="lt2" tx2="dk2" accent1="accent1" accent2="accent2" accent3="accent3" accent4="accent4" accent5="accent5" accent6="accent6" hlink="hlink" folHlink="folHlink"/>
   <p:sldLayoutIdLst>
-    <p:sldLayoutId xmlns:r="http://schemas.openxmlformats.org/officeDocument/2006/relationships" id="2147483649" r:id="R12162f99fd7a413f"/>
+    <p:sldLayoutId xmlns:r="http://schemas.openxmlformats.org/officeDocument/2006/relationships" id="2147483649" r:id="R5f8e2b4b50594bd4"/>
   </p:sldLayoutIdLst>
   <p:txStyles>
     <p:titleStyle>
@@ -1457,7 +1457,7 @@
           <p:cNvPr id="1" name="">
             <a:extLst xmlns:a="http://schemas.openxmlformats.org/drawingml/2006/main">
               <a:ext uri="{FF2B5EF4-FFF2-40B4-BE49-F238E27FC236}">
-                <a16:creationId xmlns:a16="http://schemas.microsoft.com/office/drawing/2014/main" id="{AC3892BC-2DE4-4BB2-A3CE-F9CA3E499302}"/>
+                <a16:creationId xmlns:a16="http://schemas.microsoft.com/office/drawing/2014/main" id="{A27F9E47-21A4-44F1-B859-7FBA7AA51C6C}"/>
               </a:ext>
             </a:extLst>
           </p:cNvPr>
@@ -1475,71 +1475,36 @@
             <a:avLst/>
           </a:prstGeom>
           <a:solidFill xmlns:a="http://schemas.openxmlformats.org/drawingml/2006/main">
-            <a:srgbClr val="162033"/>
-          </a:solidFill>
-          <a:ln xmlns:a="http://schemas.openxmlformats.org/drawingml/2006/main" w="0">
-            <a:solidFill>
-              <a:srgbClr val="000000">
-                <a:alpha val="0"/>
-              </a:srgbClr>
-            </a:solidFill>
-            <a:prstDash val="solid"/>
-          </a:ln>
-        </p:spPr>
-      </p:sp>
-      <p:sp>
-        <p:nvSpPr>
-          <p:cNvPr id="2" name="kicker-marker-1">
-            <a:extLst xmlns:a="http://schemas.openxmlformats.org/drawingml/2006/main">
-              <a:ext uri="{FF2B5EF4-FFF2-40B4-BE49-F238E27FC236}">
-                <a16:creationId xmlns:a16="http://schemas.microsoft.com/office/drawing/2014/main" id="{DB836381-B9D8-4E20-BD62-0DEDD861D192}"/>
-              </a:ext>
-            </a:extLst>
-          </p:cNvPr>
-          <p:cNvSpPr>
-            <a:spLocks xmlns:a="http://schemas.openxmlformats.org/drawingml/2006/main" noGrp="1"/>
-          </p:cNvSpPr>
-          <p:nvPr/>
-        </p:nvSpPr>
-        <p:spPr>
-          <a:xfrm xmlns:a="http://schemas.openxmlformats.org/drawingml/2006/main">
-            <a:off x="609600" y="447675"/>
-            <a:ext cx="228600" cy="38100"/>
-          </a:xfrm>
-          <a:prstGeom xmlns:a="http://schemas.openxmlformats.org/drawingml/2006/main" prst="rect">
-            <a:avLst/>
-          </a:prstGeom>
-          <a:solidFill xmlns:a="http://schemas.openxmlformats.org/drawingml/2006/main">
-            <a:srgbClr val="D97706"/>
-          </a:solidFill>
-          <a:ln xmlns:a="http://schemas.openxmlformats.org/drawingml/2006/main" w="0">
-            <a:solidFill>
-              <a:srgbClr val="000000">
-                <a:alpha val="0"/>
-              </a:srgbClr>
-            </a:solidFill>
-            <a:prstDash val="solid"/>
-          </a:ln>
-        </p:spPr>
-      </p:sp>
-      <p:sp>
-        <p:nvSpPr>
-          <p:cNvPr id="3" name="kicker-label-1">
-            <a:extLst xmlns:a="http://schemas.openxmlformats.org/drawingml/2006/main">
-              <a:ext uri="{FF2B5EF4-FFF2-40B4-BE49-F238E27FC236}">
-                <a16:creationId xmlns:a16="http://schemas.microsoft.com/office/drawing/2014/main" id="{745D5027-EDE2-4855-B499-5C5B2FD2ED2D}"/>
-              </a:ext>
-            </a:extLst>
-          </p:cNvPr>
-          <p:cNvSpPr>
-            <a:spLocks xmlns:a="http://schemas.openxmlformats.org/drawingml/2006/main" noGrp="1"/>
-          </p:cNvSpPr>
-          <p:nvPr/>
-        </p:nvSpPr>
-        <p:spPr>
-          <a:xfrm xmlns:a="http://schemas.openxmlformats.org/drawingml/2006/main">
-            <a:off x="933450" y="419100"/>
-            <a:ext cx="3429000" cy="171450"/>
+            <a:srgbClr val="FFFFFF"/>
+          </a:solidFill>
+          <a:ln xmlns:a="http://schemas.openxmlformats.org/drawingml/2006/main" w="0">
+            <a:solidFill>
+              <a:srgbClr val="000000">
+                <a:alpha val="0"/>
+              </a:srgbClr>
+            </a:solidFill>
+            <a:prstDash val="solid"/>
+          </a:ln>
+        </p:spPr>
+      </p:sp>
+      <p:sp>
+        <p:nvSpPr>
+          <p:cNvPr id="2" name="">
+            <a:extLst xmlns:a="http://schemas.openxmlformats.org/drawingml/2006/main">
+              <a:ext uri="{FF2B5EF4-FFF2-40B4-BE49-F238E27FC236}">
+                <a16:creationId xmlns:a16="http://schemas.microsoft.com/office/drawing/2014/main" id="{70191C66-A50D-49A8-9F95-B1D911969301}"/>
+              </a:ext>
+            </a:extLst>
+          </p:cNvPr>
+          <p:cNvSpPr>
+            <a:spLocks xmlns:a="http://schemas.openxmlformats.org/drawingml/2006/main" noGrp="1"/>
+          </p:cNvSpPr>
+          <p:nvPr/>
+        </p:nvSpPr>
+        <p:spPr>
+          <a:xfrm xmlns:a="http://schemas.openxmlformats.org/drawingml/2006/main">
+            <a:off x="800100" y="685800"/>
+            <a:ext cx="4191000" cy="228600"/>
           </a:xfrm>
           <a:prstGeom xmlns:a="http://schemas.openxmlformats.org/drawingml/2006/main" prst="rect">
             <a:avLst/>
@@ -1559,51 +1524,51 @@
           </a:ln>
         </p:spPr>
         <p:txBody>
-          <a:bodyPr xmlns:a="http://schemas.openxmlformats.org/drawingml/2006/main" lIns="0" tIns="0" rIns="0" bIns="0" anchor="ctr"/>
+          <a:bodyPr xmlns:a="http://schemas.openxmlformats.org/drawingml/2006/main" lIns="0" tIns="0" rIns="0" bIns="0" anchor="t"/>
           <a:lstStyle xmlns:a="http://schemas.openxmlformats.org/drawingml/2006/main"/>
           <a:p xmlns:a="http://schemas.openxmlformats.org/drawingml/2006/main">
             <a:pPr algn="l">
-              <a:defRPr sz="825" b="1">
-                <a:solidFill>
-                  <a:srgbClr val="CBD5E1"/>
-                </a:solidFill>
-                <a:latin typeface="Aptos"/>
-                <a:ea typeface="Aptos"/>
-                <a:cs typeface="Aptos"/>
-              </a:defRPr>
-            </a:pPr>
-            <a:r>
-              <a:rPr sz="825" b="1">
-                <a:solidFill>
-                  <a:srgbClr val="CBD5E1"/>
-                </a:solidFill>
-                <a:latin typeface="Aptos"/>
-                <a:ea typeface="Aptos"/>
-                <a:cs typeface="Aptos"/>
-              </a:rPr>
-              <a:t>MINI PROJECT</a:t>
-            </a:r>
-          </a:p>
-        </p:txBody>
-      </p:sp>
-      <p:sp>
-        <p:nvSpPr>
-          <p:cNvPr id="4" name="">
-            <a:extLst xmlns:a="http://schemas.openxmlformats.org/drawingml/2006/main">
-              <a:ext uri="{FF2B5EF4-FFF2-40B4-BE49-F238E27FC236}">
-                <a16:creationId xmlns:a16="http://schemas.microsoft.com/office/drawing/2014/main" id="{5D58E5D3-6014-4B83-9C8A-1697EDC85435}"/>
-              </a:ext>
-            </a:extLst>
-          </p:cNvPr>
-          <p:cNvSpPr>
-            <a:spLocks xmlns:a="http://schemas.openxmlformats.org/drawingml/2006/main" noGrp="1"/>
-          </p:cNvSpPr>
-          <p:nvPr/>
-        </p:nvSpPr>
-        <p:spPr>
-          <a:xfrm xmlns:a="http://schemas.openxmlformats.org/drawingml/2006/main">
-            <a:off x="609600" y="1047750"/>
-            <a:ext cx="6572250" cy="1143000"/>
+              <a:defRPr sz="1050" b="1">
+                <a:solidFill>
+                  <a:srgbClr val="2563EB"/>
+                </a:solidFill>
+                <a:latin typeface="Aptos"/>
+                <a:ea typeface="Aptos"/>
+                <a:cs typeface="Aptos"/>
+              </a:defRPr>
+            </a:pPr>
+            <a:r>
+              <a:rPr sz="1050" b="1">
+                <a:solidFill>
+                  <a:srgbClr val="2563EB"/>
+                </a:solidFill>
+                <a:latin typeface="Aptos"/>
+                <a:ea typeface="Aptos"/>
+                <a:cs typeface="Aptos"/>
+              </a:rPr>
+              <a:t>Big Data Analytics Mini Project</a:t>
+            </a:r>
+          </a:p>
+        </p:txBody>
+      </p:sp>
+      <p:sp>
+        <p:nvSpPr>
+          <p:cNvPr id="3" name="">
+            <a:extLst xmlns:a="http://schemas.openxmlformats.org/drawingml/2006/main">
+              <a:ext uri="{FF2B5EF4-FFF2-40B4-BE49-F238E27FC236}">
+                <a16:creationId xmlns:a16="http://schemas.microsoft.com/office/drawing/2014/main" id="{557C4076-F099-4B11-9503-C81BB10EFDBE}"/>
+              </a:ext>
+            </a:extLst>
+          </p:cNvPr>
+          <p:cNvSpPr>
+            <a:spLocks xmlns:a="http://schemas.openxmlformats.org/drawingml/2006/main" noGrp="1"/>
+          </p:cNvSpPr>
+          <p:nvPr/>
+        </p:nvSpPr>
+        <p:spPr>
+          <a:xfrm xmlns:a="http://schemas.openxmlformats.org/drawingml/2006/main">
+            <a:off x="800100" y="1428750"/>
+            <a:ext cx="5334000" cy="1028700"/>
           </a:xfrm>
           <a:prstGeom xmlns:a="http://schemas.openxmlformats.org/drawingml/2006/main" prst="rect">
             <a:avLst/>
@@ -1627,9 +1592,9 @@
           <a:lstStyle xmlns:a="http://schemas.openxmlformats.org/drawingml/2006/main"/>
           <a:p xmlns:a="http://schemas.openxmlformats.org/drawingml/2006/main">
             <a:pPr algn="l">
-              <a:defRPr sz="3150" b="1">
-                <a:solidFill>
-                  <a:srgbClr val="FFFFFF"/>
+              <a:defRPr sz="3300" b="1">
+                <a:solidFill>
+                  <a:srgbClr val="111827"/>
                 </a:solidFill>
                 <a:latin typeface="Aptos Display"/>
                 <a:ea typeface="Aptos Display"/>
@@ -1637,37 +1602,37 @@
               </a:defRPr>
             </a:pPr>
             <a:r>
-              <a:rPr sz="3150" b="1">
-                <a:solidFill>
-                  <a:srgbClr val="FFFFFF"/>
+              <a:rPr sz="3300" b="1">
+                <a:solidFill>
+                  <a:srgbClr val="111827"/>
                 </a:solidFill>
                 <a:latin typeface="Aptos Display"/>
                 <a:ea typeface="Aptos Display"/>
                 <a:cs typeface="Aptos Display"/>
               </a:rPr>
-              <a:t>Music Listening Analytics and Recommendation System</a:t>
-            </a:r>
-          </a:p>
-        </p:txBody>
-      </p:sp>
-      <p:sp>
-        <p:nvSpPr>
-          <p:cNvPr id="5" name="">
-            <a:extLst xmlns:a="http://schemas.openxmlformats.org/drawingml/2006/main">
-              <a:ext uri="{FF2B5EF4-FFF2-40B4-BE49-F238E27FC236}">
-                <a16:creationId xmlns:a16="http://schemas.microsoft.com/office/drawing/2014/main" id="{386C428D-82E6-4575-9CCF-766CC09CBE31}"/>
-              </a:ext>
-            </a:extLst>
-          </p:cNvPr>
-          <p:cNvSpPr>
-            <a:spLocks xmlns:a="http://schemas.openxmlformats.org/drawingml/2006/main" noGrp="1"/>
-          </p:cNvSpPr>
-          <p:nvPr/>
-        </p:nvSpPr>
-        <p:spPr>
-          <a:xfrm xmlns:a="http://schemas.openxmlformats.org/drawingml/2006/main">
-            <a:off x="647700" y="2343150"/>
-            <a:ext cx="5905500" cy="400050"/>
+              <a:t>Music Recommendation System</a:t>
+            </a:r>
+          </a:p>
+        </p:txBody>
+      </p:sp>
+      <p:sp>
+        <p:nvSpPr>
+          <p:cNvPr id="4" name="">
+            <a:extLst xmlns:a="http://schemas.openxmlformats.org/drawingml/2006/main">
+              <a:ext uri="{FF2B5EF4-FFF2-40B4-BE49-F238E27FC236}">
+                <a16:creationId xmlns:a16="http://schemas.microsoft.com/office/drawing/2014/main" id="{025012E7-CB24-4177-911D-22BFB7F0BA7A}"/>
+              </a:ext>
+            </a:extLst>
+          </p:cNvPr>
+          <p:cNvSpPr>
+            <a:spLocks xmlns:a="http://schemas.openxmlformats.org/drawingml/2006/main" noGrp="1"/>
+          </p:cNvSpPr>
+          <p:nvPr/>
+        </p:nvSpPr>
+        <p:spPr>
+          <a:xfrm xmlns:a="http://schemas.openxmlformats.org/drawingml/2006/main">
+            <a:off x="838200" y="2724150"/>
+            <a:ext cx="5143500" cy="323850"/>
           </a:xfrm>
           <a:prstGeom xmlns:a="http://schemas.openxmlformats.org/drawingml/2006/main" prst="rect">
             <a:avLst/>
@@ -1693,7 +1658,7 @@
             <a:pPr algn="l">
               <a:defRPr sz="1350" b="0">
                 <a:solidFill>
-                  <a:srgbClr val="CBD5E1"/>
+                  <a:srgbClr val="4B5563"/>
                 </a:solidFill>
                 <a:latin typeface="Aptos"/>
                 <a:ea typeface="Aptos"/>
@@ -1703,70 +1668,35 @@
             <a:r>
               <a:rPr sz="1350" b="0">
                 <a:solidFill>
-                  <a:srgbClr val="CBD5E1"/>
-                </a:solidFill>
-                <a:latin typeface="Aptos"/>
-                <a:ea typeface="Aptos"/>
-                <a:cs typeface="Aptos"/>
-              </a:rPr>
-              <a:t>Bonus-ready PySpark project using the Last.fm 1K listening-history dataset.</a:t>
-            </a:r>
-          </a:p>
-        </p:txBody>
-      </p:sp>
-      <p:sp>
-        <p:nvSpPr>
-          <p:cNvPr id="6" name="">
-            <a:extLst xmlns:a="http://schemas.openxmlformats.org/drawingml/2006/main">
-              <a:ext uri="{FF2B5EF4-FFF2-40B4-BE49-F238E27FC236}">
-                <a16:creationId xmlns:a16="http://schemas.microsoft.com/office/drawing/2014/main" id="{8B8A9710-6EFA-48C3-924B-159FA26AD4CD}"/>
-              </a:ext>
-            </a:extLst>
-          </p:cNvPr>
-          <p:cNvSpPr>
-            <a:spLocks xmlns:a="http://schemas.openxmlformats.org/drawingml/2006/main" noGrp="1"/>
-          </p:cNvSpPr>
-          <p:nvPr/>
-        </p:nvSpPr>
-        <p:spPr>
-          <a:xfrm xmlns:a="http://schemas.openxmlformats.org/drawingml/2006/main">
-            <a:off x="609600" y="3143250"/>
-            <a:ext cx="6667500" cy="14288"/>
-          </a:xfrm>
-          <a:prstGeom xmlns:a="http://schemas.openxmlformats.org/drawingml/2006/main" prst="rect">
-            <a:avLst/>
-          </a:prstGeom>
-          <a:solidFill xmlns:a="http://schemas.openxmlformats.org/drawingml/2006/main">
-            <a:srgbClr val="64748B"/>
-          </a:solidFill>
-          <a:ln xmlns:a="http://schemas.openxmlformats.org/drawingml/2006/main" w="0">
-            <a:solidFill>
-              <a:srgbClr val="000000">
-                <a:alpha val="0"/>
-              </a:srgbClr>
-            </a:solidFill>
-            <a:prstDash val="solid"/>
-          </a:ln>
-        </p:spPr>
-      </p:sp>
-      <p:sp>
-        <p:nvSpPr>
-          <p:cNvPr id="7" name="">
-            <a:extLst xmlns:a="http://schemas.openxmlformats.org/drawingml/2006/main">
-              <a:ext uri="{FF2B5EF4-FFF2-40B4-BE49-F238E27FC236}">
-                <a16:creationId xmlns:a16="http://schemas.microsoft.com/office/drawing/2014/main" id="{48B82D95-5103-401C-BB68-DE3AAD127B10}"/>
-              </a:ext>
-            </a:extLst>
-          </p:cNvPr>
-          <p:cNvSpPr>
-            <a:spLocks xmlns:a="http://schemas.openxmlformats.org/drawingml/2006/main" noGrp="1"/>
-          </p:cNvSpPr>
-          <p:nvPr/>
-        </p:nvSpPr>
-        <p:spPr>
-          <a:xfrm xmlns:a="http://schemas.openxmlformats.org/drawingml/2006/main">
-            <a:off x="647700" y="3429000"/>
-            <a:ext cx="6096000" cy="685800"/>
+                  <a:srgbClr val="4B5563"/>
+                </a:solidFill>
+                <a:latin typeface="Aptos"/>
+                <a:ea typeface="Aptos"/>
+                <a:cs typeface="Aptos"/>
+              </a:rPr>
+              <a:t>Using PySpark and the Last.fm 1K listening dataset</a:t>
+            </a:r>
+          </a:p>
+        </p:txBody>
+      </p:sp>
+      <p:sp>
+        <p:nvSpPr>
+          <p:cNvPr id="5" name="">
+            <a:extLst xmlns:a="http://schemas.openxmlformats.org/drawingml/2006/main">
+              <a:ext uri="{FF2B5EF4-FFF2-40B4-BE49-F238E27FC236}">
+                <a16:creationId xmlns:a16="http://schemas.microsoft.com/office/drawing/2014/main" id="{A8FA6634-4E74-4E7D-86EA-A02EAFFDF2E0}"/>
+              </a:ext>
+            </a:extLst>
+          </p:cNvPr>
+          <p:cNvSpPr>
+            <a:spLocks xmlns:a="http://schemas.openxmlformats.org/drawingml/2006/main" noGrp="1"/>
+          </p:cNvSpPr>
+          <p:nvPr/>
+        </p:nvSpPr>
+        <p:spPr>
+          <a:xfrm xmlns:a="http://schemas.openxmlformats.org/drawingml/2006/main">
+            <a:off x="838200" y="3657600"/>
+            <a:ext cx="5334000" cy="609600"/>
           </a:xfrm>
           <a:prstGeom xmlns:a="http://schemas.openxmlformats.org/drawingml/2006/main" prst="rect">
             <a:avLst/>
@@ -1790,103 +1720,105 @@
           <a:lstStyle xmlns:a="http://schemas.openxmlformats.org/drawingml/2006/main"/>
           <a:p xmlns:a="http://schemas.openxmlformats.org/drawingml/2006/main">
             <a:pPr algn="l">
-              <a:defRPr sz="1350" b="0">
-                <a:solidFill>
-                  <a:srgbClr val="E5E7EB"/>
-                </a:solidFill>
-                <a:latin typeface="Aptos"/>
-                <a:ea typeface="Aptos"/>
-                <a:cs typeface="Aptos"/>
-              </a:defRPr>
-            </a:pPr>
-            <a:r>
-              <a:rPr sz="1350" b="0">
-                <a:solidFill>
-                  <a:srgbClr val="E5E7EB"/>
-                </a:solidFill>
-                <a:latin typeface="Aptos"/>
-                <a:ea typeface="Aptos"/>
-                <a:cs typeface="Aptos"/>
-              </a:rPr>
-              <a:t>Part A: Spark analytics and listener segmentation</a:t>
+              <a:defRPr sz="1200" b="0">
+                <a:solidFill>
+                  <a:srgbClr val="111827"/>
+                </a:solidFill>
+                <a:latin typeface="Aptos"/>
+                <a:ea typeface="Aptos"/>
+                <a:cs typeface="Aptos"/>
+              </a:defRPr>
+            </a:pPr>
+            <a:r>
+              <a:rPr sz="1200" b="0">
+                <a:solidFill>
+                  <a:srgbClr val="111827"/>
+                </a:solidFill>
+                <a:latin typeface="Aptos"/>
+                <a:ea typeface="Aptos"/>
+                <a:cs typeface="Aptos"/>
+              </a:rPr>
+              <a:t>Part A: Listening analytics and user segmentation</a:t>
             </a:r>
           </a:p>
           <a:p xmlns:a="http://schemas.openxmlformats.org/drawingml/2006/main">
             <a:pPr algn="l">
-              <a:defRPr sz="1350" b="0">
-                <a:solidFill>
-                  <a:srgbClr val="E5E7EB"/>
-                </a:solidFill>
-                <a:latin typeface="Aptos"/>
-                <a:ea typeface="Aptos"/>
-                <a:cs typeface="Aptos"/>
-              </a:defRPr>
-            </a:pPr>
-            <a:r>
-              <a:rPr sz="1350" b="0">
-                <a:solidFill>
-                  <a:srgbClr val="E5E7EB"/>
-                </a:solidFill>
-                <a:latin typeface="Aptos"/>
-                <a:ea typeface="Aptos"/>
-                <a:cs typeface="Aptos"/>
-              </a:rPr>
-              <a:t>Part B: ALS collaborative filtering music recommendations</a:t>
-            </a:r>
-          </a:p>
-        </p:txBody>
-      </p:sp>
-      <p:sp>
-        <p:nvSpPr>
-          <p:cNvPr id="8" name="">
-            <a:extLst xmlns:a="http://schemas.openxmlformats.org/drawingml/2006/main">
-              <a:ext uri="{FF2B5EF4-FFF2-40B4-BE49-F238E27FC236}">
-                <a16:creationId xmlns:a16="http://schemas.microsoft.com/office/drawing/2014/main" id="{4C5D9A04-3A5C-49DF-9237-862D8448B0BB}"/>
-              </a:ext>
-            </a:extLst>
-          </p:cNvPr>
-          <p:cNvSpPr>
-            <a:spLocks xmlns:a="http://schemas.openxmlformats.org/drawingml/2006/main" noGrp="1"/>
-          </p:cNvSpPr>
-          <p:nvPr/>
-        </p:nvSpPr>
-        <p:spPr>
-          <a:xfrm xmlns:a="http://schemas.openxmlformats.org/drawingml/2006/main">
-            <a:off x="8001000" y="1181100"/>
-            <a:ext cx="1714500" cy="914400"/>
-          </a:xfrm>
-          <a:prstGeom xmlns:a="http://schemas.openxmlformats.org/drawingml/2006/main" prst="rect">
-            <a:avLst/>
-          </a:prstGeom>
-          <a:solidFill xmlns:a="http://schemas.openxmlformats.org/drawingml/2006/main">
-            <a:srgbClr val="243049"/>
-          </a:solidFill>
-          <a:ln xmlns:a="http://schemas.openxmlformats.org/drawingml/2006/main" w="9525">
-            <a:solidFill>
-              <a:srgbClr val="334155"/>
-            </a:solidFill>
-            <a:prstDash val="solid"/>
-          </a:ln>
-        </p:spPr>
-      </p:sp>
-      <p:sp>
-        <p:nvSpPr>
-          <p:cNvPr id="9" name="">
-            <a:extLst xmlns:a="http://schemas.openxmlformats.org/drawingml/2006/main">
-              <a:ext uri="{FF2B5EF4-FFF2-40B4-BE49-F238E27FC236}">
-                <a16:creationId xmlns:a16="http://schemas.microsoft.com/office/drawing/2014/main" id="{2F918A5B-91BD-4CBD-B7D7-3BF0596B9ADF}"/>
-              </a:ext>
-            </a:extLst>
-          </p:cNvPr>
-          <p:cNvSpPr>
-            <a:spLocks xmlns:a="http://schemas.openxmlformats.org/drawingml/2006/main" noGrp="1"/>
-          </p:cNvSpPr>
-          <p:nvPr/>
-        </p:nvSpPr>
-        <p:spPr>
-          <a:xfrm xmlns:a="http://schemas.openxmlformats.org/drawingml/2006/main">
-            <a:off x="8153400" y="1333500"/>
-            <a:ext cx="1409700" cy="304800"/>
+              <a:defRPr sz="1200" b="0">
+                <a:solidFill>
+                  <a:srgbClr val="111827"/>
+                </a:solidFill>
+                <a:latin typeface="Aptos"/>
+                <a:ea typeface="Aptos"/>
+                <a:cs typeface="Aptos"/>
+              </a:defRPr>
+            </a:pPr>
+            <a:r>
+              <a:rPr sz="1200" b="0">
+                <a:solidFill>
+                  <a:srgbClr val="111827"/>
+                </a:solidFill>
+                <a:latin typeface="Aptos"/>
+                <a:ea typeface="Aptos"/>
+                <a:cs typeface="Aptos"/>
+              </a:rPr>
+              <a:t>Part B: ALS collaborative filtering recommendations</a:t>
+            </a:r>
+          </a:p>
+        </p:txBody>
+      </p:sp>
+      <p:sp>
+        <p:nvSpPr>
+          <p:cNvPr id="6" name="">
+            <a:extLst xmlns:a="http://schemas.openxmlformats.org/drawingml/2006/main">
+              <a:ext uri="{FF2B5EF4-FFF2-40B4-BE49-F238E27FC236}">
+                <a16:creationId xmlns:a16="http://schemas.microsoft.com/office/drawing/2014/main" id="{F65D254E-FAF9-40F5-8EF6-66218A673414}"/>
+              </a:ext>
+            </a:extLst>
+          </p:cNvPr>
+          <p:cNvSpPr>
+            <a:spLocks xmlns:a="http://schemas.openxmlformats.org/drawingml/2006/main" noGrp="1"/>
+          </p:cNvSpPr>
+          <p:nvPr/>
+        </p:nvSpPr>
+        <p:spPr>
+          <a:xfrm xmlns:a="http://schemas.openxmlformats.org/drawingml/2006/main">
+            <a:off x="800100" y="4953000"/>
+            <a:ext cx="1714500" cy="28575"/>
+          </a:xfrm>
+          <a:prstGeom xmlns:a="http://schemas.openxmlformats.org/drawingml/2006/main" prst="rect">
+            <a:avLst/>
+          </a:prstGeom>
+          <a:solidFill xmlns:a="http://schemas.openxmlformats.org/drawingml/2006/main">
+            <a:srgbClr val="2563EB"/>
+          </a:solidFill>
+          <a:ln xmlns:a="http://schemas.openxmlformats.org/drawingml/2006/main" w="0">
+            <a:solidFill>
+              <a:srgbClr val="000000">
+                <a:alpha val="0"/>
+              </a:srgbClr>
+            </a:solidFill>
+            <a:prstDash val="solid"/>
+          </a:ln>
+        </p:spPr>
+      </p:sp>
+      <p:sp>
+        <p:nvSpPr>
+          <p:cNvPr id="7" name="">
+            <a:extLst xmlns:a="http://schemas.openxmlformats.org/drawingml/2006/main">
+              <a:ext uri="{FF2B5EF4-FFF2-40B4-BE49-F238E27FC236}">
+                <a16:creationId xmlns:a16="http://schemas.microsoft.com/office/drawing/2014/main" id="{91E3DBA8-DDC0-4CD8-9163-D6BA4F6BC455}"/>
+              </a:ext>
+            </a:extLst>
+          </p:cNvPr>
+          <p:cNvSpPr>
+            <a:spLocks xmlns:a="http://schemas.openxmlformats.org/drawingml/2006/main" noGrp="1"/>
+          </p:cNvSpPr>
+          <p:nvPr/>
+        </p:nvSpPr>
+        <p:spPr>
+          <a:xfrm xmlns:a="http://schemas.openxmlformats.org/drawingml/2006/main">
+            <a:off x="838200" y="5219700"/>
+            <a:ext cx="4000500" cy="228600"/>
           </a:xfrm>
           <a:prstGeom xmlns:a="http://schemas.openxmlformats.org/drawingml/2006/main" prst="rect">
             <a:avLst/>
@@ -1910,47 +1842,47 @@
           <a:lstStyle xmlns:a="http://schemas.openxmlformats.org/drawingml/2006/main"/>
           <a:p xmlns:a="http://schemas.openxmlformats.org/drawingml/2006/main">
             <a:pPr algn="l">
-              <a:defRPr sz="2025" b="1">
-                <a:solidFill>
-                  <a:srgbClr val="D97706"/>
-                </a:solidFill>
-                <a:latin typeface="Aptos"/>
-                <a:ea typeface="Aptos"/>
-                <a:cs typeface="Aptos"/>
-              </a:defRPr>
-            </a:pPr>
-            <a:r>
-              <a:rPr sz="2025" b="1">
-                <a:solidFill>
-                  <a:srgbClr val="D97706"/>
-                </a:solidFill>
-                <a:latin typeface="Aptos"/>
-                <a:ea typeface="Aptos"/>
-                <a:cs typeface="Aptos"/>
-              </a:rPr>
-              <a:t>1.0M</a:t>
-            </a:r>
-          </a:p>
-        </p:txBody>
-      </p:sp>
-      <p:sp>
-        <p:nvSpPr>
-          <p:cNvPr id="10" name="">
-            <a:extLst xmlns:a="http://schemas.openxmlformats.org/drawingml/2006/main">
-              <a:ext uri="{FF2B5EF4-FFF2-40B4-BE49-F238E27FC236}">
-                <a16:creationId xmlns:a16="http://schemas.microsoft.com/office/drawing/2014/main" id="{3FC3EB02-7A52-4F2F-B0CF-716F456030DB}"/>
-              </a:ext>
-            </a:extLst>
-          </p:cNvPr>
-          <p:cNvSpPr>
-            <a:spLocks xmlns:a="http://schemas.openxmlformats.org/drawingml/2006/main" noGrp="1"/>
-          </p:cNvSpPr>
-          <p:nvPr/>
-        </p:nvSpPr>
-        <p:spPr>
-          <a:xfrm xmlns:a="http://schemas.openxmlformats.org/drawingml/2006/main">
-            <a:off x="8153400" y="1676400"/>
-            <a:ext cx="1409700" cy="266700"/>
+              <a:defRPr sz="975" b="0">
+                <a:solidFill>
+                  <a:srgbClr val="4B5563"/>
+                </a:solidFill>
+                <a:latin typeface="Aptos"/>
+                <a:ea typeface="Aptos"/>
+                <a:cs typeface="Aptos"/>
+              </a:defRPr>
+            </a:pPr>
+            <a:r>
+              <a:rPr sz="975" b="0">
+                <a:solidFill>
+                  <a:srgbClr val="4B5563"/>
+                </a:solidFill>
+                <a:latin typeface="Aptos"/>
+                <a:ea typeface="Aptos"/>
+                <a:cs typeface="Aptos"/>
+              </a:rPr>
+              <a:t>Dataset: Last.fm Dataset - 1K users</a:t>
+            </a:r>
+          </a:p>
+        </p:txBody>
+      </p:sp>
+      <p:sp>
+        <p:nvSpPr>
+          <p:cNvPr id="8" name="">
+            <a:extLst xmlns:a="http://schemas.openxmlformats.org/drawingml/2006/main">
+              <a:ext uri="{FF2B5EF4-FFF2-40B4-BE49-F238E27FC236}">
+                <a16:creationId xmlns:a16="http://schemas.microsoft.com/office/drawing/2014/main" id="{730B2E2B-D2D0-4AEB-9202-1CD620D49D2C}"/>
+              </a:ext>
+            </a:extLst>
+          </p:cNvPr>
+          <p:cNvSpPr>
+            <a:spLocks xmlns:a="http://schemas.openxmlformats.org/drawingml/2006/main" noGrp="1"/>
+          </p:cNvSpPr>
+          <p:nvPr/>
+        </p:nvSpPr>
+        <p:spPr>
+          <a:xfrm xmlns:a="http://schemas.openxmlformats.org/drawingml/2006/main">
+            <a:off x="609600" y="6515100"/>
+            <a:ext cx="7239000" cy="171450"/>
           </a:xfrm>
           <a:prstGeom xmlns:a="http://schemas.openxmlformats.org/drawingml/2006/main" prst="rect">
             <a:avLst/>
@@ -1974,80 +1906,47 @@
           <a:lstStyle xmlns:a="http://schemas.openxmlformats.org/drawingml/2006/main"/>
           <a:p xmlns:a="http://schemas.openxmlformats.org/drawingml/2006/main">
             <a:pPr algn="l">
-              <a:defRPr sz="900" b="0">
-                <a:solidFill>
-                  <a:srgbClr val="CBD5E1"/>
-                </a:solidFill>
-                <a:latin typeface="Aptos"/>
-                <a:ea typeface="Aptos"/>
-                <a:cs typeface="Aptos"/>
-              </a:defRPr>
-            </a:pPr>
-            <a:r>
-              <a:rPr sz="900" b="0">
-                <a:solidFill>
-                  <a:srgbClr val="CBD5E1"/>
-                </a:solidFill>
-                <a:latin typeface="Aptos"/>
-                <a:ea typeface="Aptos"/>
-                <a:cs typeface="Aptos"/>
-              </a:rPr>
-              <a:t>listening events used</a:t>
-            </a:r>
-          </a:p>
-        </p:txBody>
-      </p:sp>
-      <p:sp>
-        <p:nvSpPr>
-          <p:cNvPr id="11" name="">
-            <a:extLst xmlns:a="http://schemas.openxmlformats.org/drawingml/2006/main">
-              <a:ext uri="{FF2B5EF4-FFF2-40B4-BE49-F238E27FC236}">
-                <a16:creationId xmlns:a16="http://schemas.microsoft.com/office/drawing/2014/main" id="{FAAC27E7-1978-422A-B2AE-67451FC8F792}"/>
-              </a:ext>
-            </a:extLst>
-          </p:cNvPr>
-          <p:cNvSpPr>
-            <a:spLocks xmlns:a="http://schemas.openxmlformats.org/drawingml/2006/main" noGrp="1"/>
-          </p:cNvSpPr>
-          <p:nvPr/>
-        </p:nvSpPr>
-        <p:spPr>
-          <a:xfrm xmlns:a="http://schemas.openxmlformats.org/drawingml/2006/main">
-            <a:off x="9906000" y="1181100"/>
-            <a:ext cx="1714500" cy="914400"/>
-          </a:xfrm>
-          <a:prstGeom xmlns:a="http://schemas.openxmlformats.org/drawingml/2006/main" prst="rect">
-            <a:avLst/>
-          </a:prstGeom>
-          <a:solidFill xmlns:a="http://schemas.openxmlformats.org/drawingml/2006/main">
-            <a:srgbClr val="243049"/>
-          </a:solidFill>
-          <a:ln xmlns:a="http://schemas.openxmlformats.org/drawingml/2006/main" w="9525">
-            <a:solidFill>
-              <a:srgbClr val="334155"/>
-            </a:solidFill>
-            <a:prstDash val="solid"/>
-          </a:ln>
-        </p:spPr>
-      </p:sp>
-      <p:sp>
-        <p:nvSpPr>
-          <p:cNvPr id="12" name="">
-            <a:extLst xmlns:a="http://schemas.openxmlformats.org/drawingml/2006/main">
-              <a:ext uri="{FF2B5EF4-FFF2-40B4-BE49-F238E27FC236}">
-                <a16:creationId xmlns:a16="http://schemas.microsoft.com/office/drawing/2014/main" id="{13B9EAC8-716E-45B1-BD34-0FA391BE5DCB}"/>
-              </a:ext>
-            </a:extLst>
-          </p:cNvPr>
-          <p:cNvSpPr>
-            <a:spLocks xmlns:a="http://schemas.openxmlformats.org/drawingml/2006/main" noGrp="1"/>
-          </p:cNvSpPr>
-          <p:nvPr/>
-        </p:nvSpPr>
-        <p:spPr>
-          <a:xfrm xmlns:a="http://schemas.openxmlformats.org/drawingml/2006/main">
-            <a:off x="10058400" y="1333500"/>
-            <a:ext cx="1409700" cy="304800"/>
+              <a:defRPr sz="825" b="0">
+                <a:solidFill>
+                  <a:srgbClr val="4B5563"/>
+                </a:solidFill>
+                <a:latin typeface="Aptos"/>
+                <a:ea typeface="Aptos"/>
+                <a:cs typeface="Aptos"/>
+              </a:defRPr>
+            </a:pPr>
+            <a:r>
+              <a:rPr sz="825" b="0">
+                <a:solidFill>
+                  <a:srgbClr val="4B5563"/>
+                </a:solidFill>
+                <a:latin typeface="Aptos"/>
+                <a:ea typeface="Aptos"/>
+                <a:cs typeface="Aptos"/>
+              </a:rPr>
+              <a:t>Big Data Analytics Mini Project | Last.fm 1K | PySpark</a:t>
+            </a:r>
+          </a:p>
+        </p:txBody>
+      </p:sp>
+      <p:sp>
+        <p:nvSpPr>
+          <p:cNvPr id="9" name="">
+            <a:extLst xmlns:a="http://schemas.openxmlformats.org/drawingml/2006/main">
+              <a:ext uri="{FF2B5EF4-FFF2-40B4-BE49-F238E27FC236}">
+                <a16:creationId xmlns:a16="http://schemas.microsoft.com/office/drawing/2014/main" id="{168F4C28-64FB-4E0A-9971-AE6B0CC45BBF}"/>
+              </a:ext>
+            </a:extLst>
+          </p:cNvPr>
+          <p:cNvSpPr>
+            <a:spLocks xmlns:a="http://schemas.openxmlformats.org/drawingml/2006/main" noGrp="1"/>
+          </p:cNvSpPr>
+          <p:nvPr/>
+        </p:nvSpPr>
+        <p:spPr>
+          <a:xfrm xmlns:a="http://schemas.openxmlformats.org/drawingml/2006/main">
+            <a:off x="11163300" y="6457950"/>
+            <a:ext cx="419100" cy="209550"/>
           </a:xfrm>
           <a:prstGeom xmlns:a="http://schemas.openxmlformats.org/drawingml/2006/main" prst="rect">
             <a:avLst/>
@@ -2070,588 +1969,10 @@
           <a:bodyPr xmlns:a="http://schemas.openxmlformats.org/drawingml/2006/main" lIns="0" tIns="0" rIns="0" bIns="0" anchor="t"/>
           <a:lstStyle xmlns:a="http://schemas.openxmlformats.org/drawingml/2006/main"/>
           <a:p xmlns:a="http://schemas.openxmlformats.org/drawingml/2006/main">
-            <a:pPr algn="l">
-              <a:defRPr sz="2025" b="1">
-                <a:solidFill>
-                  <a:srgbClr val="0F766E"/>
-                </a:solidFill>
-                <a:latin typeface="Aptos"/>
-                <a:ea typeface="Aptos"/>
-                <a:cs typeface="Aptos"/>
-              </a:defRPr>
-            </a:pPr>
-            <a:r>
-              <a:rPr sz="2025" b="1">
-                <a:solidFill>
-                  <a:srgbClr val="0F766E"/>
-                </a:solidFill>
-                <a:latin typeface="Aptos"/>
-                <a:ea typeface="Aptos"/>
-                <a:cs typeface="Aptos"/>
-              </a:rPr>
-              <a:t>23,007</a:t>
-            </a:r>
-          </a:p>
-        </p:txBody>
-      </p:sp>
-      <p:sp>
-        <p:nvSpPr>
-          <p:cNvPr id="13" name="">
-            <a:extLst xmlns:a="http://schemas.openxmlformats.org/drawingml/2006/main">
-              <a:ext uri="{FF2B5EF4-FFF2-40B4-BE49-F238E27FC236}">
-                <a16:creationId xmlns:a16="http://schemas.microsoft.com/office/drawing/2014/main" id="{B4147BBB-4E7E-4273-81B7-A3BAF7A5E1AF}"/>
-              </a:ext>
-            </a:extLst>
-          </p:cNvPr>
-          <p:cNvSpPr>
-            <a:spLocks xmlns:a="http://schemas.openxmlformats.org/drawingml/2006/main" noGrp="1"/>
-          </p:cNvSpPr>
-          <p:nvPr/>
-        </p:nvSpPr>
-        <p:spPr>
-          <a:xfrm xmlns:a="http://schemas.openxmlformats.org/drawingml/2006/main">
-            <a:off x="10058400" y="1676400"/>
-            <a:ext cx="1409700" cy="266700"/>
-          </a:xfrm>
-          <a:prstGeom xmlns:a="http://schemas.openxmlformats.org/drawingml/2006/main" prst="rect">
-            <a:avLst/>
-          </a:prstGeom>
-          <a:solidFill xmlns:a="http://schemas.openxmlformats.org/drawingml/2006/main">
-            <a:srgbClr val="000000">
-              <a:alpha val="0"/>
-            </a:srgbClr>
-          </a:solidFill>
-          <a:ln xmlns:a="http://schemas.openxmlformats.org/drawingml/2006/main" w="0">
-            <a:solidFill>
-              <a:srgbClr val="000000">
-                <a:alpha val="0"/>
-              </a:srgbClr>
-            </a:solidFill>
-            <a:prstDash val="solid"/>
-          </a:ln>
-        </p:spPr>
-        <p:txBody>
-          <a:bodyPr xmlns:a="http://schemas.openxmlformats.org/drawingml/2006/main" lIns="0" tIns="0" rIns="0" bIns="0" anchor="t"/>
-          <a:lstStyle xmlns:a="http://schemas.openxmlformats.org/drawingml/2006/main"/>
-          <a:p xmlns:a="http://schemas.openxmlformats.org/drawingml/2006/main">
-            <a:pPr algn="l">
-              <a:defRPr sz="900" b="0">
-                <a:solidFill>
-                  <a:srgbClr val="CBD5E1"/>
-                </a:solidFill>
-                <a:latin typeface="Aptos"/>
-                <a:ea typeface="Aptos"/>
-                <a:cs typeface="Aptos"/>
-              </a:defRPr>
-            </a:pPr>
-            <a:r>
-              <a:rPr sz="900" b="0">
-                <a:solidFill>
-                  <a:srgbClr val="CBD5E1"/>
-                </a:solidFill>
-                <a:latin typeface="Aptos"/>
-                <a:ea typeface="Aptos"/>
-                <a:cs typeface="Aptos"/>
-              </a:rPr>
-              <a:t>unique artists</a:t>
-            </a:r>
-          </a:p>
-        </p:txBody>
-      </p:sp>
-      <p:sp>
-        <p:nvSpPr>
-          <p:cNvPr id="14" name="">
-            <a:extLst xmlns:a="http://schemas.openxmlformats.org/drawingml/2006/main">
-              <a:ext uri="{FF2B5EF4-FFF2-40B4-BE49-F238E27FC236}">
-                <a16:creationId xmlns:a16="http://schemas.microsoft.com/office/drawing/2014/main" id="{92941A6E-8C10-4FEE-8D1D-E157BC37B190}"/>
-              </a:ext>
-            </a:extLst>
-          </p:cNvPr>
-          <p:cNvSpPr>
-            <a:spLocks xmlns:a="http://schemas.openxmlformats.org/drawingml/2006/main" noGrp="1"/>
-          </p:cNvSpPr>
-          <p:nvPr/>
-        </p:nvSpPr>
-        <p:spPr>
-          <a:xfrm xmlns:a="http://schemas.openxmlformats.org/drawingml/2006/main">
-            <a:off x="8001000" y="2305050"/>
-            <a:ext cx="1714500" cy="914400"/>
-          </a:xfrm>
-          <a:prstGeom xmlns:a="http://schemas.openxmlformats.org/drawingml/2006/main" prst="rect">
-            <a:avLst/>
-          </a:prstGeom>
-          <a:solidFill xmlns:a="http://schemas.openxmlformats.org/drawingml/2006/main">
-            <a:srgbClr val="243049"/>
-          </a:solidFill>
-          <a:ln xmlns:a="http://schemas.openxmlformats.org/drawingml/2006/main" w="9525">
-            <a:solidFill>
-              <a:srgbClr val="334155"/>
-            </a:solidFill>
-            <a:prstDash val="solid"/>
-          </a:ln>
-        </p:spPr>
-      </p:sp>
-      <p:sp>
-        <p:nvSpPr>
-          <p:cNvPr id="15" name="">
-            <a:extLst xmlns:a="http://schemas.openxmlformats.org/drawingml/2006/main">
-              <a:ext uri="{FF2B5EF4-FFF2-40B4-BE49-F238E27FC236}">
-                <a16:creationId xmlns:a16="http://schemas.microsoft.com/office/drawing/2014/main" id="{4E2BD97F-2EC1-466F-8E07-8D4F191B9B2F}"/>
-              </a:ext>
-            </a:extLst>
-          </p:cNvPr>
-          <p:cNvSpPr>
-            <a:spLocks xmlns:a="http://schemas.openxmlformats.org/drawingml/2006/main" noGrp="1"/>
-          </p:cNvSpPr>
-          <p:nvPr/>
-        </p:nvSpPr>
-        <p:spPr>
-          <a:xfrm xmlns:a="http://schemas.openxmlformats.org/drawingml/2006/main">
-            <a:off x="8153400" y="2457450"/>
-            <a:ext cx="1409700" cy="304800"/>
-          </a:xfrm>
-          <a:prstGeom xmlns:a="http://schemas.openxmlformats.org/drawingml/2006/main" prst="rect">
-            <a:avLst/>
-          </a:prstGeom>
-          <a:solidFill xmlns:a="http://schemas.openxmlformats.org/drawingml/2006/main">
-            <a:srgbClr val="000000">
-              <a:alpha val="0"/>
-            </a:srgbClr>
-          </a:solidFill>
-          <a:ln xmlns:a="http://schemas.openxmlformats.org/drawingml/2006/main" w="0">
-            <a:solidFill>
-              <a:srgbClr val="000000">
-                <a:alpha val="0"/>
-              </a:srgbClr>
-            </a:solidFill>
-            <a:prstDash val="solid"/>
-          </a:ln>
-        </p:spPr>
-        <p:txBody>
-          <a:bodyPr xmlns:a="http://schemas.openxmlformats.org/drawingml/2006/main" lIns="0" tIns="0" rIns="0" bIns="0" anchor="t"/>
-          <a:lstStyle xmlns:a="http://schemas.openxmlformats.org/drawingml/2006/main"/>
-          <a:p xmlns:a="http://schemas.openxmlformats.org/drawingml/2006/main">
-            <a:pPr algn="l">
-              <a:defRPr sz="2025" b="1">
-                <a:solidFill>
-                  <a:srgbClr val="2563EB"/>
-                </a:solidFill>
-                <a:latin typeface="Aptos"/>
-                <a:ea typeface="Aptos"/>
-                <a:cs typeface="Aptos"/>
-              </a:defRPr>
-            </a:pPr>
-            <a:r>
-              <a:rPr sz="2025" b="1">
-                <a:solidFill>
-                  <a:srgbClr val="2563EB"/>
-                </a:solidFill>
-                <a:latin typeface="Aptos"/>
-                <a:ea typeface="Aptos"/>
-                <a:cs typeface="Aptos"/>
-              </a:rPr>
-              <a:t>159,093</a:t>
-            </a:r>
-          </a:p>
-        </p:txBody>
-      </p:sp>
-      <p:sp>
-        <p:nvSpPr>
-          <p:cNvPr id="16" name="">
-            <a:extLst xmlns:a="http://schemas.openxmlformats.org/drawingml/2006/main">
-              <a:ext uri="{FF2B5EF4-FFF2-40B4-BE49-F238E27FC236}">
-                <a16:creationId xmlns:a16="http://schemas.microsoft.com/office/drawing/2014/main" id="{92B8073E-65A4-46C6-A2ED-81D0E58A477B}"/>
-              </a:ext>
-            </a:extLst>
-          </p:cNvPr>
-          <p:cNvSpPr>
-            <a:spLocks xmlns:a="http://schemas.openxmlformats.org/drawingml/2006/main" noGrp="1"/>
-          </p:cNvSpPr>
-          <p:nvPr/>
-        </p:nvSpPr>
-        <p:spPr>
-          <a:xfrm xmlns:a="http://schemas.openxmlformats.org/drawingml/2006/main">
-            <a:off x="8153400" y="2800350"/>
-            <a:ext cx="1409700" cy="266700"/>
-          </a:xfrm>
-          <a:prstGeom xmlns:a="http://schemas.openxmlformats.org/drawingml/2006/main" prst="rect">
-            <a:avLst/>
-          </a:prstGeom>
-          <a:solidFill xmlns:a="http://schemas.openxmlformats.org/drawingml/2006/main">
-            <a:srgbClr val="000000">
-              <a:alpha val="0"/>
-            </a:srgbClr>
-          </a:solidFill>
-          <a:ln xmlns:a="http://schemas.openxmlformats.org/drawingml/2006/main" w="0">
-            <a:solidFill>
-              <a:srgbClr val="000000">
-                <a:alpha val="0"/>
-              </a:srgbClr>
-            </a:solidFill>
-            <a:prstDash val="solid"/>
-          </a:ln>
-        </p:spPr>
-        <p:txBody>
-          <a:bodyPr xmlns:a="http://schemas.openxmlformats.org/drawingml/2006/main" lIns="0" tIns="0" rIns="0" bIns="0" anchor="t"/>
-          <a:lstStyle xmlns:a="http://schemas.openxmlformats.org/drawingml/2006/main"/>
-          <a:p xmlns:a="http://schemas.openxmlformats.org/drawingml/2006/main">
-            <a:pPr algn="l">
-              <a:defRPr sz="900" b="0">
-                <a:solidFill>
-                  <a:srgbClr val="CBD5E1"/>
-                </a:solidFill>
-                <a:latin typeface="Aptos"/>
-                <a:ea typeface="Aptos"/>
-                <a:cs typeface="Aptos"/>
-              </a:defRPr>
-            </a:pPr>
-            <a:r>
-              <a:rPr sz="900" b="0">
-                <a:solidFill>
-                  <a:srgbClr val="CBD5E1"/>
-                </a:solidFill>
-                <a:latin typeface="Aptos"/>
-                <a:ea typeface="Aptos"/>
-                <a:cs typeface="Aptos"/>
-              </a:rPr>
-              <a:t>unique tracks</a:t>
-            </a:r>
-          </a:p>
-        </p:txBody>
-      </p:sp>
-      <p:sp>
-        <p:nvSpPr>
-          <p:cNvPr id="17" name="">
-            <a:extLst xmlns:a="http://schemas.openxmlformats.org/drawingml/2006/main">
-              <a:ext uri="{FF2B5EF4-FFF2-40B4-BE49-F238E27FC236}">
-                <a16:creationId xmlns:a16="http://schemas.microsoft.com/office/drawing/2014/main" id="{1A912D3F-BFDD-4970-B3F3-54D0FE846EBA}"/>
-              </a:ext>
-            </a:extLst>
-          </p:cNvPr>
-          <p:cNvSpPr>
-            <a:spLocks xmlns:a="http://schemas.openxmlformats.org/drawingml/2006/main" noGrp="1"/>
-          </p:cNvSpPr>
-          <p:nvPr/>
-        </p:nvSpPr>
-        <p:spPr>
-          <a:xfrm xmlns:a="http://schemas.openxmlformats.org/drawingml/2006/main">
-            <a:off x="9906000" y="2305050"/>
-            <a:ext cx="1714500" cy="914400"/>
-          </a:xfrm>
-          <a:prstGeom xmlns:a="http://schemas.openxmlformats.org/drawingml/2006/main" prst="rect">
-            <a:avLst/>
-          </a:prstGeom>
-          <a:solidFill xmlns:a="http://schemas.openxmlformats.org/drawingml/2006/main">
-            <a:srgbClr val="243049"/>
-          </a:solidFill>
-          <a:ln xmlns:a="http://schemas.openxmlformats.org/drawingml/2006/main" w="9525">
-            <a:solidFill>
-              <a:srgbClr val="334155"/>
-            </a:solidFill>
-            <a:prstDash val="solid"/>
-          </a:ln>
-        </p:spPr>
-      </p:sp>
-      <p:sp>
-        <p:nvSpPr>
-          <p:cNvPr id="18" name="">
-            <a:extLst xmlns:a="http://schemas.openxmlformats.org/drawingml/2006/main">
-              <a:ext uri="{FF2B5EF4-FFF2-40B4-BE49-F238E27FC236}">
-                <a16:creationId xmlns:a16="http://schemas.microsoft.com/office/drawing/2014/main" id="{3C56FE96-8DC7-4A26-8433-8A914D2D8A24}"/>
-              </a:ext>
-            </a:extLst>
-          </p:cNvPr>
-          <p:cNvSpPr>
-            <a:spLocks xmlns:a="http://schemas.openxmlformats.org/drawingml/2006/main" noGrp="1"/>
-          </p:cNvSpPr>
-          <p:nvPr/>
-        </p:nvSpPr>
-        <p:spPr>
-          <a:xfrm xmlns:a="http://schemas.openxmlformats.org/drawingml/2006/main">
-            <a:off x="10058400" y="2457450"/>
-            <a:ext cx="1409700" cy="304800"/>
-          </a:xfrm>
-          <a:prstGeom xmlns:a="http://schemas.openxmlformats.org/drawingml/2006/main" prst="rect">
-            <a:avLst/>
-          </a:prstGeom>
-          <a:solidFill xmlns:a="http://schemas.openxmlformats.org/drawingml/2006/main">
-            <a:srgbClr val="000000">
-              <a:alpha val="0"/>
-            </a:srgbClr>
-          </a:solidFill>
-          <a:ln xmlns:a="http://schemas.openxmlformats.org/drawingml/2006/main" w="0">
-            <a:solidFill>
-              <a:srgbClr val="000000">
-                <a:alpha val="0"/>
-              </a:srgbClr>
-            </a:solidFill>
-            <a:prstDash val="solid"/>
-          </a:ln>
-        </p:spPr>
-        <p:txBody>
-          <a:bodyPr xmlns:a="http://schemas.openxmlformats.org/drawingml/2006/main" lIns="0" tIns="0" rIns="0" bIns="0" anchor="t"/>
-          <a:lstStyle xmlns:a="http://schemas.openxmlformats.org/drawingml/2006/main"/>
-          <a:p xmlns:a="http://schemas.openxmlformats.org/drawingml/2006/main">
-            <a:pPr algn="l">
-              <a:defRPr sz="2025" b="1">
-                <a:solidFill>
-                  <a:srgbClr val="BE123C"/>
-                </a:solidFill>
-                <a:latin typeface="Aptos"/>
-                <a:ea typeface="Aptos"/>
-                <a:cs typeface="Aptos"/>
-              </a:defRPr>
-            </a:pPr>
-            <a:r>
-              <a:rPr sz="2025" b="1">
-                <a:solidFill>
-                  <a:srgbClr val="BE123C"/>
-                </a:solidFill>
-                <a:latin typeface="Aptos"/>
-                <a:ea typeface="Aptos"/>
-                <a:cs typeface="Aptos"/>
-              </a:rPr>
-              <a:t>2</a:t>
-            </a:r>
-          </a:p>
-        </p:txBody>
-      </p:sp>
-      <p:sp>
-        <p:nvSpPr>
-          <p:cNvPr id="19" name="">
-            <a:extLst xmlns:a="http://schemas.openxmlformats.org/drawingml/2006/main">
-              <a:ext uri="{FF2B5EF4-FFF2-40B4-BE49-F238E27FC236}">
-                <a16:creationId xmlns:a16="http://schemas.microsoft.com/office/drawing/2014/main" id="{986F3902-6D36-41BB-A4AA-E82E1A4826F8}"/>
-              </a:ext>
-            </a:extLst>
-          </p:cNvPr>
-          <p:cNvSpPr>
-            <a:spLocks xmlns:a="http://schemas.openxmlformats.org/drawingml/2006/main" noGrp="1"/>
-          </p:cNvSpPr>
-          <p:nvPr/>
-        </p:nvSpPr>
-        <p:spPr>
-          <a:xfrm xmlns:a="http://schemas.openxmlformats.org/drawingml/2006/main">
-            <a:off x="10058400" y="2800350"/>
-            <a:ext cx="1409700" cy="266700"/>
-          </a:xfrm>
-          <a:prstGeom xmlns:a="http://schemas.openxmlformats.org/drawingml/2006/main" prst="rect">
-            <a:avLst/>
-          </a:prstGeom>
-          <a:solidFill xmlns:a="http://schemas.openxmlformats.org/drawingml/2006/main">
-            <a:srgbClr val="000000">
-              <a:alpha val="0"/>
-            </a:srgbClr>
-          </a:solidFill>
-          <a:ln xmlns:a="http://schemas.openxmlformats.org/drawingml/2006/main" w="0">
-            <a:solidFill>
-              <a:srgbClr val="000000">
-                <a:alpha val="0"/>
-              </a:srgbClr>
-            </a:solidFill>
-            <a:prstDash val="solid"/>
-          </a:ln>
-        </p:spPr>
-        <p:txBody>
-          <a:bodyPr xmlns:a="http://schemas.openxmlformats.org/drawingml/2006/main" lIns="0" tIns="0" rIns="0" bIns="0" anchor="t"/>
-          <a:lstStyle xmlns:a="http://schemas.openxmlformats.org/drawingml/2006/main"/>
-          <a:p xmlns:a="http://schemas.openxmlformats.org/drawingml/2006/main">
-            <a:pPr algn="l">
-              <a:defRPr sz="900" b="0">
-                <a:solidFill>
-                  <a:srgbClr val="CBD5E1"/>
-                </a:solidFill>
-                <a:latin typeface="Aptos"/>
-                <a:ea typeface="Aptos"/>
-                <a:cs typeface="Aptos"/>
-              </a:defRPr>
-            </a:pPr>
-            <a:r>
-              <a:rPr sz="900" b="0">
-                <a:solidFill>
-                  <a:srgbClr val="CBD5E1"/>
-                </a:solidFill>
-                <a:latin typeface="Aptos"/>
-                <a:ea typeface="Aptos"/>
-                <a:cs typeface="Aptos"/>
-              </a:rPr>
-              <a:t>Spark ML models</a:t>
-            </a:r>
-          </a:p>
-        </p:txBody>
-      </p:sp>
-      <p:sp>
-        <p:nvSpPr>
-          <p:cNvPr id="20" name="">
-            <a:extLst xmlns:a="http://schemas.openxmlformats.org/drawingml/2006/main">
-              <a:ext uri="{FF2B5EF4-FFF2-40B4-BE49-F238E27FC236}">
-                <a16:creationId xmlns:a16="http://schemas.microsoft.com/office/drawing/2014/main" id="{4A327E47-4924-49B9-AD5C-F59A63B55365}"/>
-              </a:ext>
-            </a:extLst>
-          </p:cNvPr>
-          <p:cNvSpPr>
-            <a:spLocks xmlns:a="http://schemas.openxmlformats.org/drawingml/2006/main" noGrp="1"/>
-          </p:cNvSpPr>
-          <p:nvPr/>
-        </p:nvSpPr>
-        <p:spPr>
-          <a:xfrm xmlns:a="http://schemas.openxmlformats.org/drawingml/2006/main">
-            <a:off x="8020050" y="3638550"/>
-            <a:ext cx="3429000" cy="228600"/>
-          </a:xfrm>
-          <a:prstGeom xmlns:a="http://schemas.openxmlformats.org/drawingml/2006/main" prst="rect">
-            <a:avLst/>
-          </a:prstGeom>
-          <a:solidFill xmlns:a="http://schemas.openxmlformats.org/drawingml/2006/main">
-            <a:srgbClr val="000000">
-              <a:alpha val="0"/>
-            </a:srgbClr>
-          </a:solidFill>
-          <a:ln xmlns:a="http://schemas.openxmlformats.org/drawingml/2006/main" w="0">
-            <a:solidFill>
-              <a:srgbClr val="000000">
-                <a:alpha val="0"/>
-              </a:srgbClr>
-            </a:solidFill>
-            <a:prstDash val="solid"/>
-          </a:ln>
-        </p:spPr>
-        <p:txBody>
-          <a:bodyPr xmlns:a="http://schemas.openxmlformats.org/drawingml/2006/main" lIns="0" tIns="0" rIns="0" bIns="0" anchor="t"/>
-          <a:lstStyle xmlns:a="http://schemas.openxmlformats.org/drawingml/2006/main"/>
-          <a:p xmlns:a="http://schemas.openxmlformats.org/drawingml/2006/main">
-            <a:pPr algn="l">
-              <a:defRPr sz="975" b="0">
-                <a:solidFill>
-                  <a:srgbClr val="CBD5E1"/>
-                </a:solidFill>
-                <a:latin typeface="Aptos"/>
-                <a:ea typeface="Aptos"/>
-                <a:cs typeface="Aptos"/>
-              </a:defRPr>
-            </a:pPr>
-            <a:r>
-              <a:rPr sz="975" b="0">
-                <a:solidFill>
-                  <a:srgbClr val="CBD5E1"/>
-                </a:solidFill>
-                <a:latin typeface="Aptos"/>
-                <a:ea typeface="Aptos"/>
-                <a:cs typeface="Aptos"/>
-              </a:rPr>
-              <a:t>Dataset source: Last.fm Dataset - 1K users</a:t>
-            </a:r>
-          </a:p>
-        </p:txBody>
-      </p:sp>
-      <p:sp>
-        <p:nvSpPr>
-          <p:cNvPr id="21" name="">
-            <a:extLst xmlns:a="http://schemas.openxmlformats.org/drawingml/2006/main">
-              <a:ext uri="{FF2B5EF4-FFF2-40B4-BE49-F238E27FC236}">
-                <a16:creationId xmlns:a16="http://schemas.microsoft.com/office/drawing/2014/main" id="{B828F985-8BD6-4D3A-BC92-CE93CD3D7455}"/>
-              </a:ext>
-            </a:extLst>
-          </p:cNvPr>
-          <p:cNvSpPr>
-            <a:spLocks xmlns:a="http://schemas.openxmlformats.org/drawingml/2006/main" noGrp="1"/>
-          </p:cNvSpPr>
-          <p:nvPr/>
-        </p:nvSpPr>
-        <p:spPr>
-          <a:xfrm xmlns:a="http://schemas.openxmlformats.org/drawingml/2006/main">
-            <a:off x="609600" y="6515100"/>
-            <a:ext cx="7239000" cy="171450"/>
-          </a:xfrm>
-          <a:prstGeom xmlns:a="http://schemas.openxmlformats.org/drawingml/2006/main" prst="rect">
-            <a:avLst/>
-          </a:prstGeom>
-          <a:solidFill xmlns:a="http://schemas.openxmlformats.org/drawingml/2006/main">
-            <a:srgbClr val="000000">
-              <a:alpha val="0"/>
-            </a:srgbClr>
-          </a:solidFill>
-          <a:ln xmlns:a="http://schemas.openxmlformats.org/drawingml/2006/main" w="0">
-            <a:solidFill>
-              <a:srgbClr val="000000">
-                <a:alpha val="0"/>
-              </a:srgbClr>
-            </a:solidFill>
-            <a:prstDash val="solid"/>
-          </a:ln>
-        </p:spPr>
-        <p:txBody>
-          <a:bodyPr xmlns:a="http://schemas.openxmlformats.org/drawingml/2006/main" lIns="0" tIns="0" rIns="0" bIns="0" anchor="t"/>
-          <a:lstStyle xmlns:a="http://schemas.openxmlformats.org/drawingml/2006/main"/>
-          <a:p xmlns:a="http://schemas.openxmlformats.org/drawingml/2006/main">
-            <a:pPr algn="l">
-              <a:defRPr sz="825" b="0">
-                <a:solidFill>
-                  <a:srgbClr val="CBD5E1"/>
-                </a:solidFill>
-                <a:latin typeface="Aptos"/>
-                <a:ea typeface="Aptos"/>
-                <a:cs typeface="Aptos"/>
-              </a:defRPr>
-            </a:pPr>
-            <a:r>
-              <a:rPr sz="825" b="0">
-                <a:solidFill>
-                  <a:srgbClr val="CBD5E1"/>
-                </a:solidFill>
-                <a:latin typeface="Aptos"/>
-                <a:ea typeface="Aptos"/>
-                <a:cs typeface="Aptos"/>
-              </a:rPr>
-              <a:t>Big Data Analytics Mini Project | Last.fm 1K | PySpark</a:t>
-            </a:r>
-          </a:p>
-        </p:txBody>
-      </p:sp>
-      <p:sp>
-        <p:nvSpPr>
-          <p:cNvPr id="22" name="">
-            <a:extLst xmlns:a="http://schemas.openxmlformats.org/drawingml/2006/main">
-              <a:ext uri="{FF2B5EF4-FFF2-40B4-BE49-F238E27FC236}">
-                <a16:creationId xmlns:a16="http://schemas.microsoft.com/office/drawing/2014/main" id="{74FE7AB8-2412-474E-BFCD-1C2DFA99C9C7}"/>
-              </a:ext>
-            </a:extLst>
-          </p:cNvPr>
-          <p:cNvSpPr>
-            <a:spLocks xmlns:a="http://schemas.openxmlformats.org/drawingml/2006/main" noGrp="1"/>
-          </p:cNvSpPr>
-          <p:nvPr/>
-        </p:nvSpPr>
-        <p:spPr>
-          <a:xfrm xmlns:a="http://schemas.openxmlformats.org/drawingml/2006/main">
-            <a:off x="11163300" y="6457950"/>
-            <a:ext cx="419100" cy="209550"/>
-          </a:xfrm>
-          <a:prstGeom xmlns:a="http://schemas.openxmlformats.org/drawingml/2006/main" prst="rect">
-            <a:avLst/>
-          </a:prstGeom>
-          <a:solidFill xmlns:a="http://schemas.openxmlformats.org/drawingml/2006/main">
-            <a:srgbClr val="000000">
-              <a:alpha val="0"/>
-            </a:srgbClr>
-          </a:solidFill>
-          <a:ln xmlns:a="http://schemas.openxmlformats.org/drawingml/2006/main" w="0">
-            <a:solidFill>
-              <a:srgbClr val="000000">
-                <a:alpha val="0"/>
-              </a:srgbClr>
-            </a:solidFill>
-            <a:prstDash val="solid"/>
-          </a:ln>
-        </p:spPr>
-        <p:txBody>
-          <a:bodyPr xmlns:a="http://schemas.openxmlformats.org/drawingml/2006/main" lIns="0" tIns="0" rIns="0" bIns="0" anchor="t"/>
-          <a:lstStyle xmlns:a="http://schemas.openxmlformats.org/drawingml/2006/main"/>
-          <a:p xmlns:a="http://schemas.openxmlformats.org/drawingml/2006/main">
             <a:pPr algn="r">
               <a:defRPr sz="900" b="1">
                 <a:solidFill>
-                  <a:srgbClr val="CBD5E1"/>
+                  <a:srgbClr val="4B5563"/>
                 </a:solidFill>
                 <a:latin typeface="Aptos"/>
                 <a:ea typeface="Aptos"/>
@@ -2661,7 +1982,7 @@
             <a:r>
               <a:rPr sz="900" b="1">
                 <a:solidFill>
-                  <a:srgbClr val="CBD5E1"/>
+                  <a:srgbClr val="4B5563"/>
                 </a:solidFill>
                 <a:latin typeface="Aptos"/>
                 <a:ea typeface="Aptos"/>
@@ -2672,10 +1993,32 @@
           </a:p>
         </p:txBody>
       </p:sp>
+      <p:pic>
+        <p:nvPicPr>
+          <p:cNvPr id="10" name=""/>
+          <p:cNvPicPr>
+            <a:picLocks xmlns:a="http://schemas.openxmlformats.org/drawingml/2006/main" noChangeAspect="1"/>
+          </p:cNvPicPr>
+          <p:nvPr/>
+        </p:nvPicPr>
+        <p:blipFill>
+          <a:blip xmlns:r="http://schemas.openxmlformats.org/officeDocument/2006/relationships" xmlns:a="http://schemas.openxmlformats.org/drawingml/2006/main" r:embed="R3557773b0c024659"/>
+          <a:stretch xmlns:a="http://schemas.openxmlformats.org/drawingml/2006/main"/>
+        </p:blipFill>
+        <p:spPr>
+          <a:xfrm xmlns:a="http://schemas.openxmlformats.org/drawingml/2006/main">
+            <a:off x="6858000" y="1345406"/>
+            <a:ext cx="3905250" cy="2928938"/>
+          </a:xfrm>
+          <a:prstGeom xmlns:a="http://schemas.openxmlformats.org/drawingml/2006/main" prst="rect">
+            <a:avLst/>
+          </a:prstGeom>
+        </p:spPr>
+      </p:pic>
     </p:spTree>
     <p:extLst>
       <p:ext uri="{BB962C8B-B14F-4D97-AF65-F5344CB8AC3E}">
-        <p14:creationId xmlns:p14="http://schemas.microsoft.com/office/powerpoint/2010/main" val="1791668323"/>
+        <p14:creationId xmlns:p14="http://schemas.microsoft.com/office/powerpoint/2010/main" val="722577494"/>
       </p:ext>
     </p:extLst>
   </p:cSld>
@@ -2699,7 +2042,7 @@
           <p:cNvPr id="1" name="">
             <a:extLst xmlns:a="http://schemas.openxmlformats.org/drawingml/2006/main">
               <a:ext uri="{FF2B5EF4-FFF2-40B4-BE49-F238E27FC236}">
-                <a16:creationId xmlns:a16="http://schemas.microsoft.com/office/drawing/2014/main" id="{687191DB-F7DE-4682-92F1-4CF0C300E25A}"/>
+                <a16:creationId xmlns:a16="http://schemas.microsoft.com/office/drawing/2014/main" id="{EE0D7ACF-7747-4DA3-BA3D-6F03E1C1A049}"/>
               </a:ext>
             </a:extLst>
           </p:cNvPr>
@@ -2717,7 +2060,7 @@
             <a:avLst/>
           </a:prstGeom>
           <a:solidFill xmlns:a="http://schemas.openxmlformats.org/drawingml/2006/main">
-            <a:srgbClr val="162033"/>
+            <a:srgbClr val="FFFFFF"/>
           </a:solidFill>
           <a:ln xmlns:a="http://schemas.openxmlformats.org/drawingml/2006/main" w="0">
             <a:solidFill>
@@ -2734,7 +2077,7 @@
           <p:cNvPr id="2" name="kicker-marker-10">
             <a:extLst xmlns:a="http://schemas.openxmlformats.org/drawingml/2006/main">
               <a:ext uri="{FF2B5EF4-FFF2-40B4-BE49-F238E27FC236}">
-                <a16:creationId xmlns:a16="http://schemas.microsoft.com/office/drawing/2014/main" id="{E239A8C4-5A4A-4B94-AC43-D5095129E890}"/>
+                <a16:creationId xmlns:a16="http://schemas.microsoft.com/office/drawing/2014/main" id="{94C45B3E-7E7E-4AA3-971E-65F585CDA293}"/>
               </a:ext>
             </a:extLst>
           </p:cNvPr>
@@ -2769,7 +2112,7 @@
           <p:cNvPr id="3" name="kicker-label-10">
             <a:extLst xmlns:a="http://schemas.openxmlformats.org/drawingml/2006/main">
               <a:ext uri="{FF2B5EF4-FFF2-40B4-BE49-F238E27FC236}">
-                <a16:creationId xmlns:a16="http://schemas.microsoft.com/office/drawing/2014/main" id="{DF74FE22-98E7-4008-8EC0-2CA7C889A5E1}"/>
+                <a16:creationId xmlns:a16="http://schemas.microsoft.com/office/drawing/2014/main" id="{9697FD7E-8C74-4C49-AA20-459EE472E654}"/>
               </a:ext>
             </a:extLst>
           </p:cNvPr>
@@ -2807,7 +2150,7 @@
             <a:pPr algn="l">
               <a:defRPr sz="825" b="1">
                 <a:solidFill>
-                  <a:srgbClr val="CBD5E1"/>
+                  <a:srgbClr val="4B5563"/>
                 </a:solidFill>
                 <a:latin typeface="Aptos"/>
                 <a:ea typeface="Aptos"/>
@@ -2817,13 +2160,13 @@
             <a:r>
               <a:rPr sz="825" b="1">
                 <a:solidFill>
-                  <a:srgbClr val="CBD5E1"/>
-                </a:solidFill>
-                <a:latin typeface="Aptos"/>
-                <a:ea typeface="Aptos"/>
-                <a:cs typeface="Aptos"/>
-              </a:rPr>
-              <a:t>SUBMISSION PACKAGE</a:t>
+                  <a:srgbClr val="4B5563"/>
+                </a:solidFill>
+                <a:latin typeface="Aptos"/>
+                <a:ea typeface="Aptos"/>
+                <a:cs typeface="Aptos"/>
+              </a:rPr>
+              <a:t>SUBMISSION</a:t>
             </a:r>
           </a:p>
         </p:txBody>
@@ -2833,7 +2176,7 @@
           <p:cNvPr id="4" name="">
             <a:extLst xmlns:a="http://schemas.openxmlformats.org/drawingml/2006/main">
               <a:ext uri="{FF2B5EF4-FFF2-40B4-BE49-F238E27FC236}">
-                <a16:creationId xmlns:a16="http://schemas.microsoft.com/office/drawing/2014/main" id="{2D1F09CC-D7C6-450D-A8E9-A04E8410CEC1}"/>
+                <a16:creationId xmlns:a16="http://schemas.microsoft.com/office/drawing/2014/main" id="{64A8DF29-5AAB-469C-8604-FF7F13F70272}"/>
               </a:ext>
             </a:extLst>
           </p:cNvPr>
@@ -2871,7 +2214,7 @@
             <a:pPr algn="l">
               <a:defRPr sz="2700" b="1">
                 <a:solidFill>
-                  <a:srgbClr val="FFFFFF"/>
+                  <a:srgbClr val="111827"/>
                 </a:solidFill>
                 <a:latin typeface="Aptos Display"/>
                 <a:ea typeface="Aptos Display"/>
@@ -2881,13 +2224,13 @@
             <a:r>
               <a:rPr sz="2700" b="1">
                 <a:solidFill>
-                  <a:srgbClr val="FFFFFF"/>
+                  <a:srgbClr val="111827"/>
                 </a:solidFill>
                 <a:latin typeface="Aptos Display"/>
                 <a:ea typeface="Aptos Display"/>
                 <a:cs typeface="Aptos Display"/>
               </a:rPr>
-              <a:t>The final package is ready for submission and viva demonstration.</a:t>
+              <a:t>Files Prepared for Submission</a:t>
             </a:r>
           </a:p>
         </p:txBody>
@@ -2897,7 +2240,7 @@
           <p:cNvPr id="5" name="">
             <a:extLst xmlns:a="http://schemas.openxmlformats.org/drawingml/2006/main">
               <a:ext uri="{FF2B5EF4-FFF2-40B4-BE49-F238E27FC236}">
-                <a16:creationId xmlns:a16="http://schemas.microsoft.com/office/drawing/2014/main" id="{EE7F1E20-D889-427E-AA78-BE73363FB8AD}"/>
+                <a16:creationId xmlns:a16="http://schemas.microsoft.com/office/drawing/2014/main" id="{95E56A48-B74A-43E3-9978-F8ED04AC9BAA}"/>
               </a:ext>
             </a:extLst>
           </p:cNvPr>
@@ -2935,7 +2278,7 @@
             <a:pPr algn="l">
               <a:defRPr sz="1125" b="0">
                 <a:solidFill>
-                  <a:srgbClr val="CBD5E1"/>
+                  <a:srgbClr val="4B5563"/>
                 </a:solidFill>
                 <a:latin typeface="Aptos"/>
                 <a:ea typeface="Aptos"/>
@@ -2945,13 +2288,13 @@
             <a:r>
               <a:rPr sz="1125" b="0">
                 <a:solidFill>
-                  <a:srgbClr val="CBD5E1"/>
-                </a:solidFill>
-                <a:latin typeface="Aptos"/>
-                <a:ea typeface="Aptos"/>
-                <a:cs typeface="Aptos"/>
-              </a:rPr>
-              <a:t>The project demonstrates both analytics and recommendation techniques using PySpark on a real music dataset.</a:t>
+                  <a:srgbClr val="4B5563"/>
+                </a:solidFill>
+                <a:latin typeface="Aptos"/>
+                <a:ea typeface="Aptos"/>
+                <a:cs typeface="Aptos"/>
+              </a:rPr>
+              <a:t>The project demonstrates big data analytics and a recommendation system using PySpark.</a:t>
             </a:r>
           </a:p>
         </p:txBody>
@@ -2961,7 +2304,7 @@
           <p:cNvPr id="6" name="">
             <a:extLst xmlns:a="http://schemas.openxmlformats.org/drawingml/2006/main">
               <a:ext uri="{FF2B5EF4-FFF2-40B4-BE49-F238E27FC236}">
-                <a16:creationId xmlns:a16="http://schemas.microsoft.com/office/drawing/2014/main" id="{0C5A690B-F614-41B3-89C0-086C4583CF9E}"/>
+                <a16:creationId xmlns:a16="http://schemas.microsoft.com/office/drawing/2014/main" id="{916E7299-4342-4616-92F7-5641A8F7C423}"/>
               </a:ext>
             </a:extLst>
           </p:cNvPr>
@@ -2979,11 +2322,11 @@
             <a:avLst/>
           </a:prstGeom>
           <a:solidFill xmlns:a="http://schemas.openxmlformats.org/drawingml/2006/main">
-            <a:srgbClr val="243049"/>
+            <a:srgbClr val="162033"/>
           </a:solidFill>
           <a:ln xmlns:a="http://schemas.openxmlformats.org/drawingml/2006/main" w="9525">
             <a:solidFill>
-              <a:srgbClr val="475569"/>
+              <a:srgbClr val="E5E7EB"/>
             </a:solidFill>
             <a:prstDash val="solid"/>
           </a:ln>
@@ -2994,7 +2337,7 @@
           <p:cNvPr id="7" name="">
             <a:extLst xmlns:a="http://schemas.openxmlformats.org/drawingml/2006/main">
               <a:ext uri="{FF2B5EF4-FFF2-40B4-BE49-F238E27FC236}">
-                <a16:creationId xmlns:a16="http://schemas.microsoft.com/office/drawing/2014/main" id="{2564C17D-3504-4763-AC6B-B2891634E86F}"/>
+                <a16:creationId xmlns:a16="http://schemas.microsoft.com/office/drawing/2014/main" id="{29C65B66-72A4-445B-9F69-3ADADFDABBA0}"/>
               </a:ext>
             </a:extLst>
           </p:cNvPr>
@@ -3058,7 +2401,7 @@
           <p:cNvPr id="8" name="">
             <a:extLst xmlns:a="http://schemas.openxmlformats.org/drawingml/2006/main">
               <a:ext uri="{FF2B5EF4-FFF2-40B4-BE49-F238E27FC236}">
-                <a16:creationId xmlns:a16="http://schemas.microsoft.com/office/drawing/2014/main" id="{C0ADEE36-7B17-4156-9BF8-A98CD63463D8}"/>
+                <a16:creationId xmlns:a16="http://schemas.microsoft.com/office/drawing/2014/main" id="{8E08C1C8-A27C-4822-9FC0-0404F819800A}"/>
               </a:ext>
             </a:extLst>
           </p:cNvPr>
@@ -3076,11 +2419,11 @@
             <a:avLst/>
           </a:prstGeom>
           <a:solidFill xmlns:a="http://schemas.openxmlformats.org/drawingml/2006/main">
-            <a:srgbClr val="243049"/>
+            <a:srgbClr val="162033"/>
           </a:solidFill>
           <a:ln xmlns:a="http://schemas.openxmlformats.org/drawingml/2006/main" w="9525">
             <a:solidFill>
-              <a:srgbClr val="475569"/>
+              <a:srgbClr val="E5E7EB"/>
             </a:solidFill>
             <a:prstDash val="solid"/>
           </a:ln>
@@ -3091,7 +2434,7 @@
           <p:cNvPr id="9" name="">
             <a:extLst xmlns:a="http://schemas.openxmlformats.org/drawingml/2006/main">
               <a:ext uri="{FF2B5EF4-FFF2-40B4-BE49-F238E27FC236}">
-                <a16:creationId xmlns:a16="http://schemas.microsoft.com/office/drawing/2014/main" id="{E9666A25-41D5-42CD-8879-E9E8C44EA6DF}"/>
+                <a16:creationId xmlns:a16="http://schemas.microsoft.com/office/drawing/2014/main" id="{B69389C2-FA2B-43C7-99CB-CB697356F7F6}"/>
               </a:ext>
             </a:extLst>
           </p:cNvPr>
@@ -3155,7 +2498,7 @@
           <p:cNvPr id="10" name="">
             <a:extLst xmlns:a="http://schemas.openxmlformats.org/drawingml/2006/main">
               <a:ext uri="{FF2B5EF4-FFF2-40B4-BE49-F238E27FC236}">
-                <a16:creationId xmlns:a16="http://schemas.microsoft.com/office/drawing/2014/main" id="{0639CCDE-CAC6-4F3A-A54A-94D64C7402C2}"/>
+                <a16:creationId xmlns:a16="http://schemas.microsoft.com/office/drawing/2014/main" id="{2041D468-C78B-446E-8B69-3010C2C78404}"/>
               </a:ext>
             </a:extLst>
           </p:cNvPr>
@@ -3174,12 +2517,12 @@
           </a:prstGeom>
           <a:solidFill xmlns:a="http://schemas.openxmlformats.org/drawingml/2006/main">
             <a:srgbClr val="FFFFFF">
-              <a:alpha val="10196"/>
+              <a:alpha val="80000"/>
             </a:srgbClr>
           </a:solidFill>
           <a:ln xmlns:a="http://schemas.openxmlformats.org/drawingml/2006/main" w="9525">
             <a:solidFill>
-              <a:srgbClr val="475569"/>
+              <a:srgbClr val="E5E7EB"/>
             </a:solidFill>
             <a:prstDash val="solid"/>
           </a:ln>
@@ -3190,7 +2533,7 @@
           <p:cNvPr id="11" name="">
             <a:extLst xmlns:a="http://schemas.openxmlformats.org/drawingml/2006/main">
               <a:ext uri="{FF2B5EF4-FFF2-40B4-BE49-F238E27FC236}">
-                <a16:creationId xmlns:a16="http://schemas.microsoft.com/office/drawing/2014/main" id="{798935A7-E259-4F23-84EA-EDAABA1BF00A}"/>
+                <a16:creationId xmlns:a16="http://schemas.microsoft.com/office/drawing/2014/main" id="{2559AACE-F747-4F66-BD41-1BFA13316583}"/>
               </a:ext>
             </a:extLst>
           </p:cNvPr>
@@ -3228,7 +2571,7 @@
             <a:pPr algn="l">
               <a:defRPr sz="900" b="0">
                 <a:solidFill>
-                  <a:srgbClr val="E5E7EB"/>
+                  <a:srgbClr val="111827"/>
                 </a:solidFill>
                 <a:latin typeface="Aptos"/>
                 <a:ea typeface="Aptos"/>
@@ -3238,7 +2581,7 @@
             <a:r>
               <a:rPr sz="900" b="0">
                 <a:solidFill>
-                  <a:srgbClr val="E5E7EB"/>
+                  <a:srgbClr val="111827"/>
                 </a:solidFill>
                 <a:latin typeface="Aptos"/>
                 <a:ea typeface="Aptos"/>
@@ -3254,7 +2597,7 @@
           <p:cNvPr id="12" name="">
             <a:extLst xmlns:a="http://schemas.openxmlformats.org/drawingml/2006/main">
               <a:ext uri="{FF2B5EF4-FFF2-40B4-BE49-F238E27FC236}">
-                <a16:creationId xmlns:a16="http://schemas.microsoft.com/office/drawing/2014/main" id="{0528468E-2319-486C-A171-D84A32E2586E}"/>
+                <a16:creationId xmlns:a16="http://schemas.microsoft.com/office/drawing/2014/main" id="{31F62D7D-4B3B-432C-860F-57CC9F4C5E88}"/>
               </a:ext>
             </a:extLst>
           </p:cNvPr>
@@ -3273,12 +2616,12 @@
           </a:prstGeom>
           <a:solidFill xmlns:a="http://schemas.openxmlformats.org/drawingml/2006/main">
             <a:srgbClr val="FFFFFF">
-              <a:alpha val="10196"/>
+              <a:alpha val="80000"/>
             </a:srgbClr>
           </a:solidFill>
           <a:ln xmlns:a="http://schemas.openxmlformats.org/drawingml/2006/main" w="9525">
             <a:solidFill>
-              <a:srgbClr val="475569"/>
+              <a:srgbClr val="E5E7EB"/>
             </a:solidFill>
             <a:prstDash val="solid"/>
           </a:ln>
@@ -3289,7 +2632,7 @@
           <p:cNvPr id="13" name="">
             <a:extLst xmlns:a="http://schemas.openxmlformats.org/drawingml/2006/main">
               <a:ext uri="{FF2B5EF4-FFF2-40B4-BE49-F238E27FC236}">
-                <a16:creationId xmlns:a16="http://schemas.microsoft.com/office/drawing/2014/main" id="{8A852C73-16A5-4017-A6EF-D31705CBF361}"/>
+                <a16:creationId xmlns:a16="http://schemas.microsoft.com/office/drawing/2014/main" id="{DB6F7A15-984A-402B-8848-7DB90F555845}"/>
               </a:ext>
             </a:extLst>
           </p:cNvPr>
@@ -3327,7 +2670,7 @@
             <a:pPr algn="l">
               <a:defRPr sz="900" b="0">
                 <a:solidFill>
-                  <a:srgbClr val="E5E7EB"/>
+                  <a:srgbClr val="111827"/>
                 </a:solidFill>
                 <a:latin typeface="Aptos"/>
                 <a:ea typeface="Aptos"/>
@@ -3337,7 +2680,7 @@
             <a:r>
               <a:rPr sz="900" b="0">
                 <a:solidFill>
-                  <a:srgbClr val="E5E7EB"/>
+                  <a:srgbClr val="111827"/>
                 </a:solidFill>
                 <a:latin typeface="Aptos"/>
                 <a:ea typeface="Aptos"/>
@@ -3353,7 +2696,7 @@
           <p:cNvPr id="14" name="">
             <a:extLst xmlns:a="http://schemas.openxmlformats.org/drawingml/2006/main">
               <a:ext uri="{FF2B5EF4-FFF2-40B4-BE49-F238E27FC236}">
-                <a16:creationId xmlns:a16="http://schemas.microsoft.com/office/drawing/2014/main" id="{52BD4381-ADEB-417A-B48E-C72A2C23853E}"/>
+                <a16:creationId xmlns:a16="http://schemas.microsoft.com/office/drawing/2014/main" id="{7B8AED62-077C-44AF-B04C-3BF5BE45C242}"/>
               </a:ext>
             </a:extLst>
           </p:cNvPr>
@@ -3372,12 +2715,12 @@
           </a:prstGeom>
           <a:solidFill xmlns:a="http://schemas.openxmlformats.org/drawingml/2006/main">
             <a:srgbClr val="FFFFFF">
-              <a:alpha val="7059"/>
+              <a:alpha val="50196"/>
             </a:srgbClr>
           </a:solidFill>
           <a:ln xmlns:a="http://schemas.openxmlformats.org/drawingml/2006/main" w="9525">
             <a:solidFill>
-              <a:srgbClr val="475569"/>
+              <a:srgbClr val="E5E7EB"/>
             </a:solidFill>
             <a:prstDash val="solid"/>
           </a:ln>
@@ -3388,7 +2731,7 @@
           <p:cNvPr id="15" name="">
             <a:extLst xmlns:a="http://schemas.openxmlformats.org/drawingml/2006/main">
               <a:ext uri="{FF2B5EF4-FFF2-40B4-BE49-F238E27FC236}">
-                <a16:creationId xmlns:a16="http://schemas.microsoft.com/office/drawing/2014/main" id="{DEFF1CEA-1AED-4F33-B505-7E5D490E0864}"/>
+                <a16:creationId xmlns:a16="http://schemas.microsoft.com/office/drawing/2014/main" id="{EAF084E7-124E-4403-B668-4379F53CB30E}"/>
               </a:ext>
             </a:extLst>
           </p:cNvPr>
@@ -3426,7 +2769,7 @@
             <a:pPr algn="l">
               <a:defRPr sz="900" b="0">
                 <a:solidFill>
-                  <a:srgbClr val="E5E7EB"/>
+                  <a:srgbClr val="111827"/>
                 </a:solidFill>
                 <a:latin typeface="Aptos"/>
                 <a:ea typeface="Aptos"/>
@@ -3436,7 +2779,7 @@
             <a:r>
               <a:rPr sz="900" b="0">
                 <a:solidFill>
-                  <a:srgbClr val="E5E7EB"/>
+                  <a:srgbClr val="111827"/>
                 </a:solidFill>
                 <a:latin typeface="Aptos"/>
                 <a:ea typeface="Aptos"/>
@@ -3452,7 +2795,7 @@
           <p:cNvPr id="16" name="">
             <a:extLst xmlns:a="http://schemas.openxmlformats.org/drawingml/2006/main">
               <a:ext uri="{FF2B5EF4-FFF2-40B4-BE49-F238E27FC236}">
-                <a16:creationId xmlns:a16="http://schemas.microsoft.com/office/drawing/2014/main" id="{D740B7AF-3EEE-4086-9838-C9DA082143F0}"/>
+                <a16:creationId xmlns:a16="http://schemas.microsoft.com/office/drawing/2014/main" id="{D6475014-6172-48BF-B87B-D6CFC81FDD05}"/>
               </a:ext>
             </a:extLst>
           </p:cNvPr>
@@ -3471,12 +2814,12 @@
           </a:prstGeom>
           <a:solidFill xmlns:a="http://schemas.openxmlformats.org/drawingml/2006/main">
             <a:srgbClr val="FFFFFF">
-              <a:alpha val="7059"/>
+              <a:alpha val="50196"/>
             </a:srgbClr>
           </a:solidFill>
           <a:ln xmlns:a="http://schemas.openxmlformats.org/drawingml/2006/main" w="9525">
             <a:solidFill>
-              <a:srgbClr val="475569"/>
+              <a:srgbClr val="E5E7EB"/>
             </a:solidFill>
             <a:prstDash val="solid"/>
           </a:ln>
@@ -3487,7 +2830,7 @@
           <p:cNvPr id="17" name="">
             <a:extLst xmlns:a="http://schemas.openxmlformats.org/drawingml/2006/main">
               <a:ext uri="{FF2B5EF4-FFF2-40B4-BE49-F238E27FC236}">
-                <a16:creationId xmlns:a16="http://schemas.microsoft.com/office/drawing/2014/main" id="{598BE171-F427-4362-9CFF-4B17D7E908A7}"/>
+                <a16:creationId xmlns:a16="http://schemas.microsoft.com/office/drawing/2014/main" id="{B97C40C3-9EF1-43EF-9669-57C8A73FC8A6}"/>
               </a:ext>
             </a:extLst>
           </p:cNvPr>
@@ -3525,7 +2868,7 @@
             <a:pPr algn="l">
               <a:defRPr sz="900" b="0">
                 <a:solidFill>
-                  <a:srgbClr val="E5E7EB"/>
+                  <a:srgbClr val="111827"/>
                 </a:solidFill>
                 <a:latin typeface="Aptos"/>
                 <a:ea typeface="Aptos"/>
@@ -3535,7 +2878,7 @@
             <a:r>
               <a:rPr sz="900" b="0">
                 <a:solidFill>
-                  <a:srgbClr val="E5E7EB"/>
+                  <a:srgbClr val="111827"/>
                 </a:solidFill>
                 <a:latin typeface="Aptos"/>
                 <a:ea typeface="Aptos"/>
@@ -3551,7 +2894,7 @@
           <p:cNvPr id="18" name="">
             <a:extLst xmlns:a="http://schemas.openxmlformats.org/drawingml/2006/main">
               <a:ext uri="{FF2B5EF4-FFF2-40B4-BE49-F238E27FC236}">
-                <a16:creationId xmlns:a16="http://schemas.microsoft.com/office/drawing/2014/main" id="{1FB2A76C-CA16-406D-A9BE-CA4896182987}"/>
+                <a16:creationId xmlns:a16="http://schemas.microsoft.com/office/drawing/2014/main" id="{988563BD-475C-446B-B2E6-3F8BC8E5ACCF}"/>
               </a:ext>
             </a:extLst>
           </p:cNvPr>
@@ -3570,12 +2913,12 @@
           </a:prstGeom>
           <a:solidFill xmlns:a="http://schemas.openxmlformats.org/drawingml/2006/main">
             <a:srgbClr val="FFFFFF">
-              <a:alpha val="10196"/>
+              <a:alpha val="80000"/>
             </a:srgbClr>
           </a:solidFill>
           <a:ln xmlns:a="http://schemas.openxmlformats.org/drawingml/2006/main" w="9525">
             <a:solidFill>
-              <a:srgbClr val="475569"/>
+              <a:srgbClr val="E5E7EB"/>
             </a:solidFill>
             <a:prstDash val="solid"/>
           </a:ln>
@@ -3586,7 +2929,7 @@
           <p:cNvPr id="19" name="">
             <a:extLst xmlns:a="http://schemas.openxmlformats.org/drawingml/2006/main">
               <a:ext uri="{FF2B5EF4-FFF2-40B4-BE49-F238E27FC236}">
-                <a16:creationId xmlns:a16="http://schemas.microsoft.com/office/drawing/2014/main" id="{08AC48C9-8BE9-4F69-A8A2-795EDF0DFD9E}"/>
+                <a16:creationId xmlns:a16="http://schemas.microsoft.com/office/drawing/2014/main" id="{966CAC54-CF6A-435E-9DAE-2CDA41403114}"/>
               </a:ext>
             </a:extLst>
           </p:cNvPr>
@@ -3624,7 +2967,7 @@
             <a:pPr algn="l">
               <a:defRPr sz="900" b="0">
                 <a:solidFill>
-                  <a:srgbClr val="E5E7EB"/>
+                  <a:srgbClr val="111827"/>
                 </a:solidFill>
                 <a:latin typeface="Aptos"/>
                 <a:ea typeface="Aptos"/>
@@ -3634,7 +2977,7 @@
             <a:r>
               <a:rPr sz="900" b="0">
                 <a:solidFill>
-                  <a:srgbClr val="E5E7EB"/>
+                  <a:srgbClr val="111827"/>
                 </a:solidFill>
                 <a:latin typeface="Aptos"/>
                 <a:ea typeface="Aptos"/>
@@ -3650,7 +2993,7 @@
           <p:cNvPr id="20" name="">
             <a:extLst xmlns:a="http://schemas.openxmlformats.org/drawingml/2006/main">
               <a:ext uri="{FF2B5EF4-FFF2-40B4-BE49-F238E27FC236}">
-                <a16:creationId xmlns:a16="http://schemas.microsoft.com/office/drawing/2014/main" id="{C5D85D6A-AD86-4828-81A4-94EBAA2BC507}"/>
+                <a16:creationId xmlns:a16="http://schemas.microsoft.com/office/drawing/2014/main" id="{0DBAE29A-1958-4982-A2D6-D0B6D2AFB4D7}"/>
               </a:ext>
             </a:extLst>
           </p:cNvPr>
@@ -3669,12 +3012,12 @@
           </a:prstGeom>
           <a:solidFill xmlns:a="http://schemas.openxmlformats.org/drawingml/2006/main">
             <a:srgbClr val="FFFFFF">
-              <a:alpha val="10196"/>
+              <a:alpha val="80000"/>
             </a:srgbClr>
           </a:solidFill>
           <a:ln xmlns:a="http://schemas.openxmlformats.org/drawingml/2006/main" w="9525">
             <a:solidFill>
-              <a:srgbClr val="475569"/>
+              <a:srgbClr val="E5E7EB"/>
             </a:solidFill>
             <a:prstDash val="solid"/>
           </a:ln>
@@ -3685,7 +3028,7 @@
           <p:cNvPr id="21" name="">
             <a:extLst xmlns:a="http://schemas.openxmlformats.org/drawingml/2006/main">
               <a:ext uri="{FF2B5EF4-FFF2-40B4-BE49-F238E27FC236}">
-                <a16:creationId xmlns:a16="http://schemas.microsoft.com/office/drawing/2014/main" id="{60975D7A-D721-47C2-9B4D-17F03063F4A7}"/>
+                <a16:creationId xmlns:a16="http://schemas.microsoft.com/office/drawing/2014/main" id="{020324B6-C320-4219-A39B-4B942B9C505E}"/>
               </a:ext>
             </a:extLst>
           </p:cNvPr>
@@ -3723,7 +3066,7 @@
             <a:pPr algn="l">
               <a:defRPr sz="900" b="0">
                 <a:solidFill>
-                  <a:srgbClr val="E5E7EB"/>
+                  <a:srgbClr val="111827"/>
                 </a:solidFill>
                 <a:latin typeface="Aptos"/>
                 <a:ea typeface="Aptos"/>
@@ -3733,7 +3076,7 @@
             <a:r>
               <a:rPr sz="900" b="0">
                 <a:solidFill>
-                  <a:srgbClr val="E5E7EB"/>
+                  <a:srgbClr val="111827"/>
                 </a:solidFill>
                 <a:latin typeface="Aptos"/>
                 <a:ea typeface="Aptos"/>
@@ -3749,7 +3092,7 @@
           <p:cNvPr id="22" name="">
             <a:extLst xmlns:a="http://schemas.openxmlformats.org/drawingml/2006/main">
               <a:ext uri="{FF2B5EF4-FFF2-40B4-BE49-F238E27FC236}">
-                <a16:creationId xmlns:a16="http://schemas.microsoft.com/office/drawing/2014/main" id="{86808D9A-5471-47FE-B3C3-83F95ACD8B3D}"/>
+                <a16:creationId xmlns:a16="http://schemas.microsoft.com/office/drawing/2014/main" id="{8C79D737-6FA5-422A-B98D-1861365C0B23}"/>
               </a:ext>
             </a:extLst>
           </p:cNvPr>
@@ -3768,12 +3111,12 @@
           </a:prstGeom>
           <a:solidFill xmlns:a="http://schemas.openxmlformats.org/drawingml/2006/main">
             <a:srgbClr val="FFFFFF">
-              <a:alpha val="7059"/>
+              <a:alpha val="50196"/>
             </a:srgbClr>
           </a:solidFill>
           <a:ln xmlns:a="http://schemas.openxmlformats.org/drawingml/2006/main" w="9525">
             <a:solidFill>
-              <a:srgbClr val="475569"/>
+              <a:srgbClr val="E5E7EB"/>
             </a:solidFill>
             <a:prstDash val="solid"/>
           </a:ln>
@@ -3784,7 +3127,7 @@
           <p:cNvPr id="23" name="">
             <a:extLst xmlns:a="http://schemas.openxmlformats.org/drawingml/2006/main">
               <a:ext uri="{FF2B5EF4-FFF2-40B4-BE49-F238E27FC236}">
-                <a16:creationId xmlns:a16="http://schemas.microsoft.com/office/drawing/2014/main" id="{802DDBB8-647B-491E-8904-2BEF38891A85}"/>
+                <a16:creationId xmlns:a16="http://schemas.microsoft.com/office/drawing/2014/main" id="{5A67A9F8-599A-4B4A-AF09-A5EBF58E79EC}"/>
               </a:ext>
             </a:extLst>
           </p:cNvPr>
@@ -3822,7 +3165,7 @@
             <a:pPr algn="l">
               <a:defRPr sz="900" b="0">
                 <a:solidFill>
-                  <a:srgbClr val="E5E7EB"/>
+                  <a:srgbClr val="111827"/>
                 </a:solidFill>
                 <a:latin typeface="Aptos"/>
                 <a:ea typeface="Aptos"/>
@@ -3832,7 +3175,7 @@
             <a:r>
               <a:rPr sz="900" b="0">
                 <a:solidFill>
-                  <a:srgbClr val="E5E7EB"/>
+                  <a:srgbClr val="111827"/>
                 </a:solidFill>
                 <a:latin typeface="Aptos"/>
                 <a:ea typeface="Aptos"/>
@@ -3848,7 +3191,7 @@
           <p:cNvPr id="24" name="">
             <a:extLst xmlns:a="http://schemas.openxmlformats.org/drawingml/2006/main">
               <a:ext uri="{FF2B5EF4-FFF2-40B4-BE49-F238E27FC236}">
-                <a16:creationId xmlns:a16="http://schemas.microsoft.com/office/drawing/2014/main" id="{8B16FEE2-AE0E-4614-8837-8074E0FCD07F}"/>
+                <a16:creationId xmlns:a16="http://schemas.microsoft.com/office/drawing/2014/main" id="{F5BDBB2B-96F2-4724-934A-42EE6DB43AC6}"/>
               </a:ext>
             </a:extLst>
           </p:cNvPr>
@@ -3867,12 +3210,12 @@
           </a:prstGeom>
           <a:solidFill xmlns:a="http://schemas.openxmlformats.org/drawingml/2006/main">
             <a:srgbClr val="FFFFFF">
-              <a:alpha val="7059"/>
+              <a:alpha val="50196"/>
             </a:srgbClr>
           </a:solidFill>
           <a:ln xmlns:a="http://schemas.openxmlformats.org/drawingml/2006/main" w="9525">
             <a:solidFill>
-              <a:srgbClr val="475569"/>
+              <a:srgbClr val="E5E7EB"/>
             </a:solidFill>
             <a:prstDash val="solid"/>
           </a:ln>
@@ -3883,7 +3226,7 @@
           <p:cNvPr id="25" name="">
             <a:extLst xmlns:a="http://schemas.openxmlformats.org/drawingml/2006/main">
               <a:ext uri="{FF2B5EF4-FFF2-40B4-BE49-F238E27FC236}">
-                <a16:creationId xmlns:a16="http://schemas.microsoft.com/office/drawing/2014/main" id="{AC5BB88F-6BC3-460F-8933-2DDD828F1D08}"/>
+                <a16:creationId xmlns:a16="http://schemas.microsoft.com/office/drawing/2014/main" id="{CF8B1971-7919-464E-AA5F-4D3E83546B7F}"/>
               </a:ext>
             </a:extLst>
           </p:cNvPr>
@@ -3921,7 +3264,7 @@
             <a:pPr algn="l">
               <a:defRPr sz="900" b="0">
                 <a:solidFill>
-                  <a:srgbClr val="E5E7EB"/>
+                  <a:srgbClr val="111827"/>
                 </a:solidFill>
                 <a:latin typeface="Aptos"/>
                 <a:ea typeface="Aptos"/>
@@ -3931,7 +3274,7 @@
             <a:r>
               <a:rPr sz="900" b="0">
                 <a:solidFill>
-                  <a:srgbClr val="E5E7EB"/>
+                  <a:srgbClr val="111827"/>
                 </a:solidFill>
                 <a:latin typeface="Aptos"/>
                 <a:ea typeface="Aptos"/>
@@ -3947,7 +3290,7 @@
           <p:cNvPr id="26" name="">
             <a:extLst xmlns:a="http://schemas.openxmlformats.org/drawingml/2006/main">
               <a:ext uri="{FF2B5EF4-FFF2-40B4-BE49-F238E27FC236}">
-                <a16:creationId xmlns:a16="http://schemas.microsoft.com/office/drawing/2014/main" id="{1D749596-FCB4-4A5E-B2BC-14F4D4044A2A}"/>
+                <a16:creationId xmlns:a16="http://schemas.microsoft.com/office/drawing/2014/main" id="{B56C1479-8A42-4DCB-9173-6481A58E9A88}"/>
               </a:ext>
             </a:extLst>
           </p:cNvPr>
@@ -3966,12 +3309,12 @@
           </a:prstGeom>
           <a:solidFill xmlns:a="http://schemas.openxmlformats.org/drawingml/2006/main">
             <a:srgbClr val="FFFFFF">
-              <a:alpha val="10196"/>
+              <a:alpha val="80000"/>
             </a:srgbClr>
           </a:solidFill>
           <a:ln xmlns:a="http://schemas.openxmlformats.org/drawingml/2006/main" w="9525">
             <a:solidFill>
-              <a:srgbClr val="475569"/>
+              <a:srgbClr val="E5E7EB"/>
             </a:solidFill>
             <a:prstDash val="solid"/>
           </a:ln>
@@ -3982,7 +3325,7 @@
           <p:cNvPr id="27" name="">
             <a:extLst xmlns:a="http://schemas.openxmlformats.org/drawingml/2006/main">
               <a:ext uri="{FF2B5EF4-FFF2-40B4-BE49-F238E27FC236}">
-                <a16:creationId xmlns:a16="http://schemas.microsoft.com/office/drawing/2014/main" id="{1646DD66-E3D0-4D22-8B7F-7DE5750002A0}"/>
+                <a16:creationId xmlns:a16="http://schemas.microsoft.com/office/drawing/2014/main" id="{CE281929-47A5-4F5C-8FD5-802FB43952B5}"/>
               </a:ext>
             </a:extLst>
           </p:cNvPr>
@@ -4020,7 +3363,7 @@
             <a:pPr algn="l">
               <a:defRPr sz="900" b="0">
                 <a:solidFill>
-                  <a:srgbClr val="E5E7EB"/>
+                  <a:srgbClr val="111827"/>
                 </a:solidFill>
                 <a:latin typeface="Aptos"/>
                 <a:ea typeface="Aptos"/>
@@ -4030,7 +3373,7 @@
             <a:r>
               <a:rPr sz="900" b="0">
                 <a:solidFill>
-                  <a:srgbClr val="E5E7EB"/>
+                  <a:srgbClr val="111827"/>
                 </a:solidFill>
                 <a:latin typeface="Aptos"/>
                 <a:ea typeface="Aptos"/>
@@ -4046,7 +3389,7 @@
           <p:cNvPr id="28" name="">
             <a:extLst xmlns:a="http://schemas.openxmlformats.org/drawingml/2006/main">
               <a:ext uri="{FF2B5EF4-FFF2-40B4-BE49-F238E27FC236}">
-                <a16:creationId xmlns:a16="http://schemas.microsoft.com/office/drawing/2014/main" id="{8FBED942-9AA9-47C8-BB6C-9933BC53A467}"/>
+                <a16:creationId xmlns:a16="http://schemas.microsoft.com/office/drawing/2014/main" id="{93968E50-C146-4DB4-A43F-6A8AFCED6B33}"/>
               </a:ext>
             </a:extLst>
           </p:cNvPr>
@@ -4065,12 +3408,12 @@
           </a:prstGeom>
           <a:solidFill xmlns:a="http://schemas.openxmlformats.org/drawingml/2006/main">
             <a:srgbClr val="FFFFFF">
-              <a:alpha val="10196"/>
+              <a:alpha val="80000"/>
             </a:srgbClr>
           </a:solidFill>
           <a:ln xmlns:a="http://schemas.openxmlformats.org/drawingml/2006/main" w="9525">
             <a:solidFill>
-              <a:srgbClr val="475569"/>
+              <a:srgbClr val="E5E7EB"/>
             </a:solidFill>
             <a:prstDash val="solid"/>
           </a:ln>
@@ -4081,7 +3424,7 @@
           <p:cNvPr id="29" name="">
             <a:extLst xmlns:a="http://schemas.openxmlformats.org/drawingml/2006/main">
               <a:ext uri="{FF2B5EF4-FFF2-40B4-BE49-F238E27FC236}">
-                <a16:creationId xmlns:a16="http://schemas.microsoft.com/office/drawing/2014/main" id="{C84ABAE1-A526-4DBC-A1A8-C07BD2DF6579}"/>
+                <a16:creationId xmlns:a16="http://schemas.microsoft.com/office/drawing/2014/main" id="{0C2A0D32-9B17-49D9-94DE-E724CF025A30}"/>
               </a:ext>
             </a:extLst>
           </p:cNvPr>
@@ -4119,7 +3462,7 @@
             <a:pPr algn="l">
               <a:defRPr sz="900" b="0">
                 <a:solidFill>
-                  <a:srgbClr val="E5E7EB"/>
+                  <a:srgbClr val="111827"/>
                 </a:solidFill>
                 <a:latin typeface="Aptos"/>
                 <a:ea typeface="Aptos"/>
@@ -4129,7 +3472,7 @@
             <a:r>
               <a:rPr sz="900" b="0">
                 <a:solidFill>
-                  <a:srgbClr val="E5E7EB"/>
+                  <a:srgbClr val="111827"/>
                 </a:solidFill>
                 <a:latin typeface="Aptos"/>
                 <a:ea typeface="Aptos"/>
@@ -4145,7 +3488,7 @@
           <p:cNvPr id="30" name="">
             <a:extLst xmlns:a="http://schemas.openxmlformats.org/drawingml/2006/main">
               <a:ext uri="{FF2B5EF4-FFF2-40B4-BE49-F238E27FC236}">
-                <a16:creationId xmlns:a16="http://schemas.microsoft.com/office/drawing/2014/main" id="{3EECDB15-C733-40CD-8B36-9A9F28D7BE4B}"/>
+                <a16:creationId xmlns:a16="http://schemas.microsoft.com/office/drawing/2014/main" id="{4F7A9C28-8616-4244-A03E-F796D850A5BB}"/>
               </a:ext>
             </a:extLst>
           </p:cNvPr>
@@ -4163,7 +3506,9 @@
             <a:avLst/>
           </a:prstGeom>
           <a:solidFill xmlns:a="http://schemas.openxmlformats.org/drawingml/2006/main">
-            <a:srgbClr val="243049"/>
+            <a:srgbClr val="FFFFFF">
+              <a:alpha val="66667"/>
+            </a:srgbClr>
           </a:solidFill>
           <a:ln xmlns:a="http://schemas.openxmlformats.org/drawingml/2006/main" w="11430">
             <a:solidFill>
@@ -4178,7 +3523,7 @@
           <p:cNvPr id="31" name="">
             <a:extLst xmlns:a="http://schemas.openxmlformats.org/drawingml/2006/main">
               <a:ext uri="{FF2B5EF4-FFF2-40B4-BE49-F238E27FC236}">
-                <a16:creationId xmlns:a16="http://schemas.microsoft.com/office/drawing/2014/main" id="{30BEEED8-B8A3-449A-BD5B-0DF39F0EDE55}"/>
+                <a16:creationId xmlns:a16="http://schemas.microsoft.com/office/drawing/2014/main" id="{1D5A0425-250D-4190-A722-EBE69BAC26C7}"/>
               </a:ext>
             </a:extLst>
           </p:cNvPr>
@@ -4213,7 +3558,7 @@
           <p:cNvPr id="32" name="">
             <a:extLst xmlns:a="http://schemas.openxmlformats.org/drawingml/2006/main">
               <a:ext uri="{FF2B5EF4-FFF2-40B4-BE49-F238E27FC236}">
-                <a16:creationId xmlns:a16="http://schemas.microsoft.com/office/drawing/2014/main" id="{B9B849AB-B356-44D8-9F5F-567294F7F4F3}"/>
+                <a16:creationId xmlns:a16="http://schemas.microsoft.com/office/drawing/2014/main" id="{A602907E-A4C8-4532-A197-3BCF846B2AED}"/>
               </a:ext>
             </a:extLst>
           </p:cNvPr>
@@ -4251,7 +3596,7 @@
             <a:pPr algn="l">
               <a:defRPr sz="1050" b="0">
                 <a:solidFill>
-                  <a:srgbClr val="E5E7EB"/>
+                  <a:srgbClr val="111827"/>
                 </a:solidFill>
                 <a:latin typeface="Aptos"/>
                 <a:ea typeface="Aptos"/>
@@ -4261,13 +3606,13 @@
             <a:r>
               <a:rPr sz="1050" b="0">
                 <a:solidFill>
-                  <a:srgbClr val="E5E7EB"/>
-                </a:solidFill>
-                <a:latin typeface="Aptos"/>
-                <a:ea typeface="Aptos"/>
-                <a:cs typeface="Aptos"/>
-              </a:rPr>
-              <a:t>Demo flow: open Jupyter, run Part A summary and clustering cells, then run Part B ALS training and recommendation output cells.</a:t>
+                  <a:srgbClr val="111827"/>
+                </a:solidFill>
+                <a:latin typeface="Aptos"/>
+                <a:ea typeface="Aptos"/>
+                <a:cs typeface="Aptos"/>
+              </a:rPr>
+              <a:t>Demo flow: open Jupyter, run Part A analytics and clustering cells, then run Part B ALS training and recommendation output cells.</a:t>
             </a:r>
           </a:p>
         </p:txBody>
@@ -4277,7 +3622,7 @@
           <p:cNvPr id="33" name="">
             <a:extLst xmlns:a="http://schemas.openxmlformats.org/drawingml/2006/main">
               <a:ext uri="{FF2B5EF4-FFF2-40B4-BE49-F238E27FC236}">
-                <a16:creationId xmlns:a16="http://schemas.microsoft.com/office/drawing/2014/main" id="{3D7E0C14-C0BB-4294-8B5B-1DC8C3738F77}"/>
+                <a16:creationId xmlns:a16="http://schemas.microsoft.com/office/drawing/2014/main" id="{FD6E5E4A-27FF-4902-97C3-D9D7C2A50EE5}"/>
               </a:ext>
             </a:extLst>
           </p:cNvPr>
@@ -4315,7 +3660,7 @@
             <a:pPr algn="l">
               <a:defRPr sz="825" b="0">
                 <a:solidFill>
-                  <a:srgbClr val="CBD5E1"/>
+                  <a:srgbClr val="4B5563"/>
                 </a:solidFill>
                 <a:latin typeface="Aptos"/>
                 <a:ea typeface="Aptos"/>
@@ -4325,7 +3670,7 @@
             <a:r>
               <a:rPr sz="825" b="0">
                 <a:solidFill>
-                  <a:srgbClr val="CBD5E1"/>
+                  <a:srgbClr val="4B5563"/>
                 </a:solidFill>
                 <a:latin typeface="Aptos"/>
                 <a:ea typeface="Aptos"/>
@@ -4341,7 +3686,7 @@
           <p:cNvPr id="34" name="">
             <a:extLst xmlns:a="http://schemas.openxmlformats.org/drawingml/2006/main">
               <a:ext uri="{FF2B5EF4-FFF2-40B4-BE49-F238E27FC236}">
-                <a16:creationId xmlns:a16="http://schemas.microsoft.com/office/drawing/2014/main" id="{B74F403E-BC66-402B-8A42-C5B95325F0B8}"/>
+                <a16:creationId xmlns:a16="http://schemas.microsoft.com/office/drawing/2014/main" id="{B17BBA48-BCC4-4A56-8401-B287135D4299}"/>
               </a:ext>
             </a:extLst>
           </p:cNvPr>
@@ -4379,7 +3724,7 @@
             <a:pPr algn="r">
               <a:defRPr sz="900" b="1">
                 <a:solidFill>
-                  <a:srgbClr val="CBD5E1"/>
+                  <a:srgbClr val="4B5563"/>
                 </a:solidFill>
                 <a:latin typeface="Aptos"/>
                 <a:ea typeface="Aptos"/>
@@ -4389,7 +3734,7 @@
             <a:r>
               <a:rPr sz="900" b="1">
                 <a:solidFill>
-                  <a:srgbClr val="CBD5E1"/>
+                  <a:srgbClr val="4B5563"/>
                 </a:solidFill>
                 <a:latin typeface="Aptos"/>
                 <a:ea typeface="Aptos"/>
@@ -4403,7 +3748,7 @@
     </p:spTree>
     <p:extLst>
       <p:ext uri="{BB962C8B-B14F-4D97-AF65-F5344CB8AC3E}">
-        <p14:creationId xmlns:p14="http://schemas.microsoft.com/office/powerpoint/2010/main" val="1947372401"/>
+        <p14:creationId xmlns:p14="http://schemas.microsoft.com/office/powerpoint/2010/main" val="835924406"/>
       </p:ext>
     </p:extLst>
   </p:cSld>
@@ -4427,7 +3772,7 @@
           <p:cNvPr id="1" name="">
             <a:extLst xmlns:a="http://schemas.openxmlformats.org/drawingml/2006/main">
               <a:ext uri="{FF2B5EF4-FFF2-40B4-BE49-F238E27FC236}">
-                <a16:creationId xmlns:a16="http://schemas.microsoft.com/office/drawing/2014/main" id="{C7D0FE5A-48C7-4A2F-B3F2-28088B5D32D1}"/>
+                <a16:creationId xmlns:a16="http://schemas.microsoft.com/office/drawing/2014/main" id="{08731BD3-A2FC-418B-9F42-9D0A36AC6F60}"/>
               </a:ext>
             </a:extLst>
           </p:cNvPr>
@@ -4445,7 +3790,7 @@
             <a:avLst/>
           </a:prstGeom>
           <a:solidFill xmlns:a="http://schemas.openxmlformats.org/drawingml/2006/main">
-            <a:srgbClr val="F7F3EA"/>
+            <a:srgbClr val="FFFFFF"/>
           </a:solidFill>
           <a:ln xmlns:a="http://schemas.openxmlformats.org/drawingml/2006/main" w="0">
             <a:solidFill>
@@ -4462,7 +3807,7 @@
           <p:cNvPr id="2" name="kicker-marker-2">
             <a:extLst xmlns:a="http://schemas.openxmlformats.org/drawingml/2006/main">
               <a:ext uri="{FF2B5EF4-FFF2-40B4-BE49-F238E27FC236}">
-                <a16:creationId xmlns:a16="http://schemas.microsoft.com/office/drawing/2014/main" id="{D48F1669-E259-43DA-ADB4-4E66F1F1AD1B}"/>
+                <a16:creationId xmlns:a16="http://schemas.microsoft.com/office/drawing/2014/main" id="{CC290546-4D80-4A16-A442-9F0E420007CC}"/>
               </a:ext>
             </a:extLst>
           </p:cNvPr>
@@ -4497,7 +3842,7 @@
           <p:cNvPr id="3" name="kicker-label-2">
             <a:extLst xmlns:a="http://schemas.openxmlformats.org/drawingml/2006/main">
               <a:ext uri="{FF2B5EF4-FFF2-40B4-BE49-F238E27FC236}">
-                <a16:creationId xmlns:a16="http://schemas.microsoft.com/office/drawing/2014/main" id="{C89B3506-39DC-4FEF-8D90-0330CD378B0A}"/>
+                <a16:creationId xmlns:a16="http://schemas.microsoft.com/office/drawing/2014/main" id="{4EEBDC8A-A065-4937-9F84-56B877F2C359}"/>
               </a:ext>
             </a:extLst>
           </p:cNvPr>
@@ -4535,7 +3880,7 @@
             <a:pPr algn="l">
               <a:defRPr sz="825" b="1">
                 <a:solidFill>
-                  <a:srgbClr val="5B6472"/>
+                  <a:srgbClr val="4B5563"/>
                 </a:solidFill>
                 <a:latin typeface="Aptos"/>
                 <a:ea typeface="Aptos"/>
@@ -4545,13 +3890,13 @@
             <a:r>
               <a:rPr sz="825" b="1">
                 <a:solidFill>
-                  <a:srgbClr val="5B6472"/>
-                </a:solidFill>
-                <a:latin typeface="Aptos"/>
-                <a:ea typeface="Aptos"/>
-                <a:cs typeface="Aptos"/>
-              </a:rPr>
-              <a:t>ASSIGNMENT FIT</a:t>
+                  <a:srgbClr val="4B5563"/>
+                </a:solidFill>
+                <a:latin typeface="Aptos"/>
+                <a:ea typeface="Aptos"/>
+                <a:cs typeface="Aptos"/>
+              </a:rPr>
+              <a:t>ASSIGNMENT REQUIREMENTS</a:t>
             </a:r>
           </a:p>
         </p:txBody>
@@ -4561,7 +3906,7 @@
           <p:cNvPr id="4" name="">
             <a:extLst xmlns:a="http://schemas.openxmlformats.org/drawingml/2006/main">
               <a:ext uri="{FF2B5EF4-FFF2-40B4-BE49-F238E27FC236}">
-                <a16:creationId xmlns:a16="http://schemas.microsoft.com/office/drawing/2014/main" id="{77C616D6-E899-4FA7-B198-9990C5A0210F}"/>
+                <a16:creationId xmlns:a16="http://schemas.microsoft.com/office/drawing/2014/main" id="{7743B3CD-5346-48EA-8177-B6BA58AB26BF}"/>
               </a:ext>
             </a:extLst>
           </p:cNvPr>
@@ -4615,7 +3960,7 @@
                 <a:ea typeface="Aptos Display"/>
                 <a:cs typeface="Aptos Display"/>
               </a:rPr>
-              <a:t>The project now covers both paths in the marking guide.</a:t>
+              <a:t>Project Scope</a:t>
             </a:r>
           </a:p>
         </p:txBody>
@@ -4625,7 +3970,7 @@
           <p:cNvPr id="5" name="">
             <a:extLst xmlns:a="http://schemas.openxmlformats.org/drawingml/2006/main">
               <a:ext uri="{FF2B5EF4-FFF2-40B4-BE49-F238E27FC236}">
-                <a16:creationId xmlns:a16="http://schemas.microsoft.com/office/drawing/2014/main" id="{57545186-67EE-4222-BFBA-B667429217AC}"/>
+                <a16:creationId xmlns:a16="http://schemas.microsoft.com/office/drawing/2014/main" id="{21064924-EC81-432B-B97C-71F215AD6D33}"/>
               </a:ext>
             </a:extLst>
           </p:cNvPr>
@@ -4663,7 +4008,7 @@
             <a:pPr algn="l">
               <a:defRPr sz="1125" b="0">
                 <a:solidFill>
-                  <a:srgbClr val="5B6472"/>
+                  <a:srgbClr val="4B5563"/>
                 </a:solidFill>
                 <a:latin typeface="Aptos"/>
                 <a:ea typeface="Aptos"/>
@@ -4673,13 +4018,13 @@
             <a:r>
               <a:rPr sz="1125" b="0">
                 <a:solidFill>
-                  <a:srgbClr val="5B6472"/>
-                </a:solidFill>
-                <a:latin typeface="Aptos"/>
-                <a:ea typeface="Aptos"/>
-                <a:cs typeface="Aptos"/>
-              </a:rPr>
-              <a:t>Two notebooks use the same dataset but answer different big data questions.</a:t>
+                  <a:srgbClr val="4B5563"/>
+                </a:solidFill>
+                <a:latin typeface="Aptos"/>
+                <a:ea typeface="Aptos"/>
+                <a:cs typeface="Aptos"/>
+              </a:rPr>
+              <a:t>The submission covers the required music recommendation system and the extra analytics work for bonus marks.</a:t>
             </a:r>
           </a:p>
         </p:txBody>
@@ -4689,7 +4034,7 @@
           <p:cNvPr id="6" name="">
             <a:extLst xmlns:a="http://schemas.openxmlformats.org/drawingml/2006/main">
               <a:ext uri="{FF2B5EF4-FFF2-40B4-BE49-F238E27FC236}">
-                <a16:creationId xmlns:a16="http://schemas.microsoft.com/office/drawing/2014/main" id="{22402E17-893E-40AD-99AD-935CB5745E57}"/>
+                <a16:creationId xmlns:a16="http://schemas.microsoft.com/office/drawing/2014/main" id="{9520433C-367B-434B-A6AF-E0AA16D7AB92}"/>
               </a:ext>
             </a:extLst>
           </p:cNvPr>
@@ -4711,7 +4056,7 @@
           </a:solidFill>
           <a:ln xmlns:a="http://schemas.openxmlformats.org/drawingml/2006/main" w="9525">
             <a:solidFill>
-              <a:srgbClr val="D8D0C2"/>
+              <a:srgbClr val="E5E7EB"/>
             </a:solidFill>
             <a:prstDash val="solid"/>
           </a:ln>
@@ -4722,7 +4067,7 @@
           <p:cNvPr id="7" name="">
             <a:extLst xmlns:a="http://schemas.openxmlformats.org/drawingml/2006/main">
               <a:ext uri="{FF2B5EF4-FFF2-40B4-BE49-F238E27FC236}">
-                <a16:creationId xmlns:a16="http://schemas.microsoft.com/office/drawing/2014/main" id="{1BCC2AB1-0675-4C3C-B773-708F77FE34F2}"/>
+                <a16:creationId xmlns:a16="http://schemas.microsoft.com/office/drawing/2014/main" id="{D563046E-005B-4A95-A3E2-C9EEFB198C65}"/>
               </a:ext>
             </a:extLst>
           </p:cNvPr>
@@ -4786,7 +4131,7 @@
           <p:cNvPr id="8" name="">
             <a:extLst xmlns:a="http://schemas.openxmlformats.org/drawingml/2006/main">
               <a:ext uri="{FF2B5EF4-FFF2-40B4-BE49-F238E27FC236}">
-                <a16:creationId xmlns:a16="http://schemas.microsoft.com/office/drawing/2014/main" id="{A8305A28-71F3-4113-B5C1-247D66781CEC}"/>
+                <a16:creationId xmlns:a16="http://schemas.microsoft.com/office/drawing/2014/main" id="{D47D5D52-ABA6-4B7C-ADAE-B790CCD80BC9}"/>
               </a:ext>
             </a:extLst>
           </p:cNvPr>
@@ -4850,7 +4195,7 @@
           <p:cNvPr id="9" name="">
             <a:extLst xmlns:a="http://schemas.openxmlformats.org/drawingml/2006/main">
               <a:ext uri="{FF2B5EF4-FFF2-40B4-BE49-F238E27FC236}">
-                <a16:creationId xmlns:a16="http://schemas.microsoft.com/office/drawing/2014/main" id="{F70A5F9B-4166-48EC-BE7A-B3CDCF2E1065}"/>
+                <a16:creationId xmlns:a16="http://schemas.microsoft.com/office/drawing/2014/main" id="{7D2D650F-37C5-476C-95D2-D4C539E1AB5A}"/>
               </a:ext>
             </a:extLst>
           </p:cNvPr>
@@ -4888,7 +4233,7 @@
             <a:pPr algn="l">
               <a:defRPr sz="1125" b="0">
                 <a:solidFill>
-                  <a:srgbClr val="5B6472"/>
+                  <a:srgbClr val="4B5563"/>
                 </a:solidFill>
                 <a:latin typeface="Aptos"/>
                 <a:ea typeface="Aptos"/>
@@ -4898,7 +4243,7 @@
             <a:r>
               <a:rPr sz="1125" b="0">
                 <a:solidFill>
-                  <a:srgbClr val="5B6472"/>
+                  <a:srgbClr val="4B5563"/>
                 </a:solidFill>
                 <a:latin typeface="Aptos"/>
                 <a:ea typeface="Aptos"/>
@@ -4914,7 +4259,7 @@
           <p:cNvPr id="10" name="">
             <a:extLst xmlns:a="http://schemas.openxmlformats.org/drawingml/2006/main">
               <a:ext uri="{FF2B5EF4-FFF2-40B4-BE49-F238E27FC236}">
-                <a16:creationId xmlns:a16="http://schemas.microsoft.com/office/drawing/2014/main" id="{4409840C-1CC0-4D17-8E06-459A30ADF508}"/>
+                <a16:creationId xmlns:a16="http://schemas.microsoft.com/office/drawing/2014/main" id="{3E53577C-F6CF-4321-8719-DF721095D0A2}"/>
               </a:ext>
             </a:extLst>
           </p:cNvPr>
@@ -4936,7 +4281,7 @@
           </a:solidFill>
           <a:ln xmlns:a="http://schemas.openxmlformats.org/drawingml/2006/main" w="9525">
             <a:solidFill>
-              <a:srgbClr val="D8D0C2"/>
+              <a:srgbClr val="E5E7EB"/>
             </a:solidFill>
             <a:prstDash val="solid"/>
           </a:ln>
@@ -4947,7 +4292,7 @@
           <p:cNvPr id="11" name="">
             <a:extLst xmlns:a="http://schemas.openxmlformats.org/drawingml/2006/main">
               <a:ext uri="{FF2B5EF4-FFF2-40B4-BE49-F238E27FC236}">
-                <a16:creationId xmlns:a16="http://schemas.microsoft.com/office/drawing/2014/main" id="{FCDCC629-7843-42F6-817F-B992910C078E}"/>
+                <a16:creationId xmlns:a16="http://schemas.microsoft.com/office/drawing/2014/main" id="{655E42D2-2AED-425F-8F9E-97CB6CEF84F1}"/>
               </a:ext>
             </a:extLst>
           </p:cNvPr>
@@ -5011,7 +4356,7 @@
           <p:cNvPr id="12" name="">
             <a:extLst xmlns:a="http://schemas.openxmlformats.org/drawingml/2006/main">
               <a:ext uri="{FF2B5EF4-FFF2-40B4-BE49-F238E27FC236}">
-                <a16:creationId xmlns:a16="http://schemas.microsoft.com/office/drawing/2014/main" id="{5951474F-E257-4F8B-9EBD-7AD0FD174D3D}"/>
+                <a16:creationId xmlns:a16="http://schemas.microsoft.com/office/drawing/2014/main" id="{4A2A0970-9B47-4F72-A20B-C1DBDE68E60A}"/>
               </a:ext>
             </a:extLst>
           </p:cNvPr>
@@ -5075,7 +4420,7 @@
           <p:cNvPr id="13" name="">
             <a:extLst xmlns:a="http://schemas.openxmlformats.org/drawingml/2006/main">
               <a:ext uri="{FF2B5EF4-FFF2-40B4-BE49-F238E27FC236}">
-                <a16:creationId xmlns:a16="http://schemas.microsoft.com/office/drawing/2014/main" id="{413ACB37-D987-4A89-8704-B8F35F03D76F}"/>
+                <a16:creationId xmlns:a16="http://schemas.microsoft.com/office/drawing/2014/main" id="{B1E13901-8C6F-4375-A4BA-E64992F4AB4C}"/>
               </a:ext>
             </a:extLst>
           </p:cNvPr>
@@ -5113,7 +4458,7 @@
             <a:pPr algn="l">
               <a:defRPr sz="1125" b="0">
                 <a:solidFill>
-                  <a:srgbClr val="5B6472"/>
+                  <a:srgbClr val="4B5563"/>
                 </a:solidFill>
                 <a:latin typeface="Aptos"/>
                 <a:ea typeface="Aptos"/>
@@ -5123,7 +4468,7 @@
             <a:r>
               <a:rPr sz="1125" b="0">
                 <a:solidFill>
-                  <a:srgbClr val="5B6472"/>
+                  <a:srgbClr val="4B5563"/>
                 </a:solidFill>
                 <a:latin typeface="Aptos"/>
                 <a:ea typeface="Aptos"/>
@@ -5139,7 +4484,7 @@
           <p:cNvPr id="14" name="">
             <a:extLst xmlns:a="http://schemas.openxmlformats.org/drawingml/2006/main">
               <a:ext uri="{FF2B5EF4-FFF2-40B4-BE49-F238E27FC236}">
-                <a16:creationId xmlns:a16="http://schemas.microsoft.com/office/drawing/2014/main" id="{34529361-F8ED-4180-B887-900649A485BE}"/>
+                <a16:creationId xmlns:a16="http://schemas.microsoft.com/office/drawing/2014/main" id="{CCF14FCB-DAA8-46C0-AAC7-BEBE47CE24AB}"/>
               </a:ext>
             </a:extLst>
           </p:cNvPr>
@@ -5174,7 +4519,7 @@
           <p:cNvPr id="15" name="">
             <a:extLst xmlns:a="http://schemas.openxmlformats.org/drawingml/2006/main">
               <a:ext uri="{FF2B5EF4-FFF2-40B4-BE49-F238E27FC236}">
-                <a16:creationId xmlns:a16="http://schemas.microsoft.com/office/drawing/2014/main" id="{12E25DDA-21F1-4A42-BE74-9FFE49CB6F17}"/>
+                <a16:creationId xmlns:a16="http://schemas.microsoft.com/office/drawing/2014/main" id="{9EBE779D-6BA3-42F6-883B-25F04FDE437A}"/>
               </a:ext>
             </a:extLst>
           </p:cNvPr>
@@ -5238,7 +4583,7 @@
           <p:cNvPr id="16" name="">
             <a:extLst xmlns:a="http://schemas.openxmlformats.org/drawingml/2006/main">
               <a:ext uri="{FF2B5EF4-FFF2-40B4-BE49-F238E27FC236}">
-                <a16:creationId xmlns:a16="http://schemas.microsoft.com/office/drawing/2014/main" id="{B96AC716-6CD4-47DA-8A2A-E61E594BA7D9}"/>
+                <a16:creationId xmlns:a16="http://schemas.microsoft.com/office/drawing/2014/main" id="{E3DEF703-8564-4072-ABFB-0F648666135B}"/>
               </a:ext>
             </a:extLst>
           </p:cNvPr>
@@ -5273,7 +4618,7 @@
           <p:cNvPr id="17" name="">
             <a:extLst xmlns:a="http://schemas.openxmlformats.org/drawingml/2006/main">
               <a:ext uri="{FF2B5EF4-FFF2-40B4-BE49-F238E27FC236}">
-                <a16:creationId xmlns:a16="http://schemas.microsoft.com/office/drawing/2014/main" id="{95EF2916-4FF1-40A9-9BD4-DA2B7D1E1B30}"/>
+                <a16:creationId xmlns:a16="http://schemas.microsoft.com/office/drawing/2014/main" id="{99EF7276-4F2F-4C25-8B7A-E691A56B9417}"/>
               </a:ext>
             </a:extLst>
           </p:cNvPr>
@@ -5308,7 +4653,7 @@
           <p:cNvPr id="18" name="">
             <a:extLst xmlns:a="http://schemas.openxmlformats.org/drawingml/2006/main">
               <a:ext uri="{FF2B5EF4-FFF2-40B4-BE49-F238E27FC236}">
-                <a16:creationId xmlns:a16="http://schemas.microsoft.com/office/drawing/2014/main" id="{979EF92D-94D8-4C96-9827-E039DC7BD922}"/>
+                <a16:creationId xmlns:a16="http://schemas.microsoft.com/office/drawing/2014/main" id="{40349C3B-A813-4511-879D-EEB4D86E7B82}"/>
               </a:ext>
             </a:extLst>
           </p:cNvPr>
@@ -5362,7 +4707,7 @@
                 <a:ea typeface="Aptos"/>
                 <a:cs typeface="Aptos"/>
               </a:rPr>
-              <a:t>Submission package includes two executed notebooks, README, generated CSV outputs, and this 10-slide presentation.</a:t>
+              <a:t>Submission files: two executed Jupyter notebooks, README, generated CSV outputs, and this presentation.</a:t>
             </a:r>
           </a:p>
         </p:txBody>
@@ -5372,52 +4717,19 @@
           <p:cNvPr id="19" name="">
             <a:extLst xmlns:a="http://schemas.openxmlformats.org/drawingml/2006/main">
               <a:ext uri="{FF2B5EF4-FFF2-40B4-BE49-F238E27FC236}">
-                <a16:creationId xmlns:a16="http://schemas.microsoft.com/office/drawing/2014/main" id="{B806D41E-385C-40B3-82BA-A5013BA91048}"/>
-              </a:ext>
-            </a:extLst>
-          </p:cNvPr>
-          <p:cNvSpPr>
-            <a:spLocks xmlns:a="http://schemas.openxmlformats.org/drawingml/2006/main" noGrp="1"/>
-          </p:cNvSpPr>
-          <p:nvPr/>
-        </p:nvSpPr>
-        <p:spPr>
-          <a:xfrm xmlns:a="http://schemas.openxmlformats.org/drawingml/2006/main">
-            <a:off x="10001250" y="4876800"/>
-            <a:ext cx="1143000" cy="857250"/>
-          </a:xfrm>
-          <a:prstGeom xmlns:a="http://schemas.openxmlformats.org/drawingml/2006/main" prst="rect">
-            <a:avLst/>
-          </a:prstGeom>
-          <a:solidFill xmlns:a="http://schemas.openxmlformats.org/drawingml/2006/main">
-            <a:srgbClr val="FFFFFF"/>
-          </a:solidFill>
-          <a:ln xmlns:a="http://schemas.openxmlformats.org/drawingml/2006/main" w="9525">
-            <a:solidFill>
-              <a:srgbClr val="D8D0C2"/>
-            </a:solidFill>
-            <a:prstDash val="solid"/>
-          </a:ln>
-        </p:spPr>
-      </p:sp>
-      <p:sp>
-        <p:nvSpPr>
-          <p:cNvPr id="20" name="">
-            <a:extLst xmlns:a="http://schemas.openxmlformats.org/drawingml/2006/main">
-              <a:ext uri="{FF2B5EF4-FFF2-40B4-BE49-F238E27FC236}">
-                <a16:creationId xmlns:a16="http://schemas.microsoft.com/office/drawing/2014/main" id="{6BD32A97-FE6B-4CA8-B451-BEB70DF2BBBB}"/>
-              </a:ext>
-            </a:extLst>
-          </p:cNvPr>
-          <p:cNvSpPr>
-            <a:spLocks xmlns:a="http://schemas.openxmlformats.org/drawingml/2006/main" noGrp="1"/>
-          </p:cNvSpPr>
-          <p:nvPr/>
-        </p:nvSpPr>
-        <p:spPr>
-          <a:xfrm xmlns:a="http://schemas.openxmlformats.org/drawingml/2006/main">
-            <a:off x="10153650" y="5029200"/>
-            <a:ext cx="838200" cy="304800"/>
+                <a16:creationId xmlns:a16="http://schemas.microsoft.com/office/drawing/2014/main" id="{53A9970B-E7FE-4A12-85B5-F58A53442D76}"/>
+              </a:ext>
+            </a:extLst>
+          </p:cNvPr>
+          <p:cNvSpPr>
+            <a:spLocks xmlns:a="http://schemas.openxmlformats.org/drawingml/2006/main" noGrp="1"/>
+          </p:cNvSpPr>
+          <p:nvPr/>
+        </p:nvSpPr>
+        <p:spPr>
+          <a:xfrm xmlns:a="http://schemas.openxmlformats.org/drawingml/2006/main">
+            <a:off x="609600" y="6515100"/>
+            <a:ext cx="7239000" cy="171450"/>
           </a:xfrm>
           <a:prstGeom xmlns:a="http://schemas.openxmlformats.org/drawingml/2006/main" prst="rect">
             <a:avLst/>
@@ -5441,47 +4753,47 @@
           <a:lstStyle xmlns:a="http://schemas.openxmlformats.org/drawingml/2006/main"/>
           <a:p xmlns:a="http://schemas.openxmlformats.org/drawingml/2006/main">
             <a:pPr algn="l">
-              <a:defRPr sz="2025" b="1">
-                <a:solidFill>
-                  <a:srgbClr val="6D28D9"/>
-                </a:solidFill>
-                <a:latin typeface="Aptos"/>
-                <a:ea typeface="Aptos"/>
-                <a:cs typeface="Aptos"/>
-              </a:defRPr>
-            </a:pPr>
-            <a:r>
-              <a:rPr sz="2025" b="1">
-                <a:solidFill>
-                  <a:srgbClr val="6D28D9"/>
-                </a:solidFill>
-                <a:latin typeface="Aptos"/>
-                <a:ea typeface="Aptos"/>
-                <a:cs typeface="Aptos"/>
-              </a:rPr>
-              <a:t>2</a:t>
-            </a:r>
-          </a:p>
-        </p:txBody>
-      </p:sp>
-      <p:sp>
-        <p:nvSpPr>
-          <p:cNvPr id="21" name="">
-            <a:extLst xmlns:a="http://schemas.openxmlformats.org/drawingml/2006/main">
-              <a:ext uri="{FF2B5EF4-FFF2-40B4-BE49-F238E27FC236}">
-                <a16:creationId xmlns:a16="http://schemas.microsoft.com/office/drawing/2014/main" id="{DB90DABD-9309-482F-BD95-4CF871A3DE67}"/>
-              </a:ext>
-            </a:extLst>
-          </p:cNvPr>
-          <p:cNvSpPr>
-            <a:spLocks xmlns:a="http://schemas.openxmlformats.org/drawingml/2006/main" noGrp="1"/>
-          </p:cNvSpPr>
-          <p:nvPr/>
-        </p:nvSpPr>
-        <p:spPr>
-          <a:xfrm xmlns:a="http://schemas.openxmlformats.org/drawingml/2006/main">
-            <a:off x="10153650" y="5372100"/>
-            <a:ext cx="838200" cy="266700"/>
+              <a:defRPr sz="825" b="0">
+                <a:solidFill>
+                  <a:srgbClr val="4B5563"/>
+                </a:solidFill>
+                <a:latin typeface="Aptos"/>
+                <a:ea typeface="Aptos"/>
+                <a:cs typeface="Aptos"/>
+              </a:defRPr>
+            </a:pPr>
+            <a:r>
+              <a:rPr sz="825" b="0">
+                <a:solidFill>
+                  <a:srgbClr val="4B5563"/>
+                </a:solidFill>
+                <a:latin typeface="Aptos"/>
+                <a:ea typeface="Aptos"/>
+                <a:cs typeface="Aptos"/>
+              </a:rPr>
+              <a:t>Big Data Analytics Mini Project | Last.fm 1K | PySpark</a:t>
+            </a:r>
+          </a:p>
+        </p:txBody>
+      </p:sp>
+      <p:sp>
+        <p:nvSpPr>
+          <p:cNvPr id="20" name="">
+            <a:extLst xmlns:a="http://schemas.openxmlformats.org/drawingml/2006/main">
+              <a:ext uri="{FF2B5EF4-FFF2-40B4-BE49-F238E27FC236}">
+                <a16:creationId xmlns:a16="http://schemas.microsoft.com/office/drawing/2014/main" id="{EF4EE9A8-984E-4756-9DD8-1EEB68C006E2}"/>
+              </a:ext>
+            </a:extLst>
+          </p:cNvPr>
+          <p:cNvSpPr>
+            <a:spLocks xmlns:a="http://schemas.openxmlformats.org/drawingml/2006/main" noGrp="1"/>
+          </p:cNvSpPr>
+          <p:nvPr/>
+        </p:nvSpPr>
+        <p:spPr>
+          <a:xfrm xmlns:a="http://schemas.openxmlformats.org/drawingml/2006/main">
+            <a:off x="11163300" y="6457950"/>
+            <a:ext cx="419100" cy="209550"/>
           </a:xfrm>
           <a:prstGeom xmlns:a="http://schemas.openxmlformats.org/drawingml/2006/main" prst="rect">
             <a:avLst/>
@@ -5504,138 +4816,10 @@
           <a:bodyPr xmlns:a="http://schemas.openxmlformats.org/drawingml/2006/main" lIns="0" tIns="0" rIns="0" bIns="0" anchor="t"/>
           <a:lstStyle xmlns:a="http://schemas.openxmlformats.org/drawingml/2006/main"/>
           <a:p xmlns:a="http://schemas.openxmlformats.org/drawingml/2006/main">
-            <a:pPr algn="l">
-              <a:defRPr sz="900" b="0">
-                <a:solidFill>
-                  <a:srgbClr val="5B6472"/>
-                </a:solidFill>
-                <a:latin typeface="Aptos"/>
-                <a:ea typeface="Aptos"/>
-                <a:cs typeface="Aptos"/>
-              </a:defRPr>
-            </a:pPr>
-            <a:r>
-              <a:rPr sz="900" b="0">
-                <a:solidFill>
-                  <a:srgbClr val="5B6472"/>
-                </a:solidFill>
-                <a:latin typeface="Aptos"/>
-                <a:ea typeface="Aptos"/>
-                <a:cs typeface="Aptos"/>
-              </a:rPr>
-              <a:t>notebooks</a:t>
-            </a:r>
-          </a:p>
-        </p:txBody>
-      </p:sp>
-      <p:sp>
-        <p:nvSpPr>
-          <p:cNvPr id="22" name="">
-            <a:extLst xmlns:a="http://schemas.openxmlformats.org/drawingml/2006/main">
-              <a:ext uri="{FF2B5EF4-FFF2-40B4-BE49-F238E27FC236}">
-                <a16:creationId xmlns:a16="http://schemas.microsoft.com/office/drawing/2014/main" id="{9283EA94-EB02-40A7-A2E8-5DCAA3F7ADFF}"/>
-              </a:ext>
-            </a:extLst>
-          </p:cNvPr>
-          <p:cNvSpPr>
-            <a:spLocks xmlns:a="http://schemas.openxmlformats.org/drawingml/2006/main" noGrp="1"/>
-          </p:cNvSpPr>
-          <p:nvPr/>
-        </p:nvSpPr>
-        <p:spPr>
-          <a:xfrm xmlns:a="http://schemas.openxmlformats.org/drawingml/2006/main">
-            <a:off x="609600" y="6515100"/>
-            <a:ext cx="7239000" cy="171450"/>
-          </a:xfrm>
-          <a:prstGeom xmlns:a="http://schemas.openxmlformats.org/drawingml/2006/main" prst="rect">
-            <a:avLst/>
-          </a:prstGeom>
-          <a:solidFill xmlns:a="http://schemas.openxmlformats.org/drawingml/2006/main">
-            <a:srgbClr val="000000">
-              <a:alpha val="0"/>
-            </a:srgbClr>
-          </a:solidFill>
-          <a:ln xmlns:a="http://schemas.openxmlformats.org/drawingml/2006/main" w="0">
-            <a:solidFill>
-              <a:srgbClr val="000000">
-                <a:alpha val="0"/>
-              </a:srgbClr>
-            </a:solidFill>
-            <a:prstDash val="solid"/>
-          </a:ln>
-        </p:spPr>
-        <p:txBody>
-          <a:bodyPr xmlns:a="http://schemas.openxmlformats.org/drawingml/2006/main" lIns="0" tIns="0" rIns="0" bIns="0" anchor="t"/>
-          <a:lstStyle xmlns:a="http://schemas.openxmlformats.org/drawingml/2006/main"/>
-          <a:p xmlns:a="http://schemas.openxmlformats.org/drawingml/2006/main">
-            <a:pPr algn="l">
-              <a:defRPr sz="825" b="0">
-                <a:solidFill>
-                  <a:srgbClr val="5B6472"/>
-                </a:solidFill>
-                <a:latin typeface="Aptos"/>
-                <a:ea typeface="Aptos"/>
-                <a:cs typeface="Aptos"/>
-              </a:defRPr>
-            </a:pPr>
-            <a:r>
-              <a:rPr sz="825" b="0">
-                <a:solidFill>
-                  <a:srgbClr val="5B6472"/>
-                </a:solidFill>
-                <a:latin typeface="Aptos"/>
-                <a:ea typeface="Aptos"/>
-                <a:cs typeface="Aptos"/>
-              </a:rPr>
-              <a:t>Big Data Analytics Mini Project | Last.fm 1K | PySpark</a:t>
-            </a:r>
-          </a:p>
-        </p:txBody>
-      </p:sp>
-      <p:sp>
-        <p:nvSpPr>
-          <p:cNvPr id="23" name="">
-            <a:extLst xmlns:a="http://schemas.openxmlformats.org/drawingml/2006/main">
-              <a:ext uri="{FF2B5EF4-FFF2-40B4-BE49-F238E27FC236}">
-                <a16:creationId xmlns:a16="http://schemas.microsoft.com/office/drawing/2014/main" id="{987D3860-B733-48AA-A505-014073BE3D1C}"/>
-              </a:ext>
-            </a:extLst>
-          </p:cNvPr>
-          <p:cNvSpPr>
-            <a:spLocks xmlns:a="http://schemas.openxmlformats.org/drawingml/2006/main" noGrp="1"/>
-          </p:cNvSpPr>
-          <p:nvPr/>
-        </p:nvSpPr>
-        <p:spPr>
-          <a:xfrm xmlns:a="http://schemas.openxmlformats.org/drawingml/2006/main">
-            <a:off x="11163300" y="6457950"/>
-            <a:ext cx="419100" cy="209550"/>
-          </a:xfrm>
-          <a:prstGeom xmlns:a="http://schemas.openxmlformats.org/drawingml/2006/main" prst="rect">
-            <a:avLst/>
-          </a:prstGeom>
-          <a:solidFill xmlns:a="http://schemas.openxmlformats.org/drawingml/2006/main">
-            <a:srgbClr val="000000">
-              <a:alpha val="0"/>
-            </a:srgbClr>
-          </a:solidFill>
-          <a:ln xmlns:a="http://schemas.openxmlformats.org/drawingml/2006/main" w="0">
-            <a:solidFill>
-              <a:srgbClr val="000000">
-                <a:alpha val="0"/>
-              </a:srgbClr>
-            </a:solidFill>
-            <a:prstDash val="solid"/>
-          </a:ln>
-        </p:spPr>
-        <p:txBody>
-          <a:bodyPr xmlns:a="http://schemas.openxmlformats.org/drawingml/2006/main" lIns="0" tIns="0" rIns="0" bIns="0" anchor="t"/>
-          <a:lstStyle xmlns:a="http://schemas.openxmlformats.org/drawingml/2006/main"/>
-          <a:p xmlns:a="http://schemas.openxmlformats.org/drawingml/2006/main">
             <a:pPr algn="r">
               <a:defRPr sz="900" b="1">
                 <a:solidFill>
-                  <a:srgbClr val="5B6472"/>
+                  <a:srgbClr val="4B5563"/>
                 </a:solidFill>
                 <a:latin typeface="Aptos"/>
                 <a:ea typeface="Aptos"/>
@@ -5645,7 +4829,7 @@
             <a:r>
               <a:rPr sz="900" b="1">
                 <a:solidFill>
-                  <a:srgbClr val="5B6472"/>
+                  <a:srgbClr val="4B5563"/>
                 </a:solidFill>
                 <a:latin typeface="Aptos"/>
                 <a:ea typeface="Aptos"/>
@@ -5659,7 +4843,7 @@
     </p:spTree>
     <p:extLst>
       <p:ext uri="{BB962C8B-B14F-4D97-AF65-F5344CB8AC3E}">
-        <p14:creationId xmlns:p14="http://schemas.microsoft.com/office/powerpoint/2010/main" val="1739357405"/>
+        <p14:creationId xmlns:p14="http://schemas.microsoft.com/office/powerpoint/2010/main" val="1022296443"/>
       </p:ext>
     </p:extLst>
   </p:cSld>
@@ -5683,7 +4867,7 @@
           <p:cNvPr id="1" name="">
             <a:extLst xmlns:a="http://schemas.openxmlformats.org/drawingml/2006/main">
               <a:ext uri="{FF2B5EF4-FFF2-40B4-BE49-F238E27FC236}">
-                <a16:creationId xmlns:a16="http://schemas.microsoft.com/office/drawing/2014/main" id="{B1D3172F-53D1-4910-9C6C-B6939A164030}"/>
+                <a16:creationId xmlns:a16="http://schemas.microsoft.com/office/drawing/2014/main" id="{187C2BE2-30A9-4F01-8612-65E1AD09552A}"/>
               </a:ext>
             </a:extLst>
           </p:cNvPr>
@@ -5701,7 +4885,7 @@
             <a:avLst/>
           </a:prstGeom>
           <a:solidFill xmlns:a="http://schemas.openxmlformats.org/drawingml/2006/main">
-            <a:srgbClr val="F7F3EA"/>
+            <a:srgbClr val="FFFFFF"/>
           </a:solidFill>
           <a:ln xmlns:a="http://schemas.openxmlformats.org/drawingml/2006/main" w="0">
             <a:solidFill>
@@ -5718,7 +4902,7 @@
           <p:cNvPr id="2" name="kicker-marker-3">
             <a:extLst xmlns:a="http://schemas.openxmlformats.org/drawingml/2006/main">
               <a:ext uri="{FF2B5EF4-FFF2-40B4-BE49-F238E27FC236}">
-                <a16:creationId xmlns:a16="http://schemas.microsoft.com/office/drawing/2014/main" id="{62C46569-8924-4452-80F5-6EEED5C2FDC6}"/>
+                <a16:creationId xmlns:a16="http://schemas.microsoft.com/office/drawing/2014/main" id="{E8118A99-F463-458F-9767-DEAC6131C491}"/>
               </a:ext>
             </a:extLst>
           </p:cNvPr>
@@ -5753,7 +4937,7 @@
           <p:cNvPr id="3" name="kicker-label-3">
             <a:extLst xmlns:a="http://schemas.openxmlformats.org/drawingml/2006/main">
               <a:ext uri="{FF2B5EF4-FFF2-40B4-BE49-F238E27FC236}">
-                <a16:creationId xmlns:a16="http://schemas.microsoft.com/office/drawing/2014/main" id="{9A2FE4D5-D2E3-439D-A446-1F04CDC24B88}"/>
+                <a16:creationId xmlns:a16="http://schemas.microsoft.com/office/drawing/2014/main" id="{8496B1CD-CA05-41B2-A093-DAB79DB22DEB}"/>
               </a:ext>
             </a:extLst>
           </p:cNvPr>
@@ -5791,7 +4975,7 @@
             <a:pPr algn="l">
               <a:defRPr sz="825" b="1">
                 <a:solidFill>
-                  <a:srgbClr val="5B6472"/>
+                  <a:srgbClr val="4B5563"/>
                 </a:solidFill>
                 <a:latin typeface="Aptos"/>
                 <a:ea typeface="Aptos"/>
@@ -5801,13 +4985,13 @@
             <a:r>
               <a:rPr sz="825" b="1">
                 <a:solidFill>
-                  <a:srgbClr val="5B6472"/>
-                </a:solidFill>
-                <a:latin typeface="Aptos"/>
-                <a:ea typeface="Aptos"/>
-                <a:cs typeface="Aptos"/>
-              </a:rPr>
-              <a:t>WORKFLOW</a:t>
+                  <a:srgbClr val="4B5563"/>
+                </a:solidFill>
+                <a:latin typeface="Aptos"/>
+                <a:ea typeface="Aptos"/>
+                <a:cs typeface="Aptos"/>
+              </a:rPr>
+              <a:t>METHOD</a:t>
             </a:r>
           </a:p>
         </p:txBody>
@@ -5817,7 +5001,7 @@
           <p:cNvPr id="4" name="">
             <a:extLst xmlns:a="http://schemas.openxmlformats.org/drawingml/2006/main">
               <a:ext uri="{FF2B5EF4-FFF2-40B4-BE49-F238E27FC236}">
-                <a16:creationId xmlns:a16="http://schemas.microsoft.com/office/drawing/2014/main" id="{07E5D493-FB78-460D-817D-3D5121F1487E}"/>
+                <a16:creationId xmlns:a16="http://schemas.microsoft.com/office/drawing/2014/main" id="{2227389B-ED0C-4A81-A6D5-B5E7CB29A62B}"/>
               </a:ext>
             </a:extLst>
           </p:cNvPr>
@@ -5871,7 +5055,7 @@
                 <a:ea typeface="Aptos Display"/>
                 <a:cs typeface="Aptos Display"/>
               </a:rPr>
-              <a:t>One Spark pipeline feeds two assignment outcomes.</a:t>
+              <a:t>Data Processing Workflow</a:t>
             </a:r>
           </a:p>
         </p:txBody>
@@ -5881,7 +5065,7 @@
           <p:cNvPr id="5" name="">
             <a:extLst xmlns:a="http://schemas.openxmlformats.org/drawingml/2006/main">
               <a:ext uri="{FF2B5EF4-FFF2-40B4-BE49-F238E27FC236}">
-                <a16:creationId xmlns:a16="http://schemas.microsoft.com/office/drawing/2014/main" id="{2903ABC1-8A79-4622-8A72-17516E09E2E8}"/>
+                <a16:creationId xmlns:a16="http://schemas.microsoft.com/office/drawing/2014/main" id="{FF474A4C-8F0B-4213-AA53-FDD5FD70F32C}"/>
               </a:ext>
             </a:extLst>
           </p:cNvPr>
@@ -5919,7 +5103,7 @@
             <a:pPr algn="l">
               <a:defRPr sz="1125" b="0">
                 <a:solidFill>
-                  <a:srgbClr val="5B6472"/>
+                  <a:srgbClr val="4B5563"/>
                 </a:solidFill>
                 <a:latin typeface="Aptos"/>
                 <a:ea typeface="Aptos"/>
@@ -5929,13 +5113,13 @@
             <a:r>
               <a:rPr sz="1125" b="0">
                 <a:solidFill>
-                  <a:srgbClr val="5B6472"/>
-                </a:solidFill>
-                <a:latin typeface="Aptos"/>
-                <a:ea typeface="Aptos"/>
-                <a:cs typeface="Aptos"/>
-              </a:rPr>
-              <a:t>The system reads raw Last.fm events, cleans them once, then branches into analytics and recommendation workflows.</a:t>
+                  <a:srgbClr val="4B5563"/>
+                </a:solidFill>
+                <a:latin typeface="Aptos"/>
+                <a:ea typeface="Aptos"/>
+                <a:cs typeface="Aptos"/>
+              </a:rPr>
+              <a:t>The same cleaned Last.fm data is used for analytics, clustering, and music recommendation.</a:t>
             </a:r>
           </a:p>
         </p:txBody>
@@ -5945,7 +5129,7 @@
           <p:cNvPr id="6" name="">
             <a:extLst xmlns:a="http://schemas.openxmlformats.org/drawingml/2006/main">
               <a:ext uri="{FF2B5EF4-FFF2-40B4-BE49-F238E27FC236}">
-                <a16:creationId xmlns:a16="http://schemas.microsoft.com/office/drawing/2014/main" id="{C3999B6B-AA84-4087-B16D-63FBC08AF5E6}"/>
+                <a16:creationId xmlns:a16="http://schemas.microsoft.com/office/drawing/2014/main" id="{A3BF592D-50AC-4BF3-9B0F-39C9D1F63551}"/>
               </a:ext>
             </a:extLst>
           </p:cNvPr>
@@ -5978,7 +5162,7 @@
           <p:cNvPr id="7" name="">
             <a:extLst xmlns:a="http://schemas.openxmlformats.org/drawingml/2006/main">
               <a:ext uri="{FF2B5EF4-FFF2-40B4-BE49-F238E27FC236}">
-                <a16:creationId xmlns:a16="http://schemas.microsoft.com/office/drawing/2014/main" id="{E9DC93CF-E337-4FDD-8DE5-BE69B1E900A9}"/>
+                <a16:creationId xmlns:a16="http://schemas.microsoft.com/office/drawing/2014/main" id="{009953B0-4239-4FEC-B91A-DEAA6F4AEC96}"/>
               </a:ext>
             </a:extLst>
           </p:cNvPr>
@@ -6013,7 +5197,7 @@
           <p:cNvPr id="8" name="">
             <a:extLst xmlns:a="http://schemas.openxmlformats.org/drawingml/2006/main">
               <a:ext uri="{FF2B5EF4-FFF2-40B4-BE49-F238E27FC236}">
-                <a16:creationId xmlns:a16="http://schemas.microsoft.com/office/drawing/2014/main" id="{FB216278-DF68-45FD-9C39-C14FBBD560A2}"/>
+                <a16:creationId xmlns:a16="http://schemas.microsoft.com/office/drawing/2014/main" id="{85DF5AE9-C590-4C1E-BC54-DD45FE7411F3}"/>
               </a:ext>
             </a:extLst>
           </p:cNvPr>
@@ -6077,7 +5261,7 @@
           <p:cNvPr id="9" name="">
             <a:extLst xmlns:a="http://schemas.openxmlformats.org/drawingml/2006/main">
               <a:ext uri="{FF2B5EF4-FFF2-40B4-BE49-F238E27FC236}">
-                <a16:creationId xmlns:a16="http://schemas.microsoft.com/office/drawing/2014/main" id="{D9CA9E61-6A22-40FA-8E8B-13BA5F5F12B0}"/>
+                <a16:creationId xmlns:a16="http://schemas.microsoft.com/office/drawing/2014/main" id="{F75EF8DD-C9B1-45BE-873A-6B6B19667CD2}"/>
               </a:ext>
             </a:extLst>
           </p:cNvPr>
@@ -6115,7 +5299,7 @@
             <a:pPr algn="l">
               <a:defRPr sz="938" b="0">
                 <a:solidFill>
-                  <a:srgbClr val="5B6472"/>
+                  <a:srgbClr val="4B5563"/>
                 </a:solidFill>
                 <a:latin typeface="Aptos"/>
                 <a:ea typeface="Aptos"/>
@@ -6125,13 +5309,13 @@
             <a:r>
               <a:rPr sz="938" b="0">
                 <a:solidFill>
-                  <a:srgbClr val="5B6472"/>
-                </a:solidFill>
-                <a:latin typeface="Aptos"/>
-                <a:ea typeface="Aptos"/>
-                <a:cs typeface="Aptos"/>
-              </a:rPr>
-              <a:t>Listening TSV plus user profile TSV from downloaded dataset folder.</a:t>
+                  <a:srgbClr val="4B5563"/>
+                </a:solidFill>
+                <a:latin typeface="Aptos"/>
+                <a:ea typeface="Aptos"/>
+                <a:cs typeface="Aptos"/>
+              </a:rPr>
+              <a:t>Listening history TSV plus user profile TSV from the downloaded dataset folder.</a:t>
             </a:r>
           </a:p>
         </p:txBody>
@@ -6141,7 +5325,7 @@
           <p:cNvPr id="10" name="">
             <a:extLst xmlns:a="http://schemas.openxmlformats.org/drawingml/2006/main">
               <a:ext uri="{FF2B5EF4-FFF2-40B4-BE49-F238E27FC236}">
-                <a16:creationId xmlns:a16="http://schemas.microsoft.com/office/drawing/2014/main" id="{750599AA-02B9-462E-8B83-0A3F3AA9FF16}"/>
+                <a16:creationId xmlns:a16="http://schemas.microsoft.com/office/drawing/2014/main" id="{A4A1EA6C-34E8-419E-8903-D45986035D23}"/>
               </a:ext>
             </a:extLst>
           </p:cNvPr>
@@ -6159,7 +5343,7 @@
             <a:avLst/>
           </a:prstGeom>
           <a:solidFill xmlns:a="http://schemas.openxmlformats.org/drawingml/2006/main">
-            <a:srgbClr val="D8D0C2"/>
+            <a:srgbClr val="E5E7EB"/>
           </a:solidFill>
           <a:ln xmlns:a="http://schemas.openxmlformats.org/drawingml/2006/main" w="0">
             <a:solidFill>
@@ -6176,7 +5360,7 @@
           <p:cNvPr id="11" name="">
             <a:extLst xmlns:a="http://schemas.openxmlformats.org/drawingml/2006/main">
               <a:ext uri="{FF2B5EF4-FFF2-40B4-BE49-F238E27FC236}">
-                <a16:creationId xmlns:a16="http://schemas.microsoft.com/office/drawing/2014/main" id="{7301E21C-9E09-4569-A9E0-7B61E5CA0974}"/>
+                <a16:creationId xmlns:a16="http://schemas.microsoft.com/office/drawing/2014/main" id="{6F1E3B4F-08A1-43FF-9CE0-388D1B0A45CA}"/>
               </a:ext>
             </a:extLst>
           </p:cNvPr>
@@ -6194,7 +5378,7 @@
             <a:avLst/>
           </a:prstGeom>
           <a:solidFill xmlns:a="http://schemas.openxmlformats.org/drawingml/2006/main">
-            <a:srgbClr val="D8D0C2"/>
+            <a:srgbClr val="E5E7EB"/>
           </a:solidFill>
           <a:ln xmlns:a="http://schemas.openxmlformats.org/drawingml/2006/main" w="0">
             <a:solidFill>
@@ -6211,7 +5395,7 @@
           <p:cNvPr id="12" name="">
             <a:extLst xmlns:a="http://schemas.openxmlformats.org/drawingml/2006/main">
               <a:ext uri="{FF2B5EF4-FFF2-40B4-BE49-F238E27FC236}">
-                <a16:creationId xmlns:a16="http://schemas.microsoft.com/office/drawing/2014/main" id="{59A2A488-AD53-48DC-9C7B-79D5EBC7393A}"/>
+                <a16:creationId xmlns:a16="http://schemas.microsoft.com/office/drawing/2014/main" id="{537D2E8E-D153-49D7-B617-69F96C970D20}"/>
               </a:ext>
             </a:extLst>
           </p:cNvPr>
@@ -6244,7 +5428,7 @@
           <p:cNvPr id="13" name="">
             <a:extLst xmlns:a="http://schemas.openxmlformats.org/drawingml/2006/main">
               <a:ext uri="{FF2B5EF4-FFF2-40B4-BE49-F238E27FC236}">
-                <a16:creationId xmlns:a16="http://schemas.microsoft.com/office/drawing/2014/main" id="{479A369D-841A-4736-A7F2-37432B0337A5}"/>
+                <a16:creationId xmlns:a16="http://schemas.microsoft.com/office/drawing/2014/main" id="{BE3CE66C-F5AA-4E97-9A29-A06B6106429E}"/>
               </a:ext>
             </a:extLst>
           </p:cNvPr>
@@ -6279,7 +5463,7 @@
           <p:cNvPr id="14" name="">
             <a:extLst xmlns:a="http://schemas.openxmlformats.org/drawingml/2006/main">
               <a:ext uri="{FF2B5EF4-FFF2-40B4-BE49-F238E27FC236}">
-                <a16:creationId xmlns:a16="http://schemas.microsoft.com/office/drawing/2014/main" id="{39A51BCA-27E0-42DD-BA43-7866FF57D766}"/>
+                <a16:creationId xmlns:a16="http://schemas.microsoft.com/office/drawing/2014/main" id="{368276DA-6240-4EAC-825B-BEE7F99E261F}"/>
               </a:ext>
             </a:extLst>
           </p:cNvPr>
@@ -6343,7 +5527,7 @@
           <p:cNvPr id="15" name="">
             <a:extLst xmlns:a="http://schemas.openxmlformats.org/drawingml/2006/main">
               <a:ext uri="{FF2B5EF4-FFF2-40B4-BE49-F238E27FC236}">
-                <a16:creationId xmlns:a16="http://schemas.microsoft.com/office/drawing/2014/main" id="{4844C4E0-39E3-4B75-B689-86323E4C0521}"/>
+                <a16:creationId xmlns:a16="http://schemas.microsoft.com/office/drawing/2014/main" id="{CAC95DFA-4713-4A4F-9272-AADAF4AB9C75}"/>
               </a:ext>
             </a:extLst>
           </p:cNvPr>
@@ -6381,7 +5565,7 @@
             <a:pPr algn="l">
               <a:defRPr sz="938" b="0">
                 <a:solidFill>
-                  <a:srgbClr val="5B6472"/>
+                  <a:srgbClr val="4B5563"/>
                 </a:solidFill>
                 <a:latin typeface="Aptos"/>
                 <a:ea typeface="Aptos"/>
@@ -6391,7 +5575,7 @@
             <a:r>
               <a:rPr sz="938" b="0">
                 <a:solidFill>
-                  <a:srgbClr val="5B6472"/>
+                  <a:srgbClr val="4B5563"/>
                 </a:solidFill>
                 <a:latin typeface="Aptos"/>
                 <a:ea typeface="Aptos"/>
@@ -6407,7 +5591,7 @@
           <p:cNvPr id="16" name="">
             <a:extLst xmlns:a="http://schemas.openxmlformats.org/drawingml/2006/main">
               <a:ext uri="{FF2B5EF4-FFF2-40B4-BE49-F238E27FC236}">
-                <a16:creationId xmlns:a16="http://schemas.microsoft.com/office/drawing/2014/main" id="{68432F86-0252-4CB7-9CD3-12F5EDA96740}"/>
+                <a16:creationId xmlns:a16="http://schemas.microsoft.com/office/drawing/2014/main" id="{F36ABBA5-B4F4-48F1-9E01-5D9402C1DD8F}"/>
               </a:ext>
             </a:extLst>
           </p:cNvPr>
@@ -6425,7 +5609,7 @@
             <a:avLst/>
           </a:prstGeom>
           <a:solidFill xmlns:a="http://schemas.openxmlformats.org/drawingml/2006/main">
-            <a:srgbClr val="D8D0C2"/>
+            <a:srgbClr val="E5E7EB"/>
           </a:solidFill>
           <a:ln xmlns:a="http://schemas.openxmlformats.org/drawingml/2006/main" w="0">
             <a:solidFill>
@@ -6442,7 +5626,7 @@
           <p:cNvPr id="17" name="">
             <a:extLst xmlns:a="http://schemas.openxmlformats.org/drawingml/2006/main">
               <a:ext uri="{FF2B5EF4-FFF2-40B4-BE49-F238E27FC236}">
-                <a16:creationId xmlns:a16="http://schemas.microsoft.com/office/drawing/2014/main" id="{D826E339-3E28-45B5-A527-E5E6DF179320}"/>
+                <a16:creationId xmlns:a16="http://schemas.microsoft.com/office/drawing/2014/main" id="{9023EF51-A650-4338-B574-8124E9D638A2}"/>
               </a:ext>
             </a:extLst>
           </p:cNvPr>
@@ -6460,7 +5644,7 @@
             <a:avLst/>
           </a:prstGeom>
           <a:solidFill xmlns:a="http://schemas.openxmlformats.org/drawingml/2006/main">
-            <a:srgbClr val="D8D0C2"/>
+            <a:srgbClr val="E5E7EB"/>
           </a:solidFill>
           <a:ln xmlns:a="http://schemas.openxmlformats.org/drawingml/2006/main" w="0">
             <a:solidFill>
@@ -6477,7 +5661,7 @@
           <p:cNvPr id="18" name="">
             <a:extLst xmlns:a="http://schemas.openxmlformats.org/drawingml/2006/main">
               <a:ext uri="{FF2B5EF4-FFF2-40B4-BE49-F238E27FC236}">
-                <a16:creationId xmlns:a16="http://schemas.microsoft.com/office/drawing/2014/main" id="{A81B0328-F63B-47E0-BFFC-802DA9CF4E57}"/>
+                <a16:creationId xmlns:a16="http://schemas.microsoft.com/office/drawing/2014/main" id="{86539475-5B4B-46EA-A6F9-52FFCB9FA2B1}"/>
               </a:ext>
             </a:extLst>
           </p:cNvPr>
@@ -6510,7 +5694,7 @@
           <p:cNvPr id="19" name="">
             <a:extLst xmlns:a="http://schemas.openxmlformats.org/drawingml/2006/main">
               <a:ext uri="{FF2B5EF4-FFF2-40B4-BE49-F238E27FC236}">
-                <a16:creationId xmlns:a16="http://schemas.microsoft.com/office/drawing/2014/main" id="{D7487B98-07EF-4CB4-8676-FE928A5BCC8E}"/>
+                <a16:creationId xmlns:a16="http://schemas.microsoft.com/office/drawing/2014/main" id="{8A68D37E-78C5-477E-853D-19CDD29913AE}"/>
               </a:ext>
             </a:extLst>
           </p:cNvPr>
@@ -6545,7 +5729,7 @@
           <p:cNvPr id="20" name="">
             <a:extLst xmlns:a="http://schemas.openxmlformats.org/drawingml/2006/main">
               <a:ext uri="{FF2B5EF4-FFF2-40B4-BE49-F238E27FC236}">
-                <a16:creationId xmlns:a16="http://schemas.microsoft.com/office/drawing/2014/main" id="{4A7DB713-E6EC-44CF-AA89-5715F09A0DBF}"/>
+                <a16:creationId xmlns:a16="http://schemas.microsoft.com/office/drawing/2014/main" id="{261EB0CD-AABD-440C-BF30-E8E1E478CA36}"/>
               </a:ext>
             </a:extLst>
           </p:cNvPr>
@@ -6609,7 +5793,7 @@
           <p:cNvPr id="21" name="">
             <a:extLst xmlns:a="http://schemas.openxmlformats.org/drawingml/2006/main">
               <a:ext uri="{FF2B5EF4-FFF2-40B4-BE49-F238E27FC236}">
-                <a16:creationId xmlns:a16="http://schemas.microsoft.com/office/drawing/2014/main" id="{6F7A3147-535E-4AFB-92FC-ACD444D7FAAE}"/>
+                <a16:creationId xmlns:a16="http://schemas.microsoft.com/office/drawing/2014/main" id="{85BD41A4-848B-403B-8D84-4A859627D67F}"/>
               </a:ext>
             </a:extLst>
           </p:cNvPr>
@@ -6647,7 +5831,7 @@
             <a:pPr algn="l">
               <a:defRPr sz="938" b="0">
                 <a:solidFill>
-                  <a:srgbClr val="5B6472"/>
+                  <a:srgbClr val="4B5563"/>
                 </a:solidFill>
                 <a:latin typeface="Aptos"/>
                 <a:ea typeface="Aptos"/>
@@ -6657,7 +5841,7 @@
             <a:r>
               <a:rPr sz="938" b="0">
                 <a:solidFill>
-                  <a:srgbClr val="5B6472"/>
+                  <a:srgbClr val="4B5563"/>
                 </a:solidFill>
                 <a:latin typeface="Aptos"/>
                 <a:ea typeface="Aptos"/>
@@ -6673,7 +5857,7 @@
           <p:cNvPr id="22" name="">
             <a:extLst xmlns:a="http://schemas.openxmlformats.org/drawingml/2006/main">
               <a:ext uri="{FF2B5EF4-FFF2-40B4-BE49-F238E27FC236}">
-                <a16:creationId xmlns:a16="http://schemas.microsoft.com/office/drawing/2014/main" id="{9B0A1EC7-68F6-4237-A8FF-94F2918355F8}"/>
+                <a16:creationId xmlns:a16="http://schemas.microsoft.com/office/drawing/2014/main" id="{2EDE0D03-121B-4D73-AB4A-58683486CEF8}"/>
               </a:ext>
             </a:extLst>
           </p:cNvPr>
@@ -6691,7 +5875,7 @@
             <a:avLst/>
           </a:prstGeom>
           <a:solidFill xmlns:a="http://schemas.openxmlformats.org/drawingml/2006/main">
-            <a:srgbClr val="D8D0C2"/>
+            <a:srgbClr val="E5E7EB"/>
           </a:solidFill>
           <a:ln xmlns:a="http://schemas.openxmlformats.org/drawingml/2006/main" w="0">
             <a:solidFill>
@@ -6708,7 +5892,7 @@
           <p:cNvPr id="23" name="">
             <a:extLst xmlns:a="http://schemas.openxmlformats.org/drawingml/2006/main">
               <a:ext uri="{FF2B5EF4-FFF2-40B4-BE49-F238E27FC236}">
-                <a16:creationId xmlns:a16="http://schemas.microsoft.com/office/drawing/2014/main" id="{05DCED14-B7AC-4708-ACE1-4E120E8B2D57}"/>
+                <a16:creationId xmlns:a16="http://schemas.microsoft.com/office/drawing/2014/main" id="{6D1099D3-0CDA-42DD-9786-936C2B4C3D46}"/>
               </a:ext>
             </a:extLst>
           </p:cNvPr>
@@ -6726,7 +5910,7 @@
             <a:avLst/>
           </a:prstGeom>
           <a:solidFill xmlns:a="http://schemas.openxmlformats.org/drawingml/2006/main">
-            <a:srgbClr val="D8D0C2"/>
+            <a:srgbClr val="E5E7EB"/>
           </a:solidFill>
           <a:ln xmlns:a="http://schemas.openxmlformats.org/drawingml/2006/main" w="0">
             <a:solidFill>
@@ -6743,7 +5927,7 @@
           <p:cNvPr id="24" name="">
             <a:extLst xmlns:a="http://schemas.openxmlformats.org/drawingml/2006/main">
               <a:ext uri="{FF2B5EF4-FFF2-40B4-BE49-F238E27FC236}">
-                <a16:creationId xmlns:a16="http://schemas.microsoft.com/office/drawing/2014/main" id="{40A1D073-293A-40C9-BD77-D56ACC86F17E}"/>
+                <a16:creationId xmlns:a16="http://schemas.microsoft.com/office/drawing/2014/main" id="{ADCB4CD7-552D-4D5F-9F41-0C87AAE88D91}"/>
               </a:ext>
             </a:extLst>
           </p:cNvPr>
@@ -6761,7 +5945,7 @@
             <a:avLst/>
           </a:prstGeom>
           <a:solidFill xmlns:a="http://schemas.openxmlformats.org/drawingml/2006/main">
-            <a:srgbClr val="D8D0C2"/>
+            <a:srgbClr val="E5E7EB"/>
           </a:solidFill>
           <a:ln xmlns:a="http://schemas.openxmlformats.org/drawingml/2006/main" w="0">
             <a:solidFill>
@@ -6778,7 +5962,7 @@
           <p:cNvPr id="25" name="">
             <a:extLst xmlns:a="http://schemas.openxmlformats.org/drawingml/2006/main">
               <a:ext uri="{FF2B5EF4-FFF2-40B4-BE49-F238E27FC236}">
-                <a16:creationId xmlns:a16="http://schemas.microsoft.com/office/drawing/2014/main" id="{F969F424-01AF-4A75-A8A4-5051B708FB9F}"/>
+                <a16:creationId xmlns:a16="http://schemas.microsoft.com/office/drawing/2014/main" id="{C036F09F-8B37-4CEE-9770-1A87EAEF9C4A}"/>
               </a:ext>
             </a:extLst>
           </p:cNvPr>
@@ -6796,7 +5980,7 @@
             <a:avLst/>
           </a:prstGeom>
           <a:solidFill xmlns:a="http://schemas.openxmlformats.org/drawingml/2006/main">
-            <a:srgbClr val="D8D0C2"/>
+            <a:srgbClr val="E5E7EB"/>
           </a:solidFill>
           <a:ln xmlns:a="http://schemas.openxmlformats.org/drawingml/2006/main" w="0">
             <a:solidFill>
@@ -6813,7 +5997,7 @@
           <p:cNvPr id="26" name="">
             <a:extLst xmlns:a="http://schemas.openxmlformats.org/drawingml/2006/main">
               <a:ext uri="{FF2B5EF4-FFF2-40B4-BE49-F238E27FC236}">
-                <a16:creationId xmlns:a16="http://schemas.microsoft.com/office/drawing/2014/main" id="{C4F99B60-512C-4E98-9FD0-39D2219C9C23}"/>
+                <a16:creationId xmlns:a16="http://schemas.microsoft.com/office/drawing/2014/main" id="{86F9F125-96F6-4E79-915A-9F9232D3BE4B}"/>
               </a:ext>
             </a:extLst>
           </p:cNvPr>
@@ -6846,7 +6030,7 @@
           <p:cNvPr id="27" name="">
             <a:extLst xmlns:a="http://schemas.openxmlformats.org/drawingml/2006/main">
               <a:ext uri="{FF2B5EF4-FFF2-40B4-BE49-F238E27FC236}">
-                <a16:creationId xmlns:a16="http://schemas.microsoft.com/office/drawing/2014/main" id="{75AB352A-0371-4211-9533-918100A1284A}"/>
+                <a16:creationId xmlns:a16="http://schemas.microsoft.com/office/drawing/2014/main" id="{14D55DD2-CF30-4C0C-B571-119F8F8FD653}"/>
               </a:ext>
             </a:extLst>
           </p:cNvPr>
@@ -6881,7 +6065,7 @@
           <p:cNvPr id="28" name="">
             <a:extLst xmlns:a="http://schemas.openxmlformats.org/drawingml/2006/main">
               <a:ext uri="{FF2B5EF4-FFF2-40B4-BE49-F238E27FC236}">
-                <a16:creationId xmlns:a16="http://schemas.microsoft.com/office/drawing/2014/main" id="{612AA5A9-CB63-48AD-A3D8-39A62CAC76E0}"/>
+                <a16:creationId xmlns:a16="http://schemas.microsoft.com/office/drawing/2014/main" id="{E8F3C128-E692-4372-839F-7A6FA22F2242}"/>
               </a:ext>
             </a:extLst>
           </p:cNvPr>
@@ -6945,7 +6129,7 @@
           <p:cNvPr id="29" name="">
             <a:extLst xmlns:a="http://schemas.openxmlformats.org/drawingml/2006/main">
               <a:ext uri="{FF2B5EF4-FFF2-40B4-BE49-F238E27FC236}">
-                <a16:creationId xmlns:a16="http://schemas.microsoft.com/office/drawing/2014/main" id="{DBEEF67F-84B8-41C6-8B1E-263B89688E4B}"/>
+                <a16:creationId xmlns:a16="http://schemas.microsoft.com/office/drawing/2014/main" id="{265A2568-5F01-4C25-A221-563FB00EDAD4}"/>
               </a:ext>
             </a:extLst>
           </p:cNvPr>
@@ -6983,7 +6167,7 @@
             <a:pPr algn="l">
               <a:defRPr sz="938" b="0">
                 <a:solidFill>
-                  <a:srgbClr val="5B6472"/>
+                  <a:srgbClr val="4B5563"/>
                 </a:solidFill>
                 <a:latin typeface="Aptos"/>
                 <a:ea typeface="Aptos"/>
@@ -6993,7 +6177,7 @@
             <a:r>
               <a:rPr sz="938" b="0">
                 <a:solidFill>
-                  <a:srgbClr val="5B6472"/>
+                  <a:srgbClr val="4B5563"/>
                 </a:solidFill>
                 <a:latin typeface="Aptos"/>
                 <a:ea typeface="Aptos"/>
@@ -7009,7 +6193,7 @@
           <p:cNvPr id="30" name="">
             <a:extLst xmlns:a="http://schemas.openxmlformats.org/drawingml/2006/main">
               <a:ext uri="{FF2B5EF4-FFF2-40B4-BE49-F238E27FC236}">
-                <a16:creationId xmlns:a16="http://schemas.microsoft.com/office/drawing/2014/main" id="{3DF8FA9D-D95B-4804-B3E4-B1815F1108D0}"/>
+                <a16:creationId xmlns:a16="http://schemas.microsoft.com/office/drawing/2014/main" id="{8D4C372D-CE3D-4056-A5BA-87BEDDE861D8}"/>
               </a:ext>
             </a:extLst>
           </p:cNvPr>
@@ -7042,7 +6226,7 @@
           <p:cNvPr id="31" name="">
             <a:extLst xmlns:a="http://schemas.openxmlformats.org/drawingml/2006/main">
               <a:ext uri="{FF2B5EF4-FFF2-40B4-BE49-F238E27FC236}">
-                <a16:creationId xmlns:a16="http://schemas.microsoft.com/office/drawing/2014/main" id="{DD547F78-8F0F-4EAD-8D16-678498EB5737}"/>
+                <a16:creationId xmlns:a16="http://schemas.microsoft.com/office/drawing/2014/main" id="{926A8109-E428-4AA4-A42C-93A66031D7CC}"/>
               </a:ext>
             </a:extLst>
           </p:cNvPr>
@@ -7077,7 +6261,7 @@
           <p:cNvPr id="32" name="">
             <a:extLst xmlns:a="http://schemas.openxmlformats.org/drawingml/2006/main">
               <a:ext uri="{FF2B5EF4-FFF2-40B4-BE49-F238E27FC236}">
-                <a16:creationId xmlns:a16="http://schemas.microsoft.com/office/drawing/2014/main" id="{8BAAD435-CFEB-40C9-99E2-5329E9AED482}"/>
+                <a16:creationId xmlns:a16="http://schemas.microsoft.com/office/drawing/2014/main" id="{CD5E2228-6C0B-4CD0-8A63-18C285BBFB73}"/>
               </a:ext>
             </a:extLst>
           </p:cNvPr>
@@ -7141,7 +6325,7 @@
           <p:cNvPr id="33" name="">
             <a:extLst xmlns:a="http://schemas.openxmlformats.org/drawingml/2006/main">
               <a:ext uri="{FF2B5EF4-FFF2-40B4-BE49-F238E27FC236}">
-                <a16:creationId xmlns:a16="http://schemas.microsoft.com/office/drawing/2014/main" id="{BE175BA3-77E8-4718-8900-0117B28EE365}"/>
+                <a16:creationId xmlns:a16="http://schemas.microsoft.com/office/drawing/2014/main" id="{F7E3368D-8F22-48BF-831B-0892DA2BE4C8}"/>
               </a:ext>
             </a:extLst>
           </p:cNvPr>
@@ -7179,7 +6363,7 @@
             <a:pPr algn="l">
               <a:defRPr sz="938" b="0">
                 <a:solidFill>
-                  <a:srgbClr val="5B6472"/>
+                  <a:srgbClr val="4B5563"/>
                 </a:solidFill>
                 <a:latin typeface="Aptos"/>
                 <a:ea typeface="Aptos"/>
@@ -7189,7 +6373,7 @@
             <a:r>
               <a:rPr sz="938" b="0">
                 <a:solidFill>
-                  <a:srgbClr val="5B6472"/>
+                  <a:srgbClr val="4B5563"/>
                 </a:solidFill>
                 <a:latin typeface="Aptos"/>
                 <a:ea typeface="Aptos"/>
@@ -7205,7 +6389,7 @@
           <p:cNvPr id="34" name="">
             <a:extLst xmlns:a="http://schemas.openxmlformats.org/drawingml/2006/main">
               <a:ext uri="{FF2B5EF4-FFF2-40B4-BE49-F238E27FC236}">
-                <a16:creationId xmlns:a16="http://schemas.microsoft.com/office/drawing/2014/main" id="{B7EB35FF-3E70-4B09-B57A-2825327A7BD4}"/>
+                <a16:creationId xmlns:a16="http://schemas.microsoft.com/office/drawing/2014/main" id="{74DEEE49-B3F7-45C6-AC7E-66FAE3BE62C9}"/>
               </a:ext>
             </a:extLst>
           </p:cNvPr>
@@ -7243,7 +6427,7 @@
             <a:pPr algn="l">
               <a:defRPr sz="825" b="0">
                 <a:solidFill>
-                  <a:srgbClr val="5B6472"/>
+                  <a:srgbClr val="4B5563"/>
                 </a:solidFill>
                 <a:latin typeface="Aptos"/>
                 <a:ea typeface="Aptos"/>
@@ -7253,7 +6437,7 @@
             <a:r>
               <a:rPr sz="825" b="0">
                 <a:solidFill>
-                  <a:srgbClr val="5B6472"/>
+                  <a:srgbClr val="4B5563"/>
                 </a:solidFill>
                 <a:latin typeface="Aptos"/>
                 <a:ea typeface="Aptos"/>
@@ -7269,7 +6453,7 @@
           <p:cNvPr id="35" name="">
             <a:extLst xmlns:a="http://schemas.openxmlformats.org/drawingml/2006/main">
               <a:ext uri="{FF2B5EF4-FFF2-40B4-BE49-F238E27FC236}">
-                <a16:creationId xmlns:a16="http://schemas.microsoft.com/office/drawing/2014/main" id="{BC90FFBE-5AE5-4ADA-8482-17E401F5C4A5}"/>
+                <a16:creationId xmlns:a16="http://schemas.microsoft.com/office/drawing/2014/main" id="{42E6405F-A1B6-4AF8-9DD8-BCF8597C8704}"/>
               </a:ext>
             </a:extLst>
           </p:cNvPr>
@@ -7307,7 +6491,7 @@
             <a:pPr algn="r">
               <a:defRPr sz="900" b="1">
                 <a:solidFill>
-                  <a:srgbClr val="5B6472"/>
+                  <a:srgbClr val="4B5563"/>
                 </a:solidFill>
                 <a:latin typeface="Aptos"/>
                 <a:ea typeface="Aptos"/>
@@ -7317,7 +6501,7 @@
             <a:r>
               <a:rPr sz="900" b="1">
                 <a:solidFill>
-                  <a:srgbClr val="5B6472"/>
+                  <a:srgbClr val="4B5563"/>
                 </a:solidFill>
                 <a:latin typeface="Aptos"/>
                 <a:ea typeface="Aptos"/>
@@ -7331,7 +6515,7 @@
     </p:spTree>
     <p:extLst>
       <p:ext uri="{BB962C8B-B14F-4D97-AF65-F5344CB8AC3E}">
-        <p14:creationId xmlns:p14="http://schemas.microsoft.com/office/powerpoint/2010/main" val="712250957"/>
+        <p14:creationId xmlns:p14="http://schemas.microsoft.com/office/powerpoint/2010/main" val="1665605096"/>
       </p:ext>
     </p:extLst>
   </p:cSld>
@@ -7355,7 +6539,7 @@
           <p:cNvPr id="1" name="">
             <a:extLst xmlns:a="http://schemas.openxmlformats.org/drawingml/2006/main">
               <a:ext uri="{FF2B5EF4-FFF2-40B4-BE49-F238E27FC236}">
-                <a16:creationId xmlns:a16="http://schemas.microsoft.com/office/drawing/2014/main" id="{E88A9DCB-5E97-4495-AB61-F309859864A2}"/>
+                <a16:creationId xmlns:a16="http://schemas.microsoft.com/office/drawing/2014/main" id="{210C0404-616D-41C2-9CA4-9F59CC4BDED1}"/>
               </a:ext>
             </a:extLst>
           </p:cNvPr>
@@ -7373,7 +6557,7 @@
             <a:avLst/>
           </a:prstGeom>
           <a:solidFill xmlns:a="http://schemas.openxmlformats.org/drawingml/2006/main">
-            <a:srgbClr val="F7F3EA"/>
+            <a:srgbClr val="FFFFFF"/>
           </a:solidFill>
           <a:ln xmlns:a="http://schemas.openxmlformats.org/drawingml/2006/main" w="0">
             <a:solidFill>
@@ -7390,7 +6574,7 @@
           <p:cNvPr id="2" name="kicker-marker-4">
             <a:extLst xmlns:a="http://schemas.openxmlformats.org/drawingml/2006/main">
               <a:ext uri="{FF2B5EF4-FFF2-40B4-BE49-F238E27FC236}">
-                <a16:creationId xmlns:a16="http://schemas.microsoft.com/office/drawing/2014/main" id="{EFA0B131-17EF-4B2B-A4E8-C8EF0F4FD0BD}"/>
+                <a16:creationId xmlns:a16="http://schemas.microsoft.com/office/drawing/2014/main" id="{656ADA23-15B5-4377-A19F-D13CE9368816}"/>
               </a:ext>
             </a:extLst>
           </p:cNvPr>
@@ -7425,7 +6609,7 @@
           <p:cNvPr id="3" name="kicker-label-4">
             <a:extLst xmlns:a="http://schemas.openxmlformats.org/drawingml/2006/main">
               <a:ext uri="{FF2B5EF4-FFF2-40B4-BE49-F238E27FC236}">
-                <a16:creationId xmlns:a16="http://schemas.microsoft.com/office/drawing/2014/main" id="{2621AEB7-4B49-4E79-AF18-825DACDF792A}"/>
+                <a16:creationId xmlns:a16="http://schemas.microsoft.com/office/drawing/2014/main" id="{FFF1080B-6D6B-4AFB-9959-52B81CEBD243}"/>
               </a:ext>
             </a:extLst>
           </p:cNvPr>
@@ -7463,7 +6647,7 @@
             <a:pPr algn="l">
               <a:defRPr sz="825" b="1">
                 <a:solidFill>
-                  <a:srgbClr val="5B6472"/>
+                  <a:srgbClr val="4B5563"/>
                 </a:solidFill>
                 <a:latin typeface="Aptos"/>
                 <a:ea typeface="Aptos"/>
@@ -7473,13 +6657,13 @@
             <a:r>
               <a:rPr sz="825" b="1">
                 <a:solidFill>
-                  <a:srgbClr val="5B6472"/>
-                </a:solidFill>
-                <a:latin typeface="Aptos"/>
-                <a:ea typeface="Aptos"/>
-                <a:cs typeface="Aptos"/>
-              </a:rPr>
-              <a:t>DATASET PROOF</a:t>
+                  <a:srgbClr val="4B5563"/>
+                </a:solidFill>
+                <a:latin typeface="Aptos"/>
+                <a:ea typeface="Aptos"/>
+                <a:cs typeface="Aptos"/>
+              </a:rPr>
+              <a:t>DATASET</a:t>
             </a:r>
           </a:p>
         </p:txBody>
@@ -7489,7 +6673,7 @@
           <p:cNvPr id="4" name="">
             <a:extLst xmlns:a="http://schemas.openxmlformats.org/drawingml/2006/main">
               <a:ext uri="{FF2B5EF4-FFF2-40B4-BE49-F238E27FC236}">
-                <a16:creationId xmlns:a16="http://schemas.microsoft.com/office/drawing/2014/main" id="{3A6FA37C-9FB0-42BA-A52C-2D0D14407EEB}"/>
+                <a16:creationId xmlns:a16="http://schemas.microsoft.com/office/drawing/2014/main" id="{7904CB56-3066-46C7-B0B9-1D8F98F1E94F}"/>
               </a:ext>
             </a:extLst>
           </p:cNvPr>
@@ -7543,7 +6727,7 @@
                 <a:ea typeface="Aptos Display"/>
                 <a:cs typeface="Aptos Display"/>
               </a:rPr>
-              <a:t>The demo still processes a genuinely large music sample.</a:t>
+              <a:t>Dataset Summary</a:t>
             </a:r>
           </a:p>
         </p:txBody>
@@ -7553,7 +6737,7 @@
           <p:cNvPr id="5" name="">
             <a:extLst xmlns:a="http://schemas.openxmlformats.org/drawingml/2006/main">
               <a:ext uri="{FF2B5EF4-FFF2-40B4-BE49-F238E27FC236}">
-                <a16:creationId xmlns:a16="http://schemas.microsoft.com/office/drawing/2014/main" id="{F8486B54-0DB6-4D34-9180-2E5CEB057188}"/>
+                <a16:creationId xmlns:a16="http://schemas.microsoft.com/office/drawing/2014/main" id="{AC6A8408-F8D1-456B-8558-E34E1FB14A97}"/>
               </a:ext>
             </a:extLst>
           </p:cNvPr>
@@ -7591,7 +6775,7 @@
             <a:pPr algn="l">
               <a:defRPr sz="1125" b="0">
                 <a:solidFill>
-                  <a:srgbClr val="5B6472"/>
+                  <a:srgbClr val="4B5563"/>
                 </a:solidFill>
                 <a:latin typeface="Aptos"/>
                 <a:ea typeface="Aptos"/>
@@ -7601,13 +6785,13 @@
             <a:r>
               <a:rPr sz="1125" b="0">
                 <a:solidFill>
-                  <a:srgbClr val="5B6472"/>
-                </a:solidFill>
-                <a:latin typeface="Aptos"/>
-                <a:ea typeface="Aptos"/>
-                <a:cs typeface="Aptos"/>
-              </a:rPr>
-              <a:t>The laptop-safe run uses 1,000,000 events; the full Last.fm file contains 19.15M listening events.</a:t>
+                  <a:srgbClr val="4B5563"/>
+                </a:solidFill>
+                <a:latin typeface="Aptos"/>
+                <a:ea typeface="Aptos"/>
+                <a:cs typeface="Aptos"/>
+              </a:rPr>
+              <a:t>The notebook uses a laptop-safe sample of 1,000,000 listening events from the Last.fm 1K dataset.</a:t>
             </a:r>
           </a:p>
         </p:txBody>
@@ -7617,7 +6801,7 @@
           <p:cNvPr id="6" name="">
             <a:extLst xmlns:a="http://schemas.openxmlformats.org/drawingml/2006/main">
               <a:ext uri="{FF2B5EF4-FFF2-40B4-BE49-F238E27FC236}">
-                <a16:creationId xmlns:a16="http://schemas.microsoft.com/office/drawing/2014/main" id="{12941C61-5D04-4453-89F6-D737EF85E14B}"/>
+                <a16:creationId xmlns:a16="http://schemas.microsoft.com/office/drawing/2014/main" id="{4CE4F8B1-9A83-4831-AA60-51276BE40424}"/>
               </a:ext>
             </a:extLst>
           </p:cNvPr>
@@ -7639,7 +6823,7 @@
           </a:solidFill>
           <a:ln xmlns:a="http://schemas.openxmlformats.org/drawingml/2006/main" w="9525">
             <a:solidFill>
-              <a:srgbClr val="D8D0C2"/>
+              <a:srgbClr val="E5E7EB"/>
             </a:solidFill>
             <a:prstDash val="solid"/>
           </a:ln>
@@ -7650,7 +6834,7 @@
           <p:cNvPr id="7" name="">
             <a:extLst xmlns:a="http://schemas.openxmlformats.org/drawingml/2006/main">
               <a:ext uri="{FF2B5EF4-FFF2-40B4-BE49-F238E27FC236}">
-                <a16:creationId xmlns:a16="http://schemas.microsoft.com/office/drawing/2014/main" id="{63BF2122-EED7-47CF-A8B8-256CE2F988C5}"/>
+                <a16:creationId xmlns:a16="http://schemas.microsoft.com/office/drawing/2014/main" id="{FFF5A7B2-2A6A-4713-BB5C-AD0EA44BBBE6}"/>
               </a:ext>
             </a:extLst>
           </p:cNvPr>
@@ -7714,7 +6898,7 @@
           <p:cNvPr id="8" name="">
             <a:extLst xmlns:a="http://schemas.openxmlformats.org/drawingml/2006/main">
               <a:ext uri="{FF2B5EF4-FFF2-40B4-BE49-F238E27FC236}">
-                <a16:creationId xmlns:a16="http://schemas.microsoft.com/office/drawing/2014/main" id="{F6DE5863-CC3C-41E7-834F-D28197FB0E20}"/>
+                <a16:creationId xmlns:a16="http://schemas.microsoft.com/office/drawing/2014/main" id="{A870A6AE-AAA1-44D5-8B97-18065554C228}"/>
               </a:ext>
             </a:extLst>
           </p:cNvPr>
@@ -7752,7 +6936,7 @@
             <a:pPr algn="l">
               <a:defRPr sz="900" b="0">
                 <a:solidFill>
-                  <a:srgbClr val="5B6472"/>
+                  <a:srgbClr val="4B5563"/>
                 </a:solidFill>
                 <a:latin typeface="Aptos"/>
                 <a:ea typeface="Aptos"/>
@@ -7762,7 +6946,7 @@
             <a:r>
               <a:rPr sz="900" b="0">
                 <a:solidFill>
-                  <a:srgbClr val="5B6472"/>
+                  <a:srgbClr val="4B5563"/>
                 </a:solidFill>
                 <a:latin typeface="Aptos"/>
                 <a:ea typeface="Aptos"/>
@@ -7778,7 +6962,7 @@
           <p:cNvPr id="9" name="">
             <a:extLst xmlns:a="http://schemas.openxmlformats.org/drawingml/2006/main">
               <a:ext uri="{FF2B5EF4-FFF2-40B4-BE49-F238E27FC236}">
-                <a16:creationId xmlns:a16="http://schemas.microsoft.com/office/drawing/2014/main" id="{89E28C81-04D1-4DC6-9D5F-3BF3038E725D}"/>
+                <a16:creationId xmlns:a16="http://schemas.microsoft.com/office/drawing/2014/main" id="{481DAE6D-76FB-475F-A11D-A3DF9CADF5B7}"/>
               </a:ext>
             </a:extLst>
           </p:cNvPr>
@@ -7800,7 +6984,7 @@
           </a:solidFill>
           <a:ln xmlns:a="http://schemas.openxmlformats.org/drawingml/2006/main" w="9525">
             <a:solidFill>
-              <a:srgbClr val="D8D0C2"/>
+              <a:srgbClr val="E5E7EB"/>
             </a:solidFill>
             <a:prstDash val="solid"/>
           </a:ln>
@@ -7811,7 +6995,7 @@
           <p:cNvPr id="10" name="">
             <a:extLst xmlns:a="http://schemas.openxmlformats.org/drawingml/2006/main">
               <a:ext uri="{FF2B5EF4-FFF2-40B4-BE49-F238E27FC236}">
-                <a16:creationId xmlns:a16="http://schemas.microsoft.com/office/drawing/2014/main" id="{7613BAAE-4CC4-4F36-B460-874287655E08}"/>
+                <a16:creationId xmlns:a16="http://schemas.microsoft.com/office/drawing/2014/main" id="{2FD9FCAC-BA9F-4E25-AA85-1381AE636DB6}"/>
               </a:ext>
             </a:extLst>
           </p:cNvPr>
@@ -7875,7 +7059,7 @@
           <p:cNvPr id="11" name="">
             <a:extLst xmlns:a="http://schemas.openxmlformats.org/drawingml/2006/main">
               <a:ext uri="{FF2B5EF4-FFF2-40B4-BE49-F238E27FC236}">
-                <a16:creationId xmlns:a16="http://schemas.microsoft.com/office/drawing/2014/main" id="{4034666A-6BAF-43D0-BA61-420F3EEEFBE9}"/>
+                <a16:creationId xmlns:a16="http://schemas.microsoft.com/office/drawing/2014/main" id="{F20637E2-2DE9-4062-BF54-49211AF5548C}"/>
               </a:ext>
             </a:extLst>
           </p:cNvPr>
@@ -7913,7 +7097,7 @@
             <a:pPr algn="l">
               <a:defRPr sz="900" b="0">
                 <a:solidFill>
-                  <a:srgbClr val="5B6472"/>
+                  <a:srgbClr val="4B5563"/>
                 </a:solidFill>
                 <a:latin typeface="Aptos"/>
                 <a:ea typeface="Aptos"/>
@@ -7923,7 +7107,7 @@
             <a:r>
               <a:rPr sz="900" b="0">
                 <a:solidFill>
-                  <a:srgbClr val="5B6472"/>
+                  <a:srgbClr val="4B5563"/>
                 </a:solidFill>
                 <a:latin typeface="Aptos"/>
                 <a:ea typeface="Aptos"/>
@@ -7939,7 +7123,7 @@
           <p:cNvPr id="12" name="">
             <a:extLst xmlns:a="http://schemas.openxmlformats.org/drawingml/2006/main">
               <a:ext uri="{FF2B5EF4-FFF2-40B4-BE49-F238E27FC236}">
-                <a16:creationId xmlns:a16="http://schemas.microsoft.com/office/drawing/2014/main" id="{F2FFB8D1-F267-4B38-85FA-54A250AB55AD}"/>
+                <a16:creationId xmlns:a16="http://schemas.microsoft.com/office/drawing/2014/main" id="{9F2FC213-BBAF-4AD8-9979-A5D7A3C6731F}"/>
               </a:ext>
             </a:extLst>
           </p:cNvPr>
@@ -7961,7 +7145,7 @@
           </a:solidFill>
           <a:ln xmlns:a="http://schemas.openxmlformats.org/drawingml/2006/main" w="9525">
             <a:solidFill>
-              <a:srgbClr val="D8D0C2"/>
+              <a:srgbClr val="E5E7EB"/>
             </a:solidFill>
             <a:prstDash val="solid"/>
           </a:ln>
@@ -7972,7 +7156,7 @@
           <p:cNvPr id="13" name="">
             <a:extLst xmlns:a="http://schemas.openxmlformats.org/drawingml/2006/main">
               <a:ext uri="{FF2B5EF4-FFF2-40B4-BE49-F238E27FC236}">
-                <a16:creationId xmlns:a16="http://schemas.microsoft.com/office/drawing/2014/main" id="{42A88EB0-DEDF-489E-A655-9010C54A1BDA}"/>
+                <a16:creationId xmlns:a16="http://schemas.microsoft.com/office/drawing/2014/main" id="{B1E70944-BBD5-483E-B957-46299126C624}"/>
               </a:ext>
             </a:extLst>
           </p:cNvPr>
@@ -8036,7 +7220,7 @@
           <p:cNvPr id="14" name="">
             <a:extLst xmlns:a="http://schemas.openxmlformats.org/drawingml/2006/main">
               <a:ext uri="{FF2B5EF4-FFF2-40B4-BE49-F238E27FC236}">
-                <a16:creationId xmlns:a16="http://schemas.microsoft.com/office/drawing/2014/main" id="{721B6F0C-FA74-4F13-94D9-3465FF7E967E}"/>
+                <a16:creationId xmlns:a16="http://schemas.microsoft.com/office/drawing/2014/main" id="{65ADF1CF-C979-44A6-86E7-615F490A886C}"/>
               </a:ext>
             </a:extLst>
           </p:cNvPr>
@@ -8074,7 +7258,7 @@
             <a:pPr algn="l">
               <a:defRPr sz="900" b="0">
                 <a:solidFill>
-                  <a:srgbClr val="5B6472"/>
+                  <a:srgbClr val="4B5563"/>
                 </a:solidFill>
                 <a:latin typeface="Aptos"/>
                 <a:ea typeface="Aptos"/>
@@ -8084,7 +7268,7 @@
             <a:r>
               <a:rPr sz="900" b="0">
                 <a:solidFill>
-                  <a:srgbClr val="5B6472"/>
+                  <a:srgbClr val="4B5563"/>
                 </a:solidFill>
                 <a:latin typeface="Aptos"/>
                 <a:ea typeface="Aptos"/>
@@ -8100,7 +7284,7 @@
           <p:cNvPr id="15" name="">
             <a:extLst xmlns:a="http://schemas.openxmlformats.org/drawingml/2006/main">
               <a:ext uri="{FF2B5EF4-FFF2-40B4-BE49-F238E27FC236}">
-                <a16:creationId xmlns:a16="http://schemas.microsoft.com/office/drawing/2014/main" id="{FF682478-D55D-401E-8BFD-9BCFB00EE2D8}"/>
+                <a16:creationId xmlns:a16="http://schemas.microsoft.com/office/drawing/2014/main" id="{6D8F9023-CC78-44A7-9B44-68EE49241030}"/>
               </a:ext>
             </a:extLst>
           </p:cNvPr>
@@ -8122,7 +7306,7 @@
           </a:solidFill>
           <a:ln xmlns:a="http://schemas.openxmlformats.org/drawingml/2006/main" w="9525">
             <a:solidFill>
-              <a:srgbClr val="D8D0C2"/>
+              <a:srgbClr val="E5E7EB"/>
             </a:solidFill>
             <a:prstDash val="solid"/>
           </a:ln>
@@ -8133,7 +7317,7 @@
           <p:cNvPr id="16" name="">
             <a:extLst xmlns:a="http://schemas.openxmlformats.org/drawingml/2006/main">
               <a:ext uri="{FF2B5EF4-FFF2-40B4-BE49-F238E27FC236}">
-                <a16:creationId xmlns:a16="http://schemas.microsoft.com/office/drawing/2014/main" id="{409C760C-3717-4A01-B724-4D562AE3E21D}"/>
+                <a16:creationId xmlns:a16="http://schemas.microsoft.com/office/drawing/2014/main" id="{52A97182-4185-42AC-AAE5-DFB73132BDC5}"/>
               </a:ext>
             </a:extLst>
           </p:cNvPr>
@@ -8197,7 +7381,7 @@
           <p:cNvPr id="17" name="">
             <a:extLst xmlns:a="http://schemas.openxmlformats.org/drawingml/2006/main">
               <a:ext uri="{FF2B5EF4-FFF2-40B4-BE49-F238E27FC236}">
-                <a16:creationId xmlns:a16="http://schemas.microsoft.com/office/drawing/2014/main" id="{E06146C8-0592-4583-854F-22FDB9B1B138}"/>
+                <a16:creationId xmlns:a16="http://schemas.microsoft.com/office/drawing/2014/main" id="{EF1BC0C7-AE8F-4CB7-9836-4DB0415BE0B7}"/>
               </a:ext>
             </a:extLst>
           </p:cNvPr>
@@ -8235,7 +7419,7 @@
             <a:pPr algn="l">
               <a:defRPr sz="900" b="0">
                 <a:solidFill>
-                  <a:srgbClr val="5B6472"/>
+                  <a:srgbClr val="4B5563"/>
                 </a:solidFill>
                 <a:latin typeface="Aptos"/>
                 <a:ea typeface="Aptos"/>
@@ -8245,7 +7429,7 @@
             <a:r>
               <a:rPr sz="900" b="0">
                 <a:solidFill>
-                  <a:srgbClr val="5B6472"/>
+                  <a:srgbClr val="4B5563"/>
                 </a:solidFill>
                 <a:latin typeface="Aptos"/>
                 <a:ea typeface="Aptos"/>
@@ -8261,7 +7445,7 @@
           <p:cNvPr id="18" name="">
             <a:extLst xmlns:a="http://schemas.openxmlformats.org/drawingml/2006/main">
               <a:ext uri="{FF2B5EF4-FFF2-40B4-BE49-F238E27FC236}">
-                <a16:creationId xmlns:a16="http://schemas.microsoft.com/office/drawing/2014/main" id="{98E37522-9E39-4E60-AE47-9B1D3C3299A6}"/>
+                <a16:creationId xmlns:a16="http://schemas.microsoft.com/office/drawing/2014/main" id="{BECEDE21-1C68-414C-BD66-F778C90D8F93}"/>
               </a:ext>
             </a:extLst>
           </p:cNvPr>
@@ -8283,7 +7467,7 @@
           </a:solidFill>
           <a:ln xmlns:a="http://schemas.openxmlformats.org/drawingml/2006/main" w="9525">
             <a:solidFill>
-              <a:srgbClr val="D8D0C2"/>
+              <a:srgbClr val="E5E7EB"/>
             </a:solidFill>
             <a:prstDash val="solid"/>
           </a:ln>
@@ -8294,7 +7478,7 @@
           <p:cNvPr id="19" name="">
             <a:extLst xmlns:a="http://schemas.openxmlformats.org/drawingml/2006/main">
               <a:ext uri="{FF2B5EF4-FFF2-40B4-BE49-F238E27FC236}">
-                <a16:creationId xmlns:a16="http://schemas.microsoft.com/office/drawing/2014/main" id="{6CA1F21F-1EF1-44D7-BB68-5218E150B785}"/>
+                <a16:creationId xmlns:a16="http://schemas.microsoft.com/office/drawing/2014/main" id="{3B0317D1-8444-40BC-AE45-2C83A8BAB61E}"/>
               </a:ext>
             </a:extLst>
           </p:cNvPr>
@@ -8358,7 +7542,7 @@
           <p:cNvPr id="20" name="">
             <a:extLst xmlns:a="http://schemas.openxmlformats.org/drawingml/2006/main">
               <a:ext uri="{FF2B5EF4-FFF2-40B4-BE49-F238E27FC236}">
-                <a16:creationId xmlns:a16="http://schemas.microsoft.com/office/drawing/2014/main" id="{CD8AE717-AB7B-4493-9DAD-BB60F2DE7CE3}"/>
+                <a16:creationId xmlns:a16="http://schemas.microsoft.com/office/drawing/2014/main" id="{08E21A4F-14FF-4215-8B94-1513FEE98A71}"/>
               </a:ext>
             </a:extLst>
           </p:cNvPr>
@@ -8396,7 +7580,7 @@
             <a:pPr algn="l">
               <a:defRPr sz="900" b="0">
                 <a:solidFill>
-                  <a:srgbClr val="5B6472"/>
+                  <a:srgbClr val="4B5563"/>
                 </a:solidFill>
                 <a:latin typeface="Aptos"/>
                 <a:ea typeface="Aptos"/>
@@ -8406,7 +7590,7 @@
             <a:r>
               <a:rPr sz="900" b="0">
                 <a:solidFill>
-                  <a:srgbClr val="5B6472"/>
+                  <a:srgbClr val="4B5563"/>
                 </a:solidFill>
                 <a:latin typeface="Aptos"/>
                 <a:ea typeface="Aptos"/>
@@ -8422,7 +7606,7 @@
           <p:cNvPr id="21" name="">
             <a:extLst xmlns:a="http://schemas.openxmlformats.org/drawingml/2006/main">
               <a:ext uri="{FF2B5EF4-FFF2-40B4-BE49-F238E27FC236}">
-                <a16:creationId xmlns:a16="http://schemas.microsoft.com/office/drawing/2014/main" id="{ABF1BE3B-C8BA-4D84-B20C-08E2F7578C82}"/>
+                <a16:creationId xmlns:a16="http://schemas.microsoft.com/office/drawing/2014/main" id="{2671E99A-B52E-4317-94BD-BDE29E186586}"/>
               </a:ext>
             </a:extLst>
           </p:cNvPr>
@@ -8486,7 +7670,7 @@
           <p:cNvPr id="22" name="">
             <a:extLst xmlns:a="http://schemas.openxmlformats.org/drawingml/2006/main">
               <a:ext uri="{FF2B5EF4-FFF2-40B4-BE49-F238E27FC236}">
-                <a16:creationId xmlns:a16="http://schemas.microsoft.com/office/drawing/2014/main" id="{4EE4EA9D-4704-4F90-B91C-74922A9D7E59}"/>
+                <a16:creationId xmlns:a16="http://schemas.microsoft.com/office/drawing/2014/main" id="{BCCF1139-2901-488B-BC45-0E1E2262316F}"/>
               </a:ext>
             </a:extLst>
           </p:cNvPr>
@@ -8550,7 +7734,7 @@
           <p:cNvPr id="23" name="">
             <a:extLst xmlns:a="http://schemas.openxmlformats.org/drawingml/2006/main">
               <a:ext uri="{FF2B5EF4-FFF2-40B4-BE49-F238E27FC236}">
-                <a16:creationId xmlns:a16="http://schemas.microsoft.com/office/drawing/2014/main" id="{F3383278-77D8-4BD0-9071-2689539636A7}"/>
+                <a16:creationId xmlns:a16="http://schemas.microsoft.com/office/drawing/2014/main" id="{D1B623E0-1C6C-4D8E-92B2-407FD716DAC7}"/>
               </a:ext>
             </a:extLst>
           </p:cNvPr>
@@ -8585,7 +7769,7 @@
           <p:cNvPr id="24" name="">
             <a:extLst xmlns:a="http://schemas.openxmlformats.org/drawingml/2006/main">
               <a:ext uri="{FF2B5EF4-FFF2-40B4-BE49-F238E27FC236}">
-                <a16:creationId xmlns:a16="http://schemas.microsoft.com/office/drawing/2014/main" id="{8AB49CAC-6A48-4CE5-9E3E-BDD1AE915D6E}"/>
+                <a16:creationId xmlns:a16="http://schemas.microsoft.com/office/drawing/2014/main" id="{3027859E-1011-4755-9DB0-C4F458AF157D}"/>
               </a:ext>
             </a:extLst>
           </p:cNvPr>
@@ -8623,7 +7807,7 @@
             <a:pPr algn="l">
               <a:defRPr sz="900" b="0">
                 <a:solidFill>
-                  <a:srgbClr val="5B6472"/>
+                  <a:srgbClr val="4B5563"/>
                 </a:solidFill>
                 <a:latin typeface="Aptos"/>
                 <a:ea typeface="Aptos"/>
@@ -8633,7 +7817,7 @@
             <a:r>
               <a:rPr sz="900" b="0">
                 <a:solidFill>
-                  <a:srgbClr val="5B6472"/>
+                  <a:srgbClr val="4B5563"/>
                 </a:solidFill>
                 <a:latin typeface="Aptos"/>
                 <a:ea typeface="Aptos"/>
@@ -8649,7 +7833,7 @@
           <p:cNvPr id="25" name="">
             <a:extLst xmlns:a="http://schemas.openxmlformats.org/drawingml/2006/main">
               <a:ext uri="{FF2B5EF4-FFF2-40B4-BE49-F238E27FC236}">
-                <a16:creationId xmlns:a16="http://schemas.microsoft.com/office/drawing/2014/main" id="{B0CB1B98-1DE4-4B15-91DC-255EE6F08117}"/>
+                <a16:creationId xmlns:a16="http://schemas.microsoft.com/office/drawing/2014/main" id="{26489CA0-15AF-4D39-B3DF-9EE92D119709}"/>
               </a:ext>
             </a:extLst>
           </p:cNvPr>
@@ -8713,7 +7897,7 @@
           <p:cNvPr id="26" name="">
             <a:extLst xmlns:a="http://schemas.openxmlformats.org/drawingml/2006/main">
               <a:ext uri="{FF2B5EF4-FFF2-40B4-BE49-F238E27FC236}">
-                <a16:creationId xmlns:a16="http://schemas.microsoft.com/office/drawing/2014/main" id="{893EAD90-9BCE-4B46-AC4B-20E3C7558570}"/>
+                <a16:creationId xmlns:a16="http://schemas.microsoft.com/office/drawing/2014/main" id="{790E4987-D7FA-450E-9D56-6A436145E1B9}"/>
               </a:ext>
             </a:extLst>
           </p:cNvPr>
@@ -8748,7 +7932,7 @@
           <p:cNvPr id="27" name="">
             <a:extLst xmlns:a="http://schemas.openxmlformats.org/drawingml/2006/main">
               <a:ext uri="{FF2B5EF4-FFF2-40B4-BE49-F238E27FC236}">
-                <a16:creationId xmlns:a16="http://schemas.microsoft.com/office/drawing/2014/main" id="{131CD217-C804-4A85-99F3-9FD5899F4ADD}"/>
+                <a16:creationId xmlns:a16="http://schemas.microsoft.com/office/drawing/2014/main" id="{58A9D92E-F116-4E01-86BF-CF0A5A846FE9}"/>
               </a:ext>
             </a:extLst>
           </p:cNvPr>
@@ -8786,7 +7970,7 @@
             <a:pPr algn="l">
               <a:defRPr sz="900" b="0">
                 <a:solidFill>
-                  <a:srgbClr val="5B6472"/>
+                  <a:srgbClr val="4B5563"/>
                 </a:solidFill>
                 <a:latin typeface="Aptos"/>
                 <a:ea typeface="Aptos"/>
@@ -8796,7 +7980,7 @@
             <a:r>
               <a:rPr sz="900" b="0">
                 <a:solidFill>
-                  <a:srgbClr val="5B6472"/>
+                  <a:srgbClr val="4B5563"/>
                 </a:solidFill>
                 <a:latin typeface="Aptos"/>
                 <a:ea typeface="Aptos"/>
@@ -8812,7 +7996,7 @@
           <p:cNvPr id="28" name="">
             <a:extLst xmlns:a="http://schemas.openxmlformats.org/drawingml/2006/main">
               <a:ext uri="{FF2B5EF4-FFF2-40B4-BE49-F238E27FC236}">
-                <a16:creationId xmlns:a16="http://schemas.microsoft.com/office/drawing/2014/main" id="{8F0E75FF-FFAF-4FCE-A031-532D74A046CD}"/>
+                <a16:creationId xmlns:a16="http://schemas.microsoft.com/office/drawing/2014/main" id="{ABE51F5C-6AA9-454F-ADB3-A22707EC2130}"/>
               </a:ext>
             </a:extLst>
           </p:cNvPr>
@@ -8876,7 +8060,7 @@
           <p:cNvPr id="29" name="">
             <a:extLst xmlns:a="http://schemas.openxmlformats.org/drawingml/2006/main">
               <a:ext uri="{FF2B5EF4-FFF2-40B4-BE49-F238E27FC236}">
-                <a16:creationId xmlns:a16="http://schemas.microsoft.com/office/drawing/2014/main" id="{40DB9CD1-038E-44CA-BEC3-96B3C3B1B024}"/>
+                <a16:creationId xmlns:a16="http://schemas.microsoft.com/office/drawing/2014/main" id="{E74DF119-AAB4-489E-926C-6410735332D2}"/>
               </a:ext>
             </a:extLst>
           </p:cNvPr>
@@ -8911,7 +8095,7 @@
           <p:cNvPr id="30" name="">
             <a:extLst xmlns:a="http://schemas.openxmlformats.org/drawingml/2006/main">
               <a:ext uri="{FF2B5EF4-FFF2-40B4-BE49-F238E27FC236}">
-                <a16:creationId xmlns:a16="http://schemas.microsoft.com/office/drawing/2014/main" id="{915831AA-5C68-437B-9428-59D91B156FBB}"/>
+                <a16:creationId xmlns:a16="http://schemas.microsoft.com/office/drawing/2014/main" id="{AC356C3B-C3AA-4110-B4BA-7BE669193BD2}"/>
               </a:ext>
             </a:extLst>
           </p:cNvPr>
@@ -8949,7 +8133,7 @@
             <a:pPr algn="l">
               <a:defRPr sz="900" b="0">
                 <a:solidFill>
-                  <a:srgbClr val="5B6472"/>
+                  <a:srgbClr val="4B5563"/>
                 </a:solidFill>
                 <a:latin typeface="Aptos"/>
                 <a:ea typeface="Aptos"/>
@@ -8959,7 +8143,7 @@
             <a:r>
               <a:rPr sz="900" b="0">
                 <a:solidFill>
-                  <a:srgbClr val="5B6472"/>
+                  <a:srgbClr val="4B5563"/>
                 </a:solidFill>
                 <a:latin typeface="Aptos"/>
                 <a:ea typeface="Aptos"/>
@@ -8975,7 +8159,7 @@
           <p:cNvPr id="31" name="">
             <a:extLst xmlns:a="http://schemas.openxmlformats.org/drawingml/2006/main">
               <a:ext uri="{FF2B5EF4-FFF2-40B4-BE49-F238E27FC236}">
-                <a16:creationId xmlns:a16="http://schemas.microsoft.com/office/drawing/2014/main" id="{9213F40A-1D69-477A-92B1-6AD8AE5D0303}"/>
+                <a16:creationId xmlns:a16="http://schemas.microsoft.com/office/drawing/2014/main" id="{8FB9B6BD-7C80-49CC-8038-D3A79C9C8ED4}"/>
               </a:ext>
             </a:extLst>
           </p:cNvPr>
@@ -9039,7 +8223,7 @@
           <p:cNvPr id="32" name="">
             <a:extLst xmlns:a="http://schemas.openxmlformats.org/drawingml/2006/main">
               <a:ext uri="{FF2B5EF4-FFF2-40B4-BE49-F238E27FC236}">
-                <a16:creationId xmlns:a16="http://schemas.microsoft.com/office/drawing/2014/main" id="{97B16A3E-FC3B-47B1-9BB3-6A5C5F795DC1}"/>
+                <a16:creationId xmlns:a16="http://schemas.microsoft.com/office/drawing/2014/main" id="{DB2CE72D-A44C-4BEF-A512-6E75D179635B}"/>
               </a:ext>
             </a:extLst>
           </p:cNvPr>
@@ -9074,7 +8258,7 @@
           <p:cNvPr id="33" name="">
             <a:extLst xmlns:a="http://schemas.openxmlformats.org/drawingml/2006/main">
               <a:ext uri="{FF2B5EF4-FFF2-40B4-BE49-F238E27FC236}">
-                <a16:creationId xmlns:a16="http://schemas.microsoft.com/office/drawing/2014/main" id="{D28B5D89-CE5F-467C-9FC6-DFB018F9BC86}"/>
+                <a16:creationId xmlns:a16="http://schemas.microsoft.com/office/drawing/2014/main" id="{DF149827-2E74-4F96-BF49-E7C123B3DEC2}"/>
               </a:ext>
             </a:extLst>
           </p:cNvPr>
@@ -9112,7 +8296,7 @@
             <a:pPr algn="l">
               <a:defRPr sz="900" b="0">
                 <a:solidFill>
-                  <a:srgbClr val="5B6472"/>
+                  <a:srgbClr val="4B5563"/>
                 </a:solidFill>
                 <a:latin typeface="Aptos"/>
                 <a:ea typeface="Aptos"/>
@@ -9122,7 +8306,7 @@
             <a:r>
               <a:rPr sz="900" b="0">
                 <a:solidFill>
-                  <a:srgbClr val="5B6472"/>
+                  <a:srgbClr val="4B5563"/>
                 </a:solidFill>
                 <a:latin typeface="Aptos"/>
                 <a:ea typeface="Aptos"/>
@@ -9138,7 +8322,7 @@
           <p:cNvPr id="34" name="">
             <a:extLst xmlns:a="http://schemas.openxmlformats.org/drawingml/2006/main">
               <a:ext uri="{FF2B5EF4-FFF2-40B4-BE49-F238E27FC236}">
-                <a16:creationId xmlns:a16="http://schemas.microsoft.com/office/drawing/2014/main" id="{2CEC2DCF-401A-4FEB-98D2-00EE1D3F0B43}"/>
+                <a16:creationId xmlns:a16="http://schemas.microsoft.com/office/drawing/2014/main" id="{C1D6AC4D-ACB6-4F60-AADF-ABB100DF496B}"/>
               </a:ext>
             </a:extLst>
           </p:cNvPr>
@@ -9202,7 +8386,7 @@
           <p:cNvPr id="35" name="">
             <a:extLst xmlns:a="http://schemas.openxmlformats.org/drawingml/2006/main">
               <a:ext uri="{FF2B5EF4-FFF2-40B4-BE49-F238E27FC236}">
-                <a16:creationId xmlns:a16="http://schemas.microsoft.com/office/drawing/2014/main" id="{B8EAA33B-9821-48BE-94D6-05686B465AAF}"/>
+                <a16:creationId xmlns:a16="http://schemas.microsoft.com/office/drawing/2014/main" id="{71DADBD1-D38C-4BE0-8815-E33E1D5BDF31}"/>
               </a:ext>
             </a:extLst>
           </p:cNvPr>
@@ -9237,7 +8421,7 @@
           <p:cNvPr id="36" name="">
             <a:extLst xmlns:a="http://schemas.openxmlformats.org/drawingml/2006/main">
               <a:ext uri="{FF2B5EF4-FFF2-40B4-BE49-F238E27FC236}">
-                <a16:creationId xmlns:a16="http://schemas.microsoft.com/office/drawing/2014/main" id="{3925EA12-F037-46CE-8751-0E899613CBBF}"/>
+                <a16:creationId xmlns:a16="http://schemas.microsoft.com/office/drawing/2014/main" id="{7B0D6D76-F641-4389-82B2-F20A41852CF4}"/>
               </a:ext>
             </a:extLst>
           </p:cNvPr>
@@ -9275,7 +8459,7 @@
             <a:pPr algn="l">
               <a:defRPr sz="900" b="0">
                 <a:solidFill>
-                  <a:srgbClr val="5B6472"/>
+                  <a:srgbClr val="4B5563"/>
                 </a:solidFill>
                 <a:latin typeface="Aptos"/>
                 <a:ea typeface="Aptos"/>
@@ -9285,7 +8469,7 @@
             <a:r>
               <a:rPr sz="900" b="0">
                 <a:solidFill>
-                  <a:srgbClr val="5B6472"/>
+                  <a:srgbClr val="4B5563"/>
                 </a:solidFill>
                 <a:latin typeface="Aptos"/>
                 <a:ea typeface="Aptos"/>
@@ -9301,7 +8485,7 @@
           <p:cNvPr id="37" name="">
             <a:extLst xmlns:a="http://schemas.openxmlformats.org/drawingml/2006/main">
               <a:ext uri="{FF2B5EF4-FFF2-40B4-BE49-F238E27FC236}">
-                <a16:creationId xmlns:a16="http://schemas.microsoft.com/office/drawing/2014/main" id="{ECE14191-B3EC-4B6D-9A55-C80DD58F0D73}"/>
+                <a16:creationId xmlns:a16="http://schemas.microsoft.com/office/drawing/2014/main" id="{F374A7AC-560D-4CE6-BE3F-48D5D634B117}"/>
               </a:ext>
             </a:extLst>
           </p:cNvPr>
@@ -9365,7 +8549,7 @@
           <p:cNvPr id="38" name="">
             <a:extLst xmlns:a="http://schemas.openxmlformats.org/drawingml/2006/main">
               <a:ext uri="{FF2B5EF4-FFF2-40B4-BE49-F238E27FC236}">
-                <a16:creationId xmlns:a16="http://schemas.microsoft.com/office/drawing/2014/main" id="{D6BBBC32-9ECF-483B-B998-F732289F49E5}"/>
+                <a16:creationId xmlns:a16="http://schemas.microsoft.com/office/drawing/2014/main" id="{E121389A-5137-4B1C-A5E4-ADCB1534609D}"/>
               </a:ext>
             </a:extLst>
           </p:cNvPr>
@@ -9400,7 +8584,7 @@
           <p:cNvPr id="39" name="">
             <a:extLst xmlns:a="http://schemas.openxmlformats.org/drawingml/2006/main">
               <a:ext uri="{FF2B5EF4-FFF2-40B4-BE49-F238E27FC236}">
-                <a16:creationId xmlns:a16="http://schemas.microsoft.com/office/drawing/2014/main" id="{90653457-BF33-4211-A4BF-14D86F7C2ECC}"/>
+                <a16:creationId xmlns:a16="http://schemas.microsoft.com/office/drawing/2014/main" id="{1AFC05E8-812E-41A8-8C13-12B9D1D88A9E}"/>
               </a:ext>
             </a:extLst>
           </p:cNvPr>
@@ -9438,7 +8622,7 @@
             <a:pPr algn="l">
               <a:defRPr sz="900" b="0">
                 <a:solidFill>
-                  <a:srgbClr val="5B6472"/>
+                  <a:srgbClr val="4B5563"/>
                 </a:solidFill>
                 <a:latin typeface="Aptos"/>
                 <a:ea typeface="Aptos"/>
@@ -9448,7 +8632,7 @@
             <a:r>
               <a:rPr sz="900" b="0">
                 <a:solidFill>
-                  <a:srgbClr val="5B6472"/>
+                  <a:srgbClr val="4B5563"/>
                 </a:solidFill>
                 <a:latin typeface="Aptos"/>
                 <a:ea typeface="Aptos"/>
@@ -9464,7 +8648,7 @@
           <p:cNvPr id="40" name="">
             <a:extLst xmlns:a="http://schemas.openxmlformats.org/drawingml/2006/main">
               <a:ext uri="{FF2B5EF4-FFF2-40B4-BE49-F238E27FC236}">
-                <a16:creationId xmlns:a16="http://schemas.microsoft.com/office/drawing/2014/main" id="{91C52B0F-FE66-4919-B4A2-1C0D4D91566B}"/>
+                <a16:creationId xmlns:a16="http://schemas.microsoft.com/office/drawing/2014/main" id="{973D84DA-B192-474C-8FDC-7BF310A62B45}"/>
               </a:ext>
             </a:extLst>
           </p:cNvPr>
@@ -9518,7 +8702,7 @@
                 <a:ea typeface="Aptos"/>
                 <a:cs typeface="Aptos"/>
               </a:rPr>
-              <a:t>Why this matters: the dataset is large enough to demonstrate Spark transformations, joins, aggregations, ML feature preparation, and model training beyond simple descriptive statistics.</a:t>
+              <a:t>This sample is large enough to show Spark loading, cleaning, joins, aggregations, feature preparation, and model training.</a:t>
             </a:r>
           </a:p>
         </p:txBody>
@@ -9528,7 +8712,7 @@
           <p:cNvPr id="41" name="">
             <a:extLst xmlns:a="http://schemas.openxmlformats.org/drawingml/2006/main">
               <a:ext uri="{FF2B5EF4-FFF2-40B4-BE49-F238E27FC236}">
-                <a16:creationId xmlns:a16="http://schemas.microsoft.com/office/drawing/2014/main" id="{A5EDC23E-C8F7-40B6-BBA8-FE89E361C07A}"/>
+                <a16:creationId xmlns:a16="http://schemas.microsoft.com/office/drawing/2014/main" id="{949946F5-EBFA-4B76-99F5-48CBD0E3F2A1}"/>
               </a:ext>
             </a:extLst>
           </p:cNvPr>
@@ -9563,7 +8747,7 @@
           <p:cNvPr id="42" name="">
             <a:extLst xmlns:a="http://schemas.openxmlformats.org/drawingml/2006/main">
               <a:ext uri="{FF2B5EF4-FFF2-40B4-BE49-F238E27FC236}">
-                <a16:creationId xmlns:a16="http://schemas.microsoft.com/office/drawing/2014/main" id="{6E77C4AF-BBBB-4769-80E0-D663A6E74681}"/>
+                <a16:creationId xmlns:a16="http://schemas.microsoft.com/office/drawing/2014/main" id="{1D8B849F-ED49-4EB7-A65C-070D57F78A30}"/>
               </a:ext>
             </a:extLst>
           </p:cNvPr>
@@ -9601,7 +8785,7 @@
             <a:pPr algn="l">
               <a:defRPr sz="825" b="0">
                 <a:solidFill>
-                  <a:srgbClr val="5B6472"/>
+                  <a:srgbClr val="4B5563"/>
                 </a:solidFill>
                 <a:latin typeface="Aptos"/>
                 <a:ea typeface="Aptos"/>
@@ -9611,7 +8795,7 @@
             <a:r>
               <a:rPr sz="825" b="0">
                 <a:solidFill>
-                  <a:srgbClr val="5B6472"/>
+                  <a:srgbClr val="4B5563"/>
                 </a:solidFill>
                 <a:latin typeface="Aptos"/>
                 <a:ea typeface="Aptos"/>
@@ -9627,7 +8811,7 @@
           <p:cNvPr id="43" name="">
             <a:extLst xmlns:a="http://schemas.openxmlformats.org/drawingml/2006/main">
               <a:ext uri="{FF2B5EF4-FFF2-40B4-BE49-F238E27FC236}">
-                <a16:creationId xmlns:a16="http://schemas.microsoft.com/office/drawing/2014/main" id="{844E29B3-2CDF-4FD2-A40A-D76BA040297A}"/>
+                <a16:creationId xmlns:a16="http://schemas.microsoft.com/office/drawing/2014/main" id="{C5B990D7-F93B-405B-8D5B-9E5C3576C2A5}"/>
               </a:ext>
             </a:extLst>
           </p:cNvPr>
@@ -9665,7 +8849,7 @@
             <a:pPr algn="r">
               <a:defRPr sz="900" b="1">
                 <a:solidFill>
-                  <a:srgbClr val="5B6472"/>
+                  <a:srgbClr val="4B5563"/>
                 </a:solidFill>
                 <a:latin typeface="Aptos"/>
                 <a:ea typeface="Aptos"/>
@@ -9675,7 +8859,7 @@
             <a:r>
               <a:rPr sz="900" b="1">
                 <a:solidFill>
-                  <a:srgbClr val="5B6472"/>
+                  <a:srgbClr val="4B5563"/>
                 </a:solidFill>
                 <a:latin typeface="Aptos"/>
                 <a:ea typeface="Aptos"/>
@@ -9689,7 +8873,7 @@
     </p:spTree>
     <p:extLst>
       <p:ext uri="{BB962C8B-B14F-4D97-AF65-F5344CB8AC3E}">
-        <p14:creationId xmlns:p14="http://schemas.microsoft.com/office/powerpoint/2010/main" val="1366679096"/>
+        <p14:creationId xmlns:p14="http://schemas.microsoft.com/office/powerpoint/2010/main" val="1109217082"/>
       </p:ext>
     </p:extLst>
   </p:cSld>
@@ -9713,7 +8897,7 @@
           <p:cNvPr id="1" name="">
             <a:extLst xmlns:a="http://schemas.openxmlformats.org/drawingml/2006/main">
               <a:ext uri="{FF2B5EF4-FFF2-40B4-BE49-F238E27FC236}">
-                <a16:creationId xmlns:a16="http://schemas.microsoft.com/office/drawing/2014/main" id="{5F65168E-10AE-4DEE-B8D3-B42F16859F31}"/>
+                <a16:creationId xmlns:a16="http://schemas.microsoft.com/office/drawing/2014/main" id="{D7DC971D-CA0B-47CF-AA26-04EC4A26AA95}"/>
               </a:ext>
             </a:extLst>
           </p:cNvPr>
@@ -9731,7 +8915,7 @@
             <a:avLst/>
           </a:prstGeom>
           <a:solidFill xmlns:a="http://schemas.openxmlformats.org/drawingml/2006/main">
-            <a:srgbClr val="F7F3EA"/>
+            <a:srgbClr val="FFFFFF"/>
           </a:solidFill>
           <a:ln xmlns:a="http://schemas.openxmlformats.org/drawingml/2006/main" w="0">
             <a:solidFill>
@@ -9748,7 +8932,7 @@
           <p:cNvPr id="2" name="kicker-marker-5">
             <a:extLst xmlns:a="http://schemas.openxmlformats.org/drawingml/2006/main">
               <a:ext uri="{FF2B5EF4-FFF2-40B4-BE49-F238E27FC236}">
-                <a16:creationId xmlns:a16="http://schemas.microsoft.com/office/drawing/2014/main" id="{F5F600BD-259D-4C2C-B0D5-C5753D7EC4C9}"/>
+                <a16:creationId xmlns:a16="http://schemas.microsoft.com/office/drawing/2014/main" id="{3ACDFE6D-95DA-4272-BD2F-A70C1343FD80}"/>
               </a:ext>
             </a:extLst>
           </p:cNvPr>
@@ -9783,7 +8967,7 @@
           <p:cNvPr id="3" name="kicker-label-5">
             <a:extLst xmlns:a="http://schemas.openxmlformats.org/drawingml/2006/main">
               <a:ext uri="{FF2B5EF4-FFF2-40B4-BE49-F238E27FC236}">
-                <a16:creationId xmlns:a16="http://schemas.microsoft.com/office/drawing/2014/main" id="{73809DDB-A078-45BB-A486-7CAE6A61B66A}"/>
+                <a16:creationId xmlns:a16="http://schemas.microsoft.com/office/drawing/2014/main" id="{23F53A9E-2E29-4027-B9FE-B431B2F1FBB4}"/>
               </a:ext>
             </a:extLst>
           </p:cNvPr>
@@ -9821,7 +9005,7 @@
             <a:pPr algn="l">
               <a:defRPr sz="825" b="1">
                 <a:solidFill>
-                  <a:srgbClr val="5B6472"/>
+                  <a:srgbClr val="4B5563"/>
                 </a:solidFill>
                 <a:latin typeface="Aptos"/>
                 <a:ea typeface="Aptos"/>
@@ -9831,13 +9015,13 @@
             <a:r>
               <a:rPr sz="825" b="1">
                 <a:solidFill>
-                  <a:srgbClr val="5B6472"/>
-                </a:solidFill>
-                <a:latin typeface="Aptos"/>
-                <a:ea typeface="Aptos"/>
-                <a:cs typeface="Aptos"/>
-              </a:rPr>
-              <a:t>PART A EVIDENCE</a:t>
+                  <a:srgbClr val="4B5563"/>
+                </a:solidFill>
+                <a:latin typeface="Aptos"/>
+                <a:ea typeface="Aptos"/>
+                <a:cs typeface="Aptos"/>
+              </a:rPr>
+              <a:t>PART A</a:t>
             </a:r>
           </a:p>
         </p:txBody>
@@ -9847,7 +9031,7 @@
           <p:cNvPr id="4" name="">
             <a:extLst xmlns:a="http://schemas.openxmlformats.org/drawingml/2006/main">
               <a:ext uri="{FF2B5EF4-FFF2-40B4-BE49-F238E27FC236}">
-                <a16:creationId xmlns:a16="http://schemas.microsoft.com/office/drawing/2014/main" id="{911F76CA-09C0-48A4-8564-8B9EA73DBC50}"/>
+                <a16:creationId xmlns:a16="http://schemas.microsoft.com/office/drawing/2014/main" id="{37916618-795C-4F3D-85B6-A2FB2434AFF8}"/>
               </a:ext>
             </a:extLst>
           </p:cNvPr>
@@ -9901,7 +9085,7 @@
                 <a:ea typeface="Aptos Display"/>
                 <a:cs typeface="Aptos Display"/>
               </a:rPr>
-              <a:t>Listening activity is highly concentrated around a few artists.</a:t>
+              <a:t>Big Data Analytics Results</a:t>
             </a:r>
           </a:p>
         </p:txBody>
@@ -9911,7 +9095,7 @@
           <p:cNvPr id="5" name="">
             <a:extLst xmlns:a="http://schemas.openxmlformats.org/drawingml/2006/main">
               <a:ext uri="{FF2B5EF4-FFF2-40B4-BE49-F238E27FC236}">
-                <a16:creationId xmlns:a16="http://schemas.microsoft.com/office/drawing/2014/main" id="{2791D0F9-D76A-4957-96AD-AB6FB241FC9B}"/>
+                <a16:creationId xmlns:a16="http://schemas.microsoft.com/office/drawing/2014/main" id="{593BE479-5171-4E57-A470-E70BA61211AA}"/>
               </a:ext>
             </a:extLst>
           </p:cNvPr>
@@ -9949,7 +9133,7 @@
             <a:pPr algn="l">
               <a:defRPr sz="1125" b="0">
                 <a:solidFill>
-                  <a:srgbClr val="5B6472"/>
+                  <a:srgbClr val="4B5563"/>
                 </a:solidFill>
                 <a:latin typeface="Aptos"/>
                 <a:ea typeface="Aptos"/>
@@ -9959,13 +9143,13 @@
             <a:r>
               <a:rPr sz="1125" b="0">
                 <a:solidFill>
-                  <a:srgbClr val="5B6472"/>
-                </a:solidFill>
-                <a:latin typeface="Aptos"/>
-                <a:ea typeface="Aptos"/>
-                <a:cs typeface="Aptos"/>
-              </a:rPr>
-              <a:t>Top artist and track counts reveal strong popularity concentration in the sampled listening events.</a:t>
+                  <a:srgbClr val="4B5563"/>
+                </a:solidFill>
+                <a:latin typeface="Aptos"/>
+                <a:ea typeface="Aptos"/>
+                <a:cs typeface="Aptos"/>
+              </a:rPr>
+              <a:t>Spark aggregations are used to find the most listened artists and tracks.</a:t>
             </a:r>
           </a:p>
         </p:txBody>
@@ -9975,7 +9159,7 @@
           <p:cNvPr id="6" name="">
             <a:extLst xmlns:a="http://schemas.openxmlformats.org/drawingml/2006/main">
               <a:ext uri="{FF2B5EF4-FFF2-40B4-BE49-F238E27FC236}">
-                <a16:creationId xmlns:a16="http://schemas.microsoft.com/office/drawing/2014/main" id="{B4DEA22F-8839-46FA-AC9E-108913E4AC71}"/>
+                <a16:creationId xmlns:a16="http://schemas.microsoft.com/office/drawing/2014/main" id="{721714B6-C79B-454F-901F-9E6C3C25479B}"/>
               </a:ext>
             </a:extLst>
           </p:cNvPr>
@@ -10039,7 +9223,7 @@
           <p:cNvPr id="7" name="">
             <a:extLst xmlns:a="http://schemas.openxmlformats.org/drawingml/2006/main">
               <a:ext uri="{FF2B5EF4-FFF2-40B4-BE49-F238E27FC236}">
-                <a16:creationId xmlns:a16="http://schemas.microsoft.com/office/drawing/2014/main" id="{5A92A2A6-F66A-41A6-B75E-57891551E0C6}"/>
+                <a16:creationId xmlns:a16="http://schemas.microsoft.com/office/drawing/2014/main" id="{DC0FC82D-4E06-4A6A-8738-717FAEBC5036}"/>
               </a:ext>
             </a:extLst>
           </p:cNvPr>
@@ -10074,7 +9258,7 @@
           <p:cNvPr id="8" name="">
             <a:extLst xmlns:a="http://schemas.openxmlformats.org/drawingml/2006/main">
               <a:ext uri="{FF2B5EF4-FFF2-40B4-BE49-F238E27FC236}">
-                <a16:creationId xmlns:a16="http://schemas.microsoft.com/office/drawing/2014/main" id="{9BF60F6D-77C6-41F4-BEB9-1A8882FB3714}"/>
+                <a16:creationId xmlns:a16="http://schemas.microsoft.com/office/drawing/2014/main" id="{B302EFBC-82FF-40F1-8736-13853C6E1DD4}"/>
               </a:ext>
             </a:extLst>
           </p:cNvPr>
@@ -10112,7 +9296,7 @@
             <a:pPr algn="l">
               <a:defRPr sz="900" b="0">
                 <a:solidFill>
-                  <a:srgbClr val="5B6472"/>
+                  <a:srgbClr val="4B5563"/>
                 </a:solidFill>
                 <a:latin typeface="Aptos"/>
                 <a:ea typeface="Aptos"/>
@@ -10122,7 +9306,7 @@
             <a:r>
               <a:rPr sz="900" b="0">
                 <a:solidFill>
-                  <a:srgbClr val="5B6472"/>
+                  <a:srgbClr val="4B5563"/>
                 </a:solidFill>
                 <a:latin typeface="Aptos"/>
                 <a:ea typeface="Aptos"/>
@@ -10138,7 +9322,7 @@
           <p:cNvPr id="9" name="">
             <a:extLst xmlns:a="http://schemas.openxmlformats.org/drawingml/2006/main">
               <a:ext uri="{FF2B5EF4-FFF2-40B4-BE49-F238E27FC236}">
-                <a16:creationId xmlns:a16="http://schemas.microsoft.com/office/drawing/2014/main" id="{BC1770F5-F336-4AFF-974D-42CE2F999F92}"/>
+                <a16:creationId xmlns:a16="http://schemas.microsoft.com/office/drawing/2014/main" id="{15043113-5BBF-4A63-8E46-D71A023BA13A}"/>
               </a:ext>
             </a:extLst>
           </p:cNvPr>
@@ -10202,7 +9386,7 @@
           <p:cNvPr id="10" name="">
             <a:extLst xmlns:a="http://schemas.openxmlformats.org/drawingml/2006/main">
               <a:ext uri="{FF2B5EF4-FFF2-40B4-BE49-F238E27FC236}">
-                <a16:creationId xmlns:a16="http://schemas.microsoft.com/office/drawing/2014/main" id="{210A3F2C-9140-42B8-BE22-D93FC1D580EF}"/>
+                <a16:creationId xmlns:a16="http://schemas.microsoft.com/office/drawing/2014/main" id="{159F741A-447C-44F4-8856-3D22BBD493D8}"/>
               </a:ext>
             </a:extLst>
           </p:cNvPr>
@@ -10237,7 +9421,7 @@
           <p:cNvPr id="11" name="">
             <a:extLst xmlns:a="http://schemas.openxmlformats.org/drawingml/2006/main">
               <a:ext uri="{FF2B5EF4-FFF2-40B4-BE49-F238E27FC236}">
-                <a16:creationId xmlns:a16="http://schemas.microsoft.com/office/drawing/2014/main" id="{64E19668-5498-4F7F-80E0-F19F742919AD}"/>
+                <a16:creationId xmlns:a16="http://schemas.microsoft.com/office/drawing/2014/main" id="{FC48610A-CAAA-43A0-8C1D-8BF6FD43DF71}"/>
               </a:ext>
             </a:extLst>
           </p:cNvPr>
@@ -10275,7 +9459,7 @@
             <a:pPr algn="l">
               <a:defRPr sz="900" b="0">
                 <a:solidFill>
-                  <a:srgbClr val="5B6472"/>
+                  <a:srgbClr val="4B5563"/>
                 </a:solidFill>
                 <a:latin typeface="Aptos"/>
                 <a:ea typeface="Aptos"/>
@@ -10285,7 +9469,7 @@
             <a:r>
               <a:rPr sz="900" b="0">
                 <a:solidFill>
-                  <a:srgbClr val="5B6472"/>
+                  <a:srgbClr val="4B5563"/>
                 </a:solidFill>
                 <a:latin typeface="Aptos"/>
                 <a:ea typeface="Aptos"/>
@@ -10301,7 +9485,7 @@
           <p:cNvPr id="12" name="">
             <a:extLst xmlns:a="http://schemas.openxmlformats.org/drawingml/2006/main">
               <a:ext uri="{FF2B5EF4-FFF2-40B4-BE49-F238E27FC236}">
-                <a16:creationId xmlns:a16="http://schemas.microsoft.com/office/drawing/2014/main" id="{F20C621C-262B-43A6-9406-79DAEB148E5B}"/>
+                <a16:creationId xmlns:a16="http://schemas.microsoft.com/office/drawing/2014/main" id="{09E0AD68-AAB2-4EAA-B6F4-B3278DA2F2B2}"/>
               </a:ext>
             </a:extLst>
           </p:cNvPr>
@@ -10365,7 +9549,7 @@
           <p:cNvPr id="13" name="">
             <a:extLst xmlns:a="http://schemas.openxmlformats.org/drawingml/2006/main">
               <a:ext uri="{FF2B5EF4-FFF2-40B4-BE49-F238E27FC236}">
-                <a16:creationId xmlns:a16="http://schemas.microsoft.com/office/drawing/2014/main" id="{ED7B6DCD-9263-460C-99A5-1BA7520201B0}"/>
+                <a16:creationId xmlns:a16="http://schemas.microsoft.com/office/drawing/2014/main" id="{8FC2D9FD-1D3C-4CCE-9BCB-832A7A73862C}"/>
               </a:ext>
             </a:extLst>
           </p:cNvPr>
@@ -10400,7 +9584,7 @@
           <p:cNvPr id="14" name="">
             <a:extLst xmlns:a="http://schemas.openxmlformats.org/drawingml/2006/main">
               <a:ext uri="{FF2B5EF4-FFF2-40B4-BE49-F238E27FC236}">
-                <a16:creationId xmlns:a16="http://schemas.microsoft.com/office/drawing/2014/main" id="{82F060EF-2481-4CAE-919B-0EE6055FF6F7}"/>
+                <a16:creationId xmlns:a16="http://schemas.microsoft.com/office/drawing/2014/main" id="{64AC97F9-5EAA-4BFC-8315-DCEEEEDDC9B6}"/>
               </a:ext>
             </a:extLst>
           </p:cNvPr>
@@ -10438,7 +9622,7 @@
             <a:pPr algn="l">
               <a:defRPr sz="900" b="0">
                 <a:solidFill>
-                  <a:srgbClr val="5B6472"/>
+                  <a:srgbClr val="4B5563"/>
                 </a:solidFill>
                 <a:latin typeface="Aptos"/>
                 <a:ea typeface="Aptos"/>
@@ -10448,7 +9632,7 @@
             <a:r>
               <a:rPr sz="900" b="0">
                 <a:solidFill>
-                  <a:srgbClr val="5B6472"/>
+                  <a:srgbClr val="4B5563"/>
                 </a:solidFill>
                 <a:latin typeface="Aptos"/>
                 <a:ea typeface="Aptos"/>
@@ -10464,7 +9648,7 @@
           <p:cNvPr id="15" name="">
             <a:extLst xmlns:a="http://schemas.openxmlformats.org/drawingml/2006/main">
               <a:ext uri="{FF2B5EF4-FFF2-40B4-BE49-F238E27FC236}">
-                <a16:creationId xmlns:a16="http://schemas.microsoft.com/office/drawing/2014/main" id="{214395F5-E789-4F52-B61A-31C7D9458F17}"/>
+                <a16:creationId xmlns:a16="http://schemas.microsoft.com/office/drawing/2014/main" id="{67314E54-A7D0-4552-A4C2-C5457338D7B1}"/>
               </a:ext>
             </a:extLst>
           </p:cNvPr>
@@ -10528,7 +9712,7 @@
           <p:cNvPr id="16" name="">
             <a:extLst xmlns:a="http://schemas.openxmlformats.org/drawingml/2006/main">
               <a:ext uri="{FF2B5EF4-FFF2-40B4-BE49-F238E27FC236}">
-                <a16:creationId xmlns:a16="http://schemas.microsoft.com/office/drawing/2014/main" id="{4DF7D160-CB94-4193-B000-51DAC7943FA8}"/>
+                <a16:creationId xmlns:a16="http://schemas.microsoft.com/office/drawing/2014/main" id="{946720E1-A019-4948-BAE0-74CA610E899D}"/>
               </a:ext>
             </a:extLst>
           </p:cNvPr>
@@ -10563,7 +9747,7 @@
           <p:cNvPr id="17" name="">
             <a:extLst xmlns:a="http://schemas.openxmlformats.org/drawingml/2006/main">
               <a:ext uri="{FF2B5EF4-FFF2-40B4-BE49-F238E27FC236}">
-                <a16:creationId xmlns:a16="http://schemas.microsoft.com/office/drawing/2014/main" id="{3DC17ACB-5A43-4222-8421-1C121163E5E7}"/>
+                <a16:creationId xmlns:a16="http://schemas.microsoft.com/office/drawing/2014/main" id="{5E59CE71-BF8B-430E-9ECD-3B0BD75F3EDC}"/>
               </a:ext>
             </a:extLst>
           </p:cNvPr>
@@ -10601,7 +9785,7 @@
             <a:pPr algn="l">
               <a:defRPr sz="900" b="0">
                 <a:solidFill>
-                  <a:srgbClr val="5B6472"/>
+                  <a:srgbClr val="4B5563"/>
                 </a:solidFill>
                 <a:latin typeface="Aptos"/>
                 <a:ea typeface="Aptos"/>
@@ -10611,7 +9795,7 @@
             <a:r>
               <a:rPr sz="900" b="0">
                 <a:solidFill>
-                  <a:srgbClr val="5B6472"/>
+                  <a:srgbClr val="4B5563"/>
                 </a:solidFill>
                 <a:latin typeface="Aptos"/>
                 <a:ea typeface="Aptos"/>
@@ -10627,7 +9811,7 @@
           <p:cNvPr id="18" name="">
             <a:extLst xmlns:a="http://schemas.openxmlformats.org/drawingml/2006/main">
               <a:ext uri="{FF2B5EF4-FFF2-40B4-BE49-F238E27FC236}">
-                <a16:creationId xmlns:a16="http://schemas.microsoft.com/office/drawing/2014/main" id="{BCEA54E5-58D2-4C6C-AABB-9E34D15E34E0}"/>
+                <a16:creationId xmlns:a16="http://schemas.microsoft.com/office/drawing/2014/main" id="{752844E1-B6D9-4538-9B1C-A912572D9CA4}"/>
               </a:ext>
             </a:extLst>
           </p:cNvPr>
@@ -10691,7 +9875,7 @@
           <p:cNvPr id="19" name="">
             <a:extLst xmlns:a="http://schemas.openxmlformats.org/drawingml/2006/main">
               <a:ext uri="{FF2B5EF4-FFF2-40B4-BE49-F238E27FC236}">
-                <a16:creationId xmlns:a16="http://schemas.microsoft.com/office/drawing/2014/main" id="{06F5BAD7-E2A7-4FAD-9CB0-94FF65AB61BE}"/>
+                <a16:creationId xmlns:a16="http://schemas.microsoft.com/office/drawing/2014/main" id="{6DE1133B-A1F4-462D-BBC8-97955641FDE1}"/>
               </a:ext>
             </a:extLst>
           </p:cNvPr>
@@ -10726,7 +9910,7 @@
           <p:cNvPr id="20" name="">
             <a:extLst xmlns:a="http://schemas.openxmlformats.org/drawingml/2006/main">
               <a:ext uri="{FF2B5EF4-FFF2-40B4-BE49-F238E27FC236}">
-                <a16:creationId xmlns:a16="http://schemas.microsoft.com/office/drawing/2014/main" id="{BD85E69C-32CC-429A-854B-18FC0A2638E5}"/>
+                <a16:creationId xmlns:a16="http://schemas.microsoft.com/office/drawing/2014/main" id="{247B6F27-B1D9-4DE6-8B6B-3648FB817409}"/>
               </a:ext>
             </a:extLst>
           </p:cNvPr>
@@ -10764,7 +9948,7 @@
             <a:pPr algn="l">
               <a:defRPr sz="900" b="0">
                 <a:solidFill>
-                  <a:srgbClr val="5B6472"/>
+                  <a:srgbClr val="4B5563"/>
                 </a:solidFill>
                 <a:latin typeface="Aptos"/>
                 <a:ea typeface="Aptos"/>
@@ -10774,7 +9958,7 @@
             <a:r>
               <a:rPr sz="900" b="0">
                 <a:solidFill>
-                  <a:srgbClr val="5B6472"/>
+                  <a:srgbClr val="4B5563"/>
                 </a:solidFill>
                 <a:latin typeface="Aptos"/>
                 <a:ea typeface="Aptos"/>
@@ -10790,7 +9974,7 @@
           <p:cNvPr id="21" name="">
             <a:extLst xmlns:a="http://schemas.openxmlformats.org/drawingml/2006/main">
               <a:ext uri="{FF2B5EF4-FFF2-40B4-BE49-F238E27FC236}">
-                <a16:creationId xmlns:a16="http://schemas.microsoft.com/office/drawing/2014/main" id="{169CD1DF-8B2B-41C4-AC94-1FF940CAD267}"/>
+                <a16:creationId xmlns:a16="http://schemas.microsoft.com/office/drawing/2014/main" id="{91684E74-A815-4E8A-B168-632BEAF48D3A}"/>
               </a:ext>
             </a:extLst>
           </p:cNvPr>
@@ -10854,7 +10038,7 @@
           <p:cNvPr id="22" name="">
             <a:extLst xmlns:a="http://schemas.openxmlformats.org/drawingml/2006/main">
               <a:ext uri="{FF2B5EF4-FFF2-40B4-BE49-F238E27FC236}">
-                <a16:creationId xmlns:a16="http://schemas.microsoft.com/office/drawing/2014/main" id="{AEEB1F10-E765-45BA-8306-42844AAD2095}"/>
+                <a16:creationId xmlns:a16="http://schemas.microsoft.com/office/drawing/2014/main" id="{D589063D-3721-4B15-BFB3-1090D3CD8DB4}"/>
               </a:ext>
             </a:extLst>
           </p:cNvPr>
@@ -10889,7 +10073,7 @@
           <p:cNvPr id="23" name="">
             <a:extLst xmlns:a="http://schemas.openxmlformats.org/drawingml/2006/main">
               <a:ext uri="{FF2B5EF4-FFF2-40B4-BE49-F238E27FC236}">
-                <a16:creationId xmlns:a16="http://schemas.microsoft.com/office/drawing/2014/main" id="{D2F07865-A9E0-4CED-9347-D1ECFDF6ED12}"/>
+                <a16:creationId xmlns:a16="http://schemas.microsoft.com/office/drawing/2014/main" id="{39C304FC-22D1-46BE-9656-D22A5EB06D32}"/>
               </a:ext>
             </a:extLst>
           </p:cNvPr>
@@ -10927,7 +10111,7 @@
             <a:pPr algn="l">
               <a:defRPr sz="900" b="0">
                 <a:solidFill>
-                  <a:srgbClr val="5B6472"/>
+                  <a:srgbClr val="4B5563"/>
                 </a:solidFill>
                 <a:latin typeface="Aptos"/>
                 <a:ea typeface="Aptos"/>
@@ -10937,7 +10121,7 @@
             <a:r>
               <a:rPr sz="900" b="0">
                 <a:solidFill>
-                  <a:srgbClr val="5B6472"/>
+                  <a:srgbClr val="4B5563"/>
                 </a:solidFill>
                 <a:latin typeface="Aptos"/>
                 <a:ea typeface="Aptos"/>
@@ -10953,7 +10137,7 @@
           <p:cNvPr id="24" name="">
             <a:extLst xmlns:a="http://schemas.openxmlformats.org/drawingml/2006/main">
               <a:ext uri="{FF2B5EF4-FFF2-40B4-BE49-F238E27FC236}">
-                <a16:creationId xmlns:a16="http://schemas.microsoft.com/office/drawing/2014/main" id="{64BD486E-5F96-4A7E-8905-6E759FD12DB9}"/>
+                <a16:creationId xmlns:a16="http://schemas.microsoft.com/office/drawing/2014/main" id="{5CE259B3-C58A-4930-B342-358264270FDB}"/>
               </a:ext>
             </a:extLst>
           </p:cNvPr>
@@ -10975,7 +10159,7 @@
           </a:solidFill>
           <a:ln xmlns:a="http://schemas.openxmlformats.org/drawingml/2006/main" w="9525">
             <a:solidFill>
-              <a:srgbClr val="D8D0C2"/>
+              <a:srgbClr val="E5E7EB"/>
             </a:solidFill>
             <a:prstDash val="solid"/>
           </a:ln>
@@ -10986,7 +10170,7 @@
           <p:cNvPr id="25" name="">
             <a:extLst xmlns:a="http://schemas.openxmlformats.org/drawingml/2006/main">
               <a:ext uri="{FF2B5EF4-FFF2-40B4-BE49-F238E27FC236}">
-                <a16:creationId xmlns:a16="http://schemas.microsoft.com/office/drawing/2014/main" id="{70CF8F74-0EB9-4CE0-9FEC-A51A0E2916B7}"/>
+                <a16:creationId xmlns:a16="http://schemas.microsoft.com/office/drawing/2014/main" id="{2D7A7594-A84D-49FA-935C-53CB026A1750}"/>
               </a:ext>
             </a:extLst>
           </p:cNvPr>
@@ -11050,7 +10234,7 @@
           <p:cNvPr id="26" name="">
             <a:extLst xmlns:a="http://schemas.openxmlformats.org/drawingml/2006/main">
               <a:ext uri="{FF2B5EF4-FFF2-40B4-BE49-F238E27FC236}">
-                <a16:creationId xmlns:a16="http://schemas.microsoft.com/office/drawing/2014/main" id="{3C1F4313-CE30-4929-B09F-61275A66BC09}"/>
+                <a16:creationId xmlns:a16="http://schemas.microsoft.com/office/drawing/2014/main" id="{52A82D79-55A2-405F-9EE5-784E91220EBC}"/>
               </a:ext>
             </a:extLst>
           </p:cNvPr>
@@ -11072,7 +10256,7 @@
           </a:solidFill>
           <a:ln xmlns:a="http://schemas.openxmlformats.org/drawingml/2006/main" w="9525">
             <a:solidFill>
-              <a:srgbClr val="D8D0C2"/>
+              <a:srgbClr val="E5E7EB"/>
             </a:solidFill>
             <a:prstDash val="solid"/>
           </a:ln>
@@ -11083,7 +10267,7 @@
           <p:cNvPr id="27" name="">
             <a:extLst xmlns:a="http://schemas.openxmlformats.org/drawingml/2006/main">
               <a:ext uri="{FF2B5EF4-FFF2-40B4-BE49-F238E27FC236}">
-                <a16:creationId xmlns:a16="http://schemas.microsoft.com/office/drawing/2014/main" id="{7FFDA5B8-994F-43E6-9EC8-35919811F70E}"/>
+                <a16:creationId xmlns:a16="http://schemas.microsoft.com/office/drawing/2014/main" id="{88FAD6FE-F424-4D21-8BA9-B138CC6AFD47}"/>
               </a:ext>
             </a:extLst>
           </p:cNvPr>
@@ -11147,7 +10331,7 @@
           <p:cNvPr id="28" name="">
             <a:extLst xmlns:a="http://schemas.openxmlformats.org/drawingml/2006/main">
               <a:ext uri="{FF2B5EF4-FFF2-40B4-BE49-F238E27FC236}">
-                <a16:creationId xmlns:a16="http://schemas.microsoft.com/office/drawing/2014/main" id="{07B9B6F2-819D-4CDA-9DC9-48FD846D46F3}"/>
+                <a16:creationId xmlns:a16="http://schemas.microsoft.com/office/drawing/2014/main" id="{84734537-286A-41A7-A75D-F28D5178BCC7}"/>
               </a:ext>
             </a:extLst>
           </p:cNvPr>
@@ -11169,7 +10353,7 @@
           </a:solidFill>
           <a:ln xmlns:a="http://schemas.openxmlformats.org/drawingml/2006/main" w="9525">
             <a:solidFill>
-              <a:srgbClr val="D8D0C2"/>
+              <a:srgbClr val="E5E7EB"/>
             </a:solidFill>
             <a:prstDash val="solid"/>
           </a:ln>
@@ -11180,7 +10364,7 @@
           <p:cNvPr id="29" name="">
             <a:extLst xmlns:a="http://schemas.openxmlformats.org/drawingml/2006/main">
               <a:ext uri="{FF2B5EF4-FFF2-40B4-BE49-F238E27FC236}">
-                <a16:creationId xmlns:a16="http://schemas.microsoft.com/office/drawing/2014/main" id="{42C1F6AA-8195-4441-9712-4D1763D30027}"/>
+                <a16:creationId xmlns:a16="http://schemas.microsoft.com/office/drawing/2014/main" id="{1782B05B-E619-4052-9E03-32C4CDC3080F}"/>
               </a:ext>
             </a:extLst>
           </p:cNvPr>
@@ -11244,7 +10428,7 @@
           <p:cNvPr id="30" name="">
             <a:extLst xmlns:a="http://schemas.openxmlformats.org/drawingml/2006/main">
               <a:ext uri="{FF2B5EF4-FFF2-40B4-BE49-F238E27FC236}">
-                <a16:creationId xmlns:a16="http://schemas.microsoft.com/office/drawing/2014/main" id="{20261D61-67EB-49F8-9C23-FC832BC040F9}"/>
+                <a16:creationId xmlns:a16="http://schemas.microsoft.com/office/drawing/2014/main" id="{9DAC80CB-9C9B-4C39-BB99-02516EA783E4}"/>
               </a:ext>
             </a:extLst>
           </p:cNvPr>
@@ -11268,7 +10452,7 @@
           </a:solidFill>
           <a:ln xmlns:a="http://schemas.openxmlformats.org/drawingml/2006/main" w="9525">
             <a:solidFill>
-              <a:srgbClr val="D8D0C2"/>
+              <a:srgbClr val="E5E7EB"/>
             </a:solidFill>
             <a:prstDash val="solid"/>
           </a:ln>
@@ -11279,7 +10463,7 @@
           <p:cNvPr id="31" name="">
             <a:extLst xmlns:a="http://schemas.openxmlformats.org/drawingml/2006/main">
               <a:ext uri="{FF2B5EF4-FFF2-40B4-BE49-F238E27FC236}">
-                <a16:creationId xmlns:a16="http://schemas.microsoft.com/office/drawing/2014/main" id="{536AE90B-11D4-4247-8E73-FAAB5CA860FD}"/>
+                <a16:creationId xmlns:a16="http://schemas.microsoft.com/office/drawing/2014/main" id="{90F6EF5E-FBFE-449E-B5BA-B99AC7D4807D}"/>
               </a:ext>
             </a:extLst>
           </p:cNvPr>
@@ -11343,7 +10527,7 @@
           <p:cNvPr id="32" name="">
             <a:extLst xmlns:a="http://schemas.openxmlformats.org/drawingml/2006/main">
               <a:ext uri="{FF2B5EF4-FFF2-40B4-BE49-F238E27FC236}">
-                <a16:creationId xmlns:a16="http://schemas.microsoft.com/office/drawing/2014/main" id="{EBCE58EC-DD1E-4D03-9416-456FDD24A898}"/>
+                <a16:creationId xmlns:a16="http://schemas.microsoft.com/office/drawing/2014/main" id="{2CDF52B7-760B-4C6F-ABAA-2FB949930227}"/>
               </a:ext>
             </a:extLst>
           </p:cNvPr>
@@ -11367,7 +10551,7 @@
           </a:solidFill>
           <a:ln xmlns:a="http://schemas.openxmlformats.org/drawingml/2006/main" w="9525">
             <a:solidFill>
-              <a:srgbClr val="D8D0C2"/>
+              <a:srgbClr val="E5E7EB"/>
             </a:solidFill>
             <a:prstDash val="solid"/>
           </a:ln>
@@ -11378,7 +10562,7 @@
           <p:cNvPr id="33" name="">
             <a:extLst xmlns:a="http://schemas.openxmlformats.org/drawingml/2006/main">
               <a:ext uri="{FF2B5EF4-FFF2-40B4-BE49-F238E27FC236}">
-                <a16:creationId xmlns:a16="http://schemas.microsoft.com/office/drawing/2014/main" id="{9BCB39B0-1CFE-47FB-9037-2E24B5A586F8}"/>
+                <a16:creationId xmlns:a16="http://schemas.microsoft.com/office/drawing/2014/main" id="{BAC9F5CF-83C8-4097-9474-9F1D0CE3E551}"/>
               </a:ext>
             </a:extLst>
           </p:cNvPr>
@@ -11442,7 +10626,7 @@
           <p:cNvPr id="34" name="">
             <a:extLst xmlns:a="http://schemas.openxmlformats.org/drawingml/2006/main">
               <a:ext uri="{FF2B5EF4-FFF2-40B4-BE49-F238E27FC236}">
-                <a16:creationId xmlns:a16="http://schemas.microsoft.com/office/drawing/2014/main" id="{6E34C8D9-0127-4952-A038-150B07604E04}"/>
+                <a16:creationId xmlns:a16="http://schemas.microsoft.com/office/drawing/2014/main" id="{EC72A42A-EC67-4803-8D06-E027E82338C0}"/>
               </a:ext>
             </a:extLst>
           </p:cNvPr>
@@ -11466,7 +10650,7 @@
           </a:solidFill>
           <a:ln xmlns:a="http://schemas.openxmlformats.org/drawingml/2006/main" w="9525">
             <a:solidFill>
-              <a:srgbClr val="D8D0C2"/>
+              <a:srgbClr val="E5E7EB"/>
             </a:solidFill>
             <a:prstDash val="solid"/>
           </a:ln>
@@ -11477,7 +10661,7 @@
           <p:cNvPr id="35" name="">
             <a:extLst xmlns:a="http://schemas.openxmlformats.org/drawingml/2006/main">
               <a:ext uri="{FF2B5EF4-FFF2-40B4-BE49-F238E27FC236}">
-                <a16:creationId xmlns:a16="http://schemas.microsoft.com/office/drawing/2014/main" id="{731E94FE-D29B-4A11-8E47-40356D2B74B5}"/>
+                <a16:creationId xmlns:a16="http://schemas.microsoft.com/office/drawing/2014/main" id="{AC468C02-E5F7-435F-AF11-AF16F555D477}"/>
               </a:ext>
             </a:extLst>
           </p:cNvPr>
@@ -11541,7 +10725,7 @@
           <p:cNvPr id="36" name="">
             <a:extLst xmlns:a="http://schemas.openxmlformats.org/drawingml/2006/main">
               <a:ext uri="{FF2B5EF4-FFF2-40B4-BE49-F238E27FC236}">
-                <a16:creationId xmlns:a16="http://schemas.microsoft.com/office/drawing/2014/main" id="{FB864534-96F7-4BC5-BCFF-948AEEB2C66B}"/>
+                <a16:creationId xmlns:a16="http://schemas.microsoft.com/office/drawing/2014/main" id="{286C4BC4-2BA1-4FD1-8E5E-E9B46A0CED91}"/>
               </a:ext>
             </a:extLst>
           </p:cNvPr>
@@ -11565,7 +10749,7 @@
           </a:solidFill>
           <a:ln xmlns:a="http://schemas.openxmlformats.org/drawingml/2006/main" w="9525">
             <a:solidFill>
-              <a:srgbClr val="D8D0C2"/>
+              <a:srgbClr val="E5E7EB"/>
             </a:solidFill>
             <a:prstDash val="solid"/>
           </a:ln>
@@ -11576,7 +10760,7 @@
           <p:cNvPr id="37" name="">
             <a:extLst xmlns:a="http://schemas.openxmlformats.org/drawingml/2006/main">
               <a:ext uri="{FF2B5EF4-FFF2-40B4-BE49-F238E27FC236}">
-                <a16:creationId xmlns:a16="http://schemas.microsoft.com/office/drawing/2014/main" id="{1F4F12DA-2216-4291-8E48-6F8991FEB1D8}"/>
+                <a16:creationId xmlns:a16="http://schemas.microsoft.com/office/drawing/2014/main" id="{5FCBA845-E9CB-4C03-AA9B-74B1AFA9A6F5}"/>
               </a:ext>
             </a:extLst>
           </p:cNvPr>
@@ -11640,7 +10824,7 @@
           <p:cNvPr id="38" name="">
             <a:extLst xmlns:a="http://schemas.openxmlformats.org/drawingml/2006/main">
               <a:ext uri="{FF2B5EF4-FFF2-40B4-BE49-F238E27FC236}">
-                <a16:creationId xmlns:a16="http://schemas.microsoft.com/office/drawing/2014/main" id="{041329ED-3C09-4A57-BC82-1BAE7918AD21}"/>
+                <a16:creationId xmlns:a16="http://schemas.microsoft.com/office/drawing/2014/main" id="{E5A65CBF-6165-473E-BBCD-C4C205694CDB}"/>
               </a:ext>
             </a:extLst>
           </p:cNvPr>
@@ -11664,7 +10848,7 @@
           </a:solidFill>
           <a:ln xmlns:a="http://schemas.openxmlformats.org/drawingml/2006/main" w="9525">
             <a:solidFill>
-              <a:srgbClr val="D8D0C2"/>
+              <a:srgbClr val="E5E7EB"/>
             </a:solidFill>
             <a:prstDash val="solid"/>
           </a:ln>
@@ -11675,7 +10859,7 @@
           <p:cNvPr id="39" name="">
             <a:extLst xmlns:a="http://schemas.openxmlformats.org/drawingml/2006/main">
               <a:ext uri="{FF2B5EF4-FFF2-40B4-BE49-F238E27FC236}">
-                <a16:creationId xmlns:a16="http://schemas.microsoft.com/office/drawing/2014/main" id="{7177330D-536D-46E3-AD43-3F8371DB00C1}"/>
+                <a16:creationId xmlns:a16="http://schemas.microsoft.com/office/drawing/2014/main" id="{F7D9E727-E2CE-485A-8EE6-5EFFC8A974B3}"/>
               </a:ext>
             </a:extLst>
           </p:cNvPr>
@@ -11739,7 +10923,7 @@
           <p:cNvPr id="40" name="">
             <a:extLst xmlns:a="http://schemas.openxmlformats.org/drawingml/2006/main">
               <a:ext uri="{FF2B5EF4-FFF2-40B4-BE49-F238E27FC236}">
-                <a16:creationId xmlns:a16="http://schemas.microsoft.com/office/drawing/2014/main" id="{380604F6-5029-4C22-984E-FCB94181DC4E}"/>
+                <a16:creationId xmlns:a16="http://schemas.microsoft.com/office/drawing/2014/main" id="{55AF0D5B-BF6F-46C8-B05D-EC194B28995A}"/>
               </a:ext>
             </a:extLst>
           </p:cNvPr>
@@ -11763,7 +10947,7 @@
           </a:solidFill>
           <a:ln xmlns:a="http://schemas.openxmlformats.org/drawingml/2006/main" w="9525">
             <a:solidFill>
-              <a:srgbClr val="D8D0C2"/>
+              <a:srgbClr val="E5E7EB"/>
             </a:solidFill>
             <a:prstDash val="solid"/>
           </a:ln>
@@ -11774,7 +10958,7 @@
           <p:cNvPr id="41" name="">
             <a:extLst xmlns:a="http://schemas.openxmlformats.org/drawingml/2006/main">
               <a:ext uri="{FF2B5EF4-FFF2-40B4-BE49-F238E27FC236}">
-                <a16:creationId xmlns:a16="http://schemas.microsoft.com/office/drawing/2014/main" id="{91E63024-50F4-4DFB-997B-5DEF1A00C361}"/>
+                <a16:creationId xmlns:a16="http://schemas.microsoft.com/office/drawing/2014/main" id="{84350856-C7AE-461A-85C4-B97CB7E3CC41}"/>
               </a:ext>
             </a:extLst>
           </p:cNvPr>
@@ -11838,7 +11022,7 @@
           <p:cNvPr id="42" name="">
             <a:extLst xmlns:a="http://schemas.openxmlformats.org/drawingml/2006/main">
               <a:ext uri="{FF2B5EF4-FFF2-40B4-BE49-F238E27FC236}">
-                <a16:creationId xmlns:a16="http://schemas.microsoft.com/office/drawing/2014/main" id="{69B10139-929B-4762-82FF-075F87860076}"/>
+                <a16:creationId xmlns:a16="http://schemas.microsoft.com/office/drawing/2014/main" id="{6B7CC183-8798-46A2-8937-2968BCEB5E87}"/>
               </a:ext>
             </a:extLst>
           </p:cNvPr>
@@ -11862,7 +11046,7 @@
           </a:solidFill>
           <a:ln xmlns:a="http://schemas.openxmlformats.org/drawingml/2006/main" w="9525">
             <a:solidFill>
-              <a:srgbClr val="D8D0C2"/>
+              <a:srgbClr val="E5E7EB"/>
             </a:solidFill>
             <a:prstDash val="solid"/>
           </a:ln>
@@ -11873,7 +11057,7 @@
           <p:cNvPr id="43" name="">
             <a:extLst xmlns:a="http://schemas.openxmlformats.org/drawingml/2006/main">
               <a:ext uri="{FF2B5EF4-FFF2-40B4-BE49-F238E27FC236}">
-                <a16:creationId xmlns:a16="http://schemas.microsoft.com/office/drawing/2014/main" id="{B8C6724B-616F-4299-A740-7F88CBDB93FE}"/>
+                <a16:creationId xmlns:a16="http://schemas.microsoft.com/office/drawing/2014/main" id="{7F9AFA8B-4A66-488B-944F-05460A46056E}"/>
               </a:ext>
             </a:extLst>
           </p:cNvPr>
@@ -11937,7 +11121,7 @@
           <p:cNvPr id="44" name="">
             <a:extLst xmlns:a="http://schemas.openxmlformats.org/drawingml/2006/main">
               <a:ext uri="{FF2B5EF4-FFF2-40B4-BE49-F238E27FC236}">
-                <a16:creationId xmlns:a16="http://schemas.microsoft.com/office/drawing/2014/main" id="{E7CAC239-C9C4-4E3B-A108-0CEDF94FEDE5}"/>
+                <a16:creationId xmlns:a16="http://schemas.microsoft.com/office/drawing/2014/main" id="{DC93C9CC-A085-429D-80E6-59CF85E0DAE2}"/>
               </a:ext>
             </a:extLst>
           </p:cNvPr>
@@ -11961,7 +11145,7 @@
           </a:solidFill>
           <a:ln xmlns:a="http://schemas.openxmlformats.org/drawingml/2006/main" w="9525">
             <a:solidFill>
-              <a:srgbClr val="D8D0C2"/>
+              <a:srgbClr val="E5E7EB"/>
             </a:solidFill>
             <a:prstDash val="solid"/>
           </a:ln>
@@ -11972,7 +11156,7 @@
           <p:cNvPr id="45" name="">
             <a:extLst xmlns:a="http://schemas.openxmlformats.org/drawingml/2006/main">
               <a:ext uri="{FF2B5EF4-FFF2-40B4-BE49-F238E27FC236}">
-                <a16:creationId xmlns:a16="http://schemas.microsoft.com/office/drawing/2014/main" id="{7B84444B-2B53-416F-893E-339C59DCD50A}"/>
+                <a16:creationId xmlns:a16="http://schemas.microsoft.com/office/drawing/2014/main" id="{EA8556D8-DC13-445D-B36F-D1CC6E9E5C6B}"/>
               </a:ext>
             </a:extLst>
           </p:cNvPr>
@@ -12036,7 +11220,7 @@
           <p:cNvPr id="46" name="">
             <a:extLst xmlns:a="http://schemas.openxmlformats.org/drawingml/2006/main">
               <a:ext uri="{FF2B5EF4-FFF2-40B4-BE49-F238E27FC236}">
-                <a16:creationId xmlns:a16="http://schemas.microsoft.com/office/drawing/2014/main" id="{89E87713-BC60-4C05-AA6E-25744F61E790}"/>
+                <a16:creationId xmlns:a16="http://schemas.microsoft.com/office/drawing/2014/main" id="{6523CBB2-EEE7-4050-A172-9C753F5B2F07}"/>
               </a:ext>
             </a:extLst>
           </p:cNvPr>
@@ -12060,7 +11244,7 @@
           </a:solidFill>
           <a:ln xmlns:a="http://schemas.openxmlformats.org/drawingml/2006/main" w="9525">
             <a:solidFill>
-              <a:srgbClr val="D8D0C2"/>
+              <a:srgbClr val="E5E7EB"/>
             </a:solidFill>
             <a:prstDash val="solid"/>
           </a:ln>
@@ -12071,7 +11255,7 @@
           <p:cNvPr id="47" name="">
             <a:extLst xmlns:a="http://schemas.openxmlformats.org/drawingml/2006/main">
               <a:ext uri="{FF2B5EF4-FFF2-40B4-BE49-F238E27FC236}">
-                <a16:creationId xmlns:a16="http://schemas.microsoft.com/office/drawing/2014/main" id="{347D68F1-E571-4573-80F1-E24405A98A23}"/>
+                <a16:creationId xmlns:a16="http://schemas.microsoft.com/office/drawing/2014/main" id="{B2C87AEF-18DE-4509-ACB5-53EB73AD1949}"/>
               </a:ext>
             </a:extLst>
           </p:cNvPr>
@@ -12135,7 +11319,7 @@
           <p:cNvPr id="48" name="">
             <a:extLst xmlns:a="http://schemas.openxmlformats.org/drawingml/2006/main">
               <a:ext uri="{FF2B5EF4-FFF2-40B4-BE49-F238E27FC236}">
-                <a16:creationId xmlns:a16="http://schemas.microsoft.com/office/drawing/2014/main" id="{E8516E3A-8656-48A6-B21A-9D9CA6368EC6}"/>
+                <a16:creationId xmlns:a16="http://schemas.microsoft.com/office/drawing/2014/main" id="{89A7309D-4DA1-457C-8C1B-7F7CF2874F35}"/>
               </a:ext>
             </a:extLst>
           </p:cNvPr>
@@ -12159,7 +11343,7 @@
           </a:solidFill>
           <a:ln xmlns:a="http://schemas.openxmlformats.org/drawingml/2006/main" w="9525">
             <a:solidFill>
-              <a:srgbClr val="D8D0C2"/>
+              <a:srgbClr val="E5E7EB"/>
             </a:solidFill>
             <a:prstDash val="solid"/>
           </a:ln>
@@ -12170,7 +11354,7 @@
           <p:cNvPr id="49" name="">
             <a:extLst xmlns:a="http://schemas.openxmlformats.org/drawingml/2006/main">
               <a:ext uri="{FF2B5EF4-FFF2-40B4-BE49-F238E27FC236}">
-                <a16:creationId xmlns:a16="http://schemas.microsoft.com/office/drawing/2014/main" id="{2212478C-7EFA-4D81-A7C6-8E6F7356B030}"/>
+                <a16:creationId xmlns:a16="http://schemas.microsoft.com/office/drawing/2014/main" id="{DFD727B8-98D3-43C3-A152-8B15727EB912}"/>
               </a:ext>
             </a:extLst>
           </p:cNvPr>
@@ -12234,7 +11418,7 @@
           <p:cNvPr id="50" name="">
             <a:extLst xmlns:a="http://schemas.openxmlformats.org/drawingml/2006/main">
               <a:ext uri="{FF2B5EF4-FFF2-40B4-BE49-F238E27FC236}">
-                <a16:creationId xmlns:a16="http://schemas.microsoft.com/office/drawing/2014/main" id="{8799513F-A84B-47E5-8D76-0258938EBF8F}"/>
+                <a16:creationId xmlns:a16="http://schemas.microsoft.com/office/drawing/2014/main" id="{96485D95-FDA7-4F29-ADDD-603E49902244}"/>
               </a:ext>
             </a:extLst>
           </p:cNvPr>
@@ -12258,7 +11442,7 @@
           </a:solidFill>
           <a:ln xmlns:a="http://schemas.openxmlformats.org/drawingml/2006/main" w="9525">
             <a:solidFill>
-              <a:srgbClr val="D8D0C2"/>
+              <a:srgbClr val="E5E7EB"/>
             </a:solidFill>
             <a:prstDash val="solid"/>
           </a:ln>
@@ -12269,7 +11453,7 @@
           <p:cNvPr id="51" name="">
             <a:extLst xmlns:a="http://schemas.openxmlformats.org/drawingml/2006/main">
               <a:ext uri="{FF2B5EF4-FFF2-40B4-BE49-F238E27FC236}">
-                <a16:creationId xmlns:a16="http://schemas.microsoft.com/office/drawing/2014/main" id="{35E5ECC5-5C76-4443-985B-031109B9FB6C}"/>
+                <a16:creationId xmlns:a16="http://schemas.microsoft.com/office/drawing/2014/main" id="{76769161-9C56-4E44-A8C5-7DF12EACC487}"/>
               </a:ext>
             </a:extLst>
           </p:cNvPr>
@@ -12333,7 +11517,7 @@
           <p:cNvPr id="52" name="">
             <a:extLst xmlns:a="http://schemas.openxmlformats.org/drawingml/2006/main">
               <a:ext uri="{FF2B5EF4-FFF2-40B4-BE49-F238E27FC236}">
-                <a16:creationId xmlns:a16="http://schemas.microsoft.com/office/drawing/2014/main" id="{D8812B25-5686-45B8-BE0B-623E9C949780}"/>
+                <a16:creationId xmlns:a16="http://schemas.microsoft.com/office/drawing/2014/main" id="{914470A8-A752-4C72-AA53-443633C44295}"/>
               </a:ext>
             </a:extLst>
           </p:cNvPr>
@@ -12357,7 +11541,7 @@
           </a:solidFill>
           <a:ln xmlns:a="http://schemas.openxmlformats.org/drawingml/2006/main" w="9525">
             <a:solidFill>
-              <a:srgbClr val="D8D0C2"/>
+              <a:srgbClr val="E5E7EB"/>
             </a:solidFill>
             <a:prstDash val="solid"/>
           </a:ln>
@@ -12368,7 +11552,7 @@
           <p:cNvPr id="53" name="">
             <a:extLst xmlns:a="http://schemas.openxmlformats.org/drawingml/2006/main">
               <a:ext uri="{FF2B5EF4-FFF2-40B4-BE49-F238E27FC236}">
-                <a16:creationId xmlns:a16="http://schemas.microsoft.com/office/drawing/2014/main" id="{7635671B-4B80-4CF2-9635-7F39FDAB09B9}"/>
+                <a16:creationId xmlns:a16="http://schemas.microsoft.com/office/drawing/2014/main" id="{8F96EB6E-58D0-4CA5-B577-32647AD7E19B}"/>
               </a:ext>
             </a:extLst>
           </p:cNvPr>
@@ -12432,7 +11616,7 @@
           <p:cNvPr id="54" name="">
             <a:extLst xmlns:a="http://schemas.openxmlformats.org/drawingml/2006/main">
               <a:ext uri="{FF2B5EF4-FFF2-40B4-BE49-F238E27FC236}">
-                <a16:creationId xmlns:a16="http://schemas.microsoft.com/office/drawing/2014/main" id="{3F36337B-2175-4049-8401-7E0158C91966}"/>
+                <a16:creationId xmlns:a16="http://schemas.microsoft.com/office/drawing/2014/main" id="{8C323238-DA0D-4830-9D61-CFD7982753DE}"/>
               </a:ext>
             </a:extLst>
           </p:cNvPr>
@@ -12467,7 +11651,7 @@
           <p:cNvPr id="55" name="">
             <a:extLst xmlns:a="http://schemas.openxmlformats.org/drawingml/2006/main">
               <a:ext uri="{FF2B5EF4-FFF2-40B4-BE49-F238E27FC236}">
-                <a16:creationId xmlns:a16="http://schemas.microsoft.com/office/drawing/2014/main" id="{3A821DCF-AA8C-4BCB-88B3-F6F89ED2B963}"/>
+                <a16:creationId xmlns:a16="http://schemas.microsoft.com/office/drawing/2014/main" id="{2DE8DA96-21E0-4CAC-8328-DFBC67934EFB}"/>
               </a:ext>
             </a:extLst>
           </p:cNvPr>
@@ -12502,7 +11686,7 @@
           <p:cNvPr id="56" name="">
             <a:extLst xmlns:a="http://schemas.openxmlformats.org/drawingml/2006/main">
               <a:ext uri="{FF2B5EF4-FFF2-40B4-BE49-F238E27FC236}">
-                <a16:creationId xmlns:a16="http://schemas.microsoft.com/office/drawing/2014/main" id="{238F0239-08EC-4C74-8875-6DFBF39EF778}"/>
+                <a16:creationId xmlns:a16="http://schemas.microsoft.com/office/drawing/2014/main" id="{16BA38E5-C903-4C36-8587-15DEFBB39333}"/>
               </a:ext>
             </a:extLst>
           </p:cNvPr>
@@ -12556,7 +11740,7 @@
                 <a:ea typeface="Aptos"/>
                 <a:cs typeface="Aptos"/>
               </a:rPr>
-              <a:t>Interpretation: repeated listens to a compact set of popular tracks helps justify using implicit feedback for the recommender in Part B.</a:t>
+              <a:t>Finding: a small group of artists and tracks receives many repeated listens, so play count is useful as implicit feedback.</a:t>
             </a:r>
           </a:p>
         </p:txBody>
@@ -12566,7 +11750,7 @@
           <p:cNvPr id="57" name="">
             <a:extLst xmlns:a="http://schemas.openxmlformats.org/drawingml/2006/main">
               <a:ext uri="{FF2B5EF4-FFF2-40B4-BE49-F238E27FC236}">
-                <a16:creationId xmlns:a16="http://schemas.microsoft.com/office/drawing/2014/main" id="{024244DF-AB0F-4FF0-A944-7658C68CECFF}"/>
+                <a16:creationId xmlns:a16="http://schemas.microsoft.com/office/drawing/2014/main" id="{06A0FD8B-0334-4DC6-9B75-85510BEC522B}"/>
               </a:ext>
             </a:extLst>
           </p:cNvPr>
@@ -12604,7 +11788,7 @@
             <a:pPr algn="l">
               <a:defRPr sz="825" b="0">
                 <a:solidFill>
-                  <a:srgbClr val="5B6472"/>
+                  <a:srgbClr val="4B5563"/>
                 </a:solidFill>
                 <a:latin typeface="Aptos"/>
                 <a:ea typeface="Aptos"/>
@@ -12614,7 +11798,7 @@
             <a:r>
               <a:rPr sz="825" b="0">
                 <a:solidFill>
-                  <a:srgbClr val="5B6472"/>
+                  <a:srgbClr val="4B5563"/>
                 </a:solidFill>
                 <a:latin typeface="Aptos"/>
                 <a:ea typeface="Aptos"/>
@@ -12630,7 +11814,7 @@
           <p:cNvPr id="58" name="">
             <a:extLst xmlns:a="http://schemas.openxmlformats.org/drawingml/2006/main">
               <a:ext uri="{FF2B5EF4-FFF2-40B4-BE49-F238E27FC236}">
-                <a16:creationId xmlns:a16="http://schemas.microsoft.com/office/drawing/2014/main" id="{D1C8F91E-3B26-4F8E-9BE2-3F42583EBDC3}"/>
+                <a16:creationId xmlns:a16="http://schemas.microsoft.com/office/drawing/2014/main" id="{458E305E-9BB0-4602-B59C-445BE3E5C0B8}"/>
               </a:ext>
             </a:extLst>
           </p:cNvPr>
@@ -12668,7 +11852,7 @@
             <a:pPr algn="r">
               <a:defRPr sz="900" b="1">
                 <a:solidFill>
-                  <a:srgbClr val="5B6472"/>
+                  <a:srgbClr val="4B5563"/>
                 </a:solidFill>
                 <a:latin typeface="Aptos"/>
                 <a:ea typeface="Aptos"/>
@@ -12678,7 +11862,7 @@
             <a:r>
               <a:rPr sz="900" b="1">
                 <a:solidFill>
-                  <a:srgbClr val="5B6472"/>
+                  <a:srgbClr val="4B5563"/>
                 </a:solidFill>
                 <a:latin typeface="Aptos"/>
                 <a:ea typeface="Aptos"/>
@@ -12692,7 +11876,7 @@
     </p:spTree>
     <p:extLst>
       <p:ext uri="{BB962C8B-B14F-4D97-AF65-F5344CB8AC3E}">
-        <p14:creationId xmlns:p14="http://schemas.microsoft.com/office/powerpoint/2010/main" val="452155587"/>
+        <p14:creationId xmlns:p14="http://schemas.microsoft.com/office/powerpoint/2010/main" val="982004535"/>
       </p:ext>
     </p:extLst>
   </p:cSld>
@@ -12716,7 +11900,7 @@
           <p:cNvPr id="1" name="">
             <a:extLst xmlns:a="http://schemas.openxmlformats.org/drawingml/2006/main">
               <a:ext uri="{FF2B5EF4-FFF2-40B4-BE49-F238E27FC236}">
-                <a16:creationId xmlns:a16="http://schemas.microsoft.com/office/drawing/2014/main" id="{BE5A0273-7D53-4398-B213-6B7A7DF26055}"/>
+                <a16:creationId xmlns:a16="http://schemas.microsoft.com/office/drawing/2014/main" id="{466DF93B-A856-4059-B834-D18030FC9CC3}"/>
               </a:ext>
             </a:extLst>
           </p:cNvPr>
@@ -12734,7 +11918,7 @@
             <a:avLst/>
           </a:prstGeom>
           <a:solidFill xmlns:a="http://schemas.openxmlformats.org/drawingml/2006/main">
-            <a:srgbClr val="F7F3EA"/>
+            <a:srgbClr val="FFFFFF"/>
           </a:solidFill>
           <a:ln xmlns:a="http://schemas.openxmlformats.org/drawingml/2006/main" w="0">
             <a:solidFill>
@@ -12751,7 +11935,7 @@
           <p:cNvPr id="2" name="kicker-marker-6">
             <a:extLst xmlns:a="http://schemas.openxmlformats.org/drawingml/2006/main">
               <a:ext uri="{FF2B5EF4-FFF2-40B4-BE49-F238E27FC236}">
-                <a16:creationId xmlns:a16="http://schemas.microsoft.com/office/drawing/2014/main" id="{26C0B3C4-0431-4144-8E2B-3CDF8442A6C5}"/>
+                <a16:creationId xmlns:a16="http://schemas.microsoft.com/office/drawing/2014/main" id="{8956A0B1-B8D7-4DF0-8E33-5BB7BAA7A91D}"/>
               </a:ext>
             </a:extLst>
           </p:cNvPr>
@@ -12786,7 +11970,7 @@
           <p:cNvPr id="3" name="kicker-label-6">
             <a:extLst xmlns:a="http://schemas.openxmlformats.org/drawingml/2006/main">
               <a:ext uri="{FF2B5EF4-FFF2-40B4-BE49-F238E27FC236}">
-                <a16:creationId xmlns:a16="http://schemas.microsoft.com/office/drawing/2014/main" id="{40BE2D8A-3C8F-4311-AF6D-BD8AECA99C8B}"/>
+                <a16:creationId xmlns:a16="http://schemas.microsoft.com/office/drawing/2014/main" id="{E77C5564-A24D-42E6-AC7D-4D3628AD7F1C}"/>
               </a:ext>
             </a:extLst>
           </p:cNvPr>
@@ -12824,7 +12008,7 @@
             <a:pPr algn="l">
               <a:defRPr sz="825" b="1">
                 <a:solidFill>
-                  <a:srgbClr val="5B6472"/>
+                  <a:srgbClr val="4B5563"/>
                 </a:solidFill>
                 <a:latin typeface="Aptos"/>
                 <a:ea typeface="Aptos"/>
@@ -12834,13 +12018,13 @@
             <a:r>
               <a:rPr sz="825" b="1">
                 <a:solidFill>
-                  <a:srgbClr val="5B6472"/>
-                </a:solidFill>
-                <a:latin typeface="Aptos"/>
-                <a:ea typeface="Aptos"/>
-                <a:cs typeface="Aptos"/>
-              </a:rPr>
-              <a:t>TEMPORAL BEHAVIOR</a:t>
+                  <a:srgbClr val="4B5563"/>
+                </a:solidFill>
+                <a:latin typeface="Aptos"/>
+                <a:ea typeface="Aptos"/>
+                <a:cs typeface="Aptos"/>
+              </a:rPr>
+              <a:t>PART A</a:t>
             </a:r>
           </a:p>
         </p:txBody>
@@ -12850,7 +12034,7 @@
           <p:cNvPr id="4" name="">
             <a:extLst xmlns:a="http://schemas.openxmlformats.org/drawingml/2006/main">
               <a:ext uri="{FF2B5EF4-FFF2-40B4-BE49-F238E27FC236}">
-                <a16:creationId xmlns:a16="http://schemas.microsoft.com/office/drawing/2014/main" id="{EC4AA343-E9BB-4ED6-A45F-28D6EBA333A0}"/>
+                <a16:creationId xmlns:a16="http://schemas.microsoft.com/office/drawing/2014/main" id="{6FF63528-8939-4F51-9F6B-1EFEBE4456D3}"/>
               </a:ext>
             </a:extLst>
           </p:cNvPr>
@@ -12904,7 +12088,7 @@
                 <a:ea typeface="Aptos Display"/>
                 <a:cs typeface="Aptos Display"/>
               </a:rPr>
-              <a:t>Listening peaks on weekends and in the evening.</a:t>
+              <a:t>Listening Time Analysis</a:t>
             </a:r>
           </a:p>
         </p:txBody>
@@ -12914,7 +12098,7 @@
           <p:cNvPr id="5" name="">
             <a:extLst xmlns:a="http://schemas.openxmlformats.org/drawingml/2006/main">
               <a:ext uri="{FF2B5EF4-FFF2-40B4-BE49-F238E27FC236}">
-                <a16:creationId xmlns:a16="http://schemas.microsoft.com/office/drawing/2014/main" id="{D580DEF1-B298-434A-9D84-EBA18E0CC451}"/>
+                <a16:creationId xmlns:a16="http://schemas.microsoft.com/office/drawing/2014/main" id="{AC15CBEC-F722-4C07-A82E-1B6A231433F8}"/>
               </a:ext>
             </a:extLst>
           </p:cNvPr>
@@ -12952,7 +12136,7 @@
             <a:pPr algn="l">
               <a:defRPr sz="1125" b="0">
                 <a:solidFill>
-                  <a:srgbClr val="5B6472"/>
+                  <a:srgbClr val="4B5563"/>
                 </a:solidFill>
                 <a:latin typeface="Aptos"/>
                 <a:ea typeface="Aptos"/>
@@ -12962,13 +12146,13 @@
             <a:r>
               <a:rPr sz="1125" b="0">
                 <a:solidFill>
-                  <a:srgbClr val="5B6472"/>
-                </a:solidFill>
-                <a:latin typeface="Aptos"/>
-                <a:ea typeface="Aptos"/>
-                <a:cs typeface="Aptos"/>
-              </a:rPr>
-              <a:t>Spark time features expose when users are most active across the sampled listening history.</a:t>
+                  <a:srgbClr val="4B5563"/>
+                </a:solidFill>
+                <a:latin typeface="Aptos"/>
+                <a:ea typeface="Aptos"/>
+                <a:cs typeface="Aptos"/>
+              </a:rPr>
+              <a:t>Timestamp features are used to compare listening activity by day and hour.</a:t>
             </a:r>
           </a:p>
         </p:txBody>
@@ -12978,7 +12162,7 @@
           <p:cNvPr id="6" name="">
             <a:extLst xmlns:a="http://schemas.openxmlformats.org/drawingml/2006/main">
               <a:ext uri="{FF2B5EF4-FFF2-40B4-BE49-F238E27FC236}">
-                <a16:creationId xmlns:a16="http://schemas.microsoft.com/office/drawing/2014/main" id="{62675A01-DB20-4B57-AB08-09D35C574D09}"/>
+                <a16:creationId xmlns:a16="http://schemas.microsoft.com/office/drawing/2014/main" id="{A7521D8C-9554-4FDD-8975-06E9411DE208}"/>
               </a:ext>
             </a:extLst>
           </p:cNvPr>
@@ -13042,7 +12226,7 @@
           <p:cNvPr id="7" name="">
             <a:extLst xmlns:a="http://schemas.openxmlformats.org/drawingml/2006/main">
               <a:ext uri="{FF2B5EF4-FFF2-40B4-BE49-F238E27FC236}">
-                <a16:creationId xmlns:a16="http://schemas.microsoft.com/office/drawing/2014/main" id="{D090D161-A066-42B7-B738-1D9EF1707C7F}"/>
+                <a16:creationId xmlns:a16="http://schemas.microsoft.com/office/drawing/2014/main" id="{D5D5B07B-68CE-4423-B522-9433486FA1C7}"/>
               </a:ext>
             </a:extLst>
           </p:cNvPr>
@@ -13077,7 +12261,7 @@
           <p:cNvPr id="8" name="">
             <a:extLst xmlns:a="http://schemas.openxmlformats.org/drawingml/2006/main">
               <a:ext uri="{FF2B5EF4-FFF2-40B4-BE49-F238E27FC236}">
-                <a16:creationId xmlns:a16="http://schemas.microsoft.com/office/drawing/2014/main" id="{DC3AC00E-B252-42DA-BD51-53421C5D99E5}"/>
+                <a16:creationId xmlns:a16="http://schemas.microsoft.com/office/drawing/2014/main" id="{D678FC17-A0AB-45A7-96B8-EF6BEFEDAD52}"/>
               </a:ext>
             </a:extLst>
           </p:cNvPr>
@@ -13115,7 +12299,7 @@
             <a:pPr algn="ctr">
               <a:defRPr sz="825" b="0">
                 <a:solidFill>
-                  <a:srgbClr val="5B6472"/>
+                  <a:srgbClr val="4B5563"/>
                 </a:solidFill>
                 <a:latin typeface="Aptos"/>
                 <a:ea typeface="Aptos"/>
@@ -13125,7 +12309,7 @@
             <a:r>
               <a:rPr sz="825" b="0">
                 <a:solidFill>
-                  <a:srgbClr val="5B6472"/>
+                  <a:srgbClr val="4B5563"/>
                 </a:solidFill>
                 <a:latin typeface="Aptos"/>
                 <a:ea typeface="Aptos"/>
@@ -13141,7 +12325,7 @@
           <p:cNvPr id="9" name="">
             <a:extLst xmlns:a="http://schemas.openxmlformats.org/drawingml/2006/main">
               <a:ext uri="{FF2B5EF4-FFF2-40B4-BE49-F238E27FC236}">
-                <a16:creationId xmlns:a16="http://schemas.microsoft.com/office/drawing/2014/main" id="{2376EF02-CD1D-4A08-AE96-2889CBAB879B}"/>
+                <a16:creationId xmlns:a16="http://schemas.microsoft.com/office/drawing/2014/main" id="{16A73EB8-9688-4F0D-8AF0-35E6A5F9EDED}"/>
               </a:ext>
             </a:extLst>
           </p:cNvPr>
@@ -13176,7 +12360,7 @@
           <p:cNvPr id="10" name="">
             <a:extLst xmlns:a="http://schemas.openxmlformats.org/drawingml/2006/main">
               <a:ext uri="{FF2B5EF4-FFF2-40B4-BE49-F238E27FC236}">
-                <a16:creationId xmlns:a16="http://schemas.microsoft.com/office/drawing/2014/main" id="{9EC053BA-F412-4CE4-A172-69E56137501F}"/>
+                <a16:creationId xmlns:a16="http://schemas.microsoft.com/office/drawing/2014/main" id="{21AB70A4-65F1-4638-A3AA-63091B8A5709}"/>
               </a:ext>
             </a:extLst>
           </p:cNvPr>
@@ -13214,7 +12398,7 @@
             <a:pPr algn="ctr">
               <a:defRPr sz="825" b="0">
                 <a:solidFill>
-                  <a:srgbClr val="5B6472"/>
+                  <a:srgbClr val="4B5563"/>
                 </a:solidFill>
                 <a:latin typeface="Aptos"/>
                 <a:ea typeface="Aptos"/>
@@ -13224,7 +12408,7 @@
             <a:r>
               <a:rPr sz="825" b="0">
                 <a:solidFill>
-                  <a:srgbClr val="5B6472"/>
+                  <a:srgbClr val="4B5563"/>
                 </a:solidFill>
                 <a:latin typeface="Aptos"/>
                 <a:ea typeface="Aptos"/>
@@ -13240,7 +12424,7 @@
           <p:cNvPr id="11" name="">
             <a:extLst xmlns:a="http://schemas.openxmlformats.org/drawingml/2006/main">
               <a:ext uri="{FF2B5EF4-FFF2-40B4-BE49-F238E27FC236}">
-                <a16:creationId xmlns:a16="http://schemas.microsoft.com/office/drawing/2014/main" id="{05344F5D-EF8E-456D-875E-1A0E932626E3}"/>
+                <a16:creationId xmlns:a16="http://schemas.microsoft.com/office/drawing/2014/main" id="{D3CE9A9E-E9F7-42BD-A3DA-6B06D48B2219}"/>
               </a:ext>
             </a:extLst>
           </p:cNvPr>
@@ -13275,7 +12459,7 @@
           <p:cNvPr id="12" name="">
             <a:extLst xmlns:a="http://schemas.openxmlformats.org/drawingml/2006/main">
               <a:ext uri="{FF2B5EF4-FFF2-40B4-BE49-F238E27FC236}">
-                <a16:creationId xmlns:a16="http://schemas.microsoft.com/office/drawing/2014/main" id="{F1822220-4152-477F-AE43-FEA96BACA430}"/>
+                <a16:creationId xmlns:a16="http://schemas.microsoft.com/office/drawing/2014/main" id="{7D11F0AC-1D07-48A8-B0D1-EC6124008322}"/>
               </a:ext>
             </a:extLst>
           </p:cNvPr>
@@ -13313,7 +12497,7 @@
             <a:pPr algn="ctr">
               <a:defRPr sz="825" b="0">
                 <a:solidFill>
-                  <a:srgbClr val="5B6472"/>
+                  <a:srgbClr val="4B5563"/>
                 </a:solidFill>
                 <a:latin typeface="Aptos"/>
                 <a:ea typeface="Aptos"/>
@@ -13323,7 +12507,7 @@
             <a:r>
               <a:rPr sz="825" b="0">
                 <a:solidFill>
-                  <a:srgbClr val="5B6472"/>
+                  <a:srgbClr val="4B5563"/>
                 </a:solidFill>
                 <a:latin typeface="Aptos"/>
                 <a:ea typeface="Aptos"/>
@@ -13339,7 +12523,7 @@
           <p:cNvPr id="13" name="">
             <a:extLst xmlns:a="http://schemas.openxmlformats.org/drawingml/2006/main">
               <a:ext uri="{FF2B5EF4-FFF2-40B4-BE49-F238E27FC236}">
-                <a16:creationId xmlns:a16="http://schemas.microsoft.com/office/drawing/2014/main" id="{0011BCB0-5561-48E7-8C59-2C1CA232F2A3}"/>
+                <a16:creationId xmlns:a16="http://schemas.microsoft.com/office/drawing/2014/main" id="{2AA317C8-56E5-4BCB-9263-4FD86171D6FD}"/>
               </a:ext>
             </a:extLst>
           </p:cNvPr>
@@ -13374,7 +12558,7 @@
           <p:cNvPr id="14" name="">
             <a:extLst xmlns:a="http://schemas.openxmlformats.org/drawingml/2006/main">
               <a:ext uri="{FF2B5EF4-FFF2-40B4-BE49-F238E27FC236}">
-                <a16:creationId xmlns:a16="http://schemas.microsoft.com/office/drawing/2014/main" id="{56EF08F7-1010-4AF3-80E6-69157308345B}"/>
+                <a16:creationId xmlns:a16="http://schemas.microsoft.com/office/drawing/2014/main" id="{610ED81E-D8BB-4585-9439-07F38270F9CB}"/>
               </a:ext>
             </a:extLst>
           </p:cNvPr>
@@ -13412,7 +12596,7 @@
             <a:pPr algn="ctr">
               <a:defRPr sz="825" b="0">
                 <a:solidFill>
-                  <a:srgbClr val="5B6472"/>
+                  <a:srgbClr val="4B5563"/>
                 </a:solidFill>
                 <a:latin typeface="Aptos"/>
                 <a:ea typeface="Aptos"/>
@@ -13422,7 +12606,7 @@
             <a:r>
               <a:rPr sz="825" b="0">
                 <a:solidFill>
-                  <a:srgbClr val="5B6472"/>
+                  <a:srgbClr val="4B5563"/>
                 </a:solidFill>
                 <a:latin typeface="Aptos"/>
                 <a:ea typeface="Aptos"/>
@@ -13438,7 +12622,7 @@
           <p:cNvPr id="15" name="">
             <a:extLst xmlns:a="http://schemas.openxmlformats.org/drawingml/2006/main">
               <a:ext uri="{FF2B5EF4-FFF2-40B4-BE49-F238E27FC236}">
-                <a16:creationId xmlns:a16="http://schemas.microsoft.com/office/drawing/2014/main" id="{C6C344E5-4667-4937-886C-2BC241CBBC1B}"/>
+                <a16:creationId xmlns:a16="http://schemas.microsoft.com/office/drawing/2014/main" id="{F45C1071-094A-473B-B2E7-761EBF85AFED}"/>
               </a:ext>
             </a:extLst>
           </p:cNvPr>
@@ -13473,7 +12657,7 @@
           <p:cNvPr id="16" name="">
             <a:extLst xmlns:a="http://schemas.openxmlformats.org/drawingml/2006/main">
               <a:ext uri="{FF2B5EF4-FFF2-40B4-BE49-F238E27FC236}">
-                <a16:creationId xmlns:a16="http://schemas.microsoft.com/office/drawing/2014/main" id="{F8C44E60-0AB1-4E22-84F6-CA6B5D5C8D9F}"/>
+                <a16:creationId xmlns:a16="http://schemas.microsoft.com/office/drawing/2014/main" id="{AC018A72-043E-41BE-867B-425765E70E25}"/>
               </a:ext>
             </a:extLst>
           </p:cNvPr>
@@ -13511,7 +12695,7 @@
             <a:pPr algn="ctr">
               <a:defRPr sz="825" b="0">
                 <a:solidFill>
-                  <a:srgbClr val="5B6472"/>
+                  <a:srgbClr val="4B5563"/>
                 </a:solidFill>
                 <a:latin typeface="Aptos"/>
                 <a:ea typeface="Aptos"/>
@@ -13521,7 +12705,7 @@
             <a:r>
               <a:rPr sz="825" b="0">
                 <a:solidFill>
-                  <a:srgbClr val="5B6472"/>
+                  <a:srgbClr val="4B5563"/>
                 </a:solidFill>
                 <a:latin typeface="Aptos"/>
                 <a:ea typeface="Aptos"/>
@@ -13537,7 +12721,7 @@
           <p:cNvPr id="17" name="">
             <a:extLst xmlns:a="http://schemas.openxmlformats.org/drawingml/2006/main">
               <a:ext uri="{FF2B5EF4-FFF2-40B4-BE49-F238E27FC236}">
-                <a16:creationId xmlns:a16="http://schemas.microsoft.com/office/drawing/2014/main" id="{5B2C05AC-C59B-40FD-AA01-235D5365DEBA}"/>
+                <a16:creationId xmlns:a16="http://schemas.microsoft.com/office/drawing/2014/main" id="{A7391A99-DCFA-4124-BA3B-01DC831EE4E9}"/>
               </a:ext>
             </a:extLst>
           </p:cNvPr>
@@ -13572,7 +12756,7 @@
           <p:cNvPr id="18" name="">
             <a:extLst xmlns:a="http://schemas.openxmlformats.org/drawingml/2006/main">
               <a:ext uri="{FF2B5EF4-FFF2-40B4-BE49-F238E27FC236}">
-                <a16:creationId xmlns:a16="http://schemas.microsoft.com/office/drawing/2014/main" id="{4B7CBC81-248A-41E4-B7B2-AE012E1560CE}"/>
+                <a16:creationId xmlns:a16="http://schemas.microsoft.com/office/drawing/2014/main" id="{7A9CC562-6931-4C31-A07C-83EF18FD0082}"/>
               </a:ext>
             </a:extLst>
           </p:cNvPr>
@@ -13610,7 +12794,7 @@
             <a:pPr algn="ctr">
               <a:defRPr sz="825" b="0">
                 <a:solidFill>
-                  <a:srgbClr val="5B6472"/>
+                  <a:srgbClr val="4B5563"/>
                 </a:solidFill>
                 <a:latin typeface="Aptos"/>
                 <a:ea typeface="Aptos"/>
@@ -13620,7 +12804,7 @@
             <a:r>
               <a:rPr sz="825" b="0">
                 <a:solidFill>
-                  <a:srgbClr val="5B6472"/>
+                  <a:srgbClr val="4B5563"/>
                 </a:solidFill>
                 <a:latin typeface="Aptos"/>
                 <a:ea typeface="Aptos"/>
@@ -13636,7 +12820,7 @@
           <p:cNvPr id="19" name="">
             <a:extLst xmlns:a="http://schemas.openxmlformats.org/drawingml/2006/main">
               <a:ext uri="{FF2B5EF4-FFF2-40B4-BE49-F238E27FC236}">
-                <a16:creationId xmlns:a16="http://schemas.microsoft.com/office/drawing/2014/main" id="{2A00B698-215A-41AE-88AA-98A5CCC37454}"/>
+                <a16:creationId xmlns:a16="http://schemas.microsoft.com/office/drawing/2014/main" id="{29209F96-DC00-4478-A793-779F34645AA2}"/>
               </a:ext>
             </a:extLst>
           </p:cNvPr>
@@ -13671,7 +12855,7 @@
           <p:cNvPr id="20" name="">
             <a:extLst xmlns:a="http://schemas.openxmlformats.org/drawingml/2006/main">
               <a:ext uri="{FF2B5EF4-FFF2-40B4-BE49-F238E27FC236}">
-                <a16:creationId xmlns:a16="http://schemas.microsoft.com/office/drawing/2014/main" id="{49440DAA-3145-4614-AB63-88E02ABED8D3}"/>
+                <a16:creationId xmlns:a16="http://schemas.microsoft.com/office/drawing/2014/main" id="{0406CF45-3158-4CC4-A2BB-143BC2AFA1DF}"/>
               </a:ext>
             </a:extLst>
           </p:cNvPr>
@@ -13709,7 +12893,7 @@
             <a:pPr algn="ctr">
               <a:defRPr sz="825" b="0">
                 <a:solidFill>
-                  <a:srgbClr val="5B6472"/>
+                  <a:srgbClr val="4B5563"/>
                 </a:solidFill>
                 <a:latin typeface="Aptos"/>
                 <a:ea typeface="Aptos"/>
@@ -13719,7 +12903,7 @@
             <a:r>
               <a:rPr sz="825" b="0">
                 <a:solidFill>
-                  <a:srgbClr val="5B6472"/>
+                  <a:srgbClr val="4B5563"/>
                 </a:solidFill>
                 <a:latin typeface="Aptos"/>
                 <a:ea typeface="Aptos"/>
@@ -13735,7 +12919,7 @@
           <p:cNvPr id="21" name="">
             <a:extLst xmlns:a="http://schemas.openxmlformats.org/drawingml/2006/main">
               <a:ext uri="{FF2B5EF4-FFF2-40B4-BE49-F238E27FC236}">
-                <a16:creationId xmlns:a16="http://schemas.microsoft.com/office/drawing/2014/main" id="{4161E364-329C-4F57-83D7-9FA917FC7348}"/>
+                <a16:creationId xmlns:a16="http://schemas.microsoft.com/office/drawing/2014/main" id="{170E450F-7780-4465-A681-F13FD1EBA7CF}"/>
               </a:ext>
             </a:extLst>
           </p:cNvPr>
@@ -13799,7 +12983,7 @@
           <p:cNvPr id="22" name="">
             <a:extLst xmlns:a="http://schemas.openxmlformats.org/drawingml/2006/main">
               <a:ext uri="{FF2B5EF4-FFF2-40B4-BE49-F238E27FC236}">
-                <a16:creationId xmlns:a16="http://schemas.microsoft.com/office/drawing/2014/main" id="{1368A4C5-1B0E-496E-8398-7D5E19328C7C}"/>
+                <a16:creationId xmlns:a16="http://schemas.microsoft.com/office/drawing/2014/main" id="{07C66490-80C3-4A53-B1FE-4C9B19540588}"/>
               </a:ext>
             </a:extLst>
           </p:cNvPr>
@@ -13834,7 +13018,7 @@
           <p:cNvPr id="23" name="">
             <a:extLst xmlns:a="http://schemas.openxmlformats.org/drawingml/2006/main">
               <a:ext uri="{FF2B5EF4-FFF2-40B4-BE49-F238E27FC236}">
-                <a16:creationId xmlns:a16="http://schemas.microsoft.com/office/drawing/2014/main" id="{FC787B9B-0A26-4ACC-A811-C3BCE15C8DD8}"/>
+                <a16:creationId xmlns:a16="http://schemas.microsoft.com/office/drawing/2014/main" id="{AAC5BBA3-6D01-42BD-BDBE-8F3DBEF8CF84}"/>
               </a:ext>
             </a:extLst>
           </p:cNvPr>
@@ -13872,7 +13056,7 @@
             <a:pPr algn="ctr">
               <a:defRPr sz="825" b="0">
                 <a:solidFill>
-                  <a:srgbClr val="5B6472"/>
+                  <a:srgbClr val="4B5563"/>
                 </a:solidFill>
                 <a:latin typeface="Aptos"/>
                 <a:ea typeface="Aptos"/>
@@ -13882,7 +13066,7 @@
             <a:r>
               <a:rPr sz="825" b="0">
                 <a:solidFill>
-                  <a:srgbClr val="5B6472"/>
+                  <a:srgbClr val="4B5563"/>
                 </a:solidFill>
                 <a:latin typeface="Aptos"/>
                 <a:ea typeface="Aptos"/>
@@ -13898,7 +13082,7 @@
           <p:cNvPr id="24" name="">
             <a:extLst xmlns:a="http://schemas.openxmlformats.org/drawingml/2006/main">
               <a:ext uri="{FF2B5EF4-FFF2-40B4-BE49-F238E27FC236}">
-                <a16:creationId xmlns:a16="http://schemas.microsoft.com/office/drawing/2014/main" id="{A149FB9F-5B6C-417E-96E9-D97D8FE873C5}"/>
+                <a16:creationId xmlns:a16="http://schemas.microsoft.com/office/drawing/2014/main" id="{CBDEAAE2-433F-470B-827D-FBD6CDA3642E}"/>
               </a:ext>
             </a:extLst>
           </p:cNvPr>
@@ -13933,7 +13117,7 @@
           <p:cNvPr id="25" name="">
             <a:extLst xmlns:a="http://schemas.openxmlformats.org/drawingml/2006/main">
               <a:ext uri="{FF2B5EF4-FFF2-40B4-BE49-F238E27FC236}">
-                <a16:creationId xmlns:a16="http://schemas.microsoft.com/office/drawing/2014/main" id="{EB5318BD-F0F9-4E6F-837E-10B1E85587FB}"/>
+                <a16:creationId xmlns:a16="http://schemas.microsoft.com/office/drawing/2014/main" id="{D933FE03-0258-4FF1-9404-C853686BE29C}"/>
               </a:ext>
             </a:extLst>
           </p:cNvPr>
@@ -13971,7 +13155,7 @@
             <a:pPr algn="ctr">
               <a:defRPr sz="825" b="0">
                 <a:solidFill>
-                  <a:srgbClr val="5B6472"/>
+                  <a:srgbClr val="4B5563"/>
                 </a:solidFill>
                 <a:latin typeface="Aptos"/>
                 <a:ea typeface="Aptos"/>
@@ -13981,7 +13165,7 @@
             <a:r>
               <a:rPr sz="825" b="0">
                 <a:solidFill>
-                  <a:srgbClr val="5B6472"/>
+                  <a:srgbClr val="4B5563"/>
                 </a:solidFill>
                 <a:latin typeface="Aptos"/>
                 <a:ea typeface="Aptos"/>
@@ -13997,7 +13181,7 @@
           <p:cNvPr id="26" name="">
             <a:extLst xmlns:a="http://schemas.openxmlformats.org/drawingml/2006/main">
               <a:ext uri="{FF2B5EF4-FFF2-40B4-BE49-F238E27FC236}">
-                <a16:creationId xmlns:a16="http://schemas.microsoft.com/office/drawing/2014/main" id="{929A75DB-6257-4E13-BA7F-1A77157F25E0}"/>
+                <a16:creationId xmlns:a16="http://schemas.microsoft.com/office/drawing/2014/main" id="{AECF3CAE-C387-4E12-B0F9-DD616E5AE17A}"/>
               </a:ext>
             </a:extLst>
           </p:cNvPr>
@@ -14032,7 +13216,7 @@
           <p:cNvPr id="27" name="">
             <a:extLst xmlns:a="http://schemas.openxmlformats.org/drawingml/2006/main">
               <a:ext uri="{FF2B5EF4-FFF2-40B4-BE49-F238E27FC236}">
-                <a16:creationId xmlns:a16="http://schemas.microsoft.com/office/drawing/2014/main" id="{30AA43F9-E6DA-403E-9DF4-BCB6C0D2BE15}"/>
+                <a16:creationId xmlns:a16="http://schemas.microsoft.com/office/drawing/2014/main" id="{27AC585B-934C-44F7-B4DE-AECC0EB7AB99}"/>
               </a:ext>
             </a:extLst>
           </p:cNvPr>
@@ -14070,7 +13254,7 @@
             <a:pPr algn="ctr">
               <a:defRPr sz="825" b="0">
                 <a:solidFill>
-                  <a:srgbClr val="5B6472"/>
+                  <a:srgbClr val="4B5563"/>
                 </a:solidFill>
                 <a:latin typeface="Aptos"/>
                 <a:ea typeface="Aptos"/>
@@ -14080,7 +13264,7 @@
             <a:r>
               <a:rPr sz="825" b="0">
                 <a:solidFill>
-                  <a:srgbClr val="5B6472"/>
+                  <a:srgbClr val="4B5563"/>
                 </a:solidFill>
                 <a:latin typeface="Aptos"/>
                 <a:ea typeface="Aptos"/>
@@ -14096,7 +13280,7 @@
           <p:cNvPr id="28" name="">
             <a:extLst xmlns:a="http://schemas.openxmlformats.org/drawingml/2006/main">
               <a:ext uri="{FF2B5EF4-FFF2-40B4-BE49-F238E27FC236}">
-                <a16:creationId xmlns:a16="http://schemas.microsoft.com/office/drawing/2014/main" id="{557AC24C-9CCC-42F7-B99A-3F1A02D4D85C}"/>
+                <a16:creationId xmlns:a16="http://schemas.microsoft.com/office/drawing/2014/main" id="{82919988-47A8-4D7D-99E3-97048F989CB3}"/>
               </a:ext>
             </a:extLst>
           </p:cNvPr>
@@ -14131,7 +13315,7 @@
           <p:cNvPr id="29" name="">
             <a:extLst xmlns:a="http://schemas.openxmlformats.org/drawingml/2006/main">
               <a:ext uri="{FF2B5EF4-FFF2-40B4-BE49-F238E27FC236}">
-                <a16:creationId xmlns:a16="http://schemas.microsoft.com/office/drawing/2014/main" id="{7002E5D6-B0C9-44E7-9837-C2B97D253734}"/>
+                <a16:creationId xmlns:a16="http://schemas.microsoft.com/office/drawing/2014/main" id="{07A3BB6D-25F9-409B-AF13-F3A5E75964AE}"/>
               </a:ext>
             </a:extLst>
           </p:cNvPr>
@@ -14169,7 +13353,7 @@
             <a:pPr algn="ctr">
               <a:defRPr sz="825" b="0">
                 <a:solidFill>
-                  <a:srgbClr val="5B6472"/>
+                  <a:srgbClr val="4B5563"/>
                 </a:solidFill>
                 <a:latin typeface="Aptos"/>
                 <a:ea typeface="Aptos"/>
@@ -14179,7 +13363,7 @@
             <a:r>
               <a:rPr sz="825" b="0">
                 <a:solidFill>
-                  <a:srgbClr val="5B6472"/>
+                  <a:srgbClr val="4B5563"/>
                 </a:solidFill>
                 <a:latin typeface="Aptos"/>
                 <a:ea typeface="Aptos"/>
@@ -14195,7 +13379,7 @@
           <p:cNvPr id="30" name="">
             <a:extLst xmlns:a="http://schemas.openxmlformats.org/drawingml/2006/main">
               <a:ext uri="{FF2B5EF4-FFF2-40B4-BE49-F238E27FC236}">
-                <a16:creationId xmlns:a16="http://schemas.microsoft.com/office/drawing/2014/main" id="{C4FEA867-BEF8-4523-A60C-FF9822B40B2C}"/>
+                <a16:creationId xmlns:a16="http://schemas.microsoft.com/office/drawing/2014/main" id="{6CA1C8FD-EDCC-4082-B7A0-F7E917E63DDA}"/>
               </a:ext>
             </a:extLst>
           </p:cNvPr>
@@ -14230,7 +13414,7 @@
           <p:cNvPr id="31" name="">
             <a:extLst xmlns:a="http://schemas.openxmlformats.org/drawingml/2006/main">
               <a:ext uri="{FF2B5EF4-FFF2-40B4-BE49-F238E27FC236}">
-                <a16:creationId xmlns:a16="http://schemas.microsoft.com/office/drawing/2014/main" id="{7B5A11F9-761A-4041-958E-F485E5DB84CA}"/>
+                <a16:creationId xmlns:a16="http://schemas.microsoft.com/office/drawing/2014/main" id="{C622517D-D3B4-452E-B8A0-30F3BC67AAC7}"/>
               </a:ext>
             </a:extLst>
           </p:cNvPr>
@@ -14268,7 +13452,7 @@
             <a:pPr algn="ctr">
               <a:defRPr sz="825" b="0">
                 <a:solidFill>
-                  <a:srgbClr val="5B6472"/>
+                  <a:srgbClr val="4B5563"/>
                 </a:solidFill>
                 <a:latin typeface="Aptos"/>
                 <a:ea typeface="Aptos"/>
@@ -14278,7 +13462,7 @@
             <a:r>
               <a:rPr sz="825" b="0">
                 <a:solidFill>
-                  <a:srgbClr val="5B6472"/>
+                  <a:srgbClr val="4B5563"/>
                 </a:solidFill>
                 <a:latin typeface="Aptos"/>
                 <a:ea typeface="Aptos"/>
@@ -14294,7 +13478,7 @@
           <p:cNvPr id="32" name="">
             <a:extLst xmlns:a="http://schemas.openxmlformats.org/drawingml/2006/main">
               <a:ext uri="{FF2B5EF4-FFF2-40B4-BE49-F238E27FC236}">
-                <a16:creationId xmlns:a16="http://schemas.microsoft.com/office/drawing/2014/main" id="{868843A4-5931-4587-A0AF-F0717E893B0D}"/>
+                <a16:creationId xmlns:a16="http://schemas.microsoft.com/office/drawing/2014/main" id="{56023834-1262-456E-A306-0903B3357EEA}"/>
               </a:ext>
             </a:extLst>
           </p:cNvPr>
@@ -14329,7 +13513,7 @@
           <p:cNvPr id="33" name="">
             <a:extLst xmlns:a="http://schemas.openxmlformats.org/drawingml/2006/main">
               <a:ext uri="{FF2B5EF4-FFF2-40B4-BE49-F238E27FC236}">
-                <a16:creationId xmlns:a16="http://schemas.microsoft.com/office/drawing/2014/main" id="{09843A16-A165-49BF-BCDF-88F2FDD6B3E5}"/>
+                <a16:creationId xmlns:a16="http://schemas.microsoft.com/office/drawing/2014/main" id="{77051B65-7EBA-4DF7-BFA1-5AA067DA3905}"/>
               </a:ext>
             </a:extLst>
           </p:cNvPr>
@@ -14367,7 +13551,7 @@
             <a:pPr algn="ctr">
               <a:defRPr sz="825" b="0">
                 <a:solidFill>
-                  <a:srgbClr val="5B6472"/>
+                  <a:srgbClr val="4B5563"/>
                 </a:solidFill>
                 <a:latin typeface="Aptos"/>
                 <a:ea typeface="Aptos"/>
@@ -14377,7 +13561,7 @@
             <a:r>
               <a:rPr sz="825" b="0">
                 <a:solidFill>
-                  <a:srgbClr val="5B6472"/>
+                  <a:srgbClr val="4B5563"/>
                 </a:solidFill>
                 <a:latin typeface="Aptos"/>
                 <a:ea typeface="Aptos"/>
@@ -14393,7 +13577,7 @@
           <p:cNvPr id="34" name="">
             <a:extLst xmlns:a="http://schemas.openxmlformats.org/drawingml/2006/main">
               <a:ext uri="{FF2B5EF4-FFF2-40B4-BE49-F238E27FC236}">
-                <a16:creationId xmlns:a16="http://schemas.microsoft.com/office/drawing/2014/main" id="{74422563-D6C0-4305-916F-21C2972A07D2}"/>
+                <a16:creationId xmlns:a16="http://schemas.microsoft.com/office/drawing/2014/main" id="{A17F40B0-E9E5-4021-A181-00F9845DDB27}"/>
               </a:ext>
             </a:extLst>
           </p:cNvPr>
@@ -14428,7 +13612,7 @@
           <p:cNvPr id="35" name="">
             <a:extLst xmlns:a="http://schemas.openxmlformats.org/drawingml/2006/main">
               <a:ext uri="{FF2B5EF4-FFF2-40B4-BE49-F238E27FC236}">
-                <a16:creationId xmlns:a16="http://schemas.microsoft.com/office/drawing/2014/main" id="{C00C8F94-654F-4AF5-97CE-BBF400DC2C4C}"/>
+                <a16:creationId xmlns:a16="http://schemas.microsoft.com/office/drawing/2014/main" id="{A5787FD6-1C6E-408E-9918-1EF15A1112CA}"/>
               </a:ext>
             </a:extLst>
           </p:cNvPr>
@@ -14466,7 +13650,7 @@
             <a:pPr algn="ctr">
               <a:defRPr sz="825" b="0">
                 <a:solidFill>
-                  <a:srgbClr val="5B6472"/>
+                  <a:srgbClr val="4B5563"/>
                 </a:solidFill>
                 <a:latin typeface="Aptos"/>
                 <a:ea typeface="Aptos"/>
@@ -14476,7 +13660,7 @@
             <a:r>
               <a:rPr sz="825" b="0">
                 <a:solidFill>
-                  <a:srgbClr val="5B6472"/>
+                  <a:srgbClr val="4B5563"/>
                 </a:solidFill>
                 <a:latin typeface="Aptos"/>
                 <a:ea typeface="Aptos"/>
@@ -14492,7 +13676,7 @@
           <p:cNvPr id="36" name="">
             <a:extLst xmlns:a="http://schemas.openxmlformats.org/drawingml/2006/main">
               <a:ext uri="{FF2B5EF4-FFF2-40B4-BE49-F238E27FC236}">
-                <a16:creationId xmlns:a16="http://schemas.microsoft.com/office/drawing/2014/main" id="{4DD119CD-1F34-41AB-9475-6913B9304933}"/>
+                <a16:creationId xmlns:a16="http://schemas.microsoft.com/office/drawing/2014/main" id="{8343B13C-5094-44CC-B36D-62612E4C6A33}"/>
               </a:ext>
             </a:extLst>
           </p:cNvPr>
@@ -14527,7 +13711,7 @@
           <p:cNvPr id="37" name="">
             <a:extLst xmlns:a="http://schemas.openxmlformats.org/drawingml/2006/main">
               <a:ext uri="{FF2B5EF4-FFF2-40B4-BE49-F238E27FC236}">
-                <a16:creationId xmlns:a16="http://schemas.microsoft.com/office/drawing/2014/main" id="{7E7FC3A8-A912-4BBB-B525-4E6E137D4328}"/>
+                <a16:creationId xmlns:a16="http://schemas.microsoft.com/office/drawing/2014/main" id="{C8FBB4ED-C781-42ED-926E-0BAFD4AE6593}"/>
               </a:ext>
             </a:extLst>
           </p:cNvPr>
@@ -14562,7 +13746,7 @@
           <p:cNvPr id="38" name="">
             <a:extLst xmlns:a="http://schemas.openxmlformats.org/drawingml/2006/main">
               <a:ext uri="{FF2B5EF4-FFF2-40B4-BE49-F238E27FC236}">
-                <a16:creationId xmlns:a16="http://schemas.microsoft.com/office/drawing/2014/main" id="{D9BB9B29-BFE9-45FA-B442-8F94A05C1EE8}"/>
+                <a16:creationId xmlns:a16="http://schemas.microsoft.com/office/drawing/2014/main" id="{1E3DC9BA-8CEF-41D5-A78C-26399DA25DE8}"/>
               </a:ext>
             </a:extLst>
           </p:cNvPr>
@@ -14616,7 +13800,7 @@
                 <a:ea typeface="Aptos"/>
                 <a:cs typeface="Aptos"/>
               </a:rPr>
-              <a:t>Most active hour in the sample: 18:00 with 61,737 listening events. Sunday is the highest-volume day.</a:t>
+              <a:t>Result: Sunday has the highest listening volume, and 18:00 is the most active hour in the sample.</a:t>
             </a:r>
           </a:p>
         </p:txBody>
@@ -14626,7 +13810,7 @@
           <p:cNvPr id="39" name="">
             <a:extLst xmlns:a="http://schemas.openxmlformats.org/drawingml/2006/main">
               <a:ext uri="{FF2B5EF4-FFF2-40B4-BE49-F238E27FC236}">
-                <a16:creationId xmlns:a16="http://schemas.microsoft.com/office/drawing/2014/main" id="{03A961AB-30B1-46F9-8512-F4A26AC72093}"/>
+                <a16:creationId xmlns:a16="http://schemas.microsoft.com/office/drawing/2014/main" id="{E11DC232-0048-4C4B-8966-965466C32460}"/>
               </a:ext>
             </a:extLst>
           </p:cNvPr>
@@ -14664,7 +13848,7 @@
             <a:pPr algn="l">
               <a:defRPr sz="825" b="0">
                 <a:solidFill>
-                  <a:srgbClr val="5B6472"/>
+                  <a:srgbClr val="4B5563"/>
                 </a:solidFill>
                 <a:latin typeface="Aptos"/>
                 <a:ea typeface="Aptos"/>
@@ -14674,7 +13858,7 @@
             <a:r>
               <a:rPr sz="825" b="0">
                 <a:solidFill>
-                  <a:srgbClr val="5B6472"/>
+                  <a:srgbClr val="4B5563"/>
                 </a:solidFill>
                 <a:latin typeface="Aptos"/>
                 <a:ea typeface="Aptos"/>
@@ -14690,7 +13874,7 @@
           <p:cNvPr id="40" name="">
             <a:extLst xmlns:a="http://schemas.openxmlformats.org/drawingml/2006/main">
               <a:ext uri="{FF2B5EF4-FFF2-40B4-BE49-F238E27FC236}">
-                <a16:creationId xmlns:a16="http://schemas.microsoft.com/office/drawing/2014/main" id="{43E4EBFD-C923-47FD-8BBE-5B4D8FF1B55C}"/>
+                <a16:creationId xmlns:a16="http://schemas.microsoft.com/office/drawing/2014/main" id="{1E2310A2-3E33-4719-852D-6EB7BEB05BBD}"/>
               </a:ext>
             </a:extLst>
           </p:cNvPr>
@@ -14728,7 +13912,7 @@
             <a:pPr algn="r">
               <a:defRPr sz="900" b="1">
                 <a:solidFill>
-                  <a:srgbClr val="5B6472"/>
+                  <a:srgbClr val="4B5563"/>
                 </a:solidFill>
                 <a:latin typeface="Aptos"/>
                 <a:ea typeface="Aptos"/>
@@ -14738,7 +13922,7 @@
             <a:r>
               <a:rPr sz="900" b="1">
                 <a:solidFill>
-                  <a:srgbClr val="5B6472"/>
+                  <a:srgbClr val="4B5563"/>
                 </a:solidFill>
                 <a:latin typeface="Aptos"/>
                 <a:ea typeface="Aptos"/>
@@ -14752,7 +13936,7 @@
     </p:spTree>
     <p:extLst>
       <p:ext uri="{BB962C8B-B14F-4D97-AF65-F5344CB8AC3E}">
-        <p14:creationId xmlns:p14="http://schemas.microsoft.com/office/powerpoint/2010/main" val="73914527"/>
+        <p14:creationId xmlns:p14="http://schemas.microsoft.com/office/powerpoint/2010/main" val="1757182239"/>
       </p:ext>
     </p:extLst>
   </p:cSld>
@@ -14776,7 +13960,7 @@
           <p:cNvPr id="1" name="">
             <a:extLst xmlns:a="http://schemas.openxmlformats.org/drawingml/2006/main">
               <a:ext uri="{FF2B5EF4-FFF2-40B4-BE49-F238E27FC236}">
-                <a16:creationId xmlns:a16="http://schemas.microsoft.com/office/drawing/2014/main" id="{81067F87-B9D9-4190-8941-649D9C6206B2}"/>
+                <a16:creationId xmlns:a16="http://schemas.microsoft.com/office/drawing/2014/main" id="{8A82BF4D-A80B-4CE6-BB6D-7A3E3376875E}"/>
               </a:ext>
             </a:extLst>
           </p:cNvPr>
@@ -14794,7 +13978,7 @@
             <a:avLst/>
           </a:prstGeom>
           <a:solidFill xmlns:a="http://schemas.openxmlformats.org/drawingml/2006/main">
-            <a:srgbClr val="F7F3EA"/>
+            <a:srgbClr val="FFFFFF"/>
           </a:solidFill>
           <a:ln xmlns:a="http://schemas.openxmlformats.org/drawingml/2006/main" w="0">
             <a:solidFill>
@@ -14811,7 +13995,7 @@
           <p:cNvPr id="2" name="kicker-marker-7">
             <a:extLst xmlns:a="http://schemas.openxmlformats.org/drawingml/2006/main">
               <a:ext uri="{FF2B5EF4-FFF2-40B4-BE49-F238E27FC236}">
-                <a16:creationId xmlns:a16="http://schemas.microsoft.com/office/drawing/2014/main" id="{601CDF7C-E1C8-4F69-9B88-0410C3212A5E}"/>
+                <a16:creationId xmlns:a16="http://schemas.microsoft.com/office/drawing/2014/main" id="{36932361-BE09-4442-B3B6-1444F93916C4}"/>
               </a:ext>
             </a:extLst>
           </p:cNvPr>
@@ -14846,7 +14030,7 @@
           <p:cNvPr id="3" name="kicker-label-7">
             <a:extLst xmlns:a="http://schemas.openxmlformats.org/drawingml/2006/main">
               <a:ext uri="{FF2B5EF4-FFF2-40B4-BE49-F238E27FC236}">
-                <a16:creationId xmlns:a16="http://schemas.microsoft.com/office/drawing/2014/main" id="{2E8D4F94-06A0-4810-B534-796C9A35665E}"/>
+                <a16:creationId xmlns:a16="http://schemas.microsoft.com/office/drawing/2014/main" id="{05A20CB9-4851-48AB-8E42-65B8F8685D9D}"/>
               </a:ext>
             </a:extLst>
           </p:cNvPr>
@@ -14884,7 +14068,7 @@
             <a:pPr algn="l">
               <a:defRPr sz="825" b="1">
                 <a:solidFill>
-                  <a:srgbClr val="5B6472"/>
+                  <a:srgbClr val="4B5563"/>
                 </a:solidFill>
                 <a:latin typeface="Aptos"/>
                 <a:ea typeface="Aptos"/>
@@ -14894,13 +14078,13 @@
             <a:r>
               <a:rPr sz="825" b="1">
                 <a:solidFill>
-                  <a:srgbClr val="5B6472"/>
-                </a:solidFill>
-                <a:latin typeface="Aptos"/>
-                <a:ea typeface="Aptos"/>
-                <a:cs typeface="Aptos"/>
-              </a:rPr>
-              <a:t>SPARK ML SEGMENTATION</a:t>
+                  <a:srgbClr val="4B5563"/>
+                </a:solidFill>
+                <a:latin typeface="Aptos"/>
+                <a:ea typeface="Aptos"/>
+                <a:cs typeface="Aptos"/>
+              </a:rPr>
+              <a:t>PART A</a:t>
             </a:r>
           </a:p>
         </p:txBody>
@@ -14910,7 +14094,7 @@
           <p:cNvPr id="4" name="">
             <a:extLst xmlns:a="http://schemas.openxmlformats.org/drawingml/2006/main">
               <a:ext uri="{FF2B5EF4-FFF2-40B4-BE49-F238E27FC236}">
-                <a16:creationId xmlns:a16="http://schemas.microsoft.com/office/drawing/2014/main" id="{EC2A025C-A954-4608-BC72-99F34B1EC8F8}"/>
+                <a16:creationId xmlns:a16="http://schemas.microsoft.com/office/drawing/2014/main" id="{42D734B2-95F5-4428-ADFF-6357AB8A1E76}"/>
               </a:ext>
             </a:extLst>
           </p:cNvPr>
@@ -14964,7 +14148,7 @@
                 <a:ea typeface="Aptos Display"/>
                 <a:cs typeface="Aptos Display"/>
               </a:rPr>
-              <a:t>KMeans separates listeners by volume, diversity, and repeat behavior.</a:t>
+              <a:t>User Segmentation With KMeans</a:t>
             </a:r>
           </a:p>
         </p:txBody>
@@ -14974,7 +14158,7 @@
           <p:cNvPr id="5" name="">
             <a:extLst xmlns:a="http://schemas.openxmlformats.org/drawingml/2006/main">
               <a:ext uri="{FF2B5EF4-FFF2-40B4-BE49-F238E27FC236}">
-                <a16:creationId xmlns:a16="http://schemas.microsoft.com/office/drawing/2014/main" id="{C6D754BC-81B7-41DF-92CA-FEA825D012E4}"/>
+                <a16:creationId xmlns:a16="http://schemas.microsoft.com/office/drawing/2014/main" id="{69963B70-1F4A-4C1A-8FBA-9A8F27ED2437}"/>
               </a:ext>
             </a:extLst>
           </p:cNvPr>
@@ -15012,7 +14196,7 @@
             <a:pPr algn="l">
               <a:defRPr sz="1125" b="0">
                 <a:solidFill>
-                  <a:srgbClr val="5B6472"/>
+                  <a:srgbClr val="4B5563"/>
                 </a:solidFill>
                 <a:latin typeface="Aptos"/>
                 <a:ea typeface="Aptos"/>
@@ -15022,13 +14206,13 @@
             <a:r>
               <a:rPr sz="1125" b="0">
                 <a:solidFill>
-                  <a:srgbClr val="5B6472"/>
-                </a:solidFill>
-                <a:latin typeface="Aptos"/>
-                <a:ea typeface="Aptos"/>
-                <a:cs typeface="Aptos"/>
-              </a:rPr>
-              <a:t>Part A goes beyond EDA by training a Spark ML clustering model on engineered user behavior features.</a:t>
+                  <a:srgbClr val="4B5563"/>
+                </a:solidFill>
+                <a:latin typeface="Aptos"/>
+                <a:ea typeface="Aptos"/>
+                <a:cs typeface="Aptos"/>
+              </a:rPr>
+              <a:t>Spark ML groups listeners using volume, diversity, repeat behavior, and time-based features.</a:t>
             </a:r>
           </a:p>
         </p:txBody>
@@ -15038,7 +14222,7 @@
           <p:cNvPr id="6" name="">
             <a:extLst xmlns:a="http://schemas.openxmlformats.org/drawingml/2006/main">
               <a:ext uri="{FF2B5EF4-FFF2-40B4-BE49-F238E27FC236}">
-                <a16:creationId xmlns:a16="http://schemas.microsoft.com/office/drawing/2014/main" id="{752ACE97-493C-4313-8038-4E613494AFED}"/>
+                <a16:creationId xmlns:a16="http://schemas.microsoft.com/office/drawing/2014/main" id="{D277A083-F7CC-44CA-AF0F-AB54D9116CEC}"/>
               </a:ext>
             </a:extLst>
           </p:cNvPr>
@@ -15060,7 +14244,7 @@
           </a:solidFill>
           <a:ln xmlns:a="http://schemas.openxmlformats.org/drawingml/2006/main" w="9525">
             <a:solidFill>
-              <a:srgbClr val="D8D0C2"/>
+              <a:srgbClr val="E5E7EB"/>
             </a:solidFill>
             <a:prstDash val="solid"/>
           </a:ln>
@@ -15071,7 +14255,7 @@
           <p:cNvPr id="7" name="">
             <a:extLst xmlns:a="http://schemas.openxmlformats.org/drawingml/2006/main">
               <a:ext uri="{FF2B5EF4-FFF2-40B4-BE49-F238E27FC236}">
-                <a16:creationId xmlns:a16="http://schemas.microsoft.com/office/drawing/2014/main" id="{0E335A87-23B3-4C01-A5BB-E85F7E90FC9E}"/>
+                <a16:creationId xmlns:a16="http://schemas.microsoft.com/office/drawing/2014/main" id="{37235C66-6462-4401-A05D-2AFD1798757B}"/>
               </a:ext>
             </a:extLst>
           </p:cNvPr>
@@ -15135,7 +14319,7 @@
           <p:cNvPr id="8" name="">
             <a:extLst xmlns:a="http://schemas.openxmlformats.org/drawingml/2006/main">
               <a:ext uri="{FF2B5EF4-FFF2-40B4-BE49-F238E27FC236}">
-                <a16:creationId xmlns:a16="http://schemas.microsoft.com/office/drawing/2014/main" id="{B64C829D-B790-44AF-8EDD-12F680F318A7}"/>
+                <a16:creationId xmlns:a16="http://schemas.microsoft.com/office/drawing/2014/main" id="{7556160B-CC61-49D6-B321-EBBE21F40F9E}"/>
               </a:ext>
             </a:extLst>
           </p:cNvPr>
@@ -15157,7 +14341,7 @@
           </a:solidFill>
           <a:ln xmlns:a="http://schemas.openxmlformats.org/drawingml/2006/main" w="9525">
             <a:solidFill>
-              <a:srgbClr val="D8D0C2"/>
+              <a:srgbClr val="E5E7EB"/>
             </a:solidFill>
             <a:prstDash val="solid"/>
           </a:ln>
@@ -15168,7 +14352,7 @@
           <p:cNvPr id="9" name="">
             <a:extLst xmlns:a="http://schemas.openxmlformats.org/drawingml/2006/main">
               <a:ext uri="{FF2B5EF4-FFF2-40B4-BE49-F238E27FC236}">
-                <a16:creationId xmlns:a16="http://schemas.microsoft.com/office/drawing/2014/main" id="{FA19FF19-D3EE-4A31-AEF2-5AE011FC1112}"/>
+                <a16:creationId xmlns:a16="http://schemas.microsoft.com/office/drawing/2014/main" id="{3375C836-5EC8-4788-A58A-07BC6F75CCB1}"/>
               </a:ext>
             </a:extLst>
           </p:cNvPr>
@@ -15232,7 +14416,7 @@
           <p:cNvPr id="10" name="">
             <a:extLst xmlns:a="http://schemas.openxmlformats.org/drawingml/2006/main">
               <a:ext uri="{FF2B5EF4-FFF2-40B4-BE49-F238E27FC236}">
-                <a16:creationId xmlns:a16="http://schemas.microsoft.com/office/drawing/2014/main" id="{0676AF36-7424-45B5-8532-B3472FDDF528}"/>
+                <a16:creationId xmlns:a16="http://schemas.microsoft.com/office/drawing/2014/main" id="{96BA68EB-BE5B-436C-8F5D-B87DCF2470AB}"/>
               </a:ext>
             </a:extLst>
           </p:cNvPr>
@@ -15254,7 +14438,7 @@
           </a:solidFill>
           <a:ln xmlns:a="http://schemas.openxmlformats.org/drawingml/2006/main" w="9525">
             <a:solidFill>
-              <a:srgbClr val="D8D0C2"/>
+              <a:srgbClr val="E5E7EB"/>
             </a:solidFill>
             <a:prstDash val="solid"/>
           </a:ln>
@@ -15265,7 +14449,7 @@
           <p:cNvPr id="11" name="">
             <a:extLst xmlns:a="http://schemas.openxmlformats.org/drawingml/2006/main">
               <a:ext uri="{FF2B5EF4-FFF2-40B4-BE49-F238E27FC236}">
-                <a16:creationId xmlns:a16="http://schemas.microsoft.com/office/drawing/2014/main" id="{D729CA6C-E8B9-4D49-938B-4AD2DEC05992}"/>
+                <a16:creationId xmlns:a16="http://schemas.microsoft.com/office/drawing/2014/main" id="{AADCE616-2546-4E31-A68E-FA03BDE32ABD}"/>
               </a:ext>
             </a:extLst>
           </p:cNvPr>
@@ -15329,7 +14513,7 @@
           <p:cNvPr id="12" name="">
             <a:extLst xmlns:a="http://schemas.openxmlformats.org/drawingml/2006/main">
               <a:ext uri="{FF2B5EF4-FFF2-40B4-BE49-F238E27FC236}">
-                <a16:creationId xmlns:a16="http://schemas.microsoft.com/office/drawing/2014/main" id="{A1C9EDE0-4DE5-4B45-A591-DF39E2A4EDB6}"/>
+                <a16:creationId xmlns:a16="http://schemas.microsoft.com/office/drawing/2014/main" id="{E86767DB-C63F-436C-860D-A17881ECE271}"/>
               </a:ext>
             </a:extLst>
           </p:cNvPr>
@@ -15351,7 +14535,7 @@
           </a:solidFill>
           <a:ln xmlns:a="http://schemas.openxmlformats.org/drawingml/2006/main" w="9525">
             <a:solidFill>
-              <a:srgbClr val="D8D0C2"/>
+              <a:srgbClr val="E5E7EB"/>
             </a:solidFill>
             <a:prstDash val="solid"/>
           </a:ln>
@@ -15362,7 +14546,7 @@
           <p:cNvPr id="13" name="">
             <a:extLst xmlns:a="http://schemas.openxmlformats.org/drawingml/2006/main">
               <a:ext uri="{FF2B5EF4-FFF2-40B4-BE49-F238E27FC236}">
-                <a16:creationId xmlns:a16="http://schemas.microsoft.com/office/drawing/2014/main" id="{6B4B804E-A2BD-4F51-870E-06DDF7E9066C}"/>
+                <a16:creationId xmlns:a16="http://schemas.microsoft.com/office/drawing/2014/main" id="{A9CA140A-6704-4D2E-B6C6-C1F7FE7623E8}"/>
               </a:ext>
             </a:extLst>
           </p:cNvPr>
@@ -15426,7 +14610,7 @@
           <p:cNvPr id="14" name="">
             <a:extLst xmlns:a="http://schemas.openxmlformats.org/drawingml/2006/main">
               <a:ext uri="{FF2B5EF4-FFF2-40B4-BE49-F238E27FC236}">
-                <a16:creationId xmlns:a16="http://schemas.microsoft.com/office/drawing/2014/main" id="{91545586-491E-48A1-A955-6EAC18BD59CD}"/>
+                <a16:creationId xmlns:a16="http://schemas.microsoft.com/office/drawing/2014/main" id="{13B60F2F-BC75-4CD4-BD6E-6CDAB6ED4E62}"/>
               </a:ext>
             </a:extLst>
           </p:cNvPr>
@@ -15448,7 +14632,7 @@
           </a:solidFill>
           <a:ln xmlns:a="http://schemas.openxmlformats.org/drawingml/2006/main" w="9525">
             <a:solidFill>
-              <a:srgbClr val="D8D0C2"/>
+              <a:srgbClr val="E5E7EB"/>
             </a:solidFill>
             <a:prstDash val="solid"/>
           </a:ln>
@@ -15459,7 +14643,7 @@
           <p:cNvPr id="15" name="">
             <a:extLst xmlns:a="http://schemas.openxmlformats.org/drawingml/2006/main">
               <a:ext uri="{FF2B5EF4-FFF2-40B4-BE49-F238E27FC236}">
-                <a16:creationId xmlns:a16="http://schemas.microsoft.com/office/drawing/2014/main" id="{BB1801B2-2E63-49A7-A431-5E42676E5BC1}"/>
+                <a16:creationId xmlns:a16="http://schemas.microsoft.com/office/drawing/2014/main" id="{B4295793-0A40-43EF-8B90-3BC97A1D7DD0}"/>
               </a:ext>
             </a:extLst>
           </p:cNvPr>
@@ -15523,7 +14707,7 @@
           <p:cNvPr id="16" name="">
             <a:extLst xmlns:a="http://schemas.openxmlformats.org/drawingml/2006/main">
               <a:ext uri="{FF2B5EF4-FFF2-40B4-BE49-F238E27FC236}">
-                <a16:creationId xmlns:a16="http://schemas.microsoft.com/office/drawing/2014/main" id="{7D5E0B57-D986-4CE4-896E-E9615CB50A56}"/>
+                <a16:creationId xmlns:a16="http://schemas.microsoft.com/office/drawing/2014/main" id="{F66EBC56-BB09-4CF7-A51D-FF11FCF5C502}"/>
               </a:ext>
             </a:extLst>
           </p:cNvPr>
@@ -15547,7 +14731,7 @@
           </a:solidFill>
           <a:ln xmlns:a="http://schemas.openxmlformats.org/drawingml/2006/main" w="9525">
             <a:solidFill>
-              <a:srgbClr val="D8D0C2"/>
+              <a:srgbClr val="E5E7EB"/>
             </a:solidFill>
             <a:prstDash val="solid"/>
           </a:ln>
@@ -15558,7 +14742,7 @@
           <p:cNvPr id="17" name="">
             <a:extLst xmlns:a="http://schemas.openxmlformats.org/drawingml/2006/main">
               <a:ext uri="{FF2B5EF4-FFF2-40B4-BE49-F238E27FC236}">
-                <a16:creationId xmlns:a16="http://schemas.microsoft.com/office/drawing/2014/main" id="{F2194A1D-6656-4794-9387-679A971C8CB3}"/>
+                <a16:creationId xmlns:a16="http://schemas.microsoft.com/office/drawing/2014/main" id="{F10B5E83-00A9-4AA1-ABF9-BE53216D175C}"/>
               </a:ext>
             </a:extLst>
           </p:cNvPr>
@@ -15622,7 +14806,7 @@
           <p:cNvPr id="18" name="">
             <a:extLst xmlns:a="http://schemas.openxmlformats.org/drawingml/2006/main">
               <a:ext uri="{FF2B5EF4-FFF2-40B4-BE49-F238E27FC236}">
-                <a16:creationId xmlns:a16="http://schemas.microsoft.com/office/drawing/2014/main" id="{FCB822DB-EE72-4C48-BDCF-D0E41537B94E}"/>
+                <a16:creationId xmlns:a16="http://schemas.microsoft.com/office/drawing/2014/main" id="{02343441-125A-46DF-99E7-8F940581D190}"/>
               </a:ext>
             </a:extLst>
           </p:cNvPr>
@@ -15646,7 +14830,7 @@
           </a:solidFill>
           <a:ln xmlns:a="http://schemas.openxmlformats.org/drawingml/2006/main" w="9525">
             <a:solidFill>
-              <a:srgbClr val="D8D0C2"/>
+              <a:srgbClr val="E5E7EB"/>
             </a:solidFill>
             <a:prstDash val="solid"/>
           </a:ln>
@@ -15657,7 +14841,7 @@
           <p:cNvPr id="19" name="">
             <a:extLst xmlns:a="http://schemas.openxmlformats.org/drawingml/2006/main">
               <a:ext uri="{FF2B5EF4-FFF2-40B4-BE49-F238E27FC236}">
-                <a16:creationId xmlns:a16="http://schemas.microsoft.com/office/drawing/2014/main" id="{BDC2F623-05F1-43D1-A13C-4EDA5E36511E}"/>
+                <a16:creationId xmlns:a16="http://schemas.microsoft.com/office/drawing/2014/main" id="{1CDF3006-B6B5-40ED-98C3-8575924D1684}"/>
               </a:ext>
             </a:extLst>
           </p:cNvPr>
@@ -15721,7 +14905,7 @@
           <p:cNvPr id="20" name="">
             <a:extLst xmlns:a="http://schemas.openxmlformats.org/drawingml/2006/main">
               <a:ext uri="{FF2B5EF4-FFF2-40B4-BE49-F238E27FC236}">
-                <a16:creationId xmlns:a16="http://schemas.microsoft.com/office/drawing/2014/main" id="{A9F03A67-AF76-417E-B4C0-8BFF9DC42827}"/>
+                <a16:creationId xmlns:a16="http://schemas.microsoft.com/office/drawing/2014/main" id="{97336A61-0DCF-461E-B143-120316A52ABD}"/>
               </a:ext>
             </a:extLst>
           </p:cNvPr>
@@ -15745,7 +14929,7 @@
           </a:solidFill>
           <a:ln xmlns:a="http://schemas.openxmlformats.org/drawingml/2006/main" w="9525">
             <a:solidFill>
-              <a:srgbClr val="D8D0C2"/>
+              <a:srgbClr val="E5E7EB"/>
             </a:solidFill>
             <a:prstDash val="solid"/>
           </a:ln>
@@ -15756,7 +14940,7 @@
           <p:cNvPr id="21" name="">
             <a:extLst xmlns:a="http://schemas.openxmlformats.org/drawingml/2006/main">
               <a:ext uri="{FF2B5EF4-FFF2-40B4-BE49-F238E27FC236}">
-                <a16:creationId xmlns:a16="http://schemas.microsoft.com/office/drawing/2014/main" id="{92E3F459-2577-492B-A2B9-C82540CBB20F}"/>
+                <a16:creationId xmlns:a16="http://schemas.microsoft.com/office/drawing/2014/main" id="{0933DCC6-DBF5-4B0E-9F63-02DB4D2E6360}"/>
               </a:ext>
             </a:extLst>
           </p:cNvPr>
@@ -15820,7 +15004,7 @@
           <p:cNvPr id="22" name="">
             <a:extLst xmlns:a="http://schemas.openxmlformats.org/drawingml/2006/main">
               <a:ext uri="{FF2B5EF4-FFF2-40B4-BE49-F238E27FC236}">
-                <a16:creationId xmlns:a16="http://schemas.microsoft.com/office/drawing/2014/main" id="{80DB801B-0985-4154-9EFD-49C065ECC91C}"/>
+                <a16:creationId xmlns:a16="http://schemas.microsoft.com/office/drawing/2014/main" id="{C2BCE142-37FA-46FB-9FC1-EBF567487E62}"/>
               </a:ext>
             </a:extLst>
           </p:cNvPr>
@@ -15844,7 +15028,7 @@
           </a:solidFill>
           <a:ln xmlns:a="http://schemas.openxmlformats.org/drawingml/2006/main" w="9525">
             <a:solidFill>
-              <a:srgbClr val="D8D0C2"/>
+              <a:srgbClr val="E5E7EB"/>
             </a:solidFill>
             <a:prstDash val="solid"/>
           </a:ln>
@@ -15855,7 +15039,7 @@
           <p:cNvPr id="23" name="">
             <a:extLst xmlns:a="http://schemas.openxmlformats.org/drawingml/2006/main">
               <a:ext uri="{FF2B5EF4-FFF2-40B4-BE49-F238E27FC236}">
-                <a16:creationId xmlns:a16="http://schemas.microsoft.com/office/drawing/2014/main" id="{C5B7ECAD-5388-4515-9DBB-A91DAC61826F}"/>
+                <a16:creationId xmlns:a16="http://schemas.microsoft.com/office/drawing/2014/main" id="{F04C1BCB-F423-4B73-957F-089E85EA0480}"/>
               </a:ext>
             </a:extLst>
           </p:cNvPr>
@@ -15919,7 +15103,7 @@
           <p:cNvPr id="24" name="">
             <a:extLst xmlns:a="http://schemas.openxmlformats.org/drawingml/2006/main">
               <a:ext uri="{FF2B5EF4-FFF2-40B4-BE49-F238E27FC236}">
-                <a16:creationId xmlns:a16="http://schemas.microsoft.com/office/drawing/2014/main" id="{7D52C4B6-0CB8-4A89-8803-89E2AB36F4C0}"/>
+                <a16:creationId xmlns:a16="http://schemas.microsoft.com/office/drawing/2014/main" id="{6A61F4CA-1D69-405B-B713-61CCCD97D6B4}"/>
               </a:ext>
             </a:extLst>
           </p:cNvPr>
@@ -15943,7 +15127,7 @@
           </a:solidFill>
           <a:ln xmlns:a="http://schemas.openxmlformats.org/drawingml/2006/main" w="9525">
             <a:solidFill>
-              <a:srgbClr val="D8D0C2"/>
+              <a:srgbClr val="E5E7EB"/>
             </a:solidFill>
             <a:prstDash val="solid"/>
           </a:ln>
@@ -15954,7 +15138,7 @@
           <p:cNvPr id="25" name="">
             <a:extLst xmlns:a="http://schemas.openxmlformats.org/drawingml/2006/main">
               <a:ext uri="{FF2B5EF4-FFF2-40B4-BE49-F238E27FC236}">
-                <a16:creationId xmlns:a16="http://schemas.microsoft.com/office/drawing/2014/main" id="{2BA50C92-D59D-4DD3-B1F1-DF78BC764901}"/>
+                <a16:creationId xmlns:a16="http://schemas.microsoft.com/office/drawing/2014/main" id="{E3984E64-4A69-410A-A37A-2942C72B79DA}"/>
               </a:ext>
             </a:extLst>
           </p:cNvPr>
@@ -16018,7 +15202,7 @@
           <p:cNvPr id="26" name="">
             <a:extLst xmlns:a="http://schemas.openxmlformats.org/drawingml/2006/main">
               <a:ext uri="{FF2B5EF4-FFF2-40B4-BE49-F238E27FC236}">
-                <a16:creationId xmlns:a16="http://schemas.microsoft.com/office/drawing/2014/main" id="{6B004E20-7C52-4CA9-BF70-B20D16FCD212}"/>
+                <a16:creationId xmlns:a16="http://schemas.microsoft.com/office/drawing/2014/main" id="{F5CA273D-2341-41CA-A288-BD2C4F68FC32}"/>
               </a:ext>
             </a:extLst>
           </p:cNvPr>
@@ -16042,7 +15226,7 @@
           </a:solidFill>
           <a:ln xmlns:a="http://schemas.openxmlformats.org/drawingml/2006/main" w="9525">
             <a:solidFill>
-              <a:srgbClr val="D8D0C2"/>
+              <a:srgbClr val="E5E7EB"/>
             </a:solidFill>
             <a:prstDash val="solid"/>
           </a:ln>
@@ -16053,7 +15237,7 @@
           <p:cNvPr id="27" name="">
             <a:extLst xmlns:a="http://schemas.openxmlformats.org/drawingml/2006/main">
               <a:ext uri="{FF2B5EF4-FFF2-40B4-BE49-F238E27FC236}">
-                <a16:creationId xmlns:a16="http://schemas.microsoft.com/office/drawing/2014/main" id="{BD55382A-08CC-451E-883E-1699BBE4049B}"/>
+                <a16:creationId xmlns:a16="http://schemas.microsoft.com/office/drawing/2014/main" id="{2DFFBE64-5D88-4F29-B244-8E04CE0DE710}"/>
               </a:ext>
             </a:extLst>
           </p:cNvPr>
@@ -16117,7 +15301,7 @@
           <p:cNvPr id="28" name="">
             <a:extLst xmlns:a="http://schemas.openxmlformats.org/drawingml/2006/main">
               <a:ext uri="{FF2B5EF4-FFF2-40B4-BE49-F238E27FC236}">
-                <a16:creationId xmlns:a16="http://schemas.microsoft.com/office/drawing/2014/main" id="{E64BE8B6-D881-4CE4-AC93-7D5734A0BA10}"/>
+                <a16:creationId xmlns:a16="http://schemas.microsoft.com/office/drawing/2014/main" id="{8D89CC2D-D09A-42D5-849F-7E2976808124}"/>
               </a:ext>
             </a:extLst>
           </p:cNvPr>
@@ -16141,7 +15325,7 @@
           </a:solidFill>
           <a:ln xmlns:a="http://schemas.openxmlformats.org/drawingml/2006/main" w="9525">
             <a:solidFill>
-              <a:srgbClr val="D8D0C2"/>
+              <a:srgbClr val="E5E7EB"/>
             </a:solidFill>
             <a:prstDash val="solid"/>
           </a:ln>
@@ -16152,7 +15336,7 @@
           <p:cNvPr id="29" name="">
             <a:extLst xmlns:a="http://schemas.openxmlformats.org/drawingml/2006/main">
               <a:ext uri="{FF2B5EF4-FFF2-40B4-BE49-F238E27FC236}">
-                <a16:creationId xmlns:a16="http://schemas.microsoft.com/office/drawing/2014/main" id="{3191EFBA-944F-4349-8276-66B4D4F5230C}"/>
+                <a16:creationId xmlns:a16="http://schemas.microsoft.com/office/drawing/2014/main" id="{ABEE5088-CAEB-41F6-9B2D-984818D6E2DD}"/>
               </a:ext>
             </a:extLst>
           </p:cNvPr>
@@ -16216,7 +15400,7 @@
           <p:cNvPr id="30" name="">
             <a:extLst xmlns:a="http://schemas.openxmlformats.org/drawingml/2006/main">
               <a:ext uri="{FF2B5EF4-FFF2-40B4-BE49-F238E27FC236}">
-                <a16:creationId xmlns:a16="http://schemas.microsoft.com/office/drawing/2014/main" id="{CBE4BC79-F106-4E4A-8F6E-0E06BF554F8F}"/>
+                <a16:creationId xmlns:a16="http://schemas.microsoft.com/office/drawing/2014/main" id="{050BA5B9-1ABE-469B-A58F-8985A8FE0174}"/>
               </a:ext>
             </a:extLst>
           </p:cNvPr>
@@ -16240,7 +15424,7 @@
           </a:solidFill>
           <a:ln xmlns:a="http://schemas.openxmlformats.org/drawingml/2006/main" w="9525">
             <a:solidFill>
-              <a:srgbClr val="D8D0C2"/>
+              <a:srgbClr val="E5E7EB"/>
             </a:solidFill>
             <a:prstDash val="solid"/>
           </a:ln>
@@ -16251,7 +15435,7 @@
           <p:cNvPr id="31" name="">
             <a:extLst xmlns:a="http://schemas.openxmlformats.org/drawingml/2006/main">
               <a:ext uri="{FF2B5EF4-FFF2-40B4-BE49-F238E27FC236}">
-                <a16:creationId xmlns:a16="http://schemas.microsoft.com/office/drawing/2014/main" id="{DCEFC1B1-9FB5-49AF-A077-331AE18A44AC}"/>
+                <a16:creationId xmlns:a16="http://schemas.microsoft.com/office/drawing/2014/main" id="{38FCCDA9-537A-46FB-AD25-818E673979BB}"/>
               </a:ext>
             </a:extLst>
           </p:cNvPr>
@@ -16315,7 +15499,7 @@
           <p:cNvPr id="32" name="">
             <a:extLst xmlns:a="http://schemas.openxmlformats.org/drawingml/2006/main">
               <a:ext uri="{FF2B5EF4-FFF2-40B4-BE49-F238E27FC236}">
-                <a16:creationId xmlns:a16="http://schemas.microsoft.com/office/drawing/2014/main" id="{998E2FE2-F600-4957-852B-6671E4A5FD59}"/>
+                <a16:creationId xmlns:a16="http://schemas.microsoft.com/office/drawing/2014/main" id="{E9432BB4-53B5-4595-BF5D-333F50E221BF}"/>
               </a:ext>
             </a:extLst>
           </p:cNvPr>
@@ -16339,7 +15523,7 @@
           </a:solidFill>
           <a:ln xmlns:a="http://schemas.openxmlformats.org/drawingml/2006/main" w="9525">
             <a:solidFill>
-              <a:srgbClr val="D8D0C2"/>
+              <a:srgbClr val="E5E7EB"/>
             </a:solidFill>
             <a:prstDash val="solid"/>
           </a:ln>
@@ -16350,7 +15534,7 @@
           <p:cNvPr id="33" name="">
             <a:extLst xmlns:a="http://schemas.openxmlformats.org/drawingml/2006/main">
               <a:ext uri="{FF2B5EF4-FFF2-40B4-BE49-F238E27FC236}">
-                <a16:creationId xmlns:a16="http://schemas.microsoft.com/office/drawing/2014/main" id="{DC440569-B8BA-47CE-AFF1-D2341353033E}"/>
+                <a16:creationId xmlns:a16="http://schemas.microsoft.com/office/drawing/2014/main" id="{E1364CE4-447C-4904-B149-A292CEA6DAE2}"/>
               </a:ext>
             </a:extLst>
           </p:cNvPr>
@@ -16414,7 +15598,7 @@
           <p:cNvPr id="34" name="">
             <a:extLst xmlns:a="http://schemas.openxmlformats.org/drawingml/2006/main">
               <a:ext uri="{FF2B5EF4-FFF2-40B4-BE49-F238E27FC236}">
-                <a16:creationId xmlns:a16="http://schemas.microsoft.com/office/drawing/2014/main" id="{B71D7FE3-DD7B-46E4-BEBB-56BA624BF694}"/>
+                <a16:creationId xmlns:a16="http://schemas.microsoft.com/office/drawing/2014/main" id="{3A560862-76F9-49B7-9E80-2FF8B1B81C55}"/>
               </a:ext>
             </a:extLst>
           </p:cNvPr>
@@ -16438,7 +15622,7 @@
           </a:solidFill>
           <a:ln xmlns:a="http://schemas.openxmlformats.org/drawingml/2006/main" w="9525">
             <a:solidFill>
-              <a:srgbClr val="D8D0C2"/>
+              <a:srgbClr val="E5E7EB"/>
             </a:solidFill>
             <a:prstDash val="solid"/>
           </a:ln>
@@ -16449,7 +15633,7 @@
           <p:cNvPr id="35" name="">
             <a:extLst xmlns:a="http://schemas.openxmlformats.org/drawingml/2006/main">
               <a:ext uri="{FF2B5EF4-FFF2-40B4-BE49-F238E27FC236}">
-                <a16:creationId xmlns:a16="http://schemas.microsoft.com/office/drawing/2014/main" id="{5F7CE965-1038-42B9-9650-A0235DD59EDD}"/>
+                <a16:creationId xmlns:a16="http://schemas.microsoft.com/office/drawing/2014/main" id="{48C98B62-B66F-4138-B1DD-E65B602285BF}"/>
               </a:ext>
             </a:extLst>
           </p:cNvPr>
@@ -16513,7 +15697,7 @@
           <p:cNvPr id="36" name="">
             <a:extLst xmlns:a="http://schemas.openxmlformats.org/drawingml/2006/main">
               <a:ext uri="{FF2B5EF4-FFF2-40B4-BE49-F238E27FC236}">
-                <a16:creationId xmlns:a16="http://schemas.microsoft.com/office/drawing/2014/main" id="{65DE65CF-E360-43F6-B2F3-13C7B2AC7764}"/>
+                <a16:creationId xmlns:a16="http://schemas.microsoft.com/office/drawing/2014/main" id="{C389B906-56F4-442F-8E00-3391A5645E8C}"/>
               </a:ext>
             </a:extLst>
           </p:cNvPr>
@@ -16537,7 +15721,7 @@
           </a:solidFill>
           <a:ln xmlns:a="http://schemas.openxmlformats.org/drawingml/2006/main" w="9525">
             <a:solidFill>
-              <a:srgbClr val="D8D0C2"/>
+              <a:srgbClr val="E5E7EB"/>
             </a:solidFill>
             <a:prstDash val="solid"/>
           </a:ln>
@@ -16548,7 +15732,7 @@
           <p:cNvPr id="37" name="">
             <a:extLst xmlns:a="http://schemas.openxmlformats.org/drawingml/2006/main">
               <a:ext uri="{FF2B5EF4-FFF2-40B4-BE49-F238E27FC236}">
-                <a16:creationId xmlns:a16="http://schemas.microsoft.com/office/drawing/2014/main" id="{91994485-957E-49EE-8C2D-B41ECED8219D}"/>
+                <a16:creationId xmlns:a16="http://schemas.microsoft.com/office/drawing/2014/main" id="{A33492DF-B9E9-4408-B02F-3E8EC1DDDA6C}"/>
               </a:ext>
             </a:extLst>
           </p:cNvPr>
@@ -16612,7 +15796,7 @@
           <p:cNvPr id="38" name="">
             <a:extLst xmlns:a="http://schemas.openxmlformats.org/drawingml/2006/main">
               <a:ext uri="{FF2B5EF4-FFF2-40B4-BE49-F238E27FC236}">
-                <a16:creationId xmlns:a16="http://schemas.microsoft.com/office/drawing/2014/main" id="{D01BD1E5-F24C-40F4-86D6-6681DAD8D513}"/>
+                <a16:creationId xmlns:a16="http://schemas.microsoft.com/office/drawing/2014/main" id="{CFFF20C1-9553-4FFE-AB58-6B42979B8871}"/>
               </a:ext>
             </a:extLst>
           </p:cNvPr>
@@ -16636,7 +15820,7 @@
           </a:solidFill>
           <a:ln xmlns:a="http://schemas.openxmlformats.org/drawingml/2006/main" w="9525">
             <a:solidFill>
-              <a:srgbClr val="D8D0C2"/>
+              <a:srgbClr val="E5E7EB"/>
             </a:solidFill>
             <a:prstDash val="solid"/>
           </a:ln>
@@ -16647,7 +15831,7 @@
           <p:cNvPr id="39" name="">
             <a:extLst xmlns:a="http://schemas.openxmlformats.org/drawingml/2006/main">
               <a:ext uri="{FF2B5EF4-FFF2-40B4-BE49-F238E27FC236}">
-                <a16:creationId xmlns:a16="http://schemas.microsoft.com/office/drawing/2014/main" id="{639ACF73-16A0-4319-8C5E-54EF57DADEF0}"/>
+                <a16:creationId xmlns:a16="http://schemas.microsoft.com/office/drawing/2014/main" id="{4A99A88E-8068-4CBE-AC14-3838DEB75F43}"/>
               </a:ext>
             </a:extLst>
           </p:cNvPr>
@@ -16711,7 +15895,7 @@
           <p:cNvPr id="40" name="">
             <a:extLst xmlns:a="http://schemas.openxmlformats.org/drawingml/2006/main">
               <a:ext uri="{FF2B5EF4-FFF2-40B4-BE49-F238E27FC236}">
-                <a16:creationId xmlns:a16="http://schemas.microsoft.com/office/drawing/2014/main" id="{19F50A00-1C6D-4F62-9253-EBEC36DD69A3}"/>
+                <a16:creationId xmlns:a16="http://schemas.microsoft.com/office/drawing/2014/main" id="{A7DEC10B-F37B-4FF1-AD63-23F0F227B488}"/>
               </a:ext>
             </a:extLst>
           </p:cNvPr>
@@ -16735,7 +15919,7 @@
           </a:solidFill>
           <a:ln xmlns:a="http://schemas.openxmlformats.org/drawingml/2006/main" w="9525">
             <a:solidFill>
-              <a:srgbClr val="D8D0C2"/>
+              <a:srgbClr val="E5E7EB"/>
             </a:solidFill>
             <a:prstDash val="solid"/>
           </a:ln>
@@ -16746,7 +15930,7 @@
           <p:cNvPr id="41" name="">
             <a:extLst xmlns:a="http://schemas.openxmlformats.org/drawingml/2006/main">
               <a:ext uri="{FF2B5EF4-FFF2-40B4-BE49-F238E27FC236}">
-                <a16:creationId xmlns:a16="http://schemas.microsoft.com/office/drawing/2014/main" id="{D88DD9A2-D209-4F60-BA11-82B160591A3E}"/>
+                <a16:creationId xmlns:a16="http://schemas.microsoft.com/office/drawing/2014/main" id="{8D5AA2FD-507B-4177-B46D-D4AD22776401}"/>
               </a:ext>
             </a:extLst>
           </p:cNvPr>
@@ -16810,7 +15994,7 @@
           <p:cNvPr id="42" name="">
             <a:extLst xmlns:a="http://schemas.openxmlformats.org/drawingml/2006/main">
               <a:ext uri="{FF2B5EF4-FFF2-40B4-BE49-F238E27FC236}">
-                <a16:creationId xmlns:a16="http://schemas.microsoft.com/office/drawing/2014/main" id="{3916ECAB-A80C-4337-964D-0542C5397DFD}"/>
+                <a16:creationId xmlns:a16="http://schemas.microsoft.com/office/drawing/2014/main" id="{5CF25648-325E-4567-8673-363605EB4577}"/>
               </a:ext>
             </a:extLst>
           </p:cNvPr>
@@ -16834,7 +16018,7 @@
           </a:solidFill>
           <a:ln xmlns:a="http://schemas.openxmlformats.org/drawingml/2006/main" w="9525">
             <a:solidFill>
-              <a:srgbClr val="D8D0C2"/>
+              <a:srgbClr val="E5E7EB"/>
             </a:solidFill>
             <a:prstDash val="solid"/>
           </a:ln>
@@ -16845,7 +16029,7 @@
           <p:cNvPr id="43" name="">
             <a:extLst xmlns:a="http://schemas.openxmlformats.org/drawingml/2006/main">
               <a:ext uri="{FF2B5EF4-FFF2-40B4-BE49-F238E27FC236}">
-                <a16:creationId xmlns:a16="http://schemas.microsoft.com/office/drawing/2014/main" id="{8B3F0AE6-747B-477C-8220-2ABC37D1E83C}"/>
+                <a16:creationId xmlns:a16="http://schemas.microsoft.com/office/drawing/2014/main" id="{2AD70450-1B36-4806-9627-E57AD9B611D9}"/>
               </a:ext>
             </a:extLst>
           </p:cNvPr>
@@ -16909,7 +16093,7 @@
           <p:cNvPr id="44" name="">
             <a:extLst xmlns:a="http://schemas.openxmlformats.org/drawingml/2006/main">
               <a:ext uri="{FF2B5EF4-FFF2-40B4-BE49-F238E27FC236}">
-                <a16:creationId xmlns:a16="http://schemas.microsoft.com/office/drawing/2014/main" id="{FC73EB26-3CED-4420-B320-A88CDBF62424}"/>
+                <a16:creationId xmlns:a16="http://schemas.microsoft.com/office/drawing/2014/main" id="{6F3FC335-0B72-4DE4-BF91-922AE08BD91C}"/>
               </a:ext>
             </a:extLst>
           </p:cNvPr>
@@ -16933,7 +16117,7 @@
           </a:solidFill>
           <a:ln xmlns:a="http://schemas.openxmlformats.org/drawingml/2006/main" w="9525">
             <a:solidFill>
-              <a:srgbClr val="D8D0C2"/>
+              <a:srgbClr val="E5E7EB"/>
             </a:solidFill>
             <a:prstDash val="solid"/>
           </a:ln>
@@ -16944,7 +16128,7 @@
           <p:cNvPr id="45" name="">
             <a:extLst xmlns:a="http://schemas.openxmlformats.org/drawingml/2006/main">
               <a:ext uri="{FF2B5EF4-FFF2-40B4-BE49-F238E27FC236}">
-                <a16:creationId xmlns:a16="http://schemas.microsoft.com/office/drawing/2014/main" id="{7D4112B1-5F57-4731-BB9D-A5D34DA5BA0B}"/>
+                <a16:creationId xmlns:a16="http://schemas.microsoft.com/office/drawing/2014/main" id="{23C51940-83E3-40C0-B582-CC8588517B98}"/>
               </a:ext>
             </a:extLst>
           </p:cNvPr>
@@ -17008,7 +16192,7 @@
           <p:cNvPr id="46" name="">
             <a:extLst xmlns:a="http://schemas.openxmlformats.org/drawingml/2006/main">
               <a:ext uri="{FF2B5EF4-FFF2-40B4-BE49-F238E27FC236}">
-                <a16:creationId xmlns:a16="http://schemas.microsoft.com/office/drawing/2014/main" id="{1A8C4C65-65A5-4E84-99CA-D0757BE0165D}"/>
+                <a16:creationId xmlns:a16="http://schemas.microsoft.com/office/drawing/2014/main" id="{D2AE5BF2-5345-4858-AEBA-702D2B6150AD}"/>
               </a:ext>
             </a:extLst>
           </p:cNvPr>
@@ -17072,7 +16256,7 @@
           <p:cNvPr id="47" name="">
             <a:extLst xmlns:a="http://schemas.openxmlformats.org/drawingml/2006/main">
               <a:ext uri="{FF2B5EF4-FFF2-40B4-BE49-F238E27FC236}">
-                <a16:creationId xmlns:a16="http://schemas.microsoft.com/office/drawing/2014/main" id="{B03B8CBA-4F74-4AB9-8C2F-EE5C462D9024}"/>
+                <a16:creationId xmlns:a16="http://schemas.microsoft.com/office/drawing/2014/main" id="{5D561C59-B8FC-45FC-9623-ADF1BF7BABDD}"/>
               </a:ext>
             </a:extLst>
           </p:cNvPr>
@@ -17107,7 +16291,7 @@
           <p:cNvPr id="48" name="">
             <a:extLst xmlns:a="http://schemas.openxmlformats.org/drawingml/2006/main">
               <a:ext uri="{FF2B5EF4-FFF2-40B4-BE49-F238E27FC236}">
-                <a16:creationId xmlns:a16="http://schemas.microsoft.com/office/drawing/2014/main" id="{CFC60276-5324-4866-AFDF-E92891D097B4}"/>
+                <a16:creationId xmlns:a16="http://schemas.microsoft.com/office/drawing/2014/main" id="{2534D6F3-D948-4DF4-AB54-8426429BA280}"/>
               </a:ext>
             </a:extLst>
           </p:cNvPr>
@@ -17145,7 +16329,7 @@
             <a:pPr algn="l">
               <a:defRPr sz="975" b="0">
                 <a:solidFill>
-                  <a:srgbClr val="5B6472"/>
+                  <a:srgbClr val="4B5563"/>
                 </a:solidFill>
                 <a:latin typeface="Aptos"/>
                 <a:ea typeface="Aptos"/>
@@ -17155,7 +16339,7 @@
             <a:r>
               <a:rPr sz="975" b="0">
                 <a:solidFill>
-                  <a:srgbClr val="5B6472"/>
+                  <a:srgbClr val="4B5563"/>
                 </a:solidFill>
                 <a:latin typeface="Aptos"/>
                 <a:ea typeface="Aptos"/>
@@ -17171,7 +16355,7 @@
           <p:cNvPr id="49" name="">
             <a:extLst xmlns:a="http://schemas.openxmlformats.org/drawingml/2006/main">
               <a:ext uri="{FF2B5EF4-FFF2-40B4-BE49-F238E27FC236}">
-                <a16:creationId xmlns:a16="http://schemas.microsoft.com/office/drawing/2014/main" id="{DE58DCCC-38CD-46D2-90B7-F033F626F437}"/>
+                <a16:creationId xmlns:a16="http://schemas.microsoft.com/office/drawing/2014/main" id="{4FC0C188-9922-4FBF-9A56-1183F71A7D82}"/>
               </a:ext>
             </a:extLst>
           </p:cNvPr>
@@ -17206,7 +16390,7 @@
           <p:cNvPr id="50" name="">
             <a:extLst xmlns:a="http://schemas.openxmlformats.org/drawingml/2006/main">
               <a:ext uri="{FF2B5EF4-FFF2-40B4-BE49-F238E27FC236}">
-                <a16:creationId xmlns:a16="http://schemas.microsoft.com/office/drawing/2014/main" id="{9B120293-B728-4841-AC2D-67FDA03B745D}"/>
+                <a16:creationId xmlns:a16="http://schemas.microsoft.com/office/drawing/2014/main" id="{FACA4CBD-24DF-4E60-A90E-ADEC3B470C3D}"/>
               </a:ext>
             </a:extLst>
           </p:cNvPr>
@@ -17244,7 +16428,7 @@
             <a:pPr algn="l">
               <a:defRPr sz="975" b="0">
                 <a:solidFill>
-                  <a:srgbClr val="5B6472"/>
+                  <a:srgbClr val="4B5563"/>
                 </a:solidFill>
                 <a:latin typeface="Aptos"/>
                 <a:ea typeface="Aptos"/>
@@ -17254,7 +16438,7 @@
             <a:r>
               <a:rPr sz="975" b="0">
                 <a:solidFill>
-                  <a:srgbClr val="5B6472"/>
+                  <a:srgbClr val="4B5563"/>
                 </a:solidFill>
                 <a:latin typeface="Aptos"/>
                 <a:ea typeface="Aptos"/>
@@ -17270,7 +16454,7 @@
           <p:cNvPr id="51" name="">
             <a:extLst xmlns:a="http://schemas.openxmlformats.org/drawingml/2006/main">
               <a:ext uri="{FF2B5EF4-FFF2-40B4-BE49-F238E27FC236}">
-                <a16:creationId xmlns:a16="http://schemas.microsoft.com/office/drawing/2014/main" id="{B0AD72D9-C5D4-4806-8682-DBA761C40751}"/>
+                <a16:creationId xmlns:a16="http://schemas.microsoft.com/office/drawing/2014/main" id="{8E04DC96-0FB7-494A-A2A9-9DC650354704}"/>
               </a:ext>
             </a:extLst>
           </p:cNvPr>
@@ -17305,7 +16489,7 @@
           <p:cNvPr id="52" name="">
             <a:extLst xmlns:a="http://schemas.openxmlformats.org/drawingml/2006/main">
               <a:ext uri="{FF2B5EF4-FFF2-40B4-BE49-F238E27FC236}">
-                <a16:creationId xmlns:a16="http://schemas.microsoft.com/office/drawing/2014/main" id="{EE9EE1DF-E992-48F8-A826-BCC46BF80FCB}"/>
+                <a16:creationId xmlns:a16="http://schemas.microsoft.com/office/drawing/2014/main" id="{767D95E7-84FE-42BA-9901-88311424FF4C}"/>
               </a:ext>
             </a:extLst>
           </p:cNvPr>
@@ -17343,7 +16527,7 @@
             <a:pPr algn="l">
               <a:defRPr sz="975" b="0">
                 <a:solidFill>
-                  <a:srgbClr val="5B6472"/>
+                  <a:srgbClr val="4B5563"/>
                 </a:solidFill>
                 <a:latin typeface="Aptos"/>
                 <a:ea typeface="Aptos"/>
@@ -17353,7 +16537,7 @@
             <a:r>
               <a:rPr sz="975" b="0">
                 <a:solidFill>
-                  <a:srgbClr val="5B6472"/>
+                  <a:srgbClr val="4B5563"/>
                 </a:solidFill>
                 <a:latin typeface="Aptos"/>
                 <a:ea typeface="Aptos"/>
@@ -17369,7 +16553,7 @@
           <p:cNvPr id="53" name="">
             <a:extLst xmlns:a="http://schemas.openxmlformats.org/drawingml/2006/main">
               <a:ext uri="{FF2B5EF4-FFF2-40B4-BE49-F238E27FC236}">
-                <a16:creationId xmlns:a16="http://schemas.microsoft.com/office/drawing/2014/main" id="{A668B113-0DBD-4570-BA73-3362200D4F29}"/>
+                <a16:creationId xmlns:a16="http://schemas.microsoft.com/office/drawing/2014/main" id="{32310CAE-FA97-4D87-9618-13E6588876BF}"/>
               </a:ext>
             </a:extLst>
           </p:cNvPr>
@@ -17404,7 +16588,7 @@
           <p:cNvPr id="54" name="">
             <a:extLst xmlns:a="http://schemas.openxmlformats.org/drawingml/2006/main">
               <a:ext uri="{FF2B5EF4-FFF2-40B4-BE49-F238E27FC236}">
-                <a16:creationId xmlns:a16="http://schemas.microsoft.com/office/drawing/2014/main" id="{C5106CF1-337C-464D-AD93-AA34B04A0348}"/>
+                <a16:creationId xmlns:a16="http://schemas.microsoft.com/office/drawing/2014/main" id="{824E81B3-640B-409C-9712-D5BCA8E81037}"/>
               </a:ext>
             </a:extLst>
           </p:cNvPr>
@@ -17442,7 +16626,7 @@
             <a:pPr algn="l">
               <a:defRPr sz="975" b="0">
                 <a:solidFill>
-                  <a:srgbClr val="5B6472"/>
+                  <a:srgbClr val="4B5563"/>
                 </a:solidFill>
                 <a:latin typeface="Aptos"/>
                 <a:ea typeface="Aptos"/>
@@ -17452,7 +16636,7 @@
             <a:r>
               <a:rPr sz="975" b="0">
                 <a:solidFill>
-                  <a:srgbClr val="5B6472"/>
+                  <a:srgbClr val="4B5563"/>
                 </a:solidFill>
                 <a:latin typeface="Aptos"/>
                 <a:ea typeface="Aptos"/>
@@ -17468,7 +16652,7 @@
           <p:cNvPr id="55" name="">
             <a:extLst xmlns:a="http://schemas.openxmlformats.org/drawingml/2006/main">
               <a:ext uri="{FF2B5EF4-FFF2-40B4-BE49-F238E27FC236}">
-                <a16:creationId xmlns:a16="http://schemas.microsoft.com/office/drawing/2014/main" id="{E446FF1B-DE0F-4068-9A0D-03265290BBA1}"/>
+                <a16:creationId xmlns:a16="http://schemas.microsoft.com/office/drawing/2014/main" id="{F71AD51D-5188-4063-8243-637814CA268F}"/>
               </a:ext>
             </a:extLst>
           </p:cNvPr>
@@ -17503,7 +16687,7 @@
           <p:cNvPr id="56" name="">
             <a:extLst xmlns:a="http://schemas.openxmlformats.org/drawingml/2006/main">
               <a:ext uri="{FF2B5EF4-FFF2-40B4-BE49-F238E27FC236}">
-                <a16:creationId xmlns:a16="http://schemas.microsoft.com/office/drawing/2014/main" id="{21797421-5FC0-43A8-903D-40C934014E6B}"/>
+                <a16:creationId xmlns:a16="http://schemas.microsoft.com/office/drawing/2014/main" id="{BC2DECD6-C8C4-4630-829E-336F098E4F36}"/>
               </a:ext>
             </a:extLst>
           </p:cNvPr>
@@ -17541,7 +16725,7 @@
             <a:pPr algn="l">
               <a:defRPr sz="975" b="0">
                 <a:solidFill>
-                  <a:srgbClr val="5B6472"/>
+                  <a:srgbClr val="4B5563"/>
                 </a:solidFill>
                 <a:latin typeface="Aptos"/>
                 <a:ea typeface="Aptos"/>
@@ -17551,7 +16735,7 @@
             <a:r>
               <a:rPr sz="975" b="0">
                 <a:solidFill>
-                  <a:srgbClr val="5B6472"/>
+                  <a:srgbClr val="4B5563"/>
                 </a:solidFill>
                 <a:latin typeface="Aptos"/>
                 <a:ea typeface="Aptos"/>
@@ -17567,7 +16751,7 @@
           <p:cNvPr id="57" name="">
             <a:extLst xmlns:a="http://schemas.openxmlformats.org/drawingml/2006/main">
               <a:ext uri="{FF2B5EF4-FFF2-40B4-BE49-F238E27FC236}">
-                <a16:creationId xmlns:a16="http://schemas.microsoft.com/office/drawing/2014/main" id="{CAD248A6-E870-42A3-B8C7-A66DE9811EC1}"/>
+                <a16:creationId xmlns:a16="http://schemas.microsoft.com/office/drawing/2014/main" id="{9095DD62-1911-493F-8BFC-29E223C68A30}"/>
               </a:ext>
             </a:extLst>
           </p:cNvPr>
@@ -17602,7 +16786,7 @@
           <p:cNvPr id="58" name="">
             <a:extLst xmlns:a="http://schemas.openxmlformats.org/drawingml/2006/main">
               <a:ext uri="{FF2B5EF4-FFF2-40B4-BE49-F238E27FC236}">
-                <a16:creationId xmlns:a16="http://schemas.microsoft.com/office/drawing/2014/main" id="{AF6D0880-6830-4729-AB14-0A0224799714}"/>
+                <a16:creationId xmlns:a16="http://schemas.microsoft.com/office/drawing/2014/main" id="{AFDF33CE-F99B-40A1-B9C7-82295C89B7EE}"/>
               </a:ext>
             </a:extLst>
           </p:cNvPr>
@@ -17640,7 +16824,7 @@
             <a:pPr algn="l">
               <a:defRPr sz="975" b="0">
                 <a:solidFill>
-                  <a:srgbClr val="5B6472"/>
+                  <a:srgbClr val="4B5563"/>
                 </a:solidFill>
                 <a:latin typeface="Aptos"/>
                 <a:ea typeface="Aptos"/>
@@ -17650,7 +16834,7 @@
             <a:r>
               <a:rPr sz="975" b="0">
                 <a:solidFill>
-                  <a:srgbClr val="5B6472"/>
+                  <a:srgbClr val="4B5563"/>
                 </a:solidFill>
                 <a:latin typeface="Aptos"/>
                 <a:ea typeface="Aptos"/>
@@ -17666,7 +16850,7 @@
           <p:cNvPr id="59" name="">
             <a:extLst xmlns:a="http://schemas.openxmlformats.org/drawingml/2006/main">
               <a:ext uri="{FF2B5EF4-FFF2-40B4-BE49-F238E27FC236}">
-                <a16:creationId xmlns:a16="http://schemas.microsoft.com/office/drawing/2014/main" id="{79D97362-9958-4329-B629-75C9ADD955B2}"/>
+                <a16:creationId xmlns:a16="http://schemas.microsoft.com/office/drawing/2014/main" id="{445DE1C0-B0B8-4579-832D-907692313F78}"/>
               </a:ext>
             </a:extLst>
           </p:cNvPr>
@@ -17701,7 +16885,7 @@
           <p:cNvPr id="60" name="">
             <a:extLst xmlns:a="http://schemas.openxmlformats.org/drawingml/2006/main">
               <a:ext uri="{FF2B5EF4-FFF2-40B4-BE49-F238E27FC236}">
-                <a16:creationId xmlns:a16="http://schemas.microsoft.com/office/drawing/2014/main" id="{2816B4E9-29D8-4B8C-BB5D-D8BD2A7B2E65}"/>
+                <a16:creationId xmlns:a16="http://schemas.microsoft.com/office/drawing/2014/main" id="{B54F18D0-3827-4A51-8ABA-9747637DB215}"/>
               </a:ext>
             </a:extLst>
           </p:cNvPr>
@@ -17739,7 +16923,7 @@
             <a:pPr algn="l">
               <a:defRPr sz="975" b="0">
                 <a:solidFill>
-                  <a:srgbClr val="5B6472"/>
+                  <a:srgbClr val="4B5563"/>
                 </a:solidFill>
                 <a:latin typeface="Aptos"/>
                 <a:ea typeface="Aptos"/>
@@ -17749,7 +16933,7 @@
             <a:r>
               <a:rPr sz="975" b="0">
                 <a:solidFill>
-                  <a:srgbClr val="5B6472"/>
+                  <a:srgbClr val="4B5563"/>
                 </a:solidFill>
                 <a:latin typeface="Aptos"/>
                 <a:ea typeface="Aptos"/>
@@ -17765,7 +16949,7 @@
           <p:cNvPr id="61" name="">
             <a:extLst xmlns:a="http://schemas.openxmlformats.org/drawingml/2006/main">
               <a:ext uri="{FF2B5EF4-FFF2-40B4-BE49-F238E27FC236}">
-                <a16:creationId xmlns:a16="http://schemas.microsoft.com/office/drawing/2014/main" id="{2C5CB809-4123-4C73-B2C1-E4631C9E4E66}"/>
+                <a16:creationId xmlns:a16="http://schemas.microsoft.com/office/drawing/2014/main" id="{2B733B6F-1271-46A6-A579-7B48E00AC8B6}"/>
               </a:ext>
             </a:extLst>
           </p:cNvPr>
@@ -17800,7 +16984,7 @@
           <p:cNvPr id="62" name="">
             <a:extLst xmlns:a="http://schemas.openxmlformats.org/drawingml/2006/main">
               <a:ext uri="{FF2B5EF4-FFF2-40B4-BE49-F238E27FC236}">
-                <a16:creationId xmlns:a16="http://schemas.microsoft.com/office/drawing/2014/main" id="{82B9553A-4420-48C4-B744-461F9D184AC8}"/>
+                <a16:creationId xmlns:a16="http://schemas.microsoft.com/office/drawing/2014/main" id="{DFACDCF7-6726-43A1-9EAE-5AFF73524F8B}"/>
               </a:ext>
             </a:extLst>
           </p:cNvPr>
@@ -17838,7 +17022,7 @@
             <a:pPr algn="l">
               <a:defRPr sz="975" b="0">
                 <a:solidFill>
-                  <a:srgbClr val="5B6472"/>
+                  <a:srgbClr val="4B5563"/>
                 </a:solidFill>
                 <a:latin typeface="Aptos"/>
                 <a:ea typeface="Aptos"/>
@@ -17848,7 +17032,7 @@
             <a:r>
               <a:rPr sz="975" b="0">
                 <a:solidFill>
-                  <a:srgbClr val="5B6472"/>
+                  <a:srgbClr val="4B5563"/>
                 </a:solidFill>
                 <a:latin typeface="Aptos"/>
                 <a:ea typeface="Aptos"/>
@@ -17864,7 +17048,7 @@
           <p:cNvPr id="63" name="">
             <a:extLst xmlns:a="http://schemas.openxmlformats.org/drawingml/2006/main">
               <a:ext uri="{FF2B5EF4-FFF2-40B4-BE49-F238E27FC236}">
-                <a16:creationId xmlns:a16="http://schemas.microsoft.com/office/drawing/2014/main" id="{42049A20-9DBB-4CCF-8356-8593C861A8DD}"/>
+                <a16:creationId xmlns:a16="http://schemas.microsoft.com/office/drawing/2014/main" id="{A25DCD81-1231-4DA8-9FD6-258B0A9732C1}"/>
               </a:ext>
             </a:extLst>
           </p:cNvPr>
@@ -17899,7 +17083,7 @@
           <p:cNvPr id="64" name="">
             <a:extLst xmlns:a="http://schemas.openxmlformats.org/drawingml/2006/main">
               <a:ext uri="{FF2B5EF4-FFF2-40B4-BE49-F238E27FC236}">
-                <a16:creationId xmlns:a16="http://schemas.microsoft.com/office/drawing/2014/main" id="{ECCE41D8-A674-4D4B-AD0E-D90C2519933E}"/>
+                <a16:creationId xmlns:a16="http://schemas.microsoft.com/office/drawing/2014/main" id="{A4FFA6CF-A4C4-4DF9-81DD-5DEC514C3275}"/>
               </a:ext>
             </a:extLst>
           </p:cNvPr>
@@ -17937,7 +17121,7 @@
             <a:pPr algn="l">
               <a:defRPr sz="975" b="0">
                 <a:solidFill>
-                  <a:srgbClr val="5B6472"/>
+                  <a:srgbClr val="4B5563"/>
                 </a:solidFill>
                 <a:latin typeface="Aptos"/>
                 <a:ea typeface="Aptos"/>
@@ -17947,7 +17131,7 @@
             <a:r>
               <a:rPr sz="975" b="0">
                 <a:solidFill>
-                  <a:srgbClr val="5B6472"/>
+                  <a:srgbClr val="4B5563"/>
                 </a:solidFill>
                 <a:latin typeface="Aptos"/>
                 <a:ea typeface="Aptos"/>
@@ -17963,7 +17147,7 @@
           <p:cNvPr id="65" name="">
             <a:extLst xmlns:a="http://schemas.openxmlformats.org/drawingml/2006/main">
               <a:ext uri="{FF2B5EF4-FFF2-40B4-BE49-F238E27FC236}">
-                <a16:creationId xmlns:a16="http://schemas.microsoft.com/office/drawing/2014/main" id="{DD4DE8C1-B393-476F-8BDE-8D346510F6D1}"/>
+                <a16:creationId xmlns:a16="http://schemas.microsoft.com/office/drawing/2014/main" id="{929E6C84-160B-41E2-9761-FCC716F5563A}"/>
               </a:ext>
             </a:extLst>
           </p:cNvPr>
@@ -17998,7 +17182,7 @@
           <p:cNvPr id="66" name="">
             <a:extLst xmlns:a="http://schemas.openxmlformats.org/drawingml/2006/main">
               <a:ext uri="{FF2B5EF4-FFF2-40B4-BE49-F238E27FC236}">
-                <a16:creationId xmlns:a16="http://schemas.microsoft.com/office/drawing/2014/main" id="{379042FF-FFFC-4692-A3A2-3B001435C4C5}"/>
+                <a16:creationId xmlns:a16="http://schemas.microsoft.com/office/drawing/2014/main" id="{D9D9F972-B64B-4006-B43D-C394CD8E8F04}"/>
               </a:ext>
             </a:extLst>
           </p:cNvPr>
@@ -18033,7 +17217,7 @@
           <p:cNvPr id="67" name="">
             <a:extLst xmlns:a="http://schemas.openxmlformats.org/drawingml/2006/main">
               <a:ext uri="{FF2B5EF4-FFF2-40B4-BE49-F238E27FC236}">
-                <a16:creationId xmlns:a16="http://schemas.microsoft.com/office/drawing/2014/main" id="{03F2C41E-A856-4D3A-8EBD-E763DF84CFE8}"/>
+                <a16:creationId xmlns:a16="http://schemas.microsoft.com/office/drawing/2014/main" id="{BE56264A-BB9E-4EF2-A20D-8F7FB730B61E}"/>
               </a:ext>
             </a:extLst>
           </p:cNvPr>
@@ -18087,7 +17271,7 @@
                 <a:ea typeface="Aptos"/>
                 <a:cs typeface="Aptos"/>
               </a:rPr>
-              <a:t>Interpretation: the segmentation creates a useful Part A analytics outcome and can also improve future personalized recommendation strategies.</a:t>
+              <a:t>Output: the users are grouped into heavy listeners, balanced listeners, and music explorers.</a:t>
             </a:r>
           </a:p>
         </p:txBody>
@@ -18097,7 +17281,7 @@
           <p:cNvPr id="68" name="">
             <a:extLst xmlns:a="http://schemas.openxmlformats.org/drawingml/2006/main">
               <a:ext uri="{FF2B5EF4-FFF2-40B4-BE49-F238E27FC236}">
-                <a16:creationId xmlns:a16="http://schemas.microsoft.com/office/drawing/2014/main" id="{C28659BA-A436-4295-BF0A-7150FB0CA238}"/>
+                <a16:creationId xmlns:a16="http://schemas.microsoft.com/office/drawing/2014/main" id="{5C8B8E14-7FE3-46D8-8E9D-C4CB659560F8}"/>
               </a:ext>
             </a:extLst>
           </p:cNvPr>
@@ -18135,7 +17319,7 @@
             <a:pPr algn="l">
               <a:defRPr sz="825" b="0">
                 <a:solidFill>
-                  <a:srgbClr val="5B6472"/>
+                  <a:srgbClr val="4B5563"/>
                 </a:solidFill>
                 <a:latin typeface="Aptos"/>
                 <a:ea typeface="Aptos"/>
@@ -18145,7 +17329,7 @@
             <a:r>
               <a:rPr sz="825" b="0">
                 <a:solidFill>
-                  <a:srgbClr val="5B6472"/>
+                  <a:srgbClr val="4B5563"/>
                 </a:solidFill>
                 <a:latin typeface="Aptos"/>
                 <a:ea typeface="Aptos"/>
@@ -18161,7 +17345,7 @@
           <p:cNvPr id="69" name="">
             <a:extLst xmlns:a="http://schemas.openxmlformats.org/drawingml/2006/main">
               <a:ext uri="{FF2B5EF4-FFF2-40B4-BE49-F238E27FC236}">
-                <a16:creationId xmlns:a16="http://schemas.microsoft.com/office/drawing/2014/main" id="{0C2E3EF9-2D69-4551-BF5F-DF1DE314F4DC}"/>
+                <a16:creationId xmlns:a16="http://schemas.microsoft.com/office/drawing/2014/main" id="{DE44F8E4-2E93-4D5A-BE88-F5BA2C4B9B13}"/>
               </a:ext>
             </a:extLst>
           </p:cNvPr>
@@ -18199,7 +17383,7 @@
             <a:pPr algn="r">
               <a:defRPr sz="900" b="1">
                 <a:solidFill>
-                  <a:srgbClr val="5B6472"/>
+                  <a:srgbClr val="4B5563"/>
                 </a:solidFill>
                 <a:latin typeface="Aptos"/>
                 <a:ea typeface="Aptos"/>
@@ -18209,7 +17393,7 @@
             <a:r>
               <a:rPr sz="900" b="1">
                 <a:solidFill>
-                  <a:srgbClr val="5B6472"/>
+                  <a:srgbClr val="4B5563"/>
                 </a:solidFill>
                 <a:latin typeface="Aptos"/>
                 <a:ea typeface="Aptos"/>
@@ -18223,7 +17407,7 @@
     </p:spTree>
     <p:extLst>
       <p:ext uri="{BB962C8B-B14F-4D97-AF65-F5344CB8AC3E}">
-        <p14:creationId xmlns:p14="http://schemas.microsoft.com/office/powerpoint/2010/main" val="867731289"/>
+        <p14:creationId xmlns:p14="http://schemas.microsoft.com/office/powerpoint/2010/main" val="780616185"/>
       </p:ext>
     </p:extLst>
   </p:cSld>
@@ -18247,7 +17431,7 @@
           <p:cNvPr id="1" name="">
             <a:extLst xmlns:a="http://schemas.openxmlformats.org/drawingml/2006/main">
               <a:ext uri="{FF2B5EF4-FFF2-40B4-BE49-F238E27FC236}">
-                <a16:creationId xmlns:a16="http://schemas.microsoft.com/office/drawing/2014/main" id="{979003EA-79F2-4C0B-B038-1B5764C8A039}"/>
+                <a16:creationId xmlns:a16="http://schemas.microsoft.com/office/drawing/2014/main" id="{5D047C28-43CF-4AC1-95AE-2505C9D2A4BA}"/>
               </a:ext>
             </a:extLst>
           </p:cNvPr>
@@ -18265,7 +17449,7 @@
             <a:avLst/>
           </a:prstGeom>
           <a:solidFill xmlns:a="http://schemas.openxmlformats.org/drawingml/2006/main">
-            <a:srgbClr val="F7F3EA"/>
+            <a:srgbClr val="FFFFFF"/>
           </a:solidFill>
           <a:ln xmlns:a="http://schemas.openxmlformats.org/drawingml/2006/main" w="0">
             <a:solidFill>
@@ -18282,7 +17466,7 @@
           <p:cNvPr id="2" name="kicker-marker-8">
             <a:extLst xmlns:a="http://schemas.openxmlformats.org/drawingml/2006/main">
               <a:ext uri="{FF2B5EF4-FFF2-40B4-BE49-F238E27FC236}">
-                <a16:creationId xmlns:a16="http://schemas.microsoft.com/office/drawing/2014/main" id="{917A3A1F-8949-4AFF-8157-512025C348D5}"/>
+                <a16:creationId xmlns:a16="http://schemas.microsoft.com/office/drawing/2014/main" id="{53A81C4D-A817-4A19-BB7D-A773E40288B6}"/>
               </a:ext>
             </a:extLst>
           </p:cNvPr>
@@ -18317,7 +17501,7 @@
           <p:cNvPr id="3" name="kicker-label-8">
             <a:extLst xmlns:a="http://schemas.openxmlformats.org/drawingml/2006/main">
               <a:ext uri="{FF2B5EF4-FFF2-40B4-BE49-F238E27FC236}">
-                <a16:creationId xmlns:a16="http://schemas.microsoft.com/office/drawing/2014/main" id="{2C802EDD-1AE0-431F-9819-A8EE1FD0CB3C}"/>
+                <a16:creationId xmlns:a16="http://schemas.microsoft.com/office/drawing/2014/main" id="{557A4684-4F66-45D1-9252-E81524FFB50E}"/>
               </a:ext>
             </a:extLst>
           </p:cNvPr>
@@ -18355,7 +17539,7 @@
             <a:pPr algn="l">
               <a:defRPr sz="825" b="1">
                 <a:solidFill>
-                  <a:srgbClr val="5B6472"/>
+                  <a:srgbClr val="4B5563"/>
                 </a:solidFill>
                 <a:latin typeface="Aptos"/>
                 <a:ea typeface="Aptos"/>
@@ -18365,13 +17549,13 @@
             <a:r>
               <a:rPr sz="825" b="1">
                 <a:solidFill>
-                  <a:srgbClr val="5B6472"/>
-                </a:solidFill>
-                <a:latin typeface="Aptos"/>
-                <a:ea typeface="Aptos"/>
-                <a:cs typeface="Aptos"/>
-              </a:rPr>
-              <a:t>PART B MODEL</a:t>
+                  <a:srgbClr val="4B5563"/>
+                </a:solidFill>
+                <a:latin typeface="Aptos"/>
+                <a:ea typeface="Aptos"/>
+                <a:cs typeface="Aptos"/>
+              </a:rPr>
+              <a:t>PART B</a:t>
             </a:r>
           </a:p>
         </p:txBody>
@@ -18381,7 +17565,7 @@
           <p:cNvPr id="4" name="">
             <a:extLst xmlns:a="http://schemas.openxmlformats.org/drawingml/2006/main">
               <a:ext uri="{FF2B5EF4-FFF2-40B4-BE49-F238E27FC236}">
-                <a16:creationId xmlns:a16="http://schemas.microsoft.com/office/drawing/2014/main" id="{79A60881-320F-46E8-906A-8BF1DF5780D1}"/>
+                <a16:creationId xmlns:a16="http://schemas.microsoft.com/office/drawing/2014/main" id="{01086DCB-6DD1-47C7-BA2C-D37FE188CA8C}"/>
               </a:ext>
             </a:extLst>
           </p:cNvPr>
@@ -18435,7 +17619,7 @@
                 <a:ea typeface="Aptos Display"/>
                 <a:cs typeface="Aptos Display"/>
               </a:rPr>
-              <a:t>ALS turns listening counts into ranked song recommendations.</a:t>
+              <a:t>Recommendation Model</a:t>
             </a:r>
           </a:p>
         </p:txBody>
@@ -18445,7 +17629,7 @@
           <p:cNvPr id="5" name="">
             <a:extLst xmlns:a="http://schemas.openxmlformats.org/drawingml/2006/main">
               <a:ext uri="{FF2B5EF4-FFF2-40B4-BE49-F238E27FC236}">
-                <a16:creationId xmlns:a16="http://schemas.microsoft.com/office/drawing/2014/main" id="{E227387F-00B7-4899-A39B-68DC8579CF94}"/>
+                <a16:creationId xmlns:a16="http://schemas.microsoft.com/office/drawing/2014/main" id="{DD41C2C5-8B49-447A-9C1E-119696E8E67C}"/>
               </a:ext>
             </a:extLst>
           </p:cNvPr>
@@ -18483,7 +17667,7 @@
             <a:pPr algn="l">
               <a:defRPr sz="1125" b="0">
                 <a:solidFill>
-                  <a:srgbClr val="5B6472"/>
+                  <a:srgbClr val="4B5563"/>
                 </a:solidFill>
                 <a:latin typeface="Aptos"/>
                 <a:ea typeface="Aptos"/>
@@ -18493,13 +17677,13 @@
             <a:r>
               <a:rPr sz="1125" b="0">
                 <a:solidFill>
-                  <a:srgbClr val="5B6472"/>
-                </a:solidFill>
-                <a:latin typeface="Aptos"/>
-                <a:ea typeface="Aptos"/>
-                <a:cs typeface="Aptos"/>
-              </a:rPr>
-              <a:t>Play count is treated as implicit preference, then Spark MLlib ALS learns user and track factors.</a:t>
+                  <a:srgbClr val="4B5563"/>
+                </a:solidFill>
+                <a:latin typeface="Aptos"/>
+                <a:ea typeface="Aptos"/>
+                <a:cs typeface="Aptos"/>
+              </a:rPr>
+              <a:t>Spark MLlib ALS uses listening counts as implicit feedback to produce ranked song recommendations.</a:t>
             </a:r>
           </a:p>
         </p:txBody>
@@ -18509,7 +17693,7 @@
           <p:cNvPr id="6" name="">
             <a:extLst xmlns:a="http://schemas.openxmlformats.org/drawingml/2006/main">
               <a:ext uri="{FF2B5EF4-FFF2-40B4-BE49-F238E27FC236}">
-                <a16:creationId xmlns:a16="http://schemas.microsoft.com/office/drawing/2014/main" id="{EA226536-5C6F-4962-B93B-DF4173BE01E5}"/>
+                <a16:creationId xmlns:a16="http://schemas.microsoft.com/office/drawing/2014/main" id="{177F3CF9-7F84-4D38-8190-4A97B407D001}"/>
               </a:ext>
             </a:extLst>
           </p:cNvPr>
@@ -18542,7 +17726,7 @@
           <p:cNvPr id="7" name="">
             <a:extLst xmlns:a="http://schemas.openxmlformats.org/drawingml/2006/main">
               <a:ext uri="{FF2B5EF4-FFF2-40B4-BE49-F238E27FC236}">
-                <a16:creationId xmlns:a16="http://schemas.microsoft.com/office/drawing/2014/main" id="{D39F5748-6C48-4EBC-8321-401772F70120}"/>
+                <a16:creationId xmlns:a16="http://schemas.microsoft.com/office/drawing/2014/main" id="{BA7BCABB-7266-45A0-8176-C78CA79F3A13}"/>
               </a:ext>
             </a:extLst>
           </p:cNvPr>
@@ -18606,7 +17790,7 @@
           <p:cNvPr id="8" name="">
             <a:extLst xmlns:a="http://schemas.openxmlformats.org/drawingml/2006/main">
               <a:ext uri="{FF2B5EF4-FFF2-40B4-BE49-F238E27FC236}">
-                <a16:creationId xmlns:a16="http://schemas.microsoft.com/office/drawing/2014/main" id="{CC3E32EE-F867-44AE-8063-94B784D2B12E}"/>
+                <a16:creationId xmlns:a16="http://schemas.microsoft.com/office/drawing/2014/main" id="{63AF31DB-FC63-49F7-B7CC-6E4FCAF10414}"/>
               </a:ext>
             </a:extLst>
           </p:cNvPr>
@@ -18644,7 +17828,7 @@
             <a:pPr algn="l">
               <a:defRPr sz="900" b="0">
                 <a:solidFill>
-                  <a:srgbClr val="5B6472"/>
+                  <a:srgbClr val="4B5563"/>
                 </a:solidFill>
                 <a:latin typeface="Aptos"/>
                 <a:ea typeface="Aptos"/>
@@ -18654,7 +17838,7 @@
             <a:r>
               <a:rPr sz="900" b="0">
                 <a:solidFill>
-                  <a:srgbClr val="5B6472"/>
+                  <a:srgbClr val="4B5563"/>
                 </a:solidFill>
                 <a:latin typeface="Aptos"/>
                 <a:ea typeface="Aptos"/>
@@ -18670,7 +17854,7 @@
           <p:cNvPr id="9" name="">
             <a:extLst xmlns:a="http://schemas.openxmlformats.org/drawingml/2006/main">
               <a:ext uri="{FF2B5EF4-FFF2-40B4-BE49-F238E27FC236}">
-                <a16:creationId xmlns:a16="http://schemas.microsoft.com/office/drawing/2014/main" id="{6330B5F6-DA57-46CC-9995-8BF1193B412E}"/>
+                <a16:creationId xmlns:a16="http://schemas.microsoft.com/office/drawing/2014/main" id="{D4F380E2-91F7-43FC-A1CD-ECBE08A889F9}"/>
               </a:ext>
             </a:extLst>
           </p:cNvPr>
@@ -18703,7 +17887,7 @@
           <p:cNvPr id="10" name="">
             <a:extLst xmlns:a="http://schemas.openxmlformats.org/drawingml/2006/main">
               <a:ext uri="{FF2B5EF4-FFF2-40B4-BE49-F238E27FC236}">
-                <a16:creationId xmlns:a16="http://schemas.microsoft.com/office/drawing/2014/main" id="{DE73F7E6-9D4C-4601-B252-DD879AC1E9B5}"/>
+                <a16:creationId xmlns:a16="http://schemas.microsoft.com/office/drawing/2014/main" id="{9A1C60ED-9F3E-40A7-9B74-1F99141B1AB9}"/>
               </a:ext>
             </a:extLst>
           </p:cNvPr>
@@ -18767,7 +17951,7 @@
           <p:cNvPr id="11" name="">
             <a:extLst xmlns:a="http://schemas.openxmlformats.org/drawingml/2006/main">
               <a:ext uri="{FF2B5EF4-FFF2-40B4-BE49-F238E27FC236}">
-                <a16:creationId xmlns:a16="http://schemas.microsoft.com/office/drawing/2014/main" id="{B4A803D0-63D8-478A-8AFA-C9E762CD4487}"/>
+                <a16:creationId xmlns:a16="http://schemas.microsoft.com/office/drawing/2014/main" id="{4FD4B6DC-DC8B-48A1-84F9-690996FE2678}"/>
               </a:ext>
             </a:extLst>
           </p:cNvPr>
@@ -18805,7 +17989,7 @@
             <a:pPr algn="l">
               <a:defRPr sz="900" b="0">
                 <a:solidFill>
-                  <a:srgbClr val="5B6472"/>
+                  <a:srgbClr val="4B5563"/>
                 </a:solidFill>
                 <a:latin typeface="Aptos"/>
                 <a:ea typeface="Aptos"/>
@@ -18815,7 +17999,7 @@
             <a:r>
               <a:rPr sz="900" b="0">
                 <a:solidFill>
-                  <a:srgbClr val="5B6472"/>
+                  <a:srgbClr val="4B5563"/>
                 </a:solidFill>
                 <a:latin typeface="Aptos"/>
                 <a:ea typeface="Aptos"/>
@@ -18831,7 +18015,7 @@
           <p:cNvPr id="12" name="">
             <a:extLst xmlns:a="http://schemas.openxmlformats.org/drawingml/2006/main">
               <a:ext uri="{FF2B5EF4-FFF2-40B4-BE49-F238E27FC236}">
-                <a16:creationId xmlns:a16="http://schemas.microsoft.com/office/drawing/2014/main" id="{5C8E6CE9-9D18-4F51-8714-3FF917572B77}"/>
+                <a16:creationId xmlns:a16="http://schemas.microsoft.com/office/drawing/2014/main" id="{AC9BE4B1-A3AE-4E95-B5F1-20E09831328A}"/>
               </a:ext>
             </a:extLst>
           </p:cNvPr>
@@ -18864,7 +18048,7 @@
           <p:cNvPr id="13" name="">
             <a:extLst xmlns:a="http://schemas.openxmlformats.org/drawingml/2006/main">
               <a:ext uri="{FF2B5EF4-FFF2-40B4-BE49-F238E27FC236}">
-                <a16:creationId xmlns:a16="http://schemas.microsoft.com/office/drawing/2014/main" id="{83759894-2010-4720-9DBD-74FF0B466DB5}"/>
+                <a16:creationId xmlns:a16="http://schemas.microsoft.com/office/drawing/2014/main" id="{66BBEEC7-0E3F-45F7-8370-0CAFAD326762}"/>
               </a:ext>
             </a:extLst>
           </p:cNvPr>
@@ -18928,7 +18112,7 @@
           <p:cNvPr id="14" name="">
             <a:extLst xmlns:a="http://schemas.openxmlformats.org/drawingml/2006/main">
               <a:ext uri="{FF2B5EF4-FFF2-40B4-BE49-F238E27FC236}">
-                <a16:creationId xmlns:a16="http://schemas.microsoft.com/office/drawing/2014/main" id="{BC3AF6C4-4641-456A-BAE5-FC3CF151154D}"/>
+                <a16:creationId xmlns:a16="http://schemas.microsoft.com/office/drawing/2014/main" id="{2EFAC022-3E9B-417C-9EC2-A7CDD1E24B6F}"/>
               </a:ext>
             </a:extLst>
           </p:cNvPr>
@@ -18966,7 +18150,7 @@
             <a:pPr algn="l">
               <a:defRPr sz="900" b="0">
                 <a:solidFill>
-                  <a:srgbClr val="5B6472"/>
+                  <a:srgbClr val="4B5563"/>
                 </a:solidFill>
                 <a:latin typeface="Aptos"/>
                 <a:ea typeface="Aptos"/>
@@ -18976,7 +18160,7 @@
             <a:r>
               <a:rPr sz="900" b="0">
                 <a:solidFill>
-                  <a:srgbClr val="5B6472"/>
+                  <a:srgbClr val="4B5563"/>
                 </a:solidFill>
                 <a:latin typeface="Aptos"/>
                 <a:ea typeface="Aptos"/>
@@ -18992,7 +18176,7 @@
           <p:cNvPr id="15" name="">
             <a:extLst xmlns:a="http://schemas.openxmlformats.org/drawingml/2006/main">
               <a:ext uri="{FF2B5EF4-FFF2-40B4-BE49-F238E27FC236}">
-                <a16:creationId xmlns:a16="http://schemas.microsoft.com/office/drawing/2014/main" id="{C075378C-474B-43E8-96EA-85196FFA4E39}"/>
+                <a16:creationId xmlns:a16="http://schemas.microsoft.com/office/drawing/2014/main" id="{9D7ED287-C9FC-43F5-B315-2B045A37EE22}"/>
               </a:ext>
             </a:extLst>
           </p:cNvPr>
@@ -19025,7 +18209,7 @@
           <p:cNvPr id="16" name="">
             <a:extLst xmlns:a="http://schemas.openxmlformats.org/drawingml/2006/main">
               <a:ext uri="{FF2B5EF4-FFF2-40B4-BE49-F238E27FC236}">
-                <a16:creationId xmlns:a16="http://schemas.microsoft.com/office/drawing/2014/main" id="{2F452051-024D-41FB-BF98-B95604D172C7}"/>
+                <a16:creationId xmlns:a16="http://schemas.microsoft.com/office/drawing/2014/main" id="{7068644F-B8BC-4834-9D35-C6876ACA1952}"/>
               </a:ext>
             </a:extLst>
           </p:cNvPr>
@@ -19089,7 +18273,7 @@
           <p:cNvPr id="17" name="">
             <a:extLst xmlns:a="http://schemas.openxmlformats.org/drawingml/2006/main">
               <a:ext uri="{FF2B5EF4-FFF2-40B4-BE49-F238E27FC236}">
-                <a16:creationId xmlns:a16="http://schemas.microsoft.com/office/drawing/2014/main" id="{99744A79-4E27-47FC-971A-3B3861882978}"/>
+                <a16:creationId xmlns:a16="http://schemas.microsoft.com/office/drawing/2014/main" id="{FB9C35AA-9FF0-4565-B809-252DB79B211C}"/>
               </a:ext>
             </a:extLst>
           </p:cNvPr>
@@ -19127,7 +18311,7 @@
             <a:pPr algn="l">
               <a:defRPr sz="900" b="0">
                 <a:solidFill>
-                  <a:srgbClr val="5B6472"/>
+                  <a:srgbClr val="4B5563"/>
                 </a:solidFill>
                 <a:latin typeface="Aptos"/>
                 <a:ea typeface="Aptos"/>
@@ -19137,7 +18321,7 @@
             <a:r>
               <a:rPr sz="900" b="0">
                 <a:solidFill>
-                  <a:srgbClr val="5B6472"/>
+                  <a:srgbClr val="4B5563"/>
                 </a:solidFill>
                 <a:latin typeface="Aptos"/>
                 <a:ea typeface="Aptos"/>
@@ -19153,7 +18337,7 @@
           <p:cNvPr id="18" name="">
             <a:extLst xmlns:a="http://schemas.openxmlformats.org/drawingml/2006/main">
               <a:ext uri="{FF2B5EF4-FFF2-40B4-BE49-F238E27FC236}">
-                <a16:creationId xmlns:a16="http://schemas.microsoft.com/office/drawing/2014/main" id="{F58BC35C-2D36-4968-A28E-9E978072FDA8}"/>
+                <a16:creationId xmlns:a16="http://schemas.microsoft.com/office/drawing/2014/main" id="{6D2DF63E-0FD3-4A5D-A65F-C0F952841586}"/>
               </a:ext>
             </a:extLst>
           </p:cNvPr>
@@ -19171,7 +18355,7 @@
             <a:avLst/>
           </a:prstGeom>
           <a:solidFill xmlns:a="http://schemas.openxmlformats.org/drawingml/2006/main">
-            <a:srgbClr val="D8D0C2"/>
+            <a:srgbClr val="E5E7EB"/>
           </a:solidFill>
           <a:ln xmlns:a="http://schemas.openxmlformats.org/drawingml/2006/main" w="0">
             <a:solidFill>
@@ -19188,7 +18372,7 @@
           <p:cNvPr id="19" name="">
             <a:extLst xmlns:a="http://schemas.openxmlformats.org/drawingml/2006/main">
               <a:ext uri="{FF2B5EF4-FFF2-40B4-BE49-F238E27FC236}">
-                <a16:creationId xmlns:a16="http://schemas.microsoft.com/office/drawing/2014/main" id="{A7F2A121-A86D-4B2D-8697-B98308E999B3}"/>
+                <a16:creationId xmlns:a16="http://schemas.microsoft.com/office/drawing/2014/main" id="{D4B676EC-D33C-4426-825D-AABAB5B80C87}"/>
               </a:ext>
             </a:extLst>
           </p:cNvPr>
@@ -19206,7 +18390,7 @@
             <a:avLst/>
           </a:prstGeom>
           <a:solidFill xmlns:a="http://schemas.openxmlformats.org/drawingml/2006/main">
-            <a:srgbClr val="D8D0C2"/>
+            <a:srgbClr val="E5E7EB"/>
           </a:solidFill>
           <a:ln xmlns:a="http://schemas.openxmlformats.org/drawingml/2006/main" w="0">
             <a:solidFill>
@@ -19223,7 +18407,7 @@
           <p:cNvPr id="20" name="">
             <a:extLst xmlns:a="http://schemas.openxmlformats.org/drawingml/2006/main">
               <a:ext uri="{FF2B5EF4-FFF2-40B4-BE49-F238E27FC236}">
-                <a16:creationId xmlns:a16="http://schemas.microsoft.com/office/drawing/2014/main" id="{09422481-63E7-4C5F-9D4B-6A6DBD74EFB0}"/>
+                <a16:creationId xmlns:a16="http://schemas.microsoft.com/office/drawing/2014/main" id="{E48005B6-7F60-4E14-8EA7-FFBBF4A3442C}"/>
               </a:ext>
             </a:extLst>
           </p:cNvPr>
@@ -19241,7 +18425,7 @@
             <a:avLst/>
           </a:prstGeom>
           <a:solidFill xmlns:a="http://schemas.openxmlformats.org/drawingml/2006/main">
-            <a:srgbClr val="D8D0C2"/>
+            <a:srgbClr val="E5E7EB"/>
           </a:solidFill>
           <a:ln xmlns:a="http://schemas.openxmlformats.org/drawingml/2006/main" w="0">
             <a:solidFill>
@@ -19258,7 +18442,7 @@
           <p:cNvPr id="21" name="">
             <a:extLst xmlns:a="http://schemas.openxmlformats.org/drawingml/2006/main">
               <a:ext uri="{FF2B5EF4-FFF2-40B4-BE49-F238E27FC236}">
-                <a16:creationId xmlns:a16="http://schemas.microsoft.com/office/drawing/2014/main" id="{CD17F35B-AC25-4827-878F-8DB8B68315F0}"/>
+                <a16:creationId xmlns:a16="http://schemas.microsoft.com/office/drawing/2014/main" id="{182A80B6-B0F7-4BA5-8991-A488BA61C26D}"/>
               </a:ext>
             </a:extLst>
           </p:cNvPr>
@@ -19280,7 +18464,7 @@
           </a:solidFill>
           <a:ln xmlns:a="http://schemas.openxmlformats.org/drawingml/2006/main" w="9525">
             <a:solidFill>
-              <a:srgbClr val="D8D0C2"/>
+              <a:srgbClr val="E5E7EB"/>
             </a:solidFill>
             <a:prstDash val="solid"/>
           </a:ln>
@@ -19291,7 +18475,7 @@
           <p:cNvPr id="22" name="">
             <a:extLst xmlns:a="http://schemas.openxmlformats.org/drawingml/2006/main">
               <a:ext uri="{FF2B5EF4-FFF2-40B4-BE49-F238E27FC236}">
-                <a16:creationId xmlns:a16="http://schemas.microsoft.com/office/drawing/2014/main" id="{6AE8E28F-5830-49FC-9039-685375908ABB}"/>
+                <a16:creationId xmlns:a16="http://schemas.microsoft.com/office/drawing/2014/main" id="{378599FE-3222-4220-8F4B-DEE5BED2A2A3}"/>
               </a:ext>
             </a:extLst>
           </p:cNvPr>
@@ -19355,7 +18539,7 @@
           <p:cNvPr id="23" name="">
             <a:extLst xmlns:a="http://schemas.openxmlformats.org/drawingml/2006/main">
               <a:ext uri="{FF2B5EF4-FFF2-40B4-BE49-F238E27FC236}">
-                <a16:creationId xmlns:a16="http://schemas.microsoft.com/office/drawing/2014/main" id="{F193B51F-7F06-404C-95DA-6D6BA12659C4}"/>
+                <a16:creationId xmlns:a16="http://schemas.microsoft.com/office/drawing/2014/main" id="{FCC10A6C-6436-4516-9D20-5CAC38AF2DA2}"/>
               </a:ext>
             </a:extLst>
           </p:cNvPr>
@@ -19393,7 +18577,7 @@
             <a:pPr algn="l">
               <a:defRPr sz="900" b="0">
                 <a:solidFill>
-                  <a:srgbClr val="5B6472"/>
+                  <a:srgbClr val="4B5563"/>
                 </a:solidFill>
                 <a:latin typeface="Aptos"/>
                 <a:ea typeface="Aptos"/>
@@ -19403,7 +18587,7 @@
             <a:r>
               <a:rPr sz="900" b="0">
                 <a:solidFill>
-                  <a:srgbClr val="5B6472"/>
+                  <a:srgbClr val="4B5563"/>
                 </a:solidFill>
                 <a:latin typeface="Aptos"/>
                 <a:ea typeface="Aptos"/>
@@ -19419,7 +18603,7 @@
           <p:cNvPr id="24" name="">
             <a:extLst xmlns:a="http://schemas.openxmlformats.org/drawingml/2006/main">
               <a:ext uri="{FF2B5EF4-FFF2-40B4-BE49-F238E27FC236}">
-                <a16:creationId xmlns:a16="http://schemas.microsoft.com/office/drawing/2014/main" id="{A1C46607-907B-45A2-85D6-E54A5011C302}"/>
+                <a16:creationId xmlns:a16="http://schemas.microsoft.com/office/drawing/2014/main" id="{4F4D8DB5-17E2-4BC1-85FB-666FC54E7C1B}"/>
               </a:ext>
             </a:extLst>
           </p:cNvPr>
@@ -19441,7 +18625,7 @@
           </a:solidFill>
           <a:ln xmlns:a="http://schemas.openxmlformats.org/drawingml/2006/main" w="9525">
             <a:solidFill>
-              <a:srgbClr val="D8D0C2"/>
+              <a:srgbClr val="E5E7EB"/>
             </a:solidFill>
             <a:prstDash val="solid"/>
           </a:ln>
@@ -19452,7 +18636,7 @@
           <p:cNvPr id="25" name="">
             <a:extLst xmlns:a="http://schemas.openxmlformats.org/drawingml/2006/main">
               <a:ext uri="{FF2B5EF4-FFF2-40B4-BE49-F238E27FC236}">
-                <a16:creationId xmlns:a16="http://schemas.microsoft.com/office/drawing/2014/main" id="{EA73B1F0-3AE3-4808-A1ED-7DF1A5EA1B35}"/>
+                <a16:creationId xmlns:a16="http://schemas.microsoft.com/office/drawing/2014/main" id="{8C7549E6-D109-4BBA-BC71-133FC794C09E}"/>
               </a:ext>
             </a:extLst>
           </p:cNvPr>
@@ -19516,7 +18700,7 @@
           <p:cNvPr id="26" name="">
             <a:extLst xmlns:a="http://schemas.openxmlformats.org/drawingml/2006/main">
               <a:ext uri="{FF2B5EF4-FFF2-40B4-BE49-F238E27FC236}">
-                <a16:creationId xmlns:a16="http://schemas.microsoft.com/office/drawing/2014/main" id="{2EC6CF37-D56F-4607-8469-1B26FE2CF82A}"/>
+                <a16:creationId xmlns:a16="http://schemas.microsoft.com/office/drawing/2014/main" id="{54C96C76-1DC3-4DF0-B7BF-047D34EA235A}"/>
               </a:ext>
             </a:extLst>
           </p:cNvPr>
@@ -19554,7 +18738,7 @@
             <a:pPr algn="l">
               <a:defRPr sz="900" b="0">
                 <a:solidFill>
-                  <a:srgbClr val="5B6472"/>
+                  <a:srgbClr val="4B5563"/>
                 </a:solidFill>
                 <a:latin typeface="Aptos"/>
                 <a:ea typeface="Aptos"/>
@@ -19564,7 +18748,7 @@
             <a:r>
               <a:rPr sz="900" b="0">
                 <a:solidFill>
-                  <a:srgbClr val="5B6472"/>
+                  <a:srgbClr val="4B5563"/>
                 </a:solidFill>
                 <a:latin typeface="Aptos"/>
                 <a:ea typeface="Aptos"/>
@@ -19580,7 +18764,7 @@
           <p:cNvPr id="27" name="">
             <a:extLst xmlns:a="http://schemas.openxmlformats.org/drawingml/2006/main">
               <a:ext uri="{FF2B5EF4-FFF2-40B4-BE49-F238E27FC236}">
-                <a16:creationId xmlns:a16="http://schemas.microsoft.com/office/drawing/2014/main" id="{463F90F5-E6B0-42A8-8731-477C200592DB}"/>
+                <a16:creationId xmlns:a16="http://schemas.microsoft.com/office/drawing/2014/main" id="{8DB267BF-8315-4A65-9137-66CF0884734D}"/>
               </a:ext>
             </a:extLst>
           </p:cNvPr>
@@ -19602,7 +18786,7 @@
           </a:solidFill>
           <a:ln xmlns:a="http://schemas.openxmlformats.org/drawingml/2006/main" w="9525">
             <a:solidFill>
-              <a:srgbClr val="D8D0C2"/>
+              <a:srgbClr val="E5E7EB"/>
             </a:solidFill>
             <a:prstDash val="solid"/>
           </a:ln>
@@ -19613,7 +18797,7 @@
           <p:cNvPr id="28" name="">
             <a:extLst xmlns:a="http://schemas.openxmlformats.org/drawingml/2006/main">
               <a:ext uri="{FF2B5EF4-FFF2-40B4-BE49-F238E27FC236}">
-                <a16:creationId xmlns:a16="http://schemas.microsoft.com/office/drawing/2014/main" id="{44DA8ECB-625D-4E05-811C-984B43EBB90F}"/>
+                <a16:creationId xmlns:a16="http://schemas.microsoft.com/office/drawing/2014/main" id="{8F2A5CA7-2239-495F-B916-4BFCB7848A47}"/>
               </a:ext>
             </a:extLst>
           </p:cNvPr>
@@ -19677,7 +18861,7 @@
           <p:cNvPr id="29" name="">
             <a:extLst xmlns:a="http://schemas.openxmlformats.org/drawingml/2006/main">
               <a:ext uri="{FF2B5EF4-FFF2-40B4-BE49-F238E27FC236}">
-                <a16:creationId xmlns:a16="http://schemas.microsoft.com/office/drawing/2014/main" id="{96DD6700-C42C-4A9B-92FE-C3D73FE01B95}"/>
+                <a16:creationId xmlns:a16="http://schemas.microsoft.com/office/drawing/2014/main" id="{B7DFF45F-4B00-4238-9F72-C0A461B5665A}"/>
               </a:ext>
             </a:extLst>
           </p:cNvPr>
@@ -19715,7 +18899,7 @@
             <a:pPr algn="l">
               <a:defRPr sz="900" b="0">
                 <a:solidFill>
-                  <a:srgbClr val="5B6472"/>
+                  <a:srgbClr val="4B5563"/>
                 </a:solidFill>
                 <a:latin typeface="Aptos"/>
                 <a:ea typeface="Aptos"/>
@@ -19725,7 +18909,7 @@
             <a:r>
               <a:rPr sz="900" b="0">
                 <a:solidFill>
-                  <a:srgbClr val="5B6472"/>
+                  <a:srgbClr val="4B5563"/>
                 </a:solidFill>
                 <a:latin typeface="Aptos"/>
                 <a:ea typeface="Aptos"/>
@@ -19741,7 +18925,7 @@
           <p:cNvPr id="30" name="">
             <a:extLst xmlns:a="http://schemas.openxmlformats.org/drawingml/2006/main">
               <a:ext uri="{FF2B5EF4-FFF2-40B4-BE49-F238E27FC236}">
-                <a16:creationId xmlns:a16="http://schemas.microsoft.com/office/drawing/2014/main" id="{4FF48420-9DEE-49A1-B087-1F0AF46DD968}"/>
+                <a16:creationId xmlns:a16="http://schemas.microsoft.com/office/drawing/2014/main" id="{B4D4820B-0FEE-40A1-8EA8-86B6764B7B04}"/>
               </a:ext>
             </a:extLst>
           </p:cNvPr>
@@ -19763,7 +18947,7 @@
           </a:solidFill>
           <a:ln xmlns:a="http://schemas.openxmlformats.org/drawingml/2006/main" w="9525">
             <a:solidFill>
-              <a:srgbClr val="D8D0C2"/>
+              <a:srgbClr val="E5E7EB"/>
             </a:solidFill>
             <a:prstDash val="solid"/>
           </a:ln>
@@ -19774,7 +18958,7 @@
           <p:cNvPr id="31" name="">
             <a:extLst xmlns:a="http://schemas.openxmlformats.org/drawingml/2006/main">
               <a:ext uri="{FF2B5EF4-FFF2-40B4-BE49-F238E27FC236}">
-                <a16:creationId xmlns:a16="http://schemas.microsoft.com/office/drawing/2014/main" id="{E0EE1DDF-9004-461C-ADB6-05CB5B23A3BA}"/>
+                <a16:creationId xmlns:a16="http://schemas.microsoft.com/office/drawing/2014/main" id="{0925C995-5AC5-463C-98DC-65273549B381}"/>
               </a:ext>
             </a:extLst>
           </p:cNvPr>
@@ -19838,7 +19022,7 @@
           <p:cNvPr id="32" name="">
             <a:extLst xmlns:a="http://schemas.openxmlformats.org/drawingml/2006/main">
               <a:ext uri="{FF2B5EF4-FFF2-40B4-BE49-F238E27FC236}">
-                <a16:creationId xmlns:a16="http://schemas.microsoft.com/office/drawing/2014/main" id="{FA2C75CB-CFC9-4A70-8EBE-BEA7E6FC6439}"/>
+                <a16:creationId xmlns:a16="http://schemas.microsoft.com/office/drawing/2014/main" id="{412B2A36-1074-40C0-A763-390AD537DCD3}"/>
               </a:ext>
             </a:extLst>
           </p:cNvPr>
@@ -19876,7 +19060,7 @@
             <a:pPr algn="l">
               <a:defRPr sz="900" b="0">
                 <a:solidFill>
-                  <a:srgbClr val="5B6472"/>
+                  <a:srgbClr val="4B5563"/>
                 </a:solidFill>
                 <a:latin typeface="Aptos"/>
                 <a:ea typeface="Aptos"/>
@@ -19886,7 +19070,7 @@
             <a:r>
               <a:rPr sz="900" b="0">
                 <a:solidFill>
-                  <a:srgbClr val="5B6472"/>
+                  <a:srgbClr val="4B5563"/>
                 </a:solidFill>
                 <a:latin typeface="Aptos"/>
                 <a:ea typeface="Aptos"/>
@@ -19902,7 +19086,7 @@
           <p:cNvPr id="33" name="">
             <a:extLst xmlns:a="http://schemas.openxmlformats.org/drawingml/2006/main">
               <a:ext uri="{FF2B5EF4-FFF2-40B4-BE49-F238E27FC236}">
-                <a16:creationId xmlns:a16="http://schemas.microsoft.com/office/drawing/2014/main" id="{E6CC6644-CA14-468C-A755-D1D4768C6FE5}"/>
+                <a16:creationId xmlns:a16="http://schemas.microsoft.com/office/drawing/2014/main" id="{24180E3C-0100-45EC-9DD1-EC76CBCBA79F}"/>
               </a:ext>
             </a:extLst>
           </p:cNvPr>
@@ -19940,7 +19124,7 @@
             <a:pPr algn="l">
               <a:defRPr sz="825" b="0">
                 <a:solidFill>
-                  <a:srgbClr val="5B6472"/>
+                  <a:srgbClr val="4B5563"/>
                 </a:solidFill>
                 <a:latin typeface="Aptos"/>
                 <a:ea typeface="Aptos"/>
@@ -19950,7 +19134,7 @@
             <a:r>
               <a:rPr sz="825" b="0">
                 <a:solidFill>
-                  <a:srgbClr val="5B6472"/>
+                  <a:srgbClr val="4B5563"/>
                 </a:solidFill>
                 <a:latin typeface="Aptos"/>
                 <a:ea typeface="Aptos"/>
@@ -19966,7 +19150,7 @@
           <p:cNvPr id="34" name="">
             <a:extLst xmlns:a="http://schemas.openxmlformats.org/drawingml/2006/main">
               <a:ext uri="{FF2B5EF4-FFF2-40B4-BE49-F238E27FC236}">
-                <a16:creationId xmlns:a16="http://schemas.microsoft.com/office/drawing/2014/main" id="{47F6A30C-2C21-4D8E-B520-72BC100A69FE}"/>
+                <a16:creationId xmlns:a16="http://schemas.microsoft.com/office/drawing/2014/main" id="{C9551797-A2A3-4983-B3E2-A7712FEE9F86}"/>
               </a:ext>
             </a:extLst>
           </p:cNvPr>
@@ -20004,7 +19188,7 @@
             <a:pPr algn="r">
               <a:defRPr sz="900" b="1">
                 <a:solidFill>
-                  <a:srgbClr val="5B6472"/>
+                  <a:srgbClr val="4B5563"/>
                 </a:solidFill>
                 <a:latin typeface="Aptos"/>
                 <a:ea typeface="Aptos"/>
@@ -20014,7 +19198,7 @@
             <a:r>
               <a:rPr sz="900" b="1">
                 <a:solidFill>
-                  <a:srgbClr val="5B6472"/>
+                  <a:srgbClr val="4B5563"/>
                 </a:solidFill>
                 <a:latin typeface="Aptos"/>
                 <a:ea typeface="Aptos"/>
@@ -20028,7 +19212,7 @@
     </p:spTree>
     <p:extLst>
       <p:ext uri="{BB962C8B-B14F-4D97-AF65-F5344CB8AC3E}">
-        <p14:creationId xmlns:p14="http://schemas.microsoft.com/office/powerpoint/2010/main" val="2098400916"/>
+        <p14:creationId xmlns:p14="http://schemas.microsoft.com/office/powerpoint/2010/main" val="506035119"/>
       </p:ext>
     </p:extLst>
   </p:cSld>
@@ -20052,7 +19236,7 @@
           <p:cNvPr id="1" name="">
             <a:extLst xmlns:a="http://schemas.openxmlformats.org/drawingml/2006/main">
               <a:ext uri="{FF2B5EF4-FFF2-40B4-BE49-F238E27FC236}">
-                <a16:creationId xmlns:a16="http://schemas.microsoft.com/office/drawing/2014/main" id="{7B51C0AE-14BC-45CE-B819-9E780293CB18}"/>
+                <a16:creationId xmlns:a16="http://schemas.microsoft.com/office/drawing/2014/main" id="{F0AAB8CF-4051-4FA9-9D9B-3D62202339E0}"/>
               </a:ext>
             </a:extLst>
           </p:cNvPr>
@@ -20070,7 +19254,7 @@
             <a:avLst/>
           </a:prstGeom>
           <a:solidFill xmlns:a="http://schemas.openxmlformats.org/drawingml/2006/main">
-            <a:srgbClr val="F7F3EA"/>
+            <a:srgbClr val="FFFFFF"/>
           </a:solidFill>
           <a:ln xmlns:a="http://schemas.openxmlformats.org/drawingml/2006/main" w="0">
             <a:solidFill>
@@ -20087,7 +19271,7 @@
           <p:cNvPr id="2" name="kicker-marker-9">
             <a:extLst xmlns:a="http://schemas.openxmlformats.org/drawingml/2006/main">
               <a:ext uri="{FF2B5EF4-FFF2-40B4-BE49-F238E27FC236}">
-                <a16:creationId xmlns:a16="http://schemas.microsoft.com/office/drawing/2014/main" id="{A0A78A23-838A-40AE-BBE9-6DA4960EE4C2}"/>
+                <a16:creationId xmlns:a16="http://schemas.microsoft.com/office/drawing/2014/main" id="{3025156A-1A40-40AB-9077-F1A866961109}"/>
               </a:ext>
             </a:extLst>
           </p:cNvPr>
@@ -20122,7 +19306,7 @@
           <p:cNvPr id="3" name="kicker-label-9">
             <a:extLst xmlns:a="http://schemas.openxmlformats.org/drawingml/2006/main">
               <a:ext uri="{FF2B5EF4-FFF2-40B4-BE49-F238E27FC236}">
-                <a16:creationId xmlns:a16="http://schemas.microsoft.com/office/drawing/2014/main" id="{585BAD3F-C775-4455-B6EE-DC53F8A2EF50}"/>
+                <a16:creationId xmlns:a16="http://schemas.microsoft.com/office/drawing/2014/main" id="{017F325F-FFCC-42D4-BA70-F2657C979113}"/>
               </a:ext>
             </a:extLst>
           </p:cNvPr>
@@ -20160,7 +19344,7 @@
             <a:pPr algn="l">
               <a:defRPr sz="825" b="1">
                 <a:solidFill>
-                  <a:srgbClr val="5B6472"/>
+                  <a:srgbClr val="4B5563"/>
                 </a:solidFill>
                 <a:latin typeface="Aptos"/>
                 <a:ea typeface="Aptos"/>
@@ -20170,13 +19354,13 @@
             <a:r>
               <a:rPr sz="825" b="1">
                 <a:solidFill>
-                  <a:srgbClr val="5B6472"/>
-                </a:solidFill>
-                <a:latin typeface="Aptos"/>
-                <a:ea typeface="Aptos"/>
-                <a:cs typeface="Aptos"/>
-              </a:rPr>
-              <a:t>RECOMMENDATION OUTPUT</a:t>
+                  <a:srgbClr val="4B5563"/>
+                </a:solidFill>
+                <a:latin typeface="Aptos"/>
+                <a:ea typeface="Aptos"/>
+                <a:cs typeface="Aptos"/>
+              </a:rPr>
+              <a:t>PART B</a:t>
             </a:r>
           </a:p>
         </p:txBody>
@@ -20186,7 +19370,7 @@
           <p:cNvPr id="4" name="">
             <a:extLst xmlns:a="http://schemas.openxmlformats.org/drawingml/2006/main">
               <a:ext uri="{FF2B5EF4-FFF2-40B4-BE49-F238E27FC236}">
-                <a16:creationId xmlns:a16="http://schemas.microsoft.com/office/drawing/2014/main" id="{AACCA1E0-339B-4858-A37E-454259DB4531}"/>
+                <a16:creationId xmlns:a16="http://schemas.microsoft.com/office/drawing/2014/main" id="{252E0221-C528-43B6-8740-01B8195AD400}"/>
               </a:ext>
             </a:extLst>
           </p:cNvPr>
@@ -20240,7 +19424,7 @@
                 <a:ea typeface="Aptos Display"/>
                 <a:cs typeface="Aptos Display"/>
               </a:rPr>
-              <a:t>For user_000031, the model recommends a mix of hip-hop, soul, and rock.</a:t>
+              <a:t>Recommendation Output</a:t>
             </a:r>
           </a:p>
         </p:txBody>
@@ -20250,7 +19434,7 @@
           <p:cNvPr id="5" name="">
             <a:extLst xmlns:a="http://schemas.openxmlformats.org/drawingml/2006/main">
               <a:ext uri="{FF2B5EF4-FFF2-40B4-BE49-F238E27FC236}">
-                <a16:creationId xmlns:a16="http://schemas.microsoft.com/office/drawing/2014/main" id="{D80C7420-CDBB-4BC5-8EEA-6A20CFECFE00}"/>
+                <a16:creationId xmlns:a16="http://schemas.microsoft.com/office/drawing/2014/main" id="{5DC58F9C-4FF0-4E51-8EA8-CF7C73EFE111}"/>
               </a:ext>
             </a:extLst>
           </p:cNvPr>
@@ -20288,7 +19472,7 @@
             <a:pPr algn="l">
               <a:defRPr sz="1125" b="0">
                 <a:solidFill>
-                  <a:srgbClr val="5B6472"/>
+                  <a:srgbClr val="4B5563"/>
                 </a:solidFill>
                 <a:latin typeface="Aptos"/>
                 <a:ea typeface="Aptos"/>
@@ -20298,13 +19482,13 @@
             <a:r>
               <a:rPr sz="1125" b="0">
                 <a:solidFill>
-                  <a:srgbClr val="5B6472"/>
-                </a:solidFill>
-                <a:latin typeface="Aptos"/>
-                <a:ea typeface="Aptos"/>
-                <a:cs typeface="Aptos"/>
-              </a:rPr>
-              <a:t>The output table is generated by scoring candidate tracks and removing songs already listened to by the user.</a:t>
+                  <a:srgbClr val="4B5563"/>
+                </a:solidFill>
+                <a:latin typeface="Aptos"/>
+                <a:ea typeface="Aptos"/>
+                <a:cs typeface="Aptos"/>
+              </a:rPr>
+              <a:t>The model scores candidate tracks and removes songs already listened to by the selected user.</a:t>
             </a:r>
           </a:p>
         </p:txBody>
@@ -20314,7 +19498,7 @@
           <p:cNvPr id="6" name="">
             <a:extLst xmlns:a="http://schemas.openxmlformats.org/drawingml/2006/main">
               <a:ext uri="{FF2B5EF4-FFF2-40B4-BE49-F238E27FC236}">
-                <a16:creationId xmlns:a16="http://schemas.microsoft.com/office/drawing/2014/main" id="{FE0BED6F-7590-4949-9717-F9649FC7B1AA}"/>
+                <a16:creationId xmlns:a16="http://schemas.microsoft.com/office/drawing/2014/main" id="{7F9926A0-A698-4615-9D36-868BAED5EB24}"/>
               </a:ext>
             </a:extLst>
           </p:cNvPr>
@@ -20336,7 +19520,7 @@
           </a:solidFill>
           <a:ln xmlns:a="http://schemas.openxmlformats.org/drawingml/2006/main" w="9525">
             <a:solidFill>
-              <a:srgbClr val="D8D0C2"/>
+              <a:srgbClr val="E5E7EB"/>
             </a:solidFill>
             <a:prstDash val="solid"/>
           </a:ln>
@@ -20347,7 +19531,7 @@
           <p:cNvPr id="7" name="">
             <a:extLst xmlns:a="http://schemas.openxmlformats.org/drawingml/2006/main">
               <a:ext uri="{FF2B5EF4-FFF2-40B4-BE49-F238E27FC236}">
-                <a16:creationId xmlns:a16="http://schemas.microsoft.com/office/drawing/2014/main" id="{C4E08A37-7B59-466D-9F35-CEA895E158BC}"/>
+                <a16:creationId xmlns:a16="http://schemas.microsoft.com/office/drawing/2014/main" id="{4B803BDE-AC86-497F-95B2-40F184580250}"/>
               </a:ext>
             </a:extLst>
           </p:cNvPr>
@@ -20411,7 +19595,7 @@
           <p:cNvPr id="8" name="">
             <a:extLst xmlns:a="http://schemas.openxmlformats.org/drawingml/2006/main">
               <a:ext uri="{FF2B5EF4-FFF2-40B4-BE49-F238E27FC236}">
-                <a16:creationId xmlns:a16="http://schemas.microsoft.com/office/drawing/2014/main" id="{477222C6-09B8-4DF7-A1DC-910D0BAC2477}"/>
+                <a16:creationId xmlns:a16="http://schemas.microsoft.com/office/drawing/2014/main" id="{E6F715E9-D96E-4577-BAC2-7BAC3642BC2F}"/>
               </a:ext>
             </a:extLst>
           </p:cNvPr>
@@ -20433,7 +19617,7 @@
           </a:solidFill>
           <a:ln xmlns:a="http://schemas.openxmlformats.org/drawingml/2006/main" w="9525">
             <a:solidFill>
-              <a:srgbClr val="D8D0C2"/>
+              <a:srgbClr val="E5E7EB"/>
             </a:solidFill>
             <a:prstDash val="solid"/>
           </a:ln>
@@ -20444,7 +19628,7 @@
           <p:cNvPr id="9" name="">
             <a:extLst xmlns:a="http://schemas.openxmlformats.org/drawingml/2006/main">
               <a:ext uri="{FF2B5EF4-FFF2-40B4-BE49-F238E27FC236}">
-                <a16:creationId xmlns:a16="http://schemas.microsoft.com/office/drawing/2014/main" id="{9A66E632-E9E3-4239-8671-35C9FB166745}"/>
+                <a16:creationId xmlns:a16="http://schemas.microsoft.com/office/drawing/2014/main" id="{0AF91862-2C79-4B1E-836D-8F3FAD3EF9BC}"/>
               </a:ext>
             </a:extLst>
           </p:cNvPr>
@@ -20508,7 +19692,7 @@
           <p:cNvPr id="10" name="">
             <a:extLst xmlns:a="http://schemas.openxmlformats.org/drawingml/2006/main">
               <a:ext uri="{FF2B5EF4-FFF2-40B4-BE49-F238E27FC236}">
-                <a16:creationId xmlns:a16="http://schemas.microsoft.com/office/drawing/2014/main" id="{A39AAA6E-CA77-4DFC-8D35-5976A3D391E5}"/>
+                <a16:creationId xmlns:a16="http://schemas.microsoft.com/office/drawing/2014/main" id="{AD762256-8818-41D5-8A66-179AB4F1DB4A}"/>
               </a:ext>
             </a:extLst>
           </p:cNvPr>
@@ -20530,7 +19714,7 @@
           </a:solidFill>
           <a:ln xmlns:a="http://schemas.openxmlformats.org/drawingml/2006/main" w="9525">
             <a:solidFill>
-              <a:srgbClr val="D8D0C2"/>
+              <a:srgbClr val="E5E7EB"/>
             </a:solidFill>
             <a:prstDash val="solid"/>
           </a:ln>
@@ -20541,7 +19725,7 @@
           <p:cNvPr id="11" name="">
             <a:extLst xmlns:a="http://schemas.openxmlformats.org/drawingml/2006/main">
               <a:ext uri="{FF2B5EF4-FFF2-40B4-BE49-F238E27FC236}">
-                <a16:creationId xmlns:a16="http://schemas.microsoft.com/office/drawing/2014/main" id="{445C632E-8AE4-4826-AADB-FAC2276959D4}"/>
+                <a16:creationId xmlns:a16="http://schemas.microsoft.com/office/drawing/2014/main" id="{1BE00B0B-B55E-4671-B5FF-03AAACEA353D}"/>
               </a:ext>
             </a:extLst>
           </p:cNvPr>
@@ -20605,7 +19789,7 @@
           <p:cNvPr id="12" name="">
             <a:extLst xmlns:a="http://schemas.openxmlformats.org/drawingml/2006/main">
               <a:ext uri="{FF2B5EF4-FFF2-40B4-BE49-F238E27FC236}">
-                <a16:creationId xmlns:a16="http://schemas.microsoft.com/office/drawing/2014/main" id="{8055304F-79CA-47FF-965C-A307A459FDAF}"/>
+                <a16:creationId xmlns:a16="http://schemas.microsoft.com/office/drawing/2014/main" id="{B747F082-D30A-4141-8592-30B157037932}"/>
               </a:ext>
             </a:extLst>
           </p:cNvPr>
@@ -20627,7 +19811,7 @@
           </a:solidFill>
           <a:ln xmlns:a="http://schemas.openxmlformats.org/drawingml/2006/main" w="9525">
             <a:solidFill>
-              <a:srgbClr val="D8D0C2"/>
+              <a:srgbClr val="E5E7EB"/>
             </a:solidFill>
             <a:prstDash val="solid"/>
           </a:ln>
@@ -20638,7 +19822,7 @@
           <p:cNvPr id="13" name="">
             <a:extLst xmlns:a="http://schemas.openxmlformats.org/drawingml/2006/main">
               <a:ext uri="{FF2B5EF4-FFF2-40B4-BE49-F238E27FC236}">
-                <a16:creationId xmlns:a16="http://schemas.microsoft.com/office/drawing/2014/main" id="{9EC0DEC5-6001-418F-9CB3-8A0B4A538551}"/>
+                <a16:creationId xmlns:a16="http://schemas.microsoft.com/office/drawing/2014/main" id="{E4F4E6CD-8643-4B37-80A0-D283322DF308}"/>
               </a:ext>
             </a:extLst>
           </p:cNvPr>
@@ -20702,7 +19886,7 @@
           <p:cNvPr id="14" name="">
             <a:extLst xmlns:a="http://schemas.openxmlformats.org/drawingml/2006/main">
               <a:ext uri="{FF2B5EF4-FFF2-40B4-BE49-F238E27FC236}">
-                <a16:creationId xmlns:a16="http://schemas.microsoft.com/office/drawing/2014/main" id="{B9BE98A9-8E3E-4940-8303-F59FD8D4D0FA}"/>
+                <a16:creationId xmlns:a16="http://schemas.microsoft.com/office/drawing/2014/main" id="{F40A303F-ECDF-49E9-AE6A-E01D1FC0DDAF}"/>
               </a:ext>
             </a:extLst>
           </p:cNvPr>
@@ -20726,7 +19910,7 @@
           </a:solidFill>
           <a:ln xmlns:a="http://schemas.openxmlformats.org/drawingml/2006/main" w="9525">
             <a:solidFill>
-              <a:srgbClr val="D8D0C2"/>
+              <a:srgbClr val="E5E7EB"/>
             </a:solidFill>
             <a:prstDash val="solid"/>
           </a:ln>
@@ -20737,7 +19921,7 @@
           <p:cNvPr id="15" name="">
             <a:extLst xmlns:a="http://schemas.openxmlformats.org/drawingml/2006/main">
               <a:ext uri="{FF2B5EF4-FFF2-40B4-BE49-F238E27FC236}">
-                <a16:creationId xmlns:a16="http://schemas.microsoft.com/office/drawing/2014/main" id="{D0907938-EDEC-49FB-BFE7-BBA4970D6F22}"/>
+                <a16:creationId xmlns:a16="http://schemas.microsoft.com/office/drawing/2014/main" id="{C6810E1A-D373-4396-AE80-C79851578E08}"/>
               </a:ext>
             </a:extLst>
           </p:cNvPr>
@@ -20801,7 +19985,7 @@
           <p:cNvPr id="16" name="">
             <a:extLst xmlns:a="http://schemas.openxmlformats.org/drawingml/2006/main">
               <a:ext uri="{FF2B5EF4-FFF2-40B4-BE49-F238E27FC236}">
-                <a16:creationId xmlns:a16="http://schemas.microsoft.com/office/drawing/2014/main" id="{5A557B99-4A3D-4A5C-8459-65DFF5FA58A1}"/>
+                <a16:creationId xmlns:a16="http://schemas.microsoft.com/office/drawing/2014/main" id="{0CAB7DD3-3685-4023-920A-E0D395C10F19}"/>
               </a:ext>
             </a:extLst>
           </p:cNvPr>
@@ -20825,7 +20009,7 @@
           </a:solidFill>
           <a:ln xmlns:a="http://schemas.openxmlformats.org/drawingml/2006/main" w="9525">
             <a:solidFill>
-              <a:srgbClr val="D8D0C2"/>
+              <a:srgbClr val="E5E7EB"/>
             </a:solidFill>
             <a:prstDash val="solid"/>
           </a:ln>
@@ -20836,7 +20020,7 @@
           <p:cNvPr id="17" name="">
             <a:extLst xmlns:a="http://schemas.openxmlformats.org/drawingml/2006/main">
               <a:ext uri="{FF2B5EF4-FFF2-40B4-BE49-F238E27FC236}">
-                <a16:creationId xmlns:a16="http://schemas.microsoft.com/office/drawing/2014/main" id="{2937607E-79AB-4289-A78D-4F79D752A4A2}"/>
+                <a16:creationId xmlns:a16="http://schemas.microsoft.com/office/drawing/2014/main" id="{AB6968BE-8A23-4663-9032-FC82074313B9}"/>
               </a:ext>
             </a:extLst>
           </p:cNvPr>
@@ -20900,7 +20084,7 @@
           <p:cNvPr id="18" name="">
             <a:extLst xmlns:a="http://schemas.openxmlformats.org/drawingml/2006/main">
               <a:ext uri="{FF2B5EF4-FFF2-40B4-BE49-F238E27FC236}">
-                <a16:creationId xmlns:a16="http://schemas.microsoft.com/office/drawing/2014/main" id="{B17DB3D5-F81C-46C5-A58C-5C9DF59267B7}"/>
+                <a16:creationId xmlns:a16="http://schemas.microsoft.com/office/drawing/2014/main" id="{8D3242AA-DBB9-47A8-8ED0-AEE6F80EF64D}"/>
               </a:ext>
             </a:extLst>
           </p:cNvPr>
@@ -20924,7 +20108,7 @@
           </a:solidFill>
           <a:ln xmlns:a="http://schemas.openxmlformats.org/drawingml/2006/main" w="9525">
             <a:solidFill>
-              <a:srgbClr val="D8D0C2"/>
+              <a:srgbClr val="E5E7EB"/>
             </a:solidFill>
             <a:prstDash val="solid"/>
           </a:ln>
@@ -20935,7 +20119,7 @@
           <p:cNvPr id="19" name="">
             <a:extLst xmlns:a="http://schemas.openxmlformats.org/drawingml/2006/main">
               <a:ext uri="{FF2B5EF4-FFF2-40B4-BE49-F238E27FC236}">
-                <a16:creationId xmlns:a16="http://schemas.microsoft.com/office/drawing/2014/main" id="{E8407D38-D853-49C5-81CC-17E0EA0D4569}"/>
+                <a16:creationId xmlns:a16="http://schemas.microsoft.com/office/drawing/2014/main" id="{6581336E-CBA0-4500-A4D7-C33EE984D63C}"/>
               </a:ext>
             </a:extLst>
           </p:cNvPr>
@@ -20999,7 +20183,7 @@
           <p:cNvPr id="20" name="">
             <a:extLst xmlns:a="http://schemas.openxmlformats.org/drawingml/2006/main">
               <a:ext uri="{FF2B5EF4-FFF2-40B4-BE49-F238E27FC236}">
-                <a16:creationId xmlns:a16="http://schemas.microsoft.com/office/drawing/2014/main" id="{FADDD324-58E2-42D1-8B08-A20F5FE6143F}"/>
+                <a16:creationId xmlns:a16="http://schemas.microsoft.com/office/drawing/2014/main" id="{878DCEE4-A3C9-4E27-942A-22947D7FBA1D}"/>
               </a:ext>
             </a:extLst>
           </p:cNvPr>
@@ -21023,7 +20207,7 @@
           </a:solidFill>
           <a:ln xmlns:a="http://schemas.openxmlformats.org/drawingml/2006/main" w="9525">
             <a:solidFill>
-              <a:srgbClr val="D8D0C2"/>
+              <a:srgbClr val="E5E7EB"/>
             </a:solidFill>
             <a:prstDash val="solid"/>
           </a:ln>
@@ -21034,7 +20218,7 @@
           <p:cNvPr id="21" name="">
             <a:extLst xmlns:a="http://schemas.openxmlformats.org/drawingml/2006/main">
               <a:ext uri="{FF2B5EF4-FFF2-40B4-BE49-F238E27FC236}">
-                <a16:creationId xmlns:a16="http://schemas.microsoft.com/office/drawing/2014/main" id="{BD2B84B2-A7E1-412E-AE97-1BC63F1DAD26}"/>
+                <a16:creationId xmlns:a16="http://schemas.microsoft.com/office/drawing/2014/main" id="{433D64CC-1B1C-43C3-9CF4-CB8D6DDBC317}"/>
               </a:ext>
             </a:extLst>
           </p:cNvPr>
@@ -21098,7 +20282,7 @@
           <p:cNvPr id="22" name="">
             <a:extLst xmlns:a="http://schemas.openxmlformats.org/drawingml/2006/main">
               <a:ext uri="{FF2B5EF4-FFF2-40B4-BE49-F238E27FC236}">
-                <a16:creationId xmlns:a16="http://schemas.microsoft.com/office/drawing/2014/main" id="{6E26C766-502E-45D8-90FC-43A3DD60370A}"/>
+                <a16:creationId xmlns:a16="http://schemas.microsoft.com/office/drawing/2014/main" id="{3453F740-14B6-4C78-97EC-94DBCD176F28}"/>
               </a:ext>
             </a:extLst>
           </p:cNvPr>
@@ -21122,7 +20306,7 @@
           </a:solidFill>
           <a:ln xmlns:a="http://schemas.openxmlformats.org/drawingml/2006/main" w="9525">
             <a:solidFill>
-              <a:srgbClr val="D8D0C2"/>
+              <a:srgbClr val="E5E7EB"/>
             </a:solidFill>
             <a:prstDash val="solid"/>
           </a:ln>
@@ -21133,7 +20317,7 @@
           <p:cNvPr id="23" name="">
             <a:extLst xmlns:a="http://schemas.openxmlformats.org/drawingml/2006/main">
               <a:ext uri="{FF2B5EF4-FFF2-40B4-BE49-F238E27FC236}">
-                <a16:creationId xmlns:a16="http://schemas.microsoft.com/office/drawing/2014/main" id="{C8E10936-52A7-47EF-90F4-26406D562388}"/>
+                <a16:creationId xmlns:a16="http://schemas.microsoft.com/office/drawing/2014/main" id="{84AEA879-C94C-45CC-BAB5-1EF4D9928AF7}"/>
               </a:ext>
             </a:extLst>
           </p:cNvPr>
@@ -21197,7 +20381,7 @@
           <p:cNvPr id="24" name="">
             <a:extLst xmlns:a="http://schemas.openxmlformats.org/drawingml/2006/main">
               <a:ext uri="{FF2B5EF4-FFF2-40B4-BE49-F238E27FC236}">
-                <a16:creationId xmlns:a16="http://schemas.microsoft.com/office/drawing/2014/main" id="{1327C9B6-FE6E-4045-866F-943B9A2DFC3B}"/>
+                <a16:creationId xmlns:a16="http://schemas.microsoft.com/office/drawing/2014/main" id="{816CCAFE-8AEA-4815-8CB5-B6E16421DC01}"/>
               </a:ext>
             </a:extLst>
           </p:cNvPr>
@@ -21221,7 +20405,7 @@
           </a:solidFill>
           <a:ln xmlns:a="http://schemas.openxmlformats.org/drawingml/2006/main" w="9525">
             <a:solidFill>
-              <a:srgbClr val="D8D0C2"/>
+              <a:srgbClr val="E5E7EB"/>
             </a:solidFill>
             <a:prstDash val="solid"/>
           </a:ln>
@@ -21232,7 +20416,7 @@
           <p:cNvPr id="25" name="">
             <a:extLst xmlns:a="http://schemas.openxmlformats.org/drawingml/2006/main">
               <a:ext uri="{FF2B5EF4-FFF2-40B4-BE49-F238E27FC236}">
-                <a16:creationId xmlns:a16="http://schemas.microsoft.com/office/drawing/2014/main" id="{91E9FD28-87A5-4C37-A408-AD0078B24315}"/>
+                <a16:creationId xmlns:a16="http://schemas.microsoft.com/office/drawing/2014/main" id="{50539F9D-C07D-4BF4-A250-251C5BDE422C}"/>
               </a:ext>
             </a:extLst>
           </p:cNvPr>
@@ -21296,7 +20480,7 @@
           <p:cNvPr id="26" name="">
             <a:extLst xmlns:a="http://schemas.openxmlformats.org/drawingml/2006/main">
               <a:ext uri="{FF2B5EF4-FFF2-40B4-BE49-F238E27FC236}">
-                <a16:creationId xmlns:a16="http://schemas.microsoft.com/office/drawing/2014/main" id="{31D152C5-CC5E-4179-BCC6-AB8DC804168C}"/>
+                <a16:creationId xmlns:a16="http://schemas.microsoft.com/office/drawing/2014/main" id="{EA841879-4BEB-461E-9DF8-7B1864251143}"/>
               </a:ext>
             </a:extLst>
           </p:cNvPr>
@@ -21320,7 +20504,7 @@
           </a:solidFill>
           <a:ln xmlns:a="http://schemas.openxmlformats.org/drawingml/2006/main" w="9525">
             <a:solidFill>
-              <a:srgbClr val="D8D0C2"/>
+              <a:srgbClr val="E5E7EB"/>
             </a:solidFill>
             <a:prstDash val="solid"/>
           </a:ln>
@@ -21331,7 +20515,7 @@
           <p:cNvPr id="27" name="">
             <a:extLst xmlns:a="http://schemas.openxmlformats.org/drawingml/2006/main">
               <a:ext uri="{FF2B5EF4-FFF2-40B4-BE49-F238E27FC236}">
-                <a16:creationId xmlns:a16="http://schemas.microsoft.com/office/drawing/2014/main" id="{7E7CF2A8-8E8E-4A35-A1A6-D8BC4B6E54A2}"/>
+                <a16:creationId xmlns:a16="http://schemas.microsoft.com/office/drawing/2014/main" id="{0E8956FE-A236-4A2A-B6A2-41F0E93AF5A7}"/>
               </a:ext>
             </a:extLst>
           </p:cNvPr>
@@ -21395,7 +20579,7 @@
           <p:cNvPr id="28" name="">
             <a:extLst xmlns:a="http://schemas.openxmlformats.org/drawingml/2006/main">
               <a:ext uri="{FF2B5EF4-FFF2-40B4-BE49-F238E27FC236}">
-                <a16:creationId xmlns:a16="http://schemas.microsoft.com/office/drawing/2014/main" id="{42CB0F50-E680-4856-BDB0-627A5A3B6B78}"/>
+                <a16:creationId xmlns:a16="http://schemas.microsoft.com/office/drawing/2014/main" id="{C2DEBD73-46E4-4FC8-A8F6-FBE3DD6961AF}"/>
               </a:ext>
             </a:extLst>
           </p:cNvPr>
@@ -21419,7 +20603,7 @@
           </a:solidFill>
           <a:ln xmlns:a="http://schemas.openxmlformats.org/drawingml/2006/main" w="9525">
             <a:solidFill>
-              <a:srgbClr val="D8D0C2"/>
+              <a:srgbClr val="E5E7EB"/>
             </a:solidFill>
             <a:prstDash val="solid"/>
           </a:ln>
@@ -21430,7 +20614,7 @@
           <p:cNvPr id="29" name="">
             <a:extLst xmlns:a="http://schemas.openxmlformats.org/drawingml/2006/main">
               <a:ext uri="{FF2B5EF4-FFF2-40B4-BE49-F238E27FC236}">
-                <a16:creationId xmlns:a16="http://schemas.microsoft.com/office/drawing/2014/main" id="{A29D83A1-BC36-4798-AB44-F71FDE3E41EA}"/>
+                <a16:creationId xmlns:a16="http://schemas.microsoft.com/office/drawing/2014/main" id="{732882F8-B770-42C4-BF1C-E619D723CA25}"/>
               </a:ext>
             </a:extLst>
           </p:cNvPr>
@@ -21494,7 +20678,7 @@
           <p:cNvPr id="30" name="">
             <a:extLst xmlns:a="http://schemas.openxmlformats.org/drawingml/2006/main">
               <a:ext uri="{FF2B5EF4-FFF2-40B4-BE49-F238E27FC236}">
-                <a16:creationId xmlns:a16="http://schemas.microsoft.com/office/drawing/2014/main" id="{194F77CE-B56A-49EC-B1E6-C024812BCFF8}"/>
+                <a16:creationId xmlns:a16="http://schemas.microsoft.com/office/drawing/2014/main" id="{0DCFCC44-F4EF-4295-BE64-5919E3D0D3E0}"/>
               </a:ext>
             </a:extLst>
           </p:cNvPr>
@@ -21518,7 +20702,7 @@
           </a:solidFill>
           <a:ln xmlns:a="http://schemas.openxmlformats.org/drawingml/2006/main" w="9525">
             <a:solidFill>
-              <a:srgbClr val="D8D0C2"/>
+              <a:srgbClr val="E5E7EB"/>
             </a:solidFill>
             <a:prstDash val="solid"/>
           </a:ln>
@@ -21529,7 +20713,7 @@
           <p:cNvPr id="31" name="">
             <a:extLst xmlns:a="http://schemas.openxmlformats.org/drawingml/2006/main">
               <a:ext uri="{FF2B5EF4-FFF2-40B4-BE49-F238E27FC236}">
-                <a16:creationId xmlns:a16="http://schemas.microsoft.com/office/drawing/2014/main" id="{CA353896-1883-4BD4-81F1-30A25D12F318}"/>
+                <a16:creationId xmlns:a16="http://schemas.microsoft.com/office/drawing/2014/main" id="{2F07DF7A-8A72-45FC-9B83-3D8DCDD82A06}"/>
               </a:ext>
             </a:extLst>
           </p:cNvPr>
@@ -21593,7 +20777,7 @@
           <p:cNvPr id="32" name="">
             <a:extLst xmlns:a="http://schemas.openxmlformats.org/drawingml/2006/main">
               <a:ext uri="{FF2B5EF4-FFF2-40B4-BE49-F238E27FC236}">
-                <a16:creationId xmlns:a16="http://schemas.microsoft.com/office/drawing/2014/main" id="{B60A2198-15F5-40A9-8887-010294F9E3A2}"/>
+                <a16:creationId xmlns:a16="http://schemas.microsoft.com/office/drawing/2014/main" id="{8B5A1FF6-6373-49C2-ACE4-B1C88642770F}"/>
               </a:ext>
             </a:extLst>
           </p:cNvPr>
@@ -21617,7 +20801,7 @@
           </a:solidFill>
           <a:ln xmlns:a="http://schemas.openxmlformats.org/drawingml/2006/main" w="9525">
             <a:solidFill>
-              <a:srgbClr val="D8D0C2"/>
+              <a:srgbClr val="E5E7EB"/>
             </a:solidFill>
             <a:prstDash val="solid"/>
           </a:ln>
@@ -21628,7 +20812,7 @@
           <p:cNvPr id="33" name="">
             <a:extLst xmlns:a="http://schemas.openxmlformats.org/drawingml/2006/main">
               <a:ext uri="{FF2B5EF4-FFF2-40B4-BE49-F238E27FC236}">
-                <a16:creationId xmlns:a16="http://schemas.microsoft.com/office/drawing/2014/main" id="{B11CE02B-7E9A-416F-A9C0-82A19F71CAF9}"/>
+                <a16:creationId xmlns:a16="http://schemas.microsoft.com/office/drawing/2014/main" id="{A79F0489-EB6F-4D76-B34B-9B5D00628170}"/>
               </a:ext>
             </a:extLst>
           </p:cNvPr>
@@ -21692,7 +20876,7 @@
           <p:cNvPr id="34" name="">
             <a:extLst xmlns:a="http://schemas.openxmlformats.org/drawingml/2006/main">
               <a:ext uri="{FF2B5EF4-FFF2-40B4-BE49-F238E27FC236}">
-                <a16:creationId xmlns:a16="http://schemas.microsoft.com/office/drawing/2014/main" id="{9FEAE42E-FC93-47A7-B882-2F4A71857B0E}"/>
+                <a16:creationId xmlns:a16="http://schemas.microsoft.com/office/drawing/2014/main" id="{3C57E069-02CA-4257-8B94-C297B8C62A90}"/>
               </a:ext>
             </a:extLst>
           </p:cNvPr>
@@ -21716,7 +20900,7 @@
           </a:solidFill>
           <a:ln xmlns:a="http://schemas.openxmlformats.org/drawingml/2006/main" w="9525">
             <a:solidFill>
-              <a:srgbClr val="D8D0C2"/>
+              <a:srgbClr val="E5E7EB"/>
             </a:solidFill>
             <a:prstDash val="solid"/>
           </a:ln>
@@ -21727,7 +20911,7 @@
           <p:cNvPr id="35" name="">
             <a:extLst xmlns:a="http://schemas.openxmlformats.org/drawingml/2006/main">
               <a:ext uri="{FF2B5EF4-FFF2-40B4-BE49-F238E27FC236}">
-                <a16:creationId xmlns:a16="http://schemas.microsoft.com/office/drawing/2014/main" id="{358B42FE-CB3D-4E55-B9DB-D4AEECC0445D}"/>
+                <a16:creationId xmlns:a16="http://schemas.microsoft.com/office/drawing/2014/main" id="{DA2FFE2A-25A0-4F01-820A-34D31BBC0669}"/>
               </a:ext>
             </a:extLst>
           </p:cNvPr>
@@ -21791,7 +20975,7 @@
           <p:cNvPr id="36" name="">
             <a:extLst xmlns:a="http://schemas.openxmlformats.org/drawingml/2006/main">
               <a:ext uri="{FF2B5EF4-FFF2-40B4-BE49-F238E27FC236}">
-                <a16:creationId xmlns:a16="http://schemas.microsoft.com/office/drawing/2014/main" id="{628E4204-9FDC-4DC3-88E1-851A134CFFAA}"/>
+                <a16:creationId xmlns:a16="http://schemas.microsoft.com/office/drawing/2014/main" id="{329CAECE-3440-487C-BBF9-B76452C52E33}"/>
               </a:ext>
             </a:extLst>
           </p:cNvPr>
@@ -21815,7 +20999,7 @@
           </a:solidFill>
           <a:ln xmlns:a="http://schemas.openxmlformats.org/drawingml/2006/main" w="9525">
             <a:solidFill>
-              <a:srgbClr val="D8D0C2"/>
+              <a:srgbClr val="E5E7EB"/>
             </a:solidFill>
             <a:prstDash val="solid"/>
           </a:ln>
@@ -21826,7 +21010,7 @@
           <p:cNvPr id="37" name="">
             <a:extLst xmlns:a="http://schemas.openxmlformats.org/drawingml/2006/main">
               <a:ext uri="{FF2B5EF4-FFF2-40B4-BE49-F238E27FC236}">
-                <a16:creationId xmlns:a16="http://schemas.microsoft.com/office/drawing/2014/main" id="{29177C65-DECA-47D6-BF5D-F7CFB2C229D1}"/>
+                <a16:creationId xmlns:a16="http://schemas.microsoft.com/office/drawing/2014/main" id="{B54A4A6F-BB35-4E40-B90D-DCDCA62BC6CE}"/>
               </a:ext>
             </a:extLst>
           </p:cNvPr>
@@ -21890,7 +21074,7 @@
           <p:cNvPr id="38" name="">
             <a:extLst xmlns:a="http://schemas.openxmlformats.org/drawingml/2006/main">
               <a:ext uri="{FF2B5EF4-FFF2-40B4-BE49-F238E27FC236}">
-                <a16:creationId xmlns:a16="http://schemas.microsoft.com/office/drawing/2014/main" id="{452FE5FB-9D69-4B1E-9F1A-1DAA4E657D4C}"/>
+                <a16:creationId xmlns:a16="http://schemas.microsoft.com/office/drawing/2014/main" id="{CD24C47D-8AD5-4E07-8BB9-2548E68CA1D9}"/>
               </a:ext>
             </a:extLst>
           </p:cNvPr>
@@ -21914,7 +21098,7 @@
           </a:solidFill>
           <a:ln xmlns:a="http://schemas.openxmlformats.org/drawingml/2006/main" w="9525">
             <a:solidFill>
-              <a:srgbClr val="D8D0C2"/>
+              <a:srgbClr val="E5E7EB"/>
             </a:solidFill>
             <a:prstDash val="solid"/>
           </a:ln>
@@ -21925,7 +21109,7 @@
           <p:cNvPr id="39" name="">
             <a:extLst xmlns:a="http://schemas.openxmlformats.org/drawingml/2006/main">
               <a:ext uri="{FF2B5EF4-FFF2-40B4-BE49-F238E27FC236}">
-                <a16:creationId xmlns:a16="http://schemas.microsoft.com/office/drawing/2014/main" id="{EADE3EEE-BEB9-487C-863D-D52BCEE4990B}"/>
+                <a16:creationId xmlns:a16="http://schemas.microsoft.com/office/drawing/2014/main" id="{142DC48A-6BEA-4BBD-A185-28A7E13ADB0A}"/>
               </a:ext>
             </a:extLst>
           </p:cNvPr>
@@ -21989,7 +21173,7 @@
           <p:cNvPr id="40" name="">
             <a:extLst xmlns:a="http://schemas.openxmlformats.org/drawingml/2006/main">
               <a:ext uri="{FF2B5EF4-FFF2-40B4-BE49-F238E27FC236}">
-                <a16:creationId xmlns:a16="http://schemas.microsoft.com/office/drawing/2014/main" id="{07FCB7C1-F931-440B-AA08-527BFE59A9CB}"/>
+                <a16:creationId xmlns:a16="http://schemas.microsoft.com/office/drawing/2014/main" id="{B08BD844-69F8-4D83-89E5-23C38AB9384B}"/>
               </a:ext>
             </a:extLst>
           </p:cNvPr>
@@ -22013,7 +21197,7 @@
           </a:solidFill>
           <a:ln xmlns:a="http://schemas.openxmlformats.org/drawingml/2006/main" w="9525">
             <a:solidFill>
-              <a:srgbClr val="D8D0C2"/>
+              <a:srgbClr val="E5E7EB"/>
             </a:solidFill>
             <a:prstDash val="solid"/>
           </a:ln>
@@ -22024,7 +21208,7 @@
           <p:cNvPr id="41" name="">
             <a:extLst xmlns:a="http://schemas.openxmlformats.org/drawingml/2006/main">
               <a:ext uri="{FF2B5EF4-FFF2-40B4-BE49-F238E27FC236}">
-                <a16:creationId xmlns:a16="http://schemas.microsoft.com/office/drawing/2014/main" id="{F38C07E3-9A80-4A64-810B-798DDC8040A9}"/>
+                <a16:creationId xmlns:a16="http://schemas.microsoft.com/office/drawing/2014/main" id="{89D72E7A-F078-43A0-9CD4-30F119EA5A37}"/>
               </a:ext>
             </a:extLst>
           </p:cNvPr>
@@ -22088,7 +21272,7 @@
           <p:cNvPr id="42" name="">
             <a:extLst xmlns:a="http://schemas.openxmlformats.org/drawingml/2006/main">
               <a:ext uri="{FF2B5EF4-FFF2-40B4-BE49-F238E27FC236}">
-                <a16:creationId xmlns:a16="http://schemas.microsoft.com/office/drawing/2014/main" id="{F1FF1A5A-4185-4526-8DA3-DDDE6077AFA6}"/>
+                <a16:creationId xmlns:a16="http://schemas.microsoft.com/office/drawing/2014/main" id="{A5D83EF7-D247-41AB-93F6-0C8DACB13492}"/>
               </a:ext>
             </a:extLst>
           </p:cNvPr>
@@ -22112,7 +21296,7 @@
           </a:solidFill>
           <a:ln xmlns:a="http://schemas.openxmlformats.org/drawingml/2006/main" w="9525">
             <a:solidFill>
-              <a:srgbClr val="D8D0C2"/>
+              <a:srgbClr val="E5E7EB"/>
             </a:solidFill>
             <a:prstDash val="solid"/>
           </a:ln>
@@ -22123,7 +21307,7 @@
           <p:cNvPr id="43" name="">
             <a:extLst xmlns:a="http://schemas.openxmlformats.org/drawingml/2006/main">
               <a:ext uri="{FF2B5EF4-FFF2-40B4-BE49-F238E27FC236}">
-                <a16:creationId xmlns:a16="http://schemas.microsoft.com/office/drawing/2014/main" id="{EBA272C1-0048-4685-AFE4-5E8EAE399991}"/>
+                <a16:creationId xmlns:a16="http://schemas.microsoft.com/office/drawing/2014/main" id="{46801CAC-CC07-4F51-9191-EF81FE221E11}"/>
               </a:ext>
             </a:extLst>
           </p:cNvPr>
@@ -22187,7 +21371,7 @@
           <p:cNvPr id="44" name="">
             <a:extLst xmlns:a="http://schemas.openxmlformats.org/drawingml/2006/main">
               <a:ext uri="{FF2B5EF4-FFF2-40B4-BE49-F238E27FC236}">
-                <a16:creationId xmlns:a16="http://schemas.microsoft.com/office/drawing/2014/main" id="{4DDBC4BA-EBA7-47B2-B1EF-2BE675925165}"/>
+                <a16:creationId xmlns:a16="http://schemas.microsoft.com/office/drawing/2014/main" id="{6DB95650-456D-4631-87FB-1A179C00B0AF}"/>
               </a:ext>
             </a:extLst>
           </p:cNvPr>
@@ -22211,7 +21395,7 @@
           </a:solidFill>
           <a:ln xmlns:a="http://schemas.openxmlformats.org/drawingml/2006/main" w="9525">
             <a:solidFill>
-              <a:srgbClr val="D8D0C2"/>
+              <a:srgbClr val="E5E7EB"/>
             </a:solidFill>
             <a:prstDash val="solid"/>
           </a:ln>
@@ -22222,7 +21406,7 @@
           <p:cNvPr id="45" name="">
             <a:extLst xmlns:a="http://schemas.openxmlformats.org/drawingml/2006/main">
               <a:ext uri="{FF2B5EF4-FFF2-40B4-BE49-F238E27FC236}">
-                <a16:creationId xmlns:a16="http://schemas.microsoft.com/office/drawing/2014/main" id="{AF7D6F9F-EFDA-47E2-B200-8CA40A14BACD}"/>
+                <a16:creationId xmlns:a16="http://schemas.microsoft.com/office/drawing/2014/main" id="{1FBE46AA-8738-48AA-AD6C-BCC4C748ACA8}"/>
               </a:ext>
             </a:extLst>
           </p:cNvPr>
@@ -22286,7 +21470,7 @@
           <p:cNvPr id="46" name="">
             <a:extLst xmlns:a="http://schemas.openxmlformats.org/drawingml/2006/main">
               <a:ext uri="{FF2B5EF4-FFF2-40B4-BE49-F238E27FC236}">
-                <a16:creationId xmlns:a16="http://schemas.microsoft.com/office/drawing/2014/main" id="{23E24D5D-01DD-4440-8C67-7EF6B19DFF7D}"/>
+                <a16:creationId xmlns:a16="http://schemas.microsoft.com/office/drawing/2014/main" id="{5898BDA0-E669-4C8E-9F0A-304A100E4C50}"/>
               </a:ext>
             </a:extLst>
           </p:cNvPr>
@@ -22310,7 +21494,7 @@
           </a:solidFill>
           <a:ln xmlns:a="http://schemas.openxmlformats.org/drawingml/2006/main" w="9525">
             <a:solidFill>
-              <a:srgbClr val="D8D0C2"/>
+              <a:srgbClr val="E5E7EB"/>
             </a:solidFill>
             <a:prstDash val="solid"/>
           </a:ln>
@@ -22321,7 +21505,7 @@
           <p:cNvPr id="47" name="">
             <a:extLst xmlns:a="http://schemas.openxmlformats.org/drawingml/2006/main">
               <a:ext uri="{FF2B5EF4-FFF2-40B4-BE49-F238E27FC236}">
-                <a16:creationId xmlns:a16="http://schemas.microsoft.com/office/drawing/2014/main" id="{E56E4EB1-B1FC-4795-8C6B-6DEE188BB8B7}"/>
+                <a16:creationId xmlns:a16="http://schemas.microsoft.com/office/drawing/2014/main" id="{9515A675-9999-4D27-A88A-2374A1451BA0}"/>
               </a:ext>
             </a:extLst>
           </p:cNvPr>
@@ -22385,7 +21569,7 @@
           <p:cNvPr id="48" name="">
             <a:extLst xmlns:a="http://schemas.openxmlformats.org/drawingml/2006/main">
               <a:ext uri="{FF2B5EF4-FFF2-40B4-BE49-F238E27FC236}">
-                <a16:creationId xmlns:a16="http://schemas.microsoft.com/office/drawing/2014/main" id="{CF15E9AB-96D4-4AC7-AF60-1F84D19DEF33}"/>
+                <a16:creationId xmlns:a16="http://schemas.microsoft.com/office/drawing/2014/main" id="{892F3797-B786-4606-A8E7-5006A21FDA15}"/>
               </a:ext>
             </a:extLst>
           </p:cNvPr>
@@ -22409,7 +21593,7 @@
           </a:solidFill>
           <a:ln xmlns:a="http://schemas.openxmlformats.org/drawingml/2006/main" w="9525">
             <a:solidFill>
-              <a:srgbClr val="D8D0C2"/>
+              <a:srgbClr val="E5E7EB"/>
             </a:solidFill>
             <a:prstDash val="solid"/>
           </a:ln>
@@ -22420,7 +21604,7 @@
           <p:cNvPr id="49" name="">
             <a:extLst xmlns:a="http://schemas.openxmlformats.org/drawingml/2006/main">
               <a:ext uri="{FF2B5EF4-FFF2-40B4-BE49-F238E27FC236}">
-                <a16:creationId xmlns:a16="http://schemas.microsoft.com/office/drawing/2014/main" id="{F4286A92-A351-4CE5-8F33-D1B62C7DF330}"/>
+                <a16:creationId xmlns:a16="http://schemas.microsoft.com/office/drawing/2014/main" id="{F63673E5-8804-4CD0-BDD2-83AD915133A0}"/>
               </a:ext>
             </a:extLst>
           </p:cNvPr>
@@ -22484,7 +21668,7 @@
           <p:cNvPr id="50" name="">
             <a:extLst xmlns:a="http://schemas.openxmlformats.org/drawingml/2006/main">
               <a:ext uri="{FF2B5EF4-FFF2-40B4-BE49-F238E27FC236}">
-                <a16:creationId xmlns:a16="http://schemas.microsoft.com/office/drawing/2014/main" id="{E1A25EDF-A7BF-4103-BE66-CB15F9D2CB32}"/>
+                <a16:creationId xmlns:a16="http://schemas.microsoft.com/office/drawing/2014/main" id="{DBB4A73E-D459-4EB7-9AFA-3C119A3A526F}"/>
               </a:ext>
             </a:extLst>
           </p:cNvPr>
@@ -22508,7 +21692,7 @@
           </a:solidFill>
           <a:ln xmlns:a="http://schemas.openxmlformats.org/drawingml/2006/main" w="9525">
             <a:solidFill>
-              <a:srgbClr val="D8D0C2"/>
+              <a:srgbClr val="E5E7EB"/>
             </a:solidFill>
             <a:prstDash val="solid"/>
           </a:ln>
@@ -22519,7 +21703,7 @@
           <p:cNvPr id="51" name="">
             <a:extLst xmlns:a="http://schemas.openxmlformats.org/drawingml/2006/main">
               <a:ext uri="{FF2B5EF4-FFF2-40B4-BE49-F238E27FC236}">
-                <a16:creationId xmlns:a16="http://schemas.microsoft.com/office/drawing/2014/main" id="{55A544E9-2C43-4322-84B3-761EE723939F}"/>
+                <a16:creationId xmlns:a16="http://schemas.microsoft.com/office/drawing/2014/main" id="{5536CC63-5DF4-43A0-AD37-A19830498325}"/>
               </a:ext>
             </a:extLst>
           </p:cNvPr>
@@ -22583,7 +21767,7 @@
           <p:cNvPr id="52" name="">
             <a:extLst xmlns:a="http://schemas.openxmlformats.org/drawingml/2006/main">
               <a:ext uri="{FF2B5EF4-FFF2-40B4-BE49-F238E27FC236}">
-                <a16:creationId xmlns:a16="http://schemas.microsoft.com/office/drawing/2014/main" id="{4B3DCFF8-E5C0-4EDE-A8D4-CD4D8DE43ADD}"/>
+                <a16:creationId xmlns:a16="http://schemas.microsoft.com/office/drawing/2014/main" id="{C2F9D238-F6AC-45CB-85B1-0C7505283C7C}"/>
               </a:ext>
             </a:extLst>
           </p:cNvPr>
@@ -22607,7 +21791,7 @@
           </a:solidFill>
           <a:ln xmlns:a="http://schemas.openxmlformats.org/drawingml/2006/main" w="9525">
             <a:solidFill>
-              <a:srgbClr val="D8D0C2"/>
+              <a:srgbClr val="E5E7EB"/>
             </a:solidFill>
             <a:prstDash val="solid"/>
           </a:ln>
@@ -22618,7 +21802,7 @@
           <p:cNvPr id="53" name="">
             <a:extLst xmlns:a="http://schemas.openxmlformats.org/drawingml/2006/main">
               <a:ext uri="{FF2B5EF4-FFF2-40B4-BE49-F238E27FC236}">
-                <a16:creationId xmlns:a16="http://schemas.microsoft.com/office/drawing/2014/main" id="{9AFC86BE-CC92-40CA-A462-A911669DD30A}"/>
+                <a16:creationId xmlns:a16="http://schemas.microsoft.com/office/drawing/2014/main" id="{23E3FB6C-F26C-4F21-BF00-8A4578DB46F4}"/>
               </a:ext>
             </a:extLst>
           </p:cNvPr>
@@ -22682,7 +21866,7 @@
           <p:cNvPr id="54" name="">
             <a:extLst xmlns:a="http://schemas.openxmlformats.org/drawingml/2006/main">
               <a:ext uri="{FF2B5EF4-FFF2-40B4-BE49-F238E27FC236}">
-                <a16:creationId xmlns:a16="http://schemas.microsoft.com/office/drawing/2014/main" id="{2B679778-C320-40FF-BEDD-115F1834AE99}"/>
+                <a16:creationId xmlns:a16="http://schemas.microsoft.com/office/drawing/2014/main" id="{13C2945D-C694-4DF5-8A35-8E70735CB5B8}"/>
               </a:ext>
             </a:extLst>
           </p:cNvPr>
@@ -22706,7 +21890,7 @@
           </a:solidFill>
           <a:ln xmlns:a="http://schemas.openxmlformats.org/drawingml/2006/main" w="9525">
             <a:solidFill>
-              <a:srgbClr val="D8D0C2"/>
+              <a:srgbClr val="E5E7EB"/>
             </a:solidFill>
             <a:prstDash val="solid"/>
           </a:ln>
@@ -22717,7 +21901,7 @@
           <p:cNvPr id="55" name="">
             <a:extLst xmlns:a="http://schemas.openxmlformats.org/drawingml/2006/main">
               <a:ext uri="{FF2B5EF4-FFF2-40B4-BE49-F238E27FC236}">
-                <a16:creationId xmlns:a16="http://schemas.microsoft.com/office/drawing/2014/main" id="{9B7E75F2-4793-4CA2-8CD7-16207F35CD3A}"/>
+                <a16:creationId xmlns:a16="http://schemas.microsoft.com/office/drawing/2014/main" id="{3ED36F1D-9BF3-4D47-BE66-68F45020C0A1}"/>
               </a:ext>
             </a:extLst>
           </p:cNvPr>
@@ -22781,7 +21965,7 @@
           <p:cNvPr id="56" name="">
             <a:extLst xmlns:a="http://schemas.openxmlformats.org/drawingml/2006/main">
               <a:ext uri="{FF2B5EF4-FFF2-40B4-BE49-F238E27FC236}">
-                <a16:creationId xmlns:a16="http://schemas.microsoft.com/office/drawing/2014/main" id="{2258AD91-C4AB-4AEC-AF43-BF0E6C70E740}"/>
+                <a16:creationId xmlns:a16="http://schemas.microsoft.com/office/drawing/2014/main" id="{FEC94EF6-56D2-4B32-9D24-C68176850F63}"/>
               </a:ext>
             </a:extLst>
           </p:cNvPr>
@@ -22805,7 +21989,7 @@
           </a:solidFill>
           <a:ln xmlns:a="http://schemas.openxmlformats.org/drawingml/2006/main" w="9525">
             <a:solidFill>
-              <a:srgbClr val="D8D0C2"/>
+              <a:srgbClr val="E5E7EB"/>
             </a:solidFill>
             <a:prstDash val="solid"/>
           </a:ln>
@@ -22816,7 +22000,7 @@
           <p:cNvPr id="57" name="">
             <a:extLst xmlns:a="http://schemas.openxmlformats.org/drawingml/2006/main">
               <a:ext uri="{FF2B5EF4-FFF2-40B4-BE49-F238E27FC236}">
-                <a16:creationId xmlns:a16="http://schemas.microsoft.com/office/drawing/2014/main" id="{6B78430E-B6F6-470C-A16C-2BBB98D0796D}"/>
+                <a16:creationId xmlns:a16="http://schemas.microsoft.com/office/drawing/2014/main" id="{8FEE2399-3633-4414-8B96-CC087BF0C9F4}"/>
               </a:ext>
             </a:extLst>
           </p:cNvPr>
@@ -22880,7 +22064,7 @@
           <p:cNvPr id="58" name="">
             <a:extLst xmlns:a="http://schemas.openxmlformats.org/drawingml/2006/main">
               <a:ext uri="{FF2B5EF4-FFF2-40B4-BE49-F238E27FC236}">
-                <a16:creationId xmlns:a16="http://schemas.microsoft.com/office/drawing/2014/main" id="{BB30812F-DB65-4D50-ADC5-EFCE6534CDBB}"/>
+                <a16:creationId xmlns:a16="http://schemas.microsoft.com/office/drawing/2014/main" id="{35D1F41E-2C1C-4079-8B1E-1B268E6D340D}"/>
               </a:ext>
             </a:extLst>
           </p:cNvPr>
@@ -22904,7 +22088,7 @@
           </a:solidFill>
           <a:ln xmlns:a="http://schemas.openxmlformats.org/drawingml/2006/main" w="9525">
             <a:solidFill>
-              <a:srgbClr val="D8D0C2"/>
+              <a:srgbClr val="E5E7EB"/>
             </a:solidFill>
             <a:prstDash val="solid"/>
           </a:ln>
@@ -22915,7 +22099,7 @@
           <p:cNvPr id="59" name="">
             <a:extLst xmlns:a="http://schemas.openxmlformats.org/drawingml/2006/main">
               <a:ext uri="{FF2B5EF4-FFF2-40B4-BE49-F238E27FC236}">
-                <a16:creationId xmlns:a16="http://schemas.microsoft.com/office/drawing/2014/main" id="{93966C1B-EAA0-4818-8D8E-DB586F94DD89}"/>
+                <a16:creationId xmlns:a16="http://schemas.microsoft.com/office/drawing/2014/main" id="{CC8071E5-C30E-49E7-A618-DAD0C2BBF134}"/>
               </a:ext>
             </a:extLst>
           </p:cNvPr>
@@ -22979,7 +22163,7 @@
           <p:cNvPr id="60" name="">
             <a:extLst xmlns:a="http://schemas.openxmlformats.org/drawingml/2006/main">
               <a:ext uri="{FF2B5EF4-FFF2-40B4-BE49-F238E27FC236}">
-                <a16:creationId xmlns:a16="http://schemas.microsoft.com/office/drawing/2014/main" id="{1E301A01-68BF-4D23-988D-BE3F4A902503}"/>
+                <a16:creationId xmlns:a16="http://schemas.microsoft.com/office/drawing/2014/main" id="{DC2305D1-4F96-4B16-B0D4-A922F692C168}"/>
               </a:ext>
             </a:extLst>
           </p:cNvPr>
@@ -23003,7 +22187,7 @@
           </a:solidFill>
           <a:ln xmlns:a="http://schemas.openxmlformats.org/drawingml/2006/main" w="9525">
             <a:solidFill>
-              <a:srgbClr val="D8D0C2"/>
+              <a:srgbClr val="E5E7EB"/>
             </a:solidFill>
             <a:prstDash val="solid"/>
           </a:ln>
@@ -23014,7 +22198,7 @@
           <p:cNvPr id="61" name="">
             <a:extLst xmlns:a="http://schemas.openxmlformats.org/drawingml/2006/main">
               <a:ext uri="{FF2B5EF4-FFF2-40B4-BE49-F238E27FC236}">
-                <a16:creationId xmlns:a16="http://schemas.microsoft.com/office/drawing/2014/main" id="{048C6AC0-6EAB-430F-88D6-BC14659365B7}"/>
+                <a16:creationId xmlns:a16="http://schemas.microsoft.com/office/drawing/2014/main" id="{54605D17-6910-477A-B0F1-4BBF0B209E33}"/>
               </a:ext>
             </a:extLst>
           </p:cNvPr>
@@ -23078,7 +22262,7 @@
           <p:cNvPr id="62" name="">
             <a:extLst xmlns:a="http://schemas.openxmlformats.org/drawingml/2006/main">
               <a:ext uri="{FF2B5EF4-FFF2-40B4-BE49-F238E27FC236}">
-                <a16:creationId xmlns:a16="http://schemas.microsoft.com/office/drawing/2014/main" id="{22FD9C02-D95F-4F26-9A0A-1DA0E93562FA}"/>
+                <a16:creationId xmlns:a16="http://schemas.microsoft.com/office/drawing/2014/main" id="{F4255CD1-7C82-44EB-90C1-182249FF56E0}"/>
               </a:ext>
             </a:extLst>
           </p:cNvPr>
@@ -23113,7 +22297,7 @@
           <p:cNvPr id="63" name="">
             <a:extLst xmlns:a="http://schemas.openxmlformats.org/drawingml/2006/main">
               <a:ext uri="{FF2B5EF4-FFF2-40B4-BE49-F238E27FC236}">
-                <a16:creationId xmlns:a16="http://schemas.microsoft.com/office/drawing/2014/main" id="{91CEB1C2-2C1C-4EAA-B316-9BC140A1197A}"/>
+                <a16:creationId xmlns:a16="http://schemas.microsoft.com/office/drawing/2014/main" id="{AA8C1BB1-8C1B-44E4-BA13-AF2B9F98B089}"/>
               </a:ext>
             </a:extLst>
           </p:cNvPr>
@@ -23148,7 +22332,7 @@
           <p:cNvPr id="64" name="">
             <a:extLst xmlns:a="http://schemas.openxmlformats.org/drawingml/2006/main">
               <a:ext uri="{FF2B5EF4-FFF2-40B4-BE49-F238E27FC236}">
-                <a16:creationId xmlns:a16="http://schemas.microsoft.com/office/drawing/2014/main" id="{4159A21E-B777-4C2F-BD25-470AEDED6B55}"/>
+                <a16:creationId xmlns:a16="http://schemas.microsoft.com/office/drawing/2014/main" id="{69D01B8C-5D45-4AFA-BCE2-4393B11070E3}"/>
               </a:ext>
             </a:extLst>
           </p:cNvPr>
@@ -23202,7 +22386,7 @@
                 <a:ea typeface="Aptos"/>
                 <a:cs typeface="Aptos"/>
               </a:rPr>
-              <a:t>Known-user context: user_000031 listened heavily to The Futureheads, Ladytron, Cocteau Twins, Siouxsie And The Banshees, Arcade Fire, Hard-Fi, and Radiohead.</a:t>
+              <a:t>Selected user: user_000031. The notebook generates top recommendations that can be shown during the demo.</a:t>
             </a:r>
           </a:p>
         </p:txBody>
@@ -23212,7 +22396,7 @@
           <p:cNvPr id="65" name="">
             <a:extLst xmlns:a="http://schemas.openxmlformats.org/drawingml/2006/main">
               <a:ext uri="{FF2B5EF4-FFF2-40B4-BE49-F238E27FC236}">
-                <a16:creationId xmlns:a16="http://schemas.microsoft.com/office/drawing/2014/main" id="{88E21AB2-0B64-45DB-A0D2-A63783FDAEF7}"/>
+                <a16:creationId xmlns:a16="http://schemas.microsoft.com/office/drawing/2014/main" id="{93E335ED-86FF-4109-80DA-A2267963BD2A}"/>
               </a:ext>
             </a:extLst>
           </p:cNvPr>
@@ -23250,7 +22434,7 @@
             <a:pPr algn="l">
               <a:defRPr sz="825" b="0">
                 <a:solidFill>
-                  <a:srgbClr val="5B6472"/>
+                  <a:srgbClr val="4B5563"/>
                 </a:solidFill>
                 <a:latin typeface="Aptos"/>
                 <a:ea typeface="Aptos"/>
@@ -23260,7 +22444,7 @@
             <a:r>
               <a:rPr sz="825" b="0">
                 <a:solidFill>
-                  <a:srgbClr val="5B6472"/>
+                  <a:srgbClr val="4B5563"/>
                 </a:solidFill>
                 <a:latin typeface="Aptos"/>
                 <a:ea typeface="Aptos"/>
@@ -23276,7 +22460,7 @@
           <p:cNvPr id="66" name="">
             <a:extLst xmlns:a="http://schemas.openxmlformats.org/drawingml/2006/main">
               <a:ext uri="{FF2B5EF4-FFF2-40B4-BE49-F238E27FC236}">
-                <a16:creationId xmlns:a16="http://schemas.microsoft.com/office/drawing/2014/main" id="{FB80C48A-0562-434B-9E6F-5BDD30696F22}"/>
+                <a16:creationId xmlns:a16="http://schemas.microsoft.com/office/drawing/2014/main" id="{34C88E37-5C79-4B06-B613-57C365BF8C2C}"/>
               </a:ext>
             </a:extLst>
           </p:cNvPr>
@@ -23314,7 +22498,7 @@
             <a:pPr algn="r">
               <a:defRPr sz="900" b="1">
                 <a:solidFill>
-                  <a:srgbClr val="5B6472"/>
+                  <a:srgbClr val="4B5563"/>
                 </a:solidFill>
                 <a:latin typeface="Aptos"/>
                 <a:ea typeface="Aptos"/>
@@ -23324,7 +22508,7 @@
             <a:r>
               <a:rPr sz="900" b="1">
                 <a:solidFill>
-                  <a:srgbClr val="5B6472"/>
+                  <a:srgbClr val="4B5563"/>
                 </a:solidFill>
                 <a:latin typeface="Aptos"/>
                 <a:ea typeface="Aptos"/>
@@ -23338,7 +22522,7 @@
     </p:spTree>
     <p:extLst>
       <p:ext uri="{BB962C8B-B14F-4D97-AF65-F5344CB8AC3E}">
-        <p14:creationId xmlns:p14="http://schemas.microsoft.com/office/powerpoint/2010/main" val="806153468"/>
+        <p14:creationId xmlns:p14="http://schemas.microsoft.com/office/powerpoint/2010/main" val="1956850055"/>
       </p:ext>
     </p:extLst>
   </p:cSld>
